--- a/documentation/Frontend mockup.pptx
+++ b/documentation/Frontend mockup.pptx
@@ -10,7 +10,7 @@
     <p:sldId id="258" r:id="rId4"/>
     <p:sldId id="261" r:id="rId5"/>
     <p:sldId id="262" r:id="rId6"/>
-    <p:sldId id="263" r:id="rId7"/>
+    <p:sldId id="264" r:id="rId7"/>
   </p:sldIdLst>
   <p:sldSz cx="12192000" cy="6858000"/>
   <p:notesSz cx="6858000" cy="9144000"/>
@@ -29257,7 +29257,7 @@
         <p:cNvPr id="1" name="">
           <a:extLst>
             <a:ext uri="{FF2B5EF4-FFF2-40B4-BE49-F238E27FC236}">
-              <a16:creationId xmlns:a16="http://schemas.microsoft.com/office/drawing/2014/main" id="{E696C0B3-B114-88DA-80BE-CE1400A61E68}"/>
+              <a16:creationId xmlns:a16="http://schemas.microsoft.com/office/drawing/2014/main" id="{8B264774-508D-7ED1-6102-03AC0AC95E85}"/>
             </a:ext>
           </a:extLst>
         </p:cNvPr>
@@ -29274,10 +29274,10 @@
       </p:grpSpPr>
       <p:grpSp>
         <p:nvGrpSpPr>
-          <p:cNvPr id="43" name="Group 42">
+          <p:cNvPr id="2" name="Group 1">
             <a:extLst>
               <a:ext uri="{FF2B5EF4-FFF2-40B4-BE49-F238E27FC236}">
-                <a16:creationId xmlns:a16="http://schemas.microsoft.com/office/drawing/2014/main" id="{FFA3822B-6A68-4F19-9290-CA9B3C64E56B}"/>
+                <a16:creationId xmlns:a16="http://schemas.microsoft.com/office/drawing/2014/main" id="{9311031D-BD70-AD6D-14A6-8962C7D8FFA3}"/>
               </a:ext>
             </a:extLst>
           </p:cNvPr>
@@ -29294,10 +29294,10 @@
         </p:grpSpPr>
         <p:grpSp>
           <p:nvGrpSpPr>
-            <p:cNvPr id="44" name="Group 43">
+            <p:cNvPr id="3" name="Group 2">
               <a:extLst>
                 <a:ext uri="{FF2B5EF4-FFF2-40B4-BE49-F238E27FC236}">
-                  <a16:creationId xmlns:a16="http://schemas.microsoft.com/office/drawing/2014/main" id="{5069550D-23BF-EB2B-476D-5D54C08EB287}"/>
+                  <a16:creationId xmlns:a16="http://schemas.microsoft.com/office/drawing/2014/main" id="{4493FA8D-4D89-020A-9653-B5955C3D676E}"/>
                 </a:ext>
               </a:extLst>
             </p:cNvPr>
@@ -29314,10 +29314,10 @@
           </p:grpSpPr>
           <p:sp>
             <p:nvSpPr>
-              <p:cNvPr id="48" name="Rectangle 47">
+              <p:cNvPr id="7" name="Rectangle 6">
                 <a:extLst>
                   <a:ext uri="{FF2B5EF4-FFF2-40B4-BE49-F238E27FC236}">
-                    <a16:creationId xmlns:a16="http://schemas.microsoft.com/office/drawing/2014/main" id="{FD7AA267-CC37-D50E-56E4-0CE685559939}"/>
+                    <a16:creationId xmlns:a16="http://schemas.microsoft.com/office/drawing/2014/main" id="{47697464-5946-4121-C452-9B5B816F5D3E}"/>
                   </a:ext>
                 </a:extLst>
               </p:cNvPr>
@@ -29360,10 +29360,10 @@
           </p:sp>
           <p:sp>
             <p:nvSpPr>
-              <p:cNvPr id="49" name="Rectangle 48">
+              <p:cNvPr id="8" name="Rectangle 7">
                 <a:extLst>
                   <a:ext uri="{FF2B5EF4-FFF2-40B4-BE49-F238E27FC236}">
-                    <a16:creationId xmlns:a16="http://schemas.microsoft.com/office/drawing/2014/main" id="{EC081DFE-C325-A429-5C01-9689E8E13B3C}"/>
+                    <a16:creationId xmlns:a16="http://schemas.microsoft.com/office/drawing/2014/main" id="{5822908C-9474-E0B0-BBAC-C6EB693733B8}"/>
                   </a:ext>
                 </a:extLst>
               </p:cNvPr>
@@ -29412,10 +29412,10 @@
           </p:sp>
           <p:sp>
             <p:nvSpPr>
-              <p:cNvPr id="50" name="Rectangle 49">
+              <p:cNvPr id="9" name="Rectangle 8">
                 <a:extLst>
                   <a:ext uri="{FF2B5EF4-FFF2-40B4-BE49-F238E27FC236}">
-                    <a16:creationId xmlns:a16="http://schemas.microsoft.com/office/drawing/2014/main" id="{38B0F8DD-AFF0-D93D-BB23-F024A824DAA8}"/>
+                    <a16:creationId xmlns:a16="http://schemas.microsoft.com/office/drawing/2014/main" id="{D910D1D9-B60C-8B7B-B1E1-F60F1352D8EA}"/>
                   </a:ext>
                 </a:extLst>
               </p:cNvPr>
@@ -29464,10 +29464,10 @@
         </p:grpSp>
         <p:sp>
           <p:nvSpPr>
-            <p:cNvPr id="45" name="Rectangle: Rounded Corners 44">
+            <p:cNvPr id="4" name="Rectangle: Rounded Corners 3">
               <a:extLst>
                 <a:ext uri="{FF2B5EF4-FFF2-40B4-BE49-F238E27FC236}">
-                  <a16:creationId xmlns:a16="http://schemas.microsoft.com/office/drawing/2014/main" id="{2DA513C4-60C6-9B7F-7F4A-60DAF29AE452}"/>
+                  <a16:creationId xmlns:a16="http://schemas.microsoft.com/office/drawing/2014/main" id="{BAD8EC7E-B54C-03F7-3BB4-B9EA09280D0E}"/>
                 </a:ext>
               </a:extLst>
             </p:cNvPr>
@@ -29514,10 +29514,10 @@
         </p:sp>
         <p:sp>
           <p:nvSpPr>
-            <p:cNvPr id="46" name="Oval 45">
+            <p:cNvPr id="5" name="Oval 4">
               <a:extLst>
                 <a:ext uri="{FF2B5EF4-FFF2-40B4-BE49-F238E27FC236}">
-                  <a16:creationId xmlns:a16="http://schemas.microsoft.com/office/drawing/2014/main" id="{ED2FB1CA-07E2-5BD5-67F4-438B917B064E}"/>
+                  <a16:creationId xmlns:a16="http://schemas.microsoft.com/office/drawing/2014/main" id="{6DE0AA9E-7F3F-9093-FAED-D2A1FA75FC3C}"/>
                 </a:ext>
               </a:extLst>
             </p:cNvPr>
@@ -29560,10 +29560,10 @@
         </p:sp>
         <p:pic>
           <p:nvPicPr>
-            <p:cNvPr id="47" name="Picture 2" descr="Logo">
+            <p:cNvPr id="6" name="Picture 2" descr="Logo">
               <a:extLst>
                 <a:ext uri="{FF2B5EF4-FFF2-40B4-BE49-F238E27FC236}">
-                  <a16:creationId xmlns:a16="http://schemas.microsoft.com/office/drawing/2014/main" id="{332A78E2-35AF-CB90-FBCA-CE32194278A7}"/>
+                  <a16:creationId xmlns:a16="http://schemas.microsoft.com/office/drawing/2014/main" id="{CD3BF54B-6326-3CB8-3323-33CA2B1CAD09}"/>
                 </a:ext>
               </a:extLst>
             </p:cNvPr>
@@ -29608,10 +29608,10 @@
       </p:grpSp>
       <p:graphicFrame>
         <p:nvGraphicFramePr>
-          <p:cNvPr id="38" name="Table 37">
+          <p:cNvPr id="10" name="Table 9">
             <a:extLst>
               <a:ext uri="{FF2B5EF4-FFF2-40B4-BE49-F238E27FC236}">
-                <a16:creationId xmlns:a16="http://schemas.microsoft.com/office/drawing/2014/main" id="{3E68AFDC-15C1-52CC-8831-421D5F1CCFB2}"/>
+                <a16:creationId xmlns:a16="http://schemas.microsoft.com/office/drawing/2014/main" id="{80D7A4BF-933C-E388-4D77-6E209D58D3FE}"/>
               </a:ext>
             </a:extLst>
           </p:cNvPr>
@@ -29621,13 +29621,13 @@
           <p:nvPr>
             <p:extLst>
               <p:ext uri="{D42A27DB-BD31-4B8C-83A1-F6EECF244321}">
-                <p14:modId xmlns:p14="http://schemas.microsoft.com/office/powerpoint/2010/main" val="901263082"/>
+                <p14:modId xmlns:p14="http://schemas.microsoft.com/office/powerpoint/2010/main" val="4238794989"/>
               </p:ext>
             </p:extLst>
           </p:nvPr>
         </p:nvGraphicFramePr>
         <p:xfrm>
-          <a:off x="106096" y="452338"/>
+          <a:off x="105509" y="451046"/>
           <a:ext cx="2409090" cy="1463040"/>
         </p:xfrm>
         <a:graphic>
@@ -29942,10 +29942,2145 @@
           </a:graphicData>
         </a:graphic>
       </p:graphicFrame>
+      <p:sp>
+        <p:nvSpPr>
+          <p:cNvPr id="18" name="Rectangle: Rounded Corners 17">
+            <a:extLst>
+              <a:ext uri="{FF2B5EF4-FFF2-40B4-BE49-F238E27FC236}">
+                <a16:creationId xmlns:a16="http://schemas.microsoft.com/office/drawing/2014/main" id="{A45079E6-FE55-D184-7811-D91C2B172D38}"/>
+              </a:ext>
+            </a:extLst>
+          </p:cNvPr>
+          <p:cNvSpPr/>
+          <p:nvPr/>
+        </p:nvSpPr>
+        <p:spPr>
+          <a:xfrm>
+            <a:off x="8915401" y="2204232"/>
+            <a:ext cx="3033346" cy="4202722"/>
+          </a:xfrm>
+          <a:prstGeom prst="roundRect">
+            <a:avLst/>
+          </a:prstGeom>
+        </p:spPr>
+        <p:style>
+          <a:lnRef idx="2">
+            <a:schemeClr val="accent1">
+              <a:shade val="15000"/>
+            </a:schemeClr>
+          </a:lnRef>
+          <a:fillRef idx="1">
+            <a:schemeClr val="accent1"/>
+          </a:fillRef>
+          <a:effectRef idx="0">
+            <a:schemeClr val="accent1"/>
+          </a:effectRef>
+          <a:fontRef idx="minor">
+            <a:schemeClr val="lt1"/>
+          </a:fontRef>
+        </p:style>
+        <p:txBody>
+          <a:bodyPr rtlCol="0" anchor="ctr"/>
+          <a:lstStyle/>
+          <a:p>
+            <a:pPr algn="ctr"/>
+            <a:endParaRPr lang="en-IN"/>
+          </a:p>
+        </p:txBody>
+      </p:sp>
+      <p:sp>
+        <p:nvSpPr>
+          <p:cNvPr id="19" name="Rectangle: Rounded Corners 18">
+            <a:extLst>
+              <a:ext uri="{FF2B5EF4-FFF2-40B4-BE49-F238E27FC236}">
+                <a16:creationId xmlns:a16="http://schemas.microsoft.com/office/drawing/2014/main" id="{94FF22C4-A85E-2235-9520-22C57759C6DE}"/>
+              </a:ext>
+            </a:extLst>
+          </p:cNvPr>
+          <p:cNvSpPr/>
+          <p:nvPr/>
+        </p:nvSpPr>
+        <p:spPr>
+          <a:xfrm>
+            <a:off x="8952034" y="593481"/>
+            <a:ext cx="2664070" cy="1178169"/>
+          </a:xfrm>
+          <a:prstGeom prst="roundRect">
+            <a:avLst/>
+          </a:prstGeom>
+        </p:spPr>
+        <p:style>
+          <a:lnRef idx="2">
+            <a:schemeClr val="accent1">
+              <a:shade val="15000"/>
+            </a:schemeClr>
+          </a:lnRef>
+          <a:fillRef idx="1">
+            <a:schemeClr val="accent1"/>
+          </a:fillRef>
+          <a:effectRef idx="0">
+            <a:schemeClr val="accent1"/>
+          </a:effectRef>
+          <a:fontRef idx="minor">
+            <a:schemeClr val="lt1"/>
+          </a:fontRef>
+        </p:style>
+        <p:txBody>
+          <a:bodyPr rtlCol="0" anchor="ctr"/>
+          <a:lstStyle/>
+          <a:p>
+            <a:pPr algn="ctr"/>
+            <a:endParaRPr lang="en-IN"/>
+          </a:p>
+        </p:txBody>
+      </p:sp>
+      <p:sp>
+        <p:nvSpPr>
+          <p:cNvPr id="20" name="Rectangle: Rounded Corners 19">
+            <a:extLst>
+              <a:ext uri="{FF2B5EF4-FFF2-40B4-BE49-F238E27FC236}">
+                <a16:creationId xmlns:a16="http://schemas.microsoft.com/office/drawing/2014/main" id="{72931609-DBF7-005C-BF35-2CBF1D134024}"/>
+              </a:ext>
+            </a:extLst>
+          </p:cNvPr>
+          <p:cNvSpPr/>
+          <p:nvPr/>
+        </p:nvSpPr>
+        <p:spPr>
+          <a:xfrm>
+            <a:off x="6079880" y="593481"/>
+            <a:ext cx="2664070" cy="1178169"/>
+          </a:xfrm>
+          <a:prstGeom prst="roundRect">
+            <a:avLst/>
+          </a:prstGeom>
+        </p:spPr>
+        <p:style>
+          <a:lnRef idx="2">
+            <a:schemeClr val="accent1">
+              <a:shade val="15000"/>
+            </a:schemeClr>
+          </a:lnRef>
+          <a:fillRef idx="1">
+            <a:schemeClr val="accent1"/>
+          </a:fillRef>
+          <a:effectRef idx="0">
+            <a:schemeClr val="accent1"/>
+          </a:effectRef>
+          <a:fontRef idx="minor">
+            <a:schemeClr val="lt1"/>
+          </a:fontRef>
+        </p:style>
+        <p:txBody>
+          <a:bodyPr rtlCol="0" anchor="ctr"/>
+          <a:lstStyle/>
+          <a:p>
+            <a:pPr algn="ctr"/>
+            <a:endParaRPr lang="en-IN"/>
+          </a:p>
+        </p:txBody>
+      </p:sp>
+      <p:sp>
+        <p:nvSpPr>
+          <p:cNvPr id="21" name="Rectangle: Rounded Corners 20">
+            <a:extLst>
+              <a:ext uri="{FF2B5EF4-FFF2-40B4-BE49-F238E27FC236}">
+                <a16:creationId xmlns:a16="http://schemas.microsoft.com/office/drawing/2014/main" id="{5B3BB773-7689-FBAA-EFCD-9C170B695B31}"/>
+              </a:ext>
+            </a:extLst>
+          </p:cNvPr>
+          <p:cNvSpPr/>
+          <p:nvPr/>
+        </p:nvSpPr>
+        <p:spPr>
+          <a:xfrm>
+            <a:off x="3207726" y="593481"/>
+            <a:ext cx="2664070" cy="1178169"/>
+          </a:xfrm>
+          <a:prstGeom prst="roundRect">
+            <a:avLst/>
+          </a:prstGeom>
+        </p:spPr>
+        <p:style>
+          <a:lnRef idx="2">
+            <a:schemeClr val="accent1">
+              <a:shade val="15000"/>
+            </a:schemeClr>
+          </a:lnRef>
+          <a:fillRef idx="1">
+            <a:schemeClr val="accent1"/>
+          </a:fillRef>
+          <a:effectRef idx="0">
+            <a:schemeClr val="accent1"/>
+          </a:effectRef>
+          <a:fontRef idx="minor">
+            <a:schemeClr val="lt1"/>
+          </a:fontRef>
+        </p:style>
+        <p:txBody>
+          <a:bodyPr rtlCol="0" anchor="ctr"/>
+          <a:lstStyle/>
+          <a:p>
+            <a:pPr algn="ctr"/>
+            <a:endParaRPr lang="en-IN"/>
+          </a:p>
+        </p:txBody>
+      </p:sp>
+      <p:graphicFrame>
+        <p:nvGraphicFramePr>
+          <p:cNvPr id="24" name="Table 23">
+            <a:extLst>
+              <a:ext uri="{FF2B5EF4-FFF2-40B4-BE49-F238E27FC236}">
+                <a16:creationId xmlns:a16="http://schemas.microsoft.com/office/drawing/2014/main" id="{FAB34855-CC85-E1F9-D03D-1328CBBA8744}"/>
+              </a:ext>
+            </a:extLst>
+          </p:cNvPr>
+          <p:cNvGraphicFramePr>
+            <a:graphicFrameLocks noGrp="1"/>
+          </p:cNvGraphicFramePr>
+          <p:nvPr>
+            <p:extLst>
+              <p:ext uri="{D42A27DB-BD31-4B8C-83A1-F6EECF244321}">
+                <p14:modId xmlns:p14="http://schemas.microsoft.com/office/powerpoint/2010/main" val="2926930378"/>
+              </p:ext>
+            </p:extLst>
+          </p:nvPr>
+        </p:nvGraphicFramePr>
+        <p:xfrm>
+          <a:off x="3207726" y="2204232"/>
+          <a:ext cx="5536224" cy="3337560"/>
+        </p:xfrm>
+        <a:graphic>
+          <a:graphicData uri="http://schemas.openxmlformats.org/drawingml/2006/table">
+            <a:tbl>
+              <a:tblPr firstRow="1" bandRow="1">
+                <a:tableStyleId>{2D5ABB26-0587-4C30-8999-92F81FD0307C}</a:tableStyleId>
+              </a:tblPr>
+              <a:tblGrid>
+                <a:gridCol w="1384056">
+                  <a:extLst>
+                    <a:ext uri="{9D8B030D-6E8A-4147-A177-3AD203B41FA5}">
+                      <a16:colId xmlns:a16="http://schemas.microsoft.com/office/drawing/2014/main" val="519203008"/>
+                    </a:ext>
+                  </a:extLst>
+                </a:gridCol>
+                <a:gridCol w="1384056">
+                  <a:extLst>
+                    <a:ext uri="{9D8B030D-6E8A-4147-A177-3AD203B41FA5}">
+                      <a16:colId xmlns:a16="http://schemas.microsoft.com/office/drawing/2014/main" val="2182870733"/>
+                    </a:ext>
+                  </a:extLst>
+                </a:gridCol>
+                <a:gridCol w="1384056">
+                  <a:extLst>
+                    <a:ext uri="{9D8B030D-6E8A-4147-A177-3AD203B41FA5}">
+                      <a16:colId xmlns:a16="http://schemas.microsoft.com/office/drawing/2014/main" val="2948238244"/>
+                    </a:ext>
+                  </a:extLst>
+                </a:gridCol>
+                <a:gridCol w="1384056">
+                  <a:extLst>
+                    <a:ext uri="{9D8B030D-6E8A-4147-A177-3AD203B41FA5}">
+                      <a16:colId xmlns:a16="http://schemas.microsoft.com/office/drawing/2014/main" val="1499066006"/>
+                    </a:ext>
+                  </a:extLst>
+                </a:gridCol>
+              </a:tblGrid>
+              <a:tr h="370840">
+                <a:tc>
+                  <a:txBody>
+                    <a:bodyPr/>
+                    <a:lstStyle/>
+                    <a:p>
+                      <a:r>
+                        <a:rPr lang="en-US" dirty="0"/>
+                        <a:t>Name</a:t>
+                      </a:r>
+                      <a:endParaRPr lang="en-IN" dirty="0"/>
+                    </a:p>
+                  </a:txBody>
+                  <a:tcPr>
+                    <a:lnL w="12700" cap="flat" cmpd="sng" algn="ctr">
+                      <a:solidFill>
+                        <a:schemeClr val="tx1"/>
+                      </a:solidFill>
+                      <a:prstDash val="solid"/>
+                      <a:round/>
+                      <a:headEnd type="none" w="med" len="med"/>
+                      <a:tailEnd type="none" w="med" len="med"/>
+                    </a:lnL>
+                    <a:lnR w="12700" cap="flat" cmpd="sng" algn="ctr">
+                      <a:solidFill>
+                        <a:schemeClr val="tx1"/>
+                      </a:solidFill>
+                      <a:prstDash val="solid"/>
+                      <a:round/>
+                      <a:headEnd type="none" w="med" len="med"/>
+                      <a:tailEnd type="none" w="med" len="med"/>
+                    </a:lnR>
+                    <a:lnT w="12700" cap="flat" cmpd="sng" algn="ctr">
+                      <a:solidFill>
+                        <a:schemeClr val="tx1"/>
+                      </a:solidFill>
+                      <a:prstDash val="solid"/>
+                      <a:round/>
+                      <a:headEnd type="none" w="med" len="med"/>
+                      <a:tailEnd type="none" w="med" len="med"/>
+                    </a:lnT>
+                    <a:lnB w="12700" cap="flat" cmpd="sng" algn="ctr">
+                      <a:solidFill>
+                        <a:schemeClr val="tx1"/>
+                      </a:solidFill>
+                      <a:prstDash val="solid"/>
+                      <a:round/>
+                      <a:headEnd type="none" w="med" len="med"/>
+                      <a:tailEnd type="none" w="med" len="med"/>
+                    </a:lnB>
+                    <a:solidFill>
+                      <a:schemeClr val="accent1">
+                        <a:lumMod val="75000"/>
+                      </a:schemeClr>
+                    </a:solidFill>
+                  </a:tcPr>
+                </a:tc>
+                <a:tc>
+                  <a:txBody>
+                    <a:bodyPr/>
+                    <a:lstStyle/>
+                    <a:p>
+                      <a:r>
+                        <a:rPr lang="en-US" dirty="0"/>
+                        <a:t>Position</a:t>
+                      </a:r>
+                      <a:endParaRPr lang="en-IN" dirty="0"/>
+                    </a:p>
+                  </a:txBody>
+                  <a:tcPr>
+                    <a:lnL w="12700" cap="flat" cmpd="sng" algn="ctr">
+                      <a:solidFill>
+                        <a:schemeClr val="tx1"/>
+                      </a:solidFill>
+                      <a:prstDash val="solid"/>
+                      <a:round/>
+                      <a:headEnd type="none" w="med" len="med"/>
+                      <a:tailEnd type="none" w="med" len="med"/>
+                    </a:lnL>
+                    <a:lnR w="12700" cap="flat" cmpd="sng" algn="ctr">
+                      <a:solidFill>
+                        <a:schemeClr val="tx1"/>
+                      </a:solidFill>
+                      <a:prstDash val="solid"/>
+                      <a:round/>
+                      <a:headEnd type="none" w="med" len="med"/>
+                      <a:tailEnd type="none" w="med" len="med"/>
+                    </a:lnR>
+                    <a:lnT w="12700" cap="flat" cmpd="sng" algn="ctr">
+                      <a:solidFill>
+                        <a:schemeClr val="tx1"/>
+                      </a:solidFill>
+                      <a:prstDash val="solid"/>
+                      <a:round/>
+                      <a:headEnd type="none" w="med" len="med"/>
+                      <a:tailEnd type="none" w="med" len="med"/>
+                    </a:lnT>
+                    <a:lnB w="12700" cap="flat" cmpd="sng" algn="ctr">
+                      <a:solidFill>
+                        <a:schemeClr val="tx1"/>
+                      </a:solidFill>
+                      <a:prstDash val="solid"/>
+                      <a:round/>
+                      <a:headEnd type="none" w="med" len="med"/>
+                      <a:tailEnd type="none" w="med" len="med"/>
+                    </a:lnB>
+                    <a:solidFill>
+                      <a:schemeClr val="accent1">
+                        <a:lumMod val="75000"/>
+                      </a:schemeClr>
+                    </a:solidFill>
+                  </a:tcPr>
+                </a:tc>
+                <a:tc>
+                  <a:txBody>
+                    <a:bodyPr/>
+                    <a:lstStyle/>
+                    <a:p>
+                      <a:r>
+                        <a:rPr lang="en-US" dirty="0"/>
+                        <a:t>Net Salary</a:t>
+                      </a:r>
+                      <a:endParaRPr lang="en-IN" dirty="0"/>
+                    </a:p>
+                  </a:txBody>
+                  <a:tcPr>
+                    <a:lnL w="12700" cap="flat" cmpd="sng" algn="ctr">
+                      <a:solidFill>
+                        <a:schemeClr val="tx1"/>
+                      </a:solidFill>
+                      <a:prstDash val="solid"/>
+                      <a:round/>
+                      <a:headEnd type="none" w="med" len="med"/>
+                      <a:tailEnd type="none" w="med" len="med"/>
+                    </a:lnL>
+                    <a:lnR w="12700" cap="flat" cmpd="sng" algn="ctr">
+                      <a:solidFill>
+                        <a:schemeClr val="tx1"/>
+                      </a:solidFill>
+                      <a:prstDash val="solid"/>
+                      <a:round/>
+                      <a:headEnd type="none" w="med" len="med"/>
+                      <a:tailEnd type="none" w="med" len="med"/>
+                    </a:lnR>
+                    <a:lnT w="12700" cap="flat" cmpd="sng" algn="ctr">
+                      <a:solidFill>
+                        <a:schemeClr val="tx1"/>
+                      </a:solidFill>
+                      <a:prstDash val="solid"/>
+                      <a:round/>
+                      <a:headEnd type="none" w="med" len="med"/>
+                      <a:tailEnd type="none" w="med" len="med"/>
+                    </a:lnT>
+                    <a:lnB w="12700" cap="flat" cmpd="sng" algn="ctr">
+                      <a:solidFill>
+                        <a:schemeClr val="tx1"/>
+                      </a:solidFill>
+                      <a:prstDash val="solid"/>
+                      <a:round/>
+                      <a:headEnd type="none" w="med" len="med"/>
+                      <a:tailEnd type="none" w="med" len="med"/>
+                    </a:lnB>
+                    <a:solidFill>
+                      <a:schemeClr val="accent1">
+                        <a:lumMod val="75000"/>
+                      </a:schemeClr>
+                    </a:solidFill>
+                  </a:tcPr>
+                </a:tc>
+                <a:tc>
+                  <a:txBody>
+                    <a:bodyPr/>
+                    <a:lstStyle/>
+                    <a:p>
+                      <a:r>
+                        <a:rPr lang="en-US" dirty="0"/>
+                        <a:t>Status</a:t>
+                      </a:r>
+                      <a:endParaRPr lang="en-IN" dirty="0"/>
+                    </a:p>
+                  </a:txBody>
+                  <a:tcPr>
+                    <a:lnL w="12700" cap="flat" cmpd="sng" algn="ctr">
+                      <a:solidFill>
+                        <a:schemeClr val="tx1"/>
+                      </a:solidFill>
+                      <a:prstDash val="solid"/>
+                      <a:round/>
+                      <a:headEnd type="none" w="med" len="med"/>
+                      <a:tailEnd type="none" w="med" len="med"/>
+                    </a:lnL>
+                    <a:lnR w="12700" cap="flat" cmpd="sng" algn="ctr">
+                      <a:solidFill>
+                        <a:schemeClr val="tx1"/>
+                      </a:solidFill>
+                      <a:prstDash val="solid"/>
+                      <a:round/>
+                      <a:headEnd type="none" w="med" len="med"/>
+                      <a:tailEnd type="none" w="med" len="med"/>
+                    </a:lnR>
+                    <a:lnT w="12700" cap="flat" cmpd="sng" algn="ctr">
+                      <a:solidFill>
+                        <a:schemeClr val="tx1"/>
+                      </a:solidFill>
+                      <a:prstDash val="solid"/>
+                      <a:round/>
+                      <a:headEnd type="none" w="med" len="med"/>
+                      <a:tailEnd type="none" w="med" len="med"/>
+                    </a:lnT>
+                    <a:lnB w="12700" cap="flat" cmpd="sng" algn="ctr">
+                      <a:solidFill>
+                        <a:schemeClr val="tx1"/>
+                      </a:solidFill>
+                      <a:prstDash val="solid"/>
+                      <a:round/>
+                      <a:headEnd type="none" w="med" len="med"/>
+                      <a:tailEnd type="none" w="med" len="med"/>
+                    </a:lnB>
+                    <a:solidFill>
+                      <a:schemeClr val="accent1">
+                        <a:lumMod val="75000"/>
+                      </a:schemeClr>
+                    </a:solidFill>
+                  </a:tcPr>
+                </a:tc>
+                <a:extLst>
+                  <a:ext uri="{0D108BD9-81ED-4DB2-BD59-A6C34878D82A}">
+                    <a16:rowId xmlns:a16="http://schemas.microsoft.com/office/drawing/2014/main" val="2967609491"/>
+                  </a:ext>
+                </a:extLst>
+              </a:tr>
+              <a:tr h="370840">
+                <a:tc>
+                  <a:txBody>
+                    <a:bodyPr/>
+                    <a:lstStyle/>
+                    <a:p>
+                      <a:endParaRPr lang="en-IN" dirty="0"/>
+                    </a:p>
+                  </a:txBody>
+                  <a:tcPr>
+                    <a:lnL w="12700" cap="flat" cmpd="sng" algn="ctr">
+                      <a:solidFill>
+                        <a:schemeClr val="tx1"/>
+                      </a:solidFill>
+                      <a:prstDash val="solid"/>
+                      <a:round/>
+                      <a:headEnd type="none" w="med" len="med"/>
+                      <a:tailEnd type="none" w="med" len="med"/>
+                    </a:lnL>
+                    <a:lnR w="12700" cap="flat" cmpd="sng" algn="ctr">
+                      <a:solidFill>
+                        <a:schemeClr val="tx1"/>
+                      </a:solidFill>
+                      <a:prstDash val="solid"/>
+                      <a:round/>
+                      <a:headEnd type="none" w="med" len="med"/>
+                      <a:tailEnd type="none" w="med" len="med"/>
+                    </a:lnR>
+                    <a:lnT w="12700" cap="flat" cmpd="sng" algn="ctr">
+                      <a:solidFill>
+                        <a:schemeClr val="tx1"/>
+                      </a:solidFill>
+                      <a:prstDash val="solid"/>
+                      <a:round/>
+                      <a:headEnd type="none" w="med" len="med"/>
+                      <a:tailEnd type="none" w="med" len="med"/>
+                    </a:lnT>
+                    <a:lnB w="12700" cap="flat" cmpd="sng" algn="ctr">
+                      <a:solidFill>
+                        <a:schemeClr val="tx1"/>
+                      </a:solidFill>
+                      <a:prstDash val="solid"/>
+                      <a:round/>
+                      <a:headEnd type="none" w="med" len="med"/>
+                      <a:tailEnd type="none" w="med" len="med"/>
+                    </a:lnB>
+                    <a:solidFill>
+                      <a:srgbClr val="8FAADC"/>
+                    </a:solidFill>
+                  </a:tcPr>
+                </a:tc>
+                <a:tc>
+                  <a:txBody>
+                    <a:bodyPr/>
+                    <a:lstStyle/>
+                    <a:p>
+                      <a:endParaRPr lang="en-IN"/>
+                    </a:p>
+                  </a:txBody>
+                  <a:tcPr>
+                    <a:lnL w="12700" cap="flat" cmpd="sng" algn="ctr">
+                      <a:solidFill>
+                        <a:schemeClr val="tx1"/>
+                      </a:solidFill>
+                      <a:prstDash val="solid"/>
+                      <a:round/>
+                      <a:headEnd type="none" w="med" len="med"/>
+                      <a:tailEnd type="none" w="med" len="med"/>
+                    </a:lnL>
+                    <a:lnR w="12700" cap="flat" cmpd="sng" algn="ctr">
+                      <a:solidFill>
+                        <a:schemeClr val="tx1"/>
+                      </a:solidFill>
+                      <a:prstDash val="solid"/>
+                      <a:round/>
+                      <a:headEnd type="none" w="med" len="med"/>
+                      <a:tailEnd type="none" w="med" len="med"/>
+                    </a:lnR>
+                    <a:lnT w="12700" cap="flat" cmpd="sng" algn="ctr">
+                      <a:solidFill>
+                        <a:schemeClr val="tx1"/>
+                      </a:solidFill>
+                      <a:prstDash val="solid"/>
+                      <a:round/>
+                      <a:headEnd type="none" w="med" len="med"/>
+                      <a:tailEnd type="none" w="med" len="med"/>
+                    </a:lnT>
+                    <a:lnB w="12700" cap="flat" cmpd="sng" algn="ctr">
+                      <a:solidFill>
+                        <a:schemeClr val="tx1"/>
+                      </a:solidFill>
+                      <a:prstDash val="solid"/>
+                      <a:round/>
+                      <a:headEnd type="none" w="med" len="med"/>
+                      <a:tailEnd type="none" w="med" len="med"/>
+                    </a:lnB>
+                    <a:solidFill>
+                      <a:srgbClr val="8FAADC"/>
+                    </a:solidFill>
+                  </a:tcPr>
+                </a:tc>
+                <a:tc>
+                  <a:txBody>
+                    <a:bodyPr/>
+                    <a:lstStyle/>
+                    <a:p>
+                      <a:endParaRPr lang="en-IN"/>
+                    </a:p>
+                  </a:txBody>
+                  <a:tcPr>
+                    <a:lnL w="12700" cap="flat" cmpd="sng" algn="ctr">
+                      <a:solidFill>
+                        <a:schemeClr val="tx1"/>
+                      </a:solidFill>
+                      <a:prstDash val="solid"/>
+                      <a:round/>
+                      <a:headEnd type="none" w="med" len="med"/>
+                      <a:tailEnd type="none" w="med" len="med"/>
+                    </a:lnL>
+                    <a:lnR w="12700" cap="flat" cmpd="sng" algn="ctr">
+                      <a:solidFill>
+                        <a:schemeClr val="tx1"/>
+                      </a:solidFill>
+                      <a:prstDash val="solid"/>
+                      <a:round/>
+                      <a:headEnd type="none" w="med" len="med"/>
+                      <a:tailEnd type="none" w="med" len="med"/>
+                    </a:lnR>
+                    <a:lnT w="12700" cap="flat" cmpd="sng" algn="ctr">
+                      <a:solidFill>
+                        <a:schemeClr val="tx1"/>
+                      </a:solidFill>
+                      <a:prstDash val="solid"/>
+                      <a:round/>
+                      <a:headEnd type="none" w="med" len="med"/>
+                      <a:tailEnd type="none" w="med" len="med"/>
+                    </a:lnT>
+                    <a:lnB w="12700" cap="flat" cmpd="sng" algn="ctr">
+                      <a:solidFill>
+                        <a:schemeClr val="tx1"/>
+                      </a:solidFill>
+                      <a:prstDash val="solid"/>
+                      <a:round/>
+                      <a:headEnd type="none" w="med" len="med"/>
+                      <a:tailEnd type="none" w="med" len="med"/>
+                    </a:lnB>
+                    <a:solidFill>
+                      <a:srgbClr val="8FAADC"/>
+                    </a:solidFill>
+                  </a:tcPr>
+                </a:tc>
+                <a:tc>
+                  <a:txBody>
+                    <a:bodyPr/>
+                    <a:lstStyle/>
+                    <a:p>
+                      <a:endParaRPr lang="en-IN"/>
+                    </a:p>
+                  </a:txBody>
+                  <a:tcPr>
+                    <a:lnL w="12700" cap="flat" cmpd="sng" algn="ctr">
+                      <a:solidFill>
+                        <a:schemeClr val="tx1"/>
+                      </a:solidFill>
+                      <a:prstDash val="solid"/>
+                      <a:round/>
+                      <a:headEnd type="none" w="med" len="med"/>
+                      <a:tailEnd type="none" w="med" len="med"/>
+                    </a:lnL>
+                    <a:lnR w="12700" cap="flat" cmpd="sng" algn="ctr">
+                      <a:solidFill>
+                        <a:schemeClr val="tx1"/>
+                      </a:solidFill>
+                      <a:prstDash val="solid"/>
+                      <a:round/>
+                      <a:headEnd type="none" w="med" len="med"/>
+                      <a:tailEnd type="none" w="med" len="med"/>
+                    </a:lnR>
+                    <a:lnT w="12700" cap="flat" cmpd="sng" algn="ctr">
+                      <a:solidFill>
+                        <a:schemeClr val="tx1"/>
+                      </a:solidFill>
+                      <a:prstDash val="solid"/>
+                      <a:round/>
+                      <a:headEnd type="none" w="med" len="med"/>
+                      <a:tailEnd type="none" w="med" len="med"/>
+                    </a:lnT>
+                    <a:lnB w="12700" cap="flat" cmpd="sng" algn="ctr">
+                      <a:solidFill>
+                        <a:schemeClr val="tx1"/>
+                      </a:solidFill>
+                      <a:prstDash val="solid"/>
+                      <a:round/>
+                      <a:headEnd type="none" w="med" len="med"/>
+                      <a:tailEnd type="none" w="med" len="med"/>
+                    </a:lnB>
+                    <a:solidFill>
+                      <a:srgbClr val="8FAADC"/>
+                    </a:solidFill>
+                  </a:tcPr>
+                </a:tc>
+                <a:extLst>
+                  <a:ext uri="{0D108BD9-81ED-4DB2-BD59-A6C34878D82A}">
+                    <a16:rowId xmlns:a16="http://schemas.microsoft.com/office/drawing/2014/main" val="1665693499"/>
+                  </a:ext>
+                </a:extLst>
+              </a:tr>
+              <a:tr h="370840">
+                <a:tc>
+                  <a:txBody>
+                    <a:bodyPr/>
+                    <a:lstStyle/>
+                    <a:p>
+                      <a:endParaRPr lang="en-IN" dirty="0"/>
+                    </a:p>
+                  </a:txBody>
+                  <a:tcPr>
+                    <a:lnL w="12700" cap="flat" cmpd="sng" algn="ctr">
+                      <a:solidFill>
+                        <a:schemeClr val="tx1"/>
+                      </a:solidFill>
+                      <a:prstDash val="solid"/>
+                      <a:round/>
+                      <a:headEnd type="none" w="med" len="med"/>
+                      <a:tailEnd type="none" w="med" len="med"/>
+                    </a:lnL>
+                    <a:lnR w="12700" cap="flat" cmpd="sng" algn="ctr">
+                      <a:solidFill>
+                        <a:schemeClr val="tx1"/>
+                      </a:solidFill>
+                      <a:prstDash val="solid"/>
+                      <a:round/>
+                      <a:headEnd type="none" w="med" len="med"/>
+                      <a:tailEnd type="none" w="med" len="med"/>
+                    </a:lnR>
+                    <a:lnT w="12700" cap="flat" cmpd="sng" algn="ctr">
+                      <a:solidFill>
+                        <a:schemeClr val="tx1"/>
+                      </a:solidFill>
+                      <a:prstDash val="solid"/>
+                      <a:round/>
+                      <a:headEnd type="none" w="med" len="med"/>
+                      <a:tailEnd type="none" w="med" len="med"/>
+                    </a:lnT>
+                    <a:lnB w="12700" cap="flat" cmpd="sng" algn="ctr">
+                      <a:solidFill>
+                        <a:schemeClr val="tx1"/>
+                      </a:solidFill>
+                      <a:prstDash val="solid"/>
+                      <a:round/>
+                      <a:headEnd type="none" w="med" len="med"/>
+                      <a:tailEnd type="none" w="med" len="med"/>
+                    </a:lnB>
+                    <a:solidFill>
+                      <a:srgbClr val="8FAADC"/>
+                    </a:solidFill>
+                  </a:tcPr>
+                </a:tc>
+                <a:tc>
+                  <a:txBody>
+                    <a:bodyPr/>
+                    <a:lstStyle/>
+                    <a:p>
+                      <a:endParaRPr lang="en-IN" dirty="0"/>
+                    </a:p>
+                  </a:txBody>
+                  <a:tcPr>
+                    <a:lnL w="12700" cap="flat" cmpd="sng" algn="ctr">
+                      <a:solidFill>
+                        <a:schemeClr val="tx1"/>
+                      </a:solidFill>
+                      <a:prstDash val="solid"/>
+                      <a:round/>
+                      <a:headEnd type="none" w="med" len="med"/>
+                      <a:tailEnd type="none" w="med" len="med"/>
+                    </a:lnL>
+                    <a:lnR w="12700" cap="flat" cmpd="sng" algn="ctr">
+                      <a:solidFill>
+                        <a:schemeClr val="tx1"/>
+                      </a:solidFill>
+                      <a:prstDash val="solid"/>
+                      <a:round/>
+                      <a:headEnd type="none" w="med" len="med"/>
+                      <a:tailEnd type="none" w="med" len="med"/>
+                    </a:lnR>
+                    <a:lnT w="12700" cap="flat" cmpd="sng" algn="ctr">
+                      <a:solidFill>
+                        <a:schemeClr val="tx1"/>
+                      </a:solidFill>
+                      <a:prstDash val="solid"/>
+                      <a:round/>
+                      <a:headEnd type="none" w="med" len="med"/>
+                      <a:tailEnd type="none" w="med" len="med"/>
+                    </a:lnT>
+                    <a:lnB w="12700" cap="flat" cmpd="sng" algn="ctr">
+                      <a:solidFill>
+                        <a:schemeClr val="tx1"/>
+                      </a:solidFill>
+                      <a:prstDash val="solid"/>
+                      <a:round/>
+                      <a:headEnd type="none" w="med" len="med"/>
+                      <a:tailEnd type="none" w="med" len="med"/>
+                    </a:lnB>
+                    <a:solidFill>
+                      <a:srgbClr val="8FAADC"/>
+                    </a:solidFill>
+                  </a:tcPr>
+                </a:tc>
+                <a:tc>
+                  <a:txBody>
+                    <a:bodyPr/>
+                    <a:lstStyle/>
+                    <a:p>
+                      <a:endParaRPr lang="en-IN"/>
+                    </a:p>
+                  </a:txBody>
+                  <a:tcPr>
+                    <a:lnL w="12700" cap="flat" cmpd="sng" algn="ctr">
+                      <a:solidFill>
+                        <a:schemeClr val="tx1"/>
+                      </a:solidFill>
+                      <a:prstDash val="solid"/>
+                      <a:round/>
+                      <a:headEnd type="none" w="med" len="med"/>
+                      <a:tailEnd type="none" w="med" len="med"/>
+                    </a:lnL>
+                    <a:lnR w="12700" cap="flat" cmpd="sng" algn="ctr">
+                      <a:solidFill>
+                        <a:schemeClr val="tx1"/>
+                      </a:solidFill>
+                      <a:prstDash val="solid"/>
+                      <a:round/>
+                      <a:headEnd type="none" w="med" len="med"/>
+                      <a:tailEnd type="none" w="med" len="med"/>
+                    </a:lnR>
+                    <a:lnT w="12700" cap="flat" cmpd="sng" algn="ctr">
+                      <a:solidFill>
+                        <a:schemeClr val="tx1"/>
+                      </a:solidFill>
+                      <a:prstDash val="solid"/>
+                      <a:round/>
+                      <a:headEnd type="none" w="med" len="med"/>
+                      <a:tailEnd type="none" w="med" len="med"/>
+                    </a:lnT>
+                    <a:lnB w="12700" cap="flat" cmpd="sng" algn="ctr">
+                      <a:solidFill>
+                        <a:schemeClr val="tx1"/>
+                      </a:solidFill>
+                      <a:prstDash val="solid"/>
+                      <a:round/>
+                      <a:headEnd type="none" w="med" len="med"/>
+                      <a:tailEnd type="none" w="med" len="med"/>
+                    </a:lnB>
+                    <a:solidFill>
+                      <a:srgbClr val="8FAADC"/>
+                    </a:solidFill>
+                  </a:tcPr>
+                </a:tc>
+                <a:tc>
+                  <a:txBody>
+                    <a:bodyPr/>
+                    <a:lstStyle/>
+                    <a:p>
+                      <a:endParaRPr lang="en-IN"/>
+                    </a:p>
+                  </a:txBody>
+                  <a:tcPr>
+                    <a:lnL w="12700" cap="flat" cmpd="sng" algn="ctr">
+                      <a:solidFill>
+                        <a:schemeClr val="tx1"/>
+                      </a:solidFill>
+                      <a:prstDash val="solid"/>
+                      <a:round/>
+                      <a:headEnd type="none" w="med" len="med"/>
+                      <a:tailEnd type="none" w="med" len="med"/>
+                    </a:lnL>
+                    <a:lnR w="12700" cap="flat" cmpd="sng" algn="ctr">
+                      <a:solidFill>
+                        <a:schemeClr val="tx1"/>
+                      </a:solidFill>
+                      <a:prstDash val="solid"/>
+                      <a:round/>
+                      <a:headEnd type="none" w="med" len="med"/>
+                      <a:tailEnd type="none" w="med" len="med"/>
+                    </a:lnR>
+                    <a:lnT w="12700" cap="flat" cmpd="sng" algn="ctr">
+                      <a:solidFill>
+                        <a:schemeClr val="tx1"/>
+                      </a:solidFill>
+                      <a:prstDash val="solid"/>
+                      <a:round/>
+                      <a:headEnd type="none" w="med" len="med"/>
+                      <a:tailEnd type="none" w="med" len="med"/>
+                    </a:lnT>
+                    <a:lnB w="12700" cap="flat" cmpd="sng" algn="ctr">
+                      <a:solidFill>
+                        <a:schemeClr val="tx1"/>
+                      </a:solidFill>
+                      <a:prstDash val="solid"/>
+                      <a:round/>
+                      <a:headEnd type="none" w="med" len="med"/>
+                      <a:tailEnd type="none" w="med" len="med"/>
+                    </a:lnB>
+                    <a:solidFill>
+                      <a:srgbClr val="8FAADC"/>
+                    </a:solidFill>
+                  </a:tcPr>
+                </a:tc>
+                <a:extLst>
+                  <a:ext uri="{0D108BD9-81ED-4DB2-BD59-A6C34878D82A}">
+                    <a16:rowId xmlns:a16="http://schemas.microsoft.com/office/drawing/2014/main" val="1485392036"/>
+                  </a:ext>
+                </a:extLst>
+              </a:tr>
+              <a:tr h="370840">
+                <a:tc>
+                  <a:txBody>
+                    <a:bodyPr/>
+                    <a:lstStyle/>
+                    <a:p>
+                      <a:endParaRPr lang="en-IN"/>
+                    </a:p>
+                  </a:txBody>
+                  <a:tcPr>
+                    <a:lnL w="12700" cap="flat" cmpd="sng" algn="ctr">
+                      <a:solidFill>
+                        <a:schemeClr val="tx1"/>
+                      </a:solidFill>
+                      <a:prstDash val="solid"/>
+                      <a:round/>
+                      <a:headEnd type="none" w="med" len="med"/>
+                      <a:tailEnd type="none" w="med" len="med"/>
+                    </a:lnL>
+                    <a:lnR w="12700" cap="flat" cmpd="sng" algn="ctr">
+                      <a:solidFill>
+                        <a:schemeClr val="tx1"/>
+                      </a:solidFill>
+                      <a:prstDash val="solid"/>
+                      <a:round/>
+                      <a:headEnd type="none" w="med" len="med"/>
+                      <a:tailEnd type="none" w="med" len="med"/>
+                    </a:lnR>
+                    <a:lnT w="12700" cap="flat" cmpd="sng" algn="ctr">
+                      <a:solidFill>
+                        <a:schemeClr val="tx1"/>
+                      </a:solidFill>
+                      <a:prstDash val="solid"/>
+                      <a:round/>
+                      <a:headEnd type="none" w="med" len="med"/>
+                      <a:tailEnd type="none" w="med" len="med"/>
+                    </a:lnT>
+                    <a:lnB w="12700" cap="flat" cmpd="sng" algn="ctr">
+                      <a:solidFill>
+                        <a:schemeClr val="tx1"/>
+                      </a:solidFill>
+                      <a:prstDash val="solid"/>
+                      <a:round/>
+                      <a:headEnd type="none" w="med" len="med"/>
+                      <a:tailEnd type="none" w="med" len="med"/>
+                    </a:lnB>
+                    <a:solidFill>
+                      <a:srgbClr val="8FAADC"/>
+                    </a:solidFill>
+                  </a:tcPr>
+                </a:tc>
+                <a:tc>
+                  <a:txBody>
+                    <a:bodyPr/>
+                    <a:lstStyle/>
+                    <a:p>
+                      <a:endParaRPr lang="en-IN" dirty="0"/>
+                    </a:p>
+                  </a:txBody>
+                  <a:tcPr>
+                    <a:lnL w="12700" cap="flat" cmpd="sng" algn="ctr">
+                      <a:solidFill>
+                        <a:schemeClr val="tx1"/>
+                      </a:solidFill>
+                      <a:prstDash val="solid"/>
+                      <a:round/>
+                      <a:headEnd type="none" w="med" len="med"/>
+                      <a:tailEnd type="none" w="med" len="med"/>
+                    </a:lnL>
+                    <a:lnR w="12700" cap="flat" cmpd="sng" algn="ctr">
+                      <a:solidFill>
+                        <a:schemeClr val="tx1"/>
+                      </a:solidFill>
+                      <a:prstDash val="solid"/>
+                      <a:round/>
+                      <a:headEnd type="none" w="med" len="med"/>
+                      <a:tailEnd type="none" w="med" len="med"/>
+                    </a:lnR>
+                    <a:lnT w="12700" cap="flat" cmpd="sng" algn="ctr">
+                      <a:solidFill>
+                        <a:schemeClr val="tx1"/>
+                      </a:solidFill>
+                      <a:prstDash val="solid"/>
+                      <a:round/>
+                      <a:headEnd type="none" w="med" len="med"/>
+                      <a:tailEnd type="none" w="med" len="med"/>
+                    </a:lnT>
+                    <a:lnB w="12700" cap="flat" cmpd="sng" algn="ctr">
+                      <a:solidFill>
+                        <a:schemeClr val="tx1"/>
+                      </a:solidFill>
+                      <a:prstDash val="solid"/>
+                      <a:round/>
+                      <a:headEnd type="none" w="med" len="med"/>
+                      <a:tailEnd type="none" w="med" len="med"/>
+                    </a:lnB>
+                    <a:solidFill>
+                      <a:srgbClr val="8FAADC"/>
+                    </a:solidFill>
+                  </a:tcPr>
+                </a:tc>
+                <a:tc>
+                  <a:txBody>
+                    <a:bodyPr/>
+                    <a:lstStyle/>
+                    <a:p>
+                      <a:endParaRPr lang="en-IN"/>
+                    </a:p>
+                  </a:txBody>
+                  <a:tcPr>
+                    <a:lnL w="12700" cap="flat" cmpd="sng" algn="ctr">
+                      <a:solidFill>
+                        <a:schemeClr val="tx1"/>
+                      </a:solidFill>
+                      <a:prstDash val="solid"/>
+                      <a:round/>
+                      <a:headEnd type="none" w="med" len="med"/>
+                      <a:tailEnd type="none" w="med" len="med"/>
+                    </a:lnL>
+                    <a:lnR w="12700" cap="flat" cmpd="sng" algn="ctr">
+                      <a:solidFill>
+                        <a:schemeClr val="tx1"/>
+                      </a:solidFill>
+                      <a:prstDash val="solid"/>
+                      <a:round/>
+                      <a:headEnd type="none" w="med" len="med"/>
+                      <a:tailEnd type="none" w="med" len="med"/>
+                    </a:lnR>
+                    <a:lnT w="12700" cap="flat" cmpd="sng" algn="ctr">
+                      <a:solidFill>
+                        <a:schemeClr val="tx1"/>
+                      </a:solidFill>
+                      <a:prstDash val="solid"/>
+                      <a:round/>
+                      <a:headEnd type="none" w="med" len="med"/>
+                      <a:tailEnd type="none" w="med" len="med"/>
+                    </a:lnT>
+                    <a:lnB w="12700" cap="flat" cmpd="sng" algn="ctr">
+                      <a:solidFill>
+                        <a:schemeClr val="tx1"/>
+                      </a:solidFill>
+                      <a:prstDash val="solid"/>
+                      <a:round/>
+                      <a:headEnd type="none" w="med" len="med"/>
+                      <a:tailEnd type="none" w="med" len="med"/>
+                    </a:lnB>
+                    <a:solidFill>
+                      <a:srgbClr val="8FAADC"/>
+                    </a:solidFill>
+                  </a:tcPr>
+                </a:tc>
+                <a:tc>
+                  <a:txBody>
+                    <a:bodyPr/>
+                    <a:lstStyle/>
+                    <a:p>
+                      <a:endParaRPr lang="en-IN"/>
+                    </a:p>
+                  </a:txBody>
+                  <a:tcPr>
+                    <a:lnL w="12700" cap="flat" cmpd="sng" algn="ctr">
+                      <a:solidFill>
+                        <a:schemeClr val="tx1"/>
+                      </a:solidFill>
+                      <a:prstDash val="solid"/>
+                      <a:round/>
+                      <a:headEnd type="none" w="med" len="med"/>
+                      <a:tailEnd type="none" w="med" len="med"/>
+                    </a:lnL>
+                    <a:lnR w="12700" cap="flat" cmpd="sng" algn="ctr">
+                      <a:solidFill>
+                        <a:schemeClr val="tx1"/>
+                      </a:solidFill>
+                      <a:prstDash val="solid"/>
+                      <a:round/>
+                      <a:headEnd type="none" w="med" len="med"/>
+                      <a:tailEnd type="none" w="med" len="med"/>
+                    </a:lnR>
+                    <a:lnT w="12700" cap="flat" cmpd="sng" algn="ctr">
+                      <a:solidFill>
+                        <a:schemeClr val="tx1"/>
+                      </a:solidFill>
+                      <a:prstDash val="solid"/>
+                      <a:round/>
+                      <a:headEnd type="none" w="med" len="med"/>
+                      <a:tailEnd type="none" w="med" len="med"/>
+                    </a:lnT>
+                    <a:lnB w="12700" cap="flat" cmpd="sng" algn="ctr">
+                      <a:solidFill>
+                        <a:schemeClr val="tx1"/>
+                      </a:solidFill>
+                      <a:prstDash val="solid"/>
+                      <a:round/>
+                      <a:headEnd type="none" w="med" len="med"/>
+                      <a:tailEnd type="none" w="med" len="med"/>
+                    </a:lnB>
+                    <a:solidFill>
+                      <a:srgbClr val="8FAADC"/>
+                    </a:solidFill>
+                  </a:tcPr>
+                </a:tc>
+                <a:extLst>
+                  <a:ext uri="{0D108BD9-81ED-4DB2-BD59-A6C34878D82A}">
+                    <a16:rowId xmlns:a16="http://schemas.microsoft.com/office/drawing/2014/main" val="430668479"/>
+                  </a:ext>
+                </a:extLst>
+              </a:tr>
+              <a:tr h="370840">
+                <a:tc>
+                  <a:txBody>
+                    <a:bodyPr/>
+                    <a:lstStyle/>
+                    <a:p>
+                      <a:endParaRPr lang="en-IN"/>
+                    </a:p>
+                  </a:txBody>
+                  <a:tcPr>
+                    <a:lnL w="12700" cap="flat" cmpd="sng" algn="ctr">
+                      <a:solidFill>
+                        <a:schemeClr val="tx1"/>
+                      </a:solidFill>
+                      <a:prstDash val="solid"/>
+                      <a:round/>
+                      <a:headEnd type="none" w="med" len="med"/>
+                      <a:tailEnd type="none" w="med" len="med"/>
+                    </a:lnL>
+                    <a:lnR w="12700" cap="flat" cmpd="sng" algn="ctr">
+                      <a:solidFill>
+                        <a:schemeClr val="tx1"/>
+                      </a:solidFill>
+                      <a:prstDash val="solid"/>
+                      <a:round/>
+                      <a:headEnd type="none" w="med" len="med"/>
+                      <a:tailEnd type="none" w="med" len="med"/>
+                    </a:lnR>
+                    <a:lnT w="12700" cap="flat" cmpd="sng" algn="ctr">
+                      <a:solidFill>
+                        <a:schemeClr val="tx1"/>
+                      </a:solidFill>
+                      <a:prstDash val="solid"/>
+                      <a:round/>
+                      <a:headEnd type="none" w="med" len="med"/>
+                      <a:tailEnd type="none" w="med" len="med"/>
+                    </a:lnT>
+                    <a:lnB w="12700" cap="flat" cmpd="sng" algn="ctr">
+                      <a:solidFill>
+                        <a:schemeClr val="tx1"/>
+                      </a:solidFill>
+                      <a:prstDash val="solid"/>
+                      <a:round/>
+                      <a:headEnd type="none" w="med" len="med"/>
+                      <a:tailEnd type="none" w="med" len="med"/>
+                    </a:lnB>
+                    <a:solidFill>
+                      <a:srgbClr val="8FAADC"/>
+                    </a:solidFill>
+                  </a:tcPr>
+                </a:tc>
+                <a:tc>
+                  <a:txBody>
+                    <a:bodyPr/>
+                    <a:lstStyle/>
+                    <a:p>
+                      <a:endParaRPr lang="en-IN" dirty="0"/>
+                    </a:p>
+                  </a:txBody>
+                  <a:tcPr>
+                    <a:lnL w="12700" cap="flat" cmpd="sng" algn="ctr">
+                      <a:solidFill>
+                        <a:schemeClr val="tx1"/>
+                      </a:solidFill>
+                      <a:prstDash val="solid"/>
+                      <a:round/>
+                      <a:headEnd type="none" w="med" len="med"/>
+                      <a:tailEnd type="none" w="med" len="med"/>
+                    </a:lnL>
+                    <a:lnR w="12700" cap="flat" cmpd="sng" algn="ctr">
+                      <a:solidFill>
+                        <a:schemeClr val="tx1"/>
+                      </a:solidFill>
+                      <a:prstDash val="solid"/>
+                      <a:round/>
+                      <a:headEnd type="none" w="med" len="med"/>
+                      <a:tailEnd type="none" w="med" len="med"/>
+                    </a:lnR>
+                    <a:lnT w="12700" cap="flat" cmpd="sng" algn="ctr">
+                      <a:solidFill>
+                        <a:schemeClr val="tx1"/>
+                      </a:solidFill>
+                      <a:prstDash val="solid"/>
+                      <a:round/>
+                      <a:headEnd type="none" w="med" len="med"/>
+                      <a:tailEnd type="none" w="med" len="med"/>
+                    </a:lnT>
+                    <a:lnB w="12700" cap="flat" cmpd="sng" algn="ctr">
+                      <a:solidFill>
+                        <a:schemeClr val="tx1"/>
+                      </a:solidFill>
+                      <a:prstDash val="solid"/>
+                      <a:round/>
+                      <a:headEnd type="none" w="med" len="med"/>
+                      <a:tailEnd type="none" w="med" len="med"/>
+                    </a:lnB>
+                    <a:solidFill>
+                      <a:srgbClr val="8FAADC"/>
+                    </a:solidFill>
+                  </a:tcPr>
+                </a:tc>
+                <a:tc>
+                  <a:txBody>
+                    <a:bodyPr/>
+                    <a:lstStyle/>
+                    <a:p>
+                      <a:endParaRPr lang="en-IN"/>
+                    </a:p>
+                  </a:txBody>
+                  <a:tcPr>
+                    <a:lnL w="12700" cap="flat" cmpd="sng" algn="ctr">
+                      <a:solidFill>
+                        <a:schemeClr val="tx1"/>
+                      </a:solidFill>
+                      <a:prstDash val="solid"/>
+                      <a:round/>
+                      <a:headEnd type="none" w="med" len="med"/>
+                      <a:tailEnd type="none" w="med" len="med"/>
+                    </a:lnL>
+                    <a:lnR w="12700" cap="flat" cmpd="sng" algn="ctr">
+                      <a:solidFill>
+                        <a:schemeClr val="tx1"/>
+                      </a:solidFill>
+                      <a:prstDash val="solid"/>
+                      <a:round/>
+                      <a:headEnd type="none" w="med" len="med"/>
+                      <a:tailEnd type="none" w="med" len="med"/>
+                    </a:lnR>
+                    <a:lnT w="12700" cap="flat" cmpd="sng" algn="ctr">
+                      <a:solidFill>
+                        <a:schemeClr val="tx1"/>
+                      </a:solidFill>
+                      <a:prstDash val="solid"/>
+                      <a:round/>
+                      <a:headEnd type="none" w="med" len="med"/>
+                      <a:tailEnd type="none" w="med" len="med"/>
+                    </a:lnT>
+                    <a:lnB w="12700" cap="flat" cmpd="sng" algn="ctr">
+                      <a:solidFill>
+                        <a:schemeClr val="tx1"/>
+                      </a:solidFill>
+                      <a:prstDash val="solid"/>
+                      <a:round/>
+                      <a:headEnd type="none" w="med" len="med"/>
+                      <a:tailEnd type="none" w="med" len="med"/>
+                    </a:lnB>
+                    <a:solidFill>
+                      <a:srgbClr val="8FAADC"/>
+                    </a:solidFill>
+                  </a:tcPr>
+                </a:tc>
+                <a:tc>
+                  <a:txBody>
+                    <a:bodyPr/>
+                    <a:lstStyle/>
+                    <a:p>
+                      <a:endParaRPr lang="en-IN"/>
+                    </a:p>
+                  </a:txBody>
+                  <a:tcPr>
+                    <a:lnL w="12700" cap="flat" cmpd="sng" algn="ctr">
+                      <a:solidFill>
+                        <a:schemeClr val="tx1"/>
+                      </a:solidFill>
+                      <a:prstDash val="solid"/>
+                      <a:round/>
+                      <a:headEnd type="none" w="med" len="med"/>
+                      <a:tailEnd type="none" w="med" len="med"/>
+                    </a:lnL>
+                    <a:lnR w="12700" cap="flat" cmpd="sng" algn="ctr">
+                      <a:solidFill>
+                        <a:schemeClr val="tx1"/>
+                      </a:solidFill>
+                      <a:prstDash val="solid"/>
+                      <a:round/>
+                      <a:headEnd type="none" w="med" len="med"/>
+                      <a:tailEnd type="none" w="med" len="med"/>
+                    </a:lnR>
+                    <a:lnT w="12700" cap="flat" cmpd="sng" algn="ctr">
+                      <a:solidFill>
+                        <a:schemeClr val="tx1"/>
+                      </a:solidFill>
+                      <a:prstDash val="solid"/>
+                      <a:round/>
+                      <a:headEnd type="none" w="med" len="med"/>
+                      <a:tailEnd type="none" w="med" len="med"/>
+                    </a:lnT>
+                    <a:lnB w="12700" cap="flat" cmpd="sng" algn="ctr">
+                      <a:solidFill>
+                        <a:schemeClr val="tx1"/>
+                      </a:solidFill>
+                      <a:prstDash val="solid"/>
+                      <a:round/>
+                      <a:headEnd type="none" w="med" len="med"/>
+                      <a:tailEnd type="none" w="med" len="med"/>
+                    </a:lnB>
+                    <a:solidFill>
+                      <a:srgbClr val="8FAADC"/>
+                    </a:solidFill>
+                  </a:tcPr>
+                </a:tc>
+                <a:extLst>
+                  <a:ext uri="{0D108BD9-81ED-4DB2-BD59-A6C34878D82A}">
+                    <a16:rowId xmlns:a16="http://schemas.microsoft.com/office/drawing/2014/main" val="2809319250"/>
+                  </a:ext>
+                </a:extLst>
+              </a:tr>
+              <a:tr h="370840">
+                <a:tc>
+                  <a:txBody>
+                    <a:bodyPr/>
+                    <a:lstStyle/>
+                    <a:p>
+                      <a:endParaRPr lang="en-IN"/>
+                    </a:p>
+                  </a:txBody>
+                  <a:tcPr>
+                    <a:lnL w="12700" cap="flat" cmpd="sng" algn="ctr">
+                      <a:solidFill>
+                        <a:schemeClr val="tx1"/>
+                      </a:solidFill>
+                      <a:prstDash val="solid"/>
+                      <a:round/>
+                      <a:headEnd type="none" w="med" len="med"/>
+                      <a:tailEnd type="none" w="med" len="med"/>
+                    </a:lnL>
+                    <a:lnR w="12700" cap="flat" cmpd="sng" algn="ctr">
+                      <a:solidFill>
+                        <a:schemeClr val="tx1"/>
+                      </a:solidFill>
+                      <a:prstDash val="solid"/>
+                      <a:round/>
+                      <a:headEnd type="none" w="med" len="med"/>
+                      <a:tailEnd type="none" w="med" len="med"/>
+                    </a:lnR>
+                    <a:lnT w="12700" cap="flat" cmpd="sng" algn="ctr">
+                      <a:solidFill>
+                        <a:schemeClr val="tx1"/>
+                      </a:solidFill>
+                      <a:prstDash val="solid"/>
+                      <a:round/>
+                      <a:headEnd type="none" w="med" len="med"/>
+                      <a:tailEnd type="none" w="med" len="med"/>
+                    </a:lnT>
+                    <a:lnB w="12700" cap="flat" cmpd="sng" algn="ctr">
+                      <a:solidFill>
+                        <a:schemeClr val="tx1"/>
+                      </a:solidFill>
+                      <a:prstDash val="solid"/>
+                      <a:round/>
+                      <a:headEnd type="none" w="med" len="med"/>
+                      <a:tailEnd type="none" w="med" len="med"/>
+                    </a:lnB>
+                    <a:solidFill>
+                      <a:srgbClr val="8FAADC"/>
+                    </a:solidFill>
+                  </a:tcPr>
+                </a:tc>
+                <a:tc>
+                  <a:txBody>
+                    <a:bodyPr/>
+                    <a:lstStyle/>
+                    <a:p>
+                      <a:endParaRPr lang="en-IN" dirty="0"/>
+                    </a:p>
+                  </a:txBody>
+                  <a:tcPr>
+                    <a:lnL w="12700" cap="flat" cmpd="sng" algn="ctr">
+                      <a:solidFill>
+                        <a:schemeClr val="tx1"/>
+                      </a:solidFill>
+                      <a:prstDash val="solid"/>
+                      <a:round/>
+                      <a:headEnd type="none" w="med" len="med"/>
+                      <a:tailEnd type="none" w="med" len="med"/>
+                    </a:lnL>
+                    <a:lnR w="12700" cap="flat" cmpd="sng" algn="ctr">
+                      <a:solidFill>
+                        <a:schemeClr val="tx1"/>
+                      </a:solidFill>
+                      <a:prstDash val="solid"/>
+                      <a:round/>
+                      <a:headEnd type="none" w="med" len="med"/>
+                      <a:tailEnd type="none" w="med" len="med"/>
+                    </a:lnR>
+                    <a:lnT w="12700" cap="flat" cmpd="sng" algn="ctr">
+                      <a:solidFill>
+                        <a:schemeClr val="tx1"/>
+                      </a:solidFill>
+                      <a:prstDash val="solid"/>
+                      <a:round/>
+                      <a:headEnd type="none" w="med" len="med"/>
+                      <a:tailEnd type="none" w="med" len="med"/>
+                    </a:lnT>
+                    <a:lnB w="12700" cap="flat" cmpd="sng" algn="ctr">
+                      <a:solidFill>
+                        <a:schemeClr val="tx1"/>
+                      </a:solidFill>
+                      <a:prstDash val="solid"/>
+                      <a:round/>
+                      <a:headEnd type="none" w="med" len="med"/>
+                      <a:tailEnd type="none" w="med" len="med"/>
+                    </a:lnB>
+                    <a:solidFill>
+                      <a:srgbClr val="8FAADC"/>
+                    </a:solidFill>
+                  </a:tcPr>
+                </a:tc>
+                <a:tc>
+                  <a:txBody>
+                    <a:bodyPr/>
+                    <a:lstStyle/>
+                    <a:p>
+                      <a:endParaRPr lang="en-IN" dirty="0"/>
+                    </a:p>
+                  </a:txBody>
+                  <a:tcPr>
+                    <a:lnL w="12700" cap="flat" cmpd="sng" algn="ctr">
+                      <a:solidFill>
+                        <a:schemeClr val="tx1"/>
+                      </a:solidFill>
+                      <a:prstDash val="solid"/>
+                      <a:round/>
+                      <a:headEnd type="none" w="med" len="med"/>
+                      <a:tailEnd type="none" w="med" len="med"/>
+                    </a:lnL>
+                    <a:lnR w="12700" cap="flat" cmpd="sng" algn="ctr">
+                      <a:solidFill>
+                        <a:schemeClr val="tx1"/>
+                      </a:solidFill>
+                      <a:prstDash val="solid"/>
+                      <a:round/>
+                      <a:headEnd type="none" w="med" len="med"/>
+                      <a:tailEnd type="none" w="med" len="med"/>
+                    </a:lnR>
+                    <a:lnT w="12700" cap="flat" cmpd="sng" algn="ctr">
+                      <a:solidFill>
+                        <a:schemeClr val="tx1"/>
+                      </a:solidFill>
+                      <a:prstDash val="solid"/>
+                      <a:round/>
+                      <a:headEnd type="none" w="med" len="med"/>
+                      <a:tailEnd type="none" w="med" len="med"/>
+                    </a:lnT>
+                    <a:lnB w="12700" cap="flat" cmpd="sng" algn="ctr">
+                      <a:solidFill>
+                        <a:schemeClr val="tx1"/>
+                      </a:solidFill>
+                      <a:prstDash val="solid"/>
+                      <a:round/>
+                      <a:headEnd type="none" w="med" len="med"/>
+                      <a:tailEnd type="none" w="med" len="med"/>
+                    </a:lnB>
+                    <a:solidFill>
+                      <a:srgbClr val="8FAADC"/>
+                    </a:solidFill>
+                  </a:tcPr>
+                </a:tc>
+                <a:tc>
+                  <a:txBody>
+                    <a:bodyPr/>
+                    <a:lstStyle/>
+                    <a:p>
+                      <a:endParaRPr lang="en-IN"/>
+                    </a:p>
+                  </a:txBody>
+                  <a:tcPr>
+                    <a:lnL w="12700" cap="flat" cmpd="sng" algn="ctr">
+                      <a:solidFill>
+                        <a:schemeClr val="tx1"/>
+                      </a:solidFill>
+                      <a:prstDash val="solid"/>
+                      <a:round/>
+                      <a:headEnd type="none" w="med" len="med"/>
+                      <a:tailEnd type="none" w="med" len="med"/>
+                    </a:lnL>
+                    <a:lnR w="12700" cap="flat" cmpd="sng" algn="ctr">
+                      <a:solidFill>
+                        <a:schemeClr val="tx1"/>
+                      </a:solidFill>
+                      <a:prstDash val="solid"/>
+                      <a:round/>
+                      <a:headEnd type="none" w="med" len="med"/>
+                      <a:tailEnd type="none" w="med" len="med"/>
+                    </a:lnR>
+                    <a:lnT w="12700" cap="flat" cmpd="sng" algn="ctr">
+                      <a:solidFill>
+                        <a:schemeClr val="tx1"/>
+                      </a:solidFill>
+                      <a:prstDash val="solid"/>
+                      <a:round/>
+                      <a:headEnd type="none" w="med" len="med"/>
+                      <a:tailEnd type="none" w="med" len="med"/>
+                    </a:lnT>
+                    <a:lnB w="12700" cap="flat" cmpd="sng" algn="ctr">
+                      <a:solidFill>
+                        <a:schemeClr val="tx1"/>
+                      </a:solidFill>
+                      <a:prstDash val="solid"/>
+                      <a:round/>
+                      <a:headEnd type="none" w="med" len="med"/>
+                      <a:tailEnd type="none" w="med" len="med"/>
+                    </a:lnB>
+                    <a:solidFill>
+                      <a:srgbClr val="8FAADC"/>
+                    </a:solidFill>
+                  </a:tcPr>
+                </a:tc>
+                <a:extLst>
+                  <a:ext uri="{0D108BD9-81ED-4DB2-BD59-A6C34878D82A}">
+                    <a16:rowId xmlns:a16="http://schemas.microsoft.com/office/drawing/2014/main" val="1170336215"/>
+                  </a:ext>
+                </a:extLst>
+              </a:tr>
+              <a:tr h="370840">
+                <a:tc>
+                  <a:txBody>
+                    <a:bodyPr/>
+                    <a:lstStyle/>
+                    <a:p>
+                      <a:endParaRPr lang="en-IN" dirty="0"/>
+                    </a:p>
+                  </a:txBody>
+                  <a:tcPr>
+                    <a:lnL w="12700" cap="flat" cmpd="sng" algn="ctr">
+                      <a:solidFill>
+                        <a:schemeClr val="tx1"/>
+                      </a:solidFill>
+                      <a:prstDash val="solid"/>
+                      <a:round/>
+                      <a:headEnd type="none" w="med" len="med"/>
+                      <a:tailEnd type="none" w="med" len="med"/>
+                    </a:lnL>
+                    <a:lnR w="12700" cap="flat" cmpd="sng" algn="ctr">
+                      <a:solidFill>
+                        <a:schemeClr val="tx1"/>
+                      </a:solidFill>
+                      <a:prstDash val="solid"/>
+                      <a:round/>
+                      <a:headEnd type="none" w="med" len="med"/>
+                      <a:tailEnd type="none" w="med" len="med"/>
+                    </a:lnR>
+                    <a:lnT w="12700" cap="flat" cmpd="sng" algn="ctr">
+                      <a:solidFill>
+                        <a:schemeClr val="tx1"/>
+                      </a:solidFill>
+                      <a:prstDash val="solid"/>
+                      <a:round/>
+                      <a:headEnd type="none" w="med" len="med"/>
+                      <a:tailEnd type="none" w="med" len="med"/>
+                    </a:lnT>
+                    <a:lnB w="12700" cap="flat" cmpd="sng" algn="ctr">
+                      <a:solidFill>
+                        <a:schemeClr val="tx1"/>
+                      </a:solidFill>
+                      <a:prstDash val="solid"/>
+                      <a:round/>
+                      <a:headEnd type="none" w="med" len="med"/>
+                      <a:tailEnd type="none" w="med" len="med"/>
+                    </a:lnB>
+                    <a:solidFill>
+                      <a:srgbClr val="8FAADC"/>
+                    </a:solidFill>
+                  </a:tcPr>
+                </a:tc>
+                <a:tc>
+                  <a:txBody>
+                    <a:bodyPr/>
+                    <a:lstStyle/>
+                    <a:p>
+                      <a:endParaRPr lang="en-IN"/>
+                    </a:p>
+                  </a:txBody>
+                  <a:tcPr>
+                    <a:lnL w="12700" cap="flat" cmpd="sng" algn="ctr">
+                      <a:solidFill>
+                        <a:schemeClr val="tx1"/>
+                      </a:solidFill>
+                      <a:prstDash val="solid"/>
+                      <a:round/>
+                      <a:headEnd type="none" w="med" len="med"/>
+                      <a:tailEnd type="none" w="med" len="med"/>
+                    </a:lnL>
+                    <a:lnR w="12700" cap="flat" cmpd="sng" algn="ctr">
+                      <a:solidFill>
+                        <a:schemeClr val="tx1"/>
+                      </a:solidFill>
+                      <a:prstDash val="solid"/>
+                      <a:round/>
+                      <a:headEnd type="none" w="med" len="med"/>
+                      <a:tailEnd type="none" w="med" len="med"/>
+                    </a:lnR>
+                    <a:lnT w="12700" cap="flat" cmpd="sng" algn="ctr">
+                      <a:solidFill>
+                        <a:schemeClr val="tx1"/>
+                      </a:solidFill>
+                      <a:prstDash val="solid"/>
+                      <a:round/>
+                      <a:headEnd type="none" w="med" len="med"/>
+                      <a:tailEnd type="none" w="med" len="med"/>
+                    </a:lnT>
+                    <a:lnB w="12700" cap="flat" cmpd="sng" algn="ctr">
+                      <a:solidFill>
+                        <a:schemeClr val="tx1"/>
+                      </a:solidFill>
+                      <a:prstDash val="solid"/>
+                      <a:round/>
+                      <a:headEnd type="none" w="med" len="med"/>
+                      <a:tailEnd type="none" w="med" len="med"/>
+                    </a:lnB>
+                    <a:solidFill>
+                      <a:srgbClr val="8FAADC"/>
+                    </a:solidFill>
+                  </a:tcPr>
+                </a:tc>
+                <a:tc>
+                  <a:txBody>
+                    <a:bodyPr/>
+                    <a:lstStyle/>
+                    <a:p>
+                      <a:endParaRPr lang="en-IN" dirty="0"/>
+                    </a:p>
+                  </a:txBody>
+                  <a:tcPr>
+                    <a:lnL w="12700" cap="flat" cmpd="sng" algn="ctr">
+                      <a:solidFill>
+                        <a:schemeClr val="tx1"/>
+                      </a:solidFill>
+                      <a:prstDash val="solid"/>
+                      <a:round/>
+                      <a:headEnd type="none" w="med" len="med"/>
+                      <a:tailEnd type="none" w="med" len="med"/>
+                    </a:lnL>
+                    <a:lnR w="12700" cap="flat" cmpd="sng" algn="ctr">
+                      <a:solidFill>
+                        <a:schemeClr val="tx1"/>
+                      </a:solidFill>
+                      <a:prstDash val="solid"/>
+                      <a:round/>
+                      <a:headEnd type="none" w="med" len="med"/>
+                      <a:tailEnd type="none" w="med" len="med"/>
+                    </a:lnR>
+                    <a:lnT w="12700" cap="flat" cmpd="sng" algn="ctr">
+                      <a:solidFill>
+                        <a:schemeClr val="tx1"/>
+                      </a:solidFill>
+                      <a:prstDash val="solid"/>
+                      <a:round/>
+                      <a:headEnd type="none" w="med" len="med"/>
+                      <a:tailEnd type="none" w="med" len="med"/>
+                    </a:lnT>
+                    <a:lnB w="12700" cap="flat" cmpd="sng" algn="ctr">
+                      <a:solidFill>
+                        <a:schemeClr val="tx1"/>
+                      </a:solidFill>
+                      <a:prstDash val="solid"/>
+                      <a:round/>
+                      <a:headEnd type="none" w="med" len="med"/>
+                      <a:tailEnd type="none" w="med" len="med"/>
+                    </a:lnB>
+                    <a:solidFill>
+                      <a:srgbClr val="8FAADC"/>
+                    </a:solidFill>
+                  </a:tcPr>
+                </a:tc>
+                <a:tc>
+                  <a:txBody>
+                    <a:bodyPr/>
+                    <a:lstStyle/>
+                    <a:p>
+                      <a:endParaRPr lang="en-IN"/>
+                    </a:p>
+                  </a:txBody>
+                  <a:tcPr>
+                    <a:lnL w="12700" cap="flat" cmpd="sng" algn="ctr">
+                      <a:solidFill>
+                        <a:schemeClr val="tx1"/>
+                      </a:solidFill>
+                      <a:prstDash val="solid"/>
+                      <a:round/>
+                      <a:headEnd type="none" w="med" len="med"/>
+                      <a:tailEnd type="none" w="med" len="med"/>
+                    </a:lnL>
+                    <a:lnR w="12700" cap="flat" cmpd="sng" algn="ctr">
+                      <a:solidFill>
+                        <a:schemeClr val="tx1"/>
+                      </a:solidFill>
+                      <a:prstDash val="solid"/>
+                      <a:round/>
+                      <a:headEnd type="none" w="med" len="med"/>
+                      <a:tailEnd type="none" w="med" len="med"/>
+                    </a:lnR>
+                    <a:lnT w="12700" cap="flat" cmpd="sng" algn="ctr">
+                      <a:solidFill>
+                        <a:schemeClr val="tx1"/>
+                      </a:solidFill>
+                      <a:prstDash val="solid"/>
+                      <a:round/>
+                      <a:headEnd type="none" w="med" len="med"/>
+                      <a:tailEnd type="none" w="med" len="med"/>
+                    </a:lnT>
+                    <a:lnB w="12700" cap="flat" cmpd="sng" algn="ctr">
+                      <a:solidFill>
+                        <a:schemeClr val="tx1"/>
+                      </a:solidFill>
+                      <a:prstDash val="solid"/>
+                      <a:round/>
+                      <a:headEnd type="none" w="med" len="med"/>
+                      <a:tailEnd type="none" w="med" len="med"/>
+                    </a:lnB>
+                    <a:solidFill>
+                      <a:srgbClr val="8FAADC"/>
+                    </a:solidFill>
+                  </a:tcPr>
+                </a:tc>
+                <a:extLst>
+                  <a:ext uri="{0D108BD9-81ED-4DB2-BD59-A6C34878D82A}">
+                    <a16:rowId xmlns:a16="http://schemas.microsoft.com/office/drawing/2014/main" val="2363680877"/>
+                  </a:ext>
+                </a:extLst>
+              </a:tr>
+              <a:tr h="370840">
+                <a:tc>
+                  <a:txBody>
+                    <a:bodyPr/>
+                    <a:lstStyle/>
+                    <a:p>
+                      <a:endParaRPr lang="en-IN"/>
+                    </a:p>
+                  </a:txBody>
+                  <a:tcPr>
+                    <a:lnL w="12700" cap="flat" cmpd="sng" algn="ctr">
+                      <a:solidFill>
+                        <a:schemeClr val="tx1"/>
+                      </a:solidFill>
+                      <a:prstDash val="solid"/>
+                      <a:round/>
+                      <a:headEnd type="none" w="med" len="med"/>
+                      <a:tailEnd type="none" w="med" len="med"/>
+                    </a:lnL>
+                    <a:lnR w="12700" cap="flat" cmpd="sng" algn="ctr">
+                      <a:solidFill>
+                        <a:schemeClr val="tx1"/>
+                      </a:solidFill>
+                      <a:prstDash val="solid"/>
+                      <a:round/>
+                      <a:headEnd type="none" w="med" len="med"/>
+                      <a:tailEnd type="none" w="med" len="med"/>
+                    </a:lnR>
+                    <a:lnT w="12700" cap="flat" cmpd="sng" algn="ctr">
+                      <a:solidFill>
+                        <a:schemeClr val="tx1"/>
+                      </a:solidFill>
+                      <a:prstDash val="solid"/>
+                      <a:round/>
+                      <a:headEnd type="none" w="med" len="med"/>
+                      <a:tailEnd type="none" w="med" len="med"/>
+                    </a:lnT>
+                    <a:lnB w="12700" cap="flat" cmpd="sng" algn="ctr">
+                      <a:solidFill>
+                        <a:schemeClr val="tx1"/>
+                      </a:solidFill>
+                      <a:prstDash val="solid"/>
+                      <a:round/>
+                      <a:headEnd type="none" w="med" len="med"/>
+                      <a:tailEnd type="none" w="med" len="med"/>
+                    </a:lnB>
+                    <a:solidFill>
+                      <a:srgbClr val="8FAADC"/>
+                    </a:solidFill>
+                  </a:tcPr>
+                </a:tc>
+                <a:tc>
+                  <a:txBody>
+                    <a:bodyPr/>
+                    <a:lstStyle/>
+                    <a:p>
+                      <a:endParaRPr lang="en-IN"/>
+                    </a:p>
+                  </a:txBody>
+                  <a:tcPr>
+                    <a:lnL w="12700" cap="flat" cmpd="sng" algn="ctr">
+                      <a:solidFill>
+                        <a:schemeClr val="tx1"/>
+                      </a:solidFill>
+                      <a:prstDash val="solid"/>
+                      <a:round/>
+                      <a:headEnd type="none" w="med" len="med"/>
+                      <a:tailEnd type="none" w="med" len="med"/>
+                    </a:lnL>
+                    <a:lnR w="12700" cap="flat" cmpd="sng" algn="ctr">
+                      <a:solidFill>
+                        <a:schemeClr val="tx1"/>
+                      </a:solidFill>
+                      <a:prstDash val="solid"/>
+                      <a:round/>
+                      <a:headEnd type="none" w="med" len="med"/>
+                      <a:tailEnd type="none" w="med" len="med"/>
+                    </a:lnR>
+                    <a:lnT w="12700" cap="flat" cmpd="sng" algn="ctr">
+                      <a:solidFill>
+                        <a:schemeClr val="tx1"/>
+                      </a:solidFill>
+                      <a:prstDash val="solid"/>
+                      <a:round/>
+                      <a:headEnd type="none" w="med" len="med"/>
+                      <a:tailEnd type="none" w="med" len="med"/>
+                    </a:lnT>
+                    <a:lnB w="12700" cap="flat" cmpd="sng" algn="ctr">
+                      <a:solidFill>
+                        <a:schemeClr val="tx1"/>
+                      </a:solidFill>
+                      <a:prstDash val="solid"/>
+                      <a:round/>
+                      <a:headEnd type="none" w="med" len="med"/>
+                      <a:tailEnd type="none" w="med" len="med"/>
+                    </a:lnB>
+                    <a:solidFill>
+                      <a:srgbClr val="8FAADC"/>
+                    </a:solidFill>
+                  </a:tcPr>
+                </a:tc>
+                <a:tc>
+                  <a:txBody>
+                    <a:bodyPr/>
+                    <a:lstStyle/>
+                    <a:p>
+                      <a:endParaRPr lang="en-IN" dirty="0"/>
+                    </a:p>
+                  </a:txBody>
+                  <a:tcPr>
+                    <a:lnL w="12700" cap="flat" cmpd="sng" algn="ctr">
+                      <a:solidFill>
+                        <a:schemeClr val="tx1"/>
+                      </a:solidFill>
+                      <a:prstDash val="solid"/>
+                      <a:round/>
+                      <a:headEnd type="none" w="med" len="med"/>
+                      <a:tailEnd type="none" w="med" len="med"/>
+                    </a:lnL>
+                    <a:lnR w="12700" cap="flat" cmpd="sng" algn="ctr">
+                      <a:solidFill>
+                        <a:schemeClr val="tx1"/>
+                      </a:solidFill>
+                      <a:prstDash val="solid"/>
+                      <a:round/>
+                      <a:headEnd type="none" w="med" len="med"/>
+                      <a:tailEnd type="none" w="med" len="med"/>
+                    </a:lnR>
+                    <a:lnT w="12700" cap="flat" cmpd="sng" algn="ctr">
+                      <a:solidFill>
+                        <a:schemeClr val="tx1"/>
+                      </a:solidFill>
+                      <a:prstDash val="solid"/>
+                      <a:round/>
+                      <a:headEnd type="none" w="med" len="med"/>
+                      <a:tailEnd type="none" w="med" len="med"/>
+                    </a:lnT>
+                    <a:lnB w="12700" cap="flat" cmpd="sng" algn="ctr">
+                      <a:solidFill>
+                        <a:schemeClr val="tx1"/>
+                      </a:solidFill>
+                      <a:prstDash val="solid"/>
+                      <a:round/>
+                      <a:headEnd type="none" w="med" len="med"/>
+                      <a:tailEnd type="none" w="med" len="med"/>
+                    </a:lnB>
+                    <a:solidFill>
+                      <a:srgbClr val="8FAADC"/>
+                    </a:solidFill>
+                  </a:tcPr>
+                </a:tc>
+                <a:tc>
+                  <a:txBody>
+                    <a:bodyPr/>
+                    <a:lstStyle/>
+                    <a:p>
+                      <a:endParaRPr lang="en-IN" dirty="0"/>
+                    </a:p>
+                  </a:txBody>
+                  <a:tcPr>
+                    <a:lnL w="12700" cap="flat" cmpd="sng" algn="ctr">
+                      <a:solidFill>
+                        <a:schemeClr val="tx1"/>
+                      </a:solidFill>
+                      <a:prstDash val="solid"/>
+                      <a:round/>
+                      <a:headEnd type="none" w="med" len="med"/>
+                      <a:tailEnd type="none" w="med" len="med"/>
+                    </a:lnL>
+                    <a:lnR w="12700" cap="flat" cmpd="sng" algn="ctr">
+                      <a:solidFill>
+                        <a:schemeClr val="tx1"/>
+                      </a:solidFill>
+                      <a:prstDash val="solid"/>
+                      <a:round/>
+                      <a:headEnd type="none" w="med" len="med"/>
+                      <a:tailEnd type="none" w="med" len="med"/>
+                    </a:lnR>
+                    <a:lnT w="12700" cap="flat" cmpd="sng" algn="ctr">
+                      <a:solidFill>
+                        <a:schemeClr val="tx1"/>
+                      </a:solidFill>
+                      <a:prstDash val="solid"/>
+                      <a:round/>
+                      <a:headEnd type="none" w="med" len="med"/>
+                      <a:tailEnd type="none" w="med" len="med"/>
+                    </a:lnT>
+                    <a:lnB w="12700" cap="flat" cmpd="sng" algn="ctr">
+                      <a:solidFill>
+                        <a:schemeClr val="tx1"/>
+                      </a:solidFill>
+                      <a:prstDash val="solid"/>
+                      <a:round/>
+                      <a:headEnd type="none" w="med" len="med"/>
+                      <a:tailEnd type="none" w="med" len="med"/>
+                    </a:lnB>
+                    <a:solidFill>
+                      <a:srgbClr val="8FAADC"/>
+                    </a:solidFill>
+                  </a:tcPr>
+                </a:tc>
+                <a:extLst>
+                  <a:ext uri="{0D108BD9-81ED-4DB2-BD59-A6C34878D82A}">
+                    <a16:rowId xmlns:a16="http://schemas.microsoft.com/office/drawing/2014/main" val="2031315940"/>
+                  </a:ext>
+                </a:extLst>
+              </a:tr>
+              <a:tr h="370840">
+                <a:tc>
+                  <a:txBody>
+                    <a:bodyPr/>
+                    <a:lstStyle/>
+                    <a:p>
+                      <a:endParaRPr lang="en-IN"/>
+                    </a:p>
+                  </a:txBody>
+                  <a:tcPr>
+                    <a:lnL w="12700" cap="flat" cmpd="sng" algn="ctr">
+                      <a:solidFill>
+                        <a:schemeClr val="tx1"/>
+                      </a:solidFill>
+                      <a:prstDash val="solid"/>
+                      <a:round/>
+                      <a:headEnd type="none" w="med" len="med"/>
+                      <a:tailEnd type="none" w="med" len="med"/>
+                    </a:lnL>
+                    <a:lnR w="12700" cap="flat" cmpd="sng" algn="ctr">
+                      <a:solidFill>
+                        <a:schemeClr val="tx1"/>
+                      </a:solidFill>
+                      <a:prstDash val="solid"/>
+                      <a:round/>
+                      <a:headEnd type="none" w="med" len="med"/>
+                      <a:tailEnd type="none" w="med" len="med"/>
+                    </a:lnR>
+                    <a:lnT w="12700" cap="flat" cmpd="sng" algn="ctr">
+                      <a:solidFill>
+                        <a:schemeClr val="tx1"/>
+                      </a:solidFill>
+                      <a:prstDash val="solid"/>
+                      <a:round/>
+                      <a:headEnd type="none" w="med" len="med"/>
+                      <a:tailEnd type="none" w="med" len="med"/>
+                    </a:lnT>
+                    <a:lnB w="12700" cap="flat" cmpd="sng" algn="ctr">
+                      <a:solidFill>
+                        <a:schemeClr val="tx1"/>
+                      </a:solidFill>
+                      <a:prstDash val="solid"/>
+                      <a:round/>
+                      <a:headEnd type="none" w="med" len="med"/>
+                      <a:tailEnd type="none" w="med" len="med"/>
+                    </a:lnB>
+                    <a:solidFill>
+                      <a:srgbClr val="8FAADC"/>
+                    </a:solidFill>
+                  </a:tcPr>
+                </a:tc>
+                <a:tc>
+                  <a:txBody>
+                    <a:bodyPr/>
+                    <a:lstStyle/>
+                    <a:p>
+                      <a:endParaRPr lang="en-IN"/>
+                    </a:p>
+                  </a:txBody>
+                  <a:tcPr>
+                    <a:lnL w="12700" cap="flat" cmpd="sng" algn="ctr">
+                      <a:solidFill>
+                        <a:schemeClr val="tx1"/>
+                      </a:solidFill>
+                      <a:prstDash val="solid"/>
+                      <a:round/>
+                      <a:headEnd type="none" w="med" len="med"/>
+                      <a:tailEnd type="none" w="med" len="med"/>
+                    </a:lnL>
+                    <a:lnR w="12700" cap="flat" cmpd="sng" algn="ctr">
+                      <a:solidFill>
+                        <a:schemeClr val="tx1"/>
+                      </a:solidFill>
+                      <a:prstDash val="solid"/>
+                      <a:round/>
+                      <a:headEnd type="none" w="med" len="med"/>
+                      <a:tailEnd type="none" w="med" len="med"/>
+                    </a:lnR>
+                    <a:lnT w="12700" cap="flat" cmpd="sng" algn="ctr">
+                      <a:solidFill>
+                        <a:schemeClr val="tx1"/>
+                      </a:solidFill>
+                      <a:prstDash val="solid"/>
+                      <a:round/>
+                      <a:headEnd type="none" w="med" len="med"/>
+                      <a:tailEnd type="none" w="med" len="med"/>
+                    </a:lnT>
+                    <a:lnB w="12700" cap="flat" cmpd="sng" algn="ctr">
+                      <a:solidFill>
+                        <a:schemeClr val="tx1"/>
+                      </a:solidFill>
+                      <a:prstDash val="solid"/>
+                      <a:round/>
+                      <a:headEnd type="none" w="med" len="med"/>
+                      <a:tailEnd type="none" w="med" len="med"/>
+                    </a:lnB>
+                    <a:solidFill>
+                      <a:srgbClr val="8FAADC"/>
+                    </a:solidFill>
+                  </a:tcPr>
+                </a:tc>
+                <a:tc>
+                  <a:txBody>
+                    <a:bodyPr/>
+                    <a:lstStyle/>
+                    <a:p>
+                      <a:endParaRPr lang="en-IN"/>
+                    </a:p>
+                  </a:txBody>
+                  <a:tcPr>
+                    <a:lnL w="12700" cap="flat" cmpd="sng" algn="ctr">
+                      <a:solidFill>
+                        <a:schemeClr val="tx1"/>
+                      </a:solidFill>
+                      <a:prstDash val="solid"/>
+                      <a:round/>
+                      <a:headEnd type="none" w="med" len="med"/>
+                      <a:tailEnd type="none" w="med" len="med"/>
+                    </a:lnL>
+                    <a:lnR w="12700" cap="flat" cmpd="sng" algn="ctr">
+                      <a:solidFill>
+                        <a:schemeClr val="tx1"/>
+                      </a:solidFill>
+                      <a:prstDash val="solid"/>
+                      <a:round/>
+                      <a:headEnd type="none" w="med" len="med"/>
+                      <a:tailEnd type="none" w="med" len="med"/>
+                    </a:lnR>
+                    <a:lnT w="12700" cap="flat" cmpd="sng" algn="ctr">
+                      <a:solidFill>
+                        <a:schemeClr val="tx1"/>
+                      </a:solidFill>
+                      <a:prstDash val="solid"/>
+                      <a:round/>
+                      <a:headEnd type="none" w="med" len="med"/>
+                      <a:tailEnd type="none" w="med" len="med"/>
+                    </a:lnT>
+                    <a:lnB w="12700" cap="flat" cmpd="sng" algn="ctr">
+                      <a:solidFill>
+                        <a:schemeClr val="tx1"/>
+                      </a:solidFill>
+                      <a:prstDash val="solid"/>
+                      <a:round/>
+                      <a:headEnd type="none" w="med" len="med"/>
+                      <a:tailEnd type="none" w="med" len="med"/>
+                    </a:lnB>
+                    <a:solidFill>
+                      <a:srgbClr val="8FAADC"/>
+                    </a:solidFill>
+                  </a:tcPr>
+                </a:tc>
+                <a:tc>
+                  <a:txBody>
+                    <a:bodyPr/>
+                    <a:lstStyle/>
+                    <a:p>
+                      <a:endParaRPr lang="en-IN" dirty="0"/>
+                    </a:p>
+                  </a:txBody>
+                  <a:tcPr>
+                    <a:lnL w="12700" cap="flat" cmpd="sng" algn="ctr">
+                      <a:solidFill>
+                        <a:schemeClr val="tx1"/>
+                      </a:solidFill>
+                      <a:prstDash val="solid"/>
+                      <a:round/>
+                      <a:headEnd type="none" w="med" len="med"/>
+                      <a:tailEnd type="none" w="med" len="med"/>
+                    </a:lnL>
+                    <a:lnR w="12700" cap="flat" cmpd="sng" algn="ctr">
+                      <a:solidFill>
+                        <a:schemeClr val="tx1"/>
+                      </a:solidFill>
+                      <a:prstDash val="solid"/>
+                      <a:round/>
+                      <a:headEnd type="none" w="med" len="med"/>
+                      <a:tailEnd type="none" w="med" len="med"/>
+                    </a:lnR>
+                    <a:lnT w="12700" cap="flat" cmpd="sng" algn="ctr">
+                      <a:solidFill>
+                        <a:schemeClr val="tx1"/>
+                      </a:solidFill>
+                      <a:prstDash val="solid"/>
+                      <a:round/>
+                      <a:headEnd type="none" w="med" len="med"/>
+                      <a:tailEnd type="none" w="med" len="med"/>
+                    </a:lnT>
+                    <a:lnB w="12700" cap="flat" cmpd="sng" algn="ctr">
+                      <a:solidFill>
+                        <a:schemeClr val="tx1"/>
+                      </a:solidFill>
+                      <a:prstDash val="solid"/>
+                      <a:round/>
+                      <a:headEnd type="none" w="med" len="med"/>
+                      <a:tailEnd type="none" w="med" len="med"/>
+                    </a:lnB>
+                    <a:solidFill>
+                      <a:srgbClr val="8FAADC"/>
+                    </a:solidFill>
+                  </a:tcPr>
+                </a:tc>
+                <a:extLst>
+                  <a:ext uri="{0D108BD9-81ED-4DB2-BD59-A6C34878D82A}">
+                    <a16:rowId xmlns:a16="http://schemas.microsoft.com/office/drawing/2014/main" val="992374018"/>
+                  </a:ext>
+                </a:extLst>
+              </a:tr>
+            </a:tbl>
+          </a:graphicData>
+        </a:graphic>
+      </p:graphicFrame>
     </p:spTree>
     <p:extLst>
       <p:ext uri="{BB962C8B-B14F-4D97-AF65-F5344CB8AC3E}">
-        <p14:creationId xmlns:p14="http://schemas.microsoft.com/office/powerpoint/2010/main" val="3081722400"/>
+        <p14:creationId xmlns:p14="http://schemas.microsoft.com/office/powerpoint/2010/main" val="2150309207"/>
       </p:ext>
     </p:extLst>
   </p:cSld>

--- a/documentation/Frontend mockup.pptx
+++ b/documentation/Frontend mockup.pptx
@@ -11,6 +11,7 @@
     <p:sldId id="261" r:id="rId5"/>
     <p:sldId id="262" r:id="rId6"/>
     <p:sldId id="264" r:id="rId7"/>
+    <p:sldId id="265" r:id="rId8"/>
   </p:sldIdLst>
   <p:sldSz cx="12192000" cy="6858000"/>
   <p:notesSz cx="6858000" cy="9144000"/>
@@ -277,7 +278,7 @@
           <a:p>
             <a:fld id="{005069A1-986F-417B-B4C2-5BD1BF3375D4}" type="datetimeFigureOut">
               <a:rPr lang="en-IN" smtClean="0"/>
-              <a:t>09-06-2026</a:t>
+              <a:t>11-06-2026</a:t>
             </a:fld>
             <a:endParaRPr lang="en-IN"/>
           </a:p>
@@ -477,7 +478,7 @@
           <a:p>
             <a:fld id="{005069A1-986F-417B-B4C2-5BD1BF3375D4}" type="datetimeFigureOut">
               <a:rPr lang="en-IN" smtClean="0"/>
-              <a:t>09-06-2026</a:t>
+              <a:t>11-06-2026</a:t>
             </a:fld>
             <a:endParaRPr lang="en-IN"/>
           </a:p>
@@ -687,7 +688,7 @@
           <a:p>
             <a:fld id="{005069A1-986F-417B-B4C2-5BD1BF3375D4}" type="datetimeFigureOut">
               <a:rPr lang="en-IN" smtClean="0"/>
-              <a:t>09-06-2026</a:t>
+              <a:t>11-06-2026</a:t>
             </a:fld>
             <a:endParaRPr lang="en-IN"/>
           </a:p>
@@ -887,7 +888,7 @@
           <a:p>
             <a:fld id="{005069A1-986F-417B-B4C2-5BD1BF3375D4}" type="datetimeFigureOut">
               <a:rPr lang="en-IN" smtClean="0"/>
-              <a:t>09-06-2026</a:t>
+              <a:t>11-06-2026</a:t>
             </a:fld>
             <a:endParaRPr lang="en-IN"/>
           </a:p>
@@ -1163,7 +1164,7 @@
           <a:p>
             <a:fld id="{005069A1-986F-417B-B4C2-5BD1BF3375D4}" type="datetimeFigureOut">
               <a:rPr lang="en-IN" smtClean="0"/>
-              <a:t>09-06-2026</a:t>
+              <a:t>11-06-2026</a:t>
             </a:fld>
             <a:endParaRPr lang="en-IN"/>
           </a:p>
@@ -1431,7 +1432,7 @@
           <a:p>
             <a:fld id="{005069A1-986F-417B-B4C2-5BD1BF3375D4}" type="datetimeFigureOut">
               <a:rPr lang="en-IN" smtClean="0"/>
-              <a:t>09-06-2026</a:t>
+              <a:t>11-06-2026</a:t>
             </a:fld>
             <a:endParaRPr lang="en-IN"/>
           </a:p>
@@ -1846,7 +1847,7 @@
           <a:p>
             <a:fld id="{005069A1-986F-417B-B4C2-5BD1BF3375D4}" type="datetimeFigureOut">
               <a:rPr lang="en-IN" smtClean="0"/>
-              <a:t>09-06-2026</a:t>
+              <a:t>11-06-2026</a:t>
             </a:fld>
             <a:endParaRPr lang="en-IN"/>
           </a:p>
@@ -1988,7 +1989,7 @@
           <a:p>
             <a:fld id="{005069A1-986F-417B-B4C2-5BD1BF3375D4}" type="datetimeFigureOut">
               <a:rPr lang="en-IN" smtClean="0"/>
-              <a:t>09-06-2026</a:t>
+              <a:t>11-06-2026</a:t>
             </a:fld>
             <a:endParaRPr lang="en-IN"/>
           </a:p>
@@ -2101,7 +2102,7 @@
           <a:p>
             <a:fld id="{005069A1-986F-417B-B4C2-5BD1BF3375D4}" type="datetimeFigureOut">
               <a:rPr lang="en-IN" smtClean="0"/>
-              <a:t>09-06-2026</a:t>
+              <a:t>11-06-2026</a:t>
             </a:fld>
             <a:endParaRPr lang="en-IN"/>
           </a:p>
@@ -2414,7 +2415,7 @@
           <a:p>
             <a:fld id="{005069A1-986F-417B-B4C2-5BD1BF3375D4}" type="datetimeFigureOut">
               <a:rPr lang="en-IN" smtClean="0"/>
-              <a:t>09-06-2026</a:t>
+              <a:t>11-06-2026</a:t>
             </a:fld>
             <a:endParaRPr lang="en-IN"/>
           </a:p>
@@ -2703,7 +2704,7 @@
           <a:p>
             <a:fld id="{005069A1-986F-417B-B4C2-5BD1BF3375D4}" type="datetimeFigureOut">
               <a:rPr lang="en-IN" smtClean="0"/>
-              <a:t>09-06-2026</a:t>
+              <a:t>11-06-2026</a:t>
             </a:fld>
             <a:endParaRPr lang="en-IN"/>
           </a:p>
@@ -2946,7 +2947,7 @@
           <a:p>
             <a:fld id="{005069A1-986F-417B-B4C2-5BD1BF3375D4}" type="datetimeFigureOut">
               <a:rPr lang="en-IN" smtClean="0"/>
-              <a:t>09-06-2026</a:t>
+              <a:t>11-06-2026</a:t>
             </a:fld>
             <a:endParaRPr lang="en-IN"/>
           </a:p>
@@ -4083,7 +4084,7 @@
           <p:nvPr>
             <p:extLst>
               <p:ext uri="{D42A27DB-BD31-4B8C-83A1-F6EECF244321}">
-                <p14:modId xmlns:p14="http://schemas.microsoft.com/office/powerpoint/2010/main" val="2457765808"/>
+                <p14:modId xmlns:p14="http://schemas.microsoft.com/office/powerpoint/2010/main" val="3360020464"/>
               </p:ext>
             </p:extLst>
           </p:nvPr>
@@ -29621,14 +29622,14 @@
           <p:nvPr>
             <p:extLst>
               <p:ext uri="{D42A27DB-BD31-4B8C-83A1-F6EECF244321}">
-                <p14:modId xmlns:p14="http://schemas.microsoft.com/office/powerpoint/2010/main" val="4238794989"/>
+                <p14:modId xmlns:p14="http://schemas.microsoft.com/office/powerpoint/2010/main" val="1675182798"/>
               </p:ext>
             </p:extLst>
           </p:nvPr>
         </p:nvGraphicFramePr>
         <p:xfrm>
           <a:off x="105509" y="451046"/>
-          <a:ext cx="2409090" cy="1463040"/>
+          <a:ext cx="2409090" cy="1828800"/>
         </p:xfrm>
         <a:graphic>
           <a:graphicData uri="http://schemas.openxmlformats.org/drawingml/2006/table">
@@ -29938,16 +29939,2567 @@
                   </a:ext>
                 </a:extLst>
               </a:tr>
+              <a:tr h="327514">
+                <a:tc>
+                  <a:txBody>
+                    <a:bodyPr/>
+                    <a:lstStyle/>
+                    <a:p>
+                      <a:r>
+                        <a:rPr lang="en-US" dirty="0"/>
+                        <a:t>Payslip</a:t>
+                      </a:r>
+                      <a:endParaRPr lang="en-IN" dirty="0"/>
+                    </a:p>
+                  </a:txBody>
+                  <a:tcPr>
+                    <a:lnL w="12700" cap="flat" cmpd="sng" algn="ctr">
+                      <a:solidFill>
+                        <a:schemeClr val="tx1"/>
+                      </a:solidFill>
+                      <a:prstDash val="solid"/>
+                      <a:round/>
+                      <a:headEnd type="none" w="med" len="med"/>
+                      <a:tailEnd type="none" w="med" len="med"/>
+                    </a:lnL>
+                    <a:lnR w="12700" cap="flat" cmpd="sng" algn="ctr">
+                      <a:solidFill>
+                        <a:schemeClr val="tx1"/>
+                      </a:solidFill>
+                      <a:prstDash val="solid"/>
+                      <a:round/>
+                      <a:headEnd type="none" w="med" len="med"/>
+                      <a:tailEnd type="none" w="med" len="med"/>
+                    </a:lnR>
+                    <a:lnT w="12700" cap="flat" cmpd="sng" algn="ctr">
+                      <a:solidFill>
+                        <a:schemeClr val="tx1"/>
+                      </a:solidFill>
+                      <a:prstDash val="solid"/>
+                      <a:round/>
+                      <a:headEnd type="none" w="med" len="med"/>
+                      <a:tailEnd type="none" w="med" len="med"/>
+                    </a:lnT>
+                    <a:lnB w="12700" cap="flat" cmpd="sng" algn="ctr">
+                      <a:solidFill>
+                        <a:schemeClr val="tx1"/>
+                      </a:solidFill>
+                      <a:prstDash val="solid"/>
+                      <a:round/>
+                      <a:headEnd type="none" w="med" len="med"/>
+                      <a:tailEnd type="none" w="med" len="med"/>
+                    </a:lnB>
+                    <a:lnTlToBr w="12700" cmpd="sng">
+                      <a:noFill/>
+                      <a:prstDash val="solid"/>
+                    </a:lnTlToBr>
+                    <a:lnBlToTr w="12700" cmpd="sng">
+                      <a:noFill/>
+                      <a:prstDash val="solid"/>
+                    </a:lnBlToTr>
+                    <a:solidFill>
+                      <a:srgbClr val="FF6E02"/>
+                    </a:solidFill>
+                  </a:tcPr>
+                </a:tc>
+                <a:extLst>
+                  <a:ext uri="{0D108BD9-81ED-4DB2-BD59-A6C34878D82A}">
+                    <a16:rowId xmlns:a16="http://schemas.microsoft.com/office/drawing/2014/main" val="1287688085"/>
+                  </a:ext>
+                </a:extLst>
+              </a:tr>
+            </a:tbl>
+          </a:graphicData>
+        </a:graphic>
+      </p:graphicFrame>
+      <p:graphicFrame>
+        <p:nvGraphicFramePr>
+          <p:cNvPr id="24" name="Table 23">
+            <a:extLst>
+              <a:ext uri="{FF2B5EF4-FFF2-40B4-BE49-F238E27FC236}">
+                <a16:creationId xmlns:a16="http://schemas.microsoft.com/office/drawing/2014/main" id="{FAB34855-CC85-E1F9-D03D-1328CBBA8744}"/>
+              </a:ext>
+            </a:extLst>
+          </p:cNvPr>
+          <p:cNvGraphicFramePr>
+            <a:graphicFrameLocks noGrp="1"/>
+          </p:cNvGraphicFramePr>
+          <p:nvPr>
+            <p:extLst>
+              <p:ext uri="{D42A27DB-BD31-4B8C-83A1-F6EECF244321}">
+                <p14:modId xmlns:p14="http://schemas.microsoft.com/office/powerpoint/2010/main" val="1144644504"/>
+              </p:ext>
+            </p:extLst>
+          </p:nvPr>
+        </p:nvGraphicFramePr>
+        <p:xfrm>
+          <a:off x="2980596" y="1914086"/>
+          <a:ext cx="5536224" cy="3606800"/>
+        </p:xfrm>
+        <a:graphic>
+          <a:graphicData uri="http://schemas.openxmlformats.org/drawingml/2006/table">
+            <a:tbl>
+              <a:tblPr firstRow="1" bandRow="1">
+                <a:tableStyleId>{2D5ABB26-0587-4C30-8999-92F81FD0307C}</a:tableStyleId>
+              </a:tblPr>
+              <a:tblGrid>
+                <a:gridCol w="685796">
+                  <a:extLst>
+                    <a:ext uri="{9D8B030D-6E8A-4147-A177-3AD203B41FA5}">
+                      <a16:colId xmlns:a16="http://schemas.microsoft.com/office/drawing/2014/main" val="4048085484"/>
+                    </a:ext>
+                  </a:extLst>
+                </a:gridCol>
+                <a:gridCol w="1011116">
+                  <a:extLst>
+                    <a:ext uri="{9D8B030D-6E8A-4147-A177-3AD203B41FA5}">
+                      <a16:colId xmlns:a16="http://schemas.microsoft.com/office/drawing/2014/main" val="519203008"/>
+                    </a:ext>
+                  </a:extLst>
+                </a:gridCol>
+                <a:gridCol w="1204546">
+                  <a:extLst>
+                    <a:ext uri="{9D8B030D-6E8A-4147-A177-3AD203B41FA5}">
+                      <a16:colId xmlns:a16="http://schemas.microsoft.com/office/drawing/2014/main" val="2182870733"/>
+                    </a:ext>
+                  </a:extLst>
+                </a:gridCol>
+                <a:gridCol w="1422159">
+                  <a:extLst>
+                    <a:ext uri="{9D8B030D-6E8A-4147-A177-3AD203B41FA5}">
+                      <a16:colId xmlns:a16="http://schemas.microsoft.com/office/drawing/2014/main" val="2948238244"/>
+                    </a:ext>
+                  </a:extLst>
+                </a:gridCol>
+                <a:gridCol w="1212607">
+                  <a:extLst>
+                    <a:ext uri="{9D8B030D-6E8A-4147-A177-3AD203B41FA5}">
+                      <a16:colId xmlns:a16="http://schemas.microsoft.com/office/drawing/2014/main" val="1499066006"/>
+                    </a:ext>
+                  </a:extLst>
+                </a:gridCol>
+              </a:tblGrid>
+              <a:tr h="370840">
+                <a:tc>
+                  <a:txBody>
+                    <a:bodyPr/>
+                    <a:lstStyle/>
+                    <a:p>
+                      <a:r>
+                        <a:rPr lang="en-US" dirty="0"/>
+                        <a:t>Sr. No.</a:t>
+                      </a:r>
+                      <a:endParaRPr lang="en-IN" dirty="0"/>
+                    </a:p>
+                  </a:txBody>
+                  <a:tcPr>
+                    <a:lnL w="12700" cap="flat" cmpd="sng" algn="ctr">
+                      <a:solidFill>
+                        <a:schemeClr val="tx1"/>
+                      </a:solidFill>
+                      <a:prstDash val="solid"/>
+                      <a:round/>
+                      <a:headEnd type="none" w="med" len="med"/>
+                      <a:tailEnd type="none" w="med" len="med"/>
+                    </a:lnL>
+                    <a:lnR w="12700" cap="flat" cmpd="sng" algn="ctr">
+                      <a:solidFill>
+                        <a:schemeClr val="tx1"/>
+                      </a:solidFill>
+                      <a:prstDash val="solid"/>
+                      <a:round/>
+                      <a:headEnd type="none" w="med" len="med"/>
+                      <a:tailEnd type="none" w="med" len="med"/>
+                    </a:lnR>
+                    <a:lnT w="12700" cap="flat" cmpd="sng" algn="ctr">
+                      <a:solidFill>
+                        <a:schemeClr val="tx1"/>
+                      </a:solidFill>
+                      <a:prstDash val="solid"/>
+                      <a:round/>
+                      <a:headEnd type="none" w="med" len="med"/>
+                      <a:tailEnd type="none" w="med" len="med"/>
+                    </a:lnT>
+                    <a:lnB w="12700" cap="flat" cmpd="sng" algn="ctr">
+                      <a:solidFill>
+                        <a:schemeClr val="tx1"/>
+                      </a:solidFill>
+                      <a:prstDash val="solid"/>
+                      <a:round/>
+                      <a:headEnd type="none" w="med" len="med"/>
+                      <a:tailEnd type="none" w="med" len="med"/>
+                    </a:lnB>
+                    <a:solidFill>
+                      <a:schemeClr val="accent1">
+                        <a:lumMod val="75000"/>
+                      </a:schemeClr>
+                    </a:solidFill>
+                  </a:tcPr>
+                </a:tc>
+                <a:tc>
+                  <a:txBody>
+                    <a:bodyPr/>
+                    <a:lstStyle/>
+                    <a:p>
+                      <a:r>
+                        <a:rPr lang="en-US" dirty="0"/>
+                        <a:t>Name </a:t>
+                      </a:r>
+                      <a:r>
+                        <a:rPr kumimoji="0" lang="en-US" sz="1100" b="0" i="0" u="none" strike="noStrike" kern="1200" cap="none" spc="0" normalizeH="0" baseline="0" noProof="0" dirty="0">
+                          <a:ln>
+                            <a:noFill/>
+                          </a:ln>
+                          <a:solidFill>
+                            <a:prstClr val="black"/>
+                          </a:solidFill>
+                          <a:effectLst/>
+                          <a:uLnTx/>
+                          <a:uFillTx/>
+                          <a:latin typeface="+mn-lt"/>
+                          <a:ea typeface="+mn-ea"/>
+                          <a:cs typeface="+mn-cs"/>
+                        </a:rPr>
+                        <a:t>▼</a:t>
+                      </a:r>
+                      <a:endParaRPr lang="en-IN" dirty="0"/>
+                    </a:p>
+                  </a:txBody>
+                  <a:tcPr>
+                    <a:lnL w="12700" cap="flat" cmpd="sng" algn="ctr">
+                      <a:solidFill>
+                        <a:schemeClr val="tx1"/>
+                      </a:solidFill>
+                      <a:prstDash val="solid"/>
+                      <a:round/>
+                      <a:headEnd type="none" w="med" len="med"/>
+                      <a:tailEnd type="none" w="med" len="med"/>
+                    </a:lnL>
+                    <a:lnR w="12700" cap="flat" cmpd="sng" algn="ctr">
+                      <a:solidFill>
+                        <a:schemeClr val="tx1"/>
+                      </a:solidFill>
+                      <a:prstDash val="solid"/>
+                      <a:round/>
+                      <a:headEnd type="none" w="med" len="med"/>
+                      <a:tailEnd type="none" w="med" len="med"/>
+                    </a:lnR>
+                    <a:lnT w="12700" cap="flat" cmpd="sng" algn="ctr">
+                      <a:solidFill>
+                        <a:schemeClr val="tx1"/>
+                      </a:solidFill>
+                      <a:prstDash val="solid"/>
+                      <a:round/>
+                      <a:headEnd type="none" w="med" len="med"/>
+                      <a:tailEnd type="none" w="med" len="med"/>
+                    </a:lnT>
+                    <a:lnB w="12700" cap="flat" cmpd="sng" algn="ctr">
+                      <a:solidFill>
+                        <a:schemeClr val="tx1"/>
+                      </a:solidFill>
+                      <a:prstDash val="solid"/>
+                      <a:round/>
+                      <a:headEnd type="none" w="med" len="med"/>
+                      <a:tailEnd type="none" w="med" len="med"/>
+                    </a:lnB>
+                    <a:solidFill>
+                      <a:schemeClr val="accent1">
+                        <a:lumMod val="75000"/>
+                      </a:schemeClr>
+                    </a:solidFill>
+                  </a:tcPr>
+                </a:tc>
+                <a:tc>
+                  <a:txBody>
+                    <a:bodyPr/>
+                    <a:lstStyle/>
+                    <a:p>
+                      <a:r>
+                        <a:rPr lang="en-US" dirty="0"/>
+                        <a:t>Position </a:t>
+                      </a:r>
+                      <a:r>
+                        <a:rPr kumimoji="0" lang="en-US" sz="1100" b="0" i="0" u="none" strike="noStrike" kern="1200" cap="none" spc="0" normalizeH="0" baseline="0" noProof="0" dirty="0">
+                          <a:ln>
+                            <a:noFill/>
+                          </a:ln>
+                          <a:solidFill>
+                            <a:prstClr val="black"/>
+                          </a:solidFill>
+                          <a:effectLst/>
+                          <a:uLnTx/>
+                          <a:uFillTx/>
+                          <a:latin typeface="+mn-lt"/>
+                          <a:ea typeface="+mn-ea"/>
+                          <a:cs typeface="+mn-cs"/>
+                        </a:rPr>
+                        <a:t>▼</a:t>
+                      </a:r>
+                      <a:endParaRPr lang="en-IN" dirty="0"/>
+                    </a:p>
+                  </a:txBody>
+                  <a:tcPr>
+                    <a:lnL w="12700" cap="flat" cmpd="sng" algn="ctr">
+                      <a:solidFill>
+                        <a:schemeClr val="tx1"/>
+                      </a:solidFill>
+                      <a:prstDash val="solid"/>
+                      <a:round/>
+                      <a:headEnd type="none" w="med" len="med"/>
+                      <a:tailEnd type="none" w="med" len="med"/>
+                    </a:lnL>
+                    <a:lnR w="12700" cap="flat" cmpd="sng" algn="ctr">
+                      <a:solidFill>
+                        <a:schemeClr val="tx1"/>
+                      </a:solidFill>
+                      <a:prstDash val="solid"/>
+                      <a:round/>
+                      <a:headEnd type="none" w="med" len="med"/>
+                      <a:tailEnd type="none" w="med" len="med"/>
+                    </a:lnR>
+                    <a:lnT w="12700" cap="flat" cmpd="sng" algn="ctr">
+                      <a:solidFill>
+                        <a:schemeClr val="tx1"/>
+                      </a:solidFill>
+                      <a:prstDash val="solid"/>
+                      <a:round/>
+                      <a:headEnd type="none" w="med" len="med"/>
+                      <a:tailEnd type="none" w="med" len="med"/>
+                    </a:lnT>
+                    <a:lnB w="12700" cap="flat" cmpd="sng" algn="ctr">
+                      <a:solidFill>
+                        <a:schemeClr val="tx1"/>
+                      </a:solidFill>
+                      <a:prstDash val="solid"/>
+                      <a:round/>
+                      <a:headEnd type="none" w="med" len="med"/>
+                      <a:tailEnd type="none" w="med" len="med"/>
+                    </a:lnB>
+                    <a:solidFill>
+                      <a:schemeClr val="accent1">
+                        <a:lumMod val="75000"/>
+                      </a:schemeClr>
+                    </a:solidFill>
+                  </a:tcPr>
+                </a:tc>
+                <a:tc>
+                  <a:txBody>
+                    <a:bodyPr/>
+                    <a:lstStyle/>
+                    <a:p>
+                      <a:r>
+                        <a:rPr lang="en-US" dirty="0"/>
+                        <a:t>Net Salary </a:t>
+                      </a:r>
+                      <a:r>
+                        <a:rPr kumimoji="0" lang="en-US" sz="1100" b="0" i="0" u="none" strike="noStrike" kern="1200" cap="none" spc="0" normalizeH="0" baseline="0" noProof="0" dirty="0">
+                          <a:ln>
+                            <a:noFill/>
+                          </a:ln>
+                          <a:solidFill>
+                            <a:prstClr val="black"/>
+                          </a:solidFill>
+                          <a:effectLst/>
+                          <a:uLnTx/>
+                          <a:uFillTx/>
+                          <a:latin typeface="+mn-lt"/>
+                          <a:ea typeface="+mn-ea"/>
+                          <a:cs typeface="+mn-cs"/>
+                        </a:rPr>
+                        <a:t>▼</a:t>
+                      </a:r>
+                      <a:endParaRPr lang="en-IN" dirty="0"/>
+                    </a:p>
+                  </a:txBody>
+                  <a:tcPr>
+                    <a:lnL w="12700" cap="flat" cmpd="sng" algn="ctr">
+                      <a:solidFill>
+                        <a:schemeClr val="tx1"/>
+                      </a:solidFill>
+                      <a:prstDash val="solid"/>
+                      <a:round/>
+                      <a:headEnd type="none" w="med" len="med"/>
+                      <a:tailEnd type="none" w="med" len="med"/>
+                    </a:lnL>
+                    <a:lnR w="12700" cap="flat" cmpd="sng" algn="ctr">
+                      <a:solidFill>
+                        <a:schemeClr val="tx1"/>
+                      </a:solidFill>
+                      <a:prstDash val="solid"/>
+                      <a:round/>
+                      <a:headEnd type="none" w="med" len="med"/>
+                      <a:tailEnd type="none" w="med" len="med"/>
+                    </a:lnR>
+                    <a:lnT w="12700" cap="flat" cmpd="sng" algn="ctr">
+                      <a:solidFill>
+                        <a:schemeClr val="tx1"/>
+                      </a:solidFill>
+                      <a:prstDash val="solid"/>
+                      <a:round/>
+                      <a:headEnd type="none" w="med" len="med"/>
+                      <a:tailEnd type="none" w="med" len="med"/>
+                    </a:lnT>
+                    <a:lnB w="12700" cap="flat" cmpd="sng" algn="ctr">
+                      <a:solidFill>
+                        <a:schemeClr val="tx1"/>
+                      </a:solidFill>
+                      <a:prstDash val="solid"/>
+                      <a:round/>
+                      <a:headEnd type="none" w="med" len="med"/>
+                      <a:tailEnd type="none" w="med" len="med"/>
+                    </a:lnB>
+                    <a:solidFill>
+                      <a:schemeClr val="accent1">
+                        <a:lumMod val="75000"/>
+                      </a:schemeClr>
+                    </a:solidFill>
+                  </a:tcPr>
+                </a:tc>
+                <a:tc>
+                  <a:txBody>
+                    <a:bodyPr/>
+                    <a:lstStyle/>
+                    <a:p>
+                      <a:r>
+                        <a:rPr lang="en-US" dirty="0"/>
+                        <a:t>Status </a:t>
+                      </a:r>
+                      <a:r>
+                        <a:rPr kumimoji="0" lang="en-US" sz="1100" b="0" i="0" u="none" strike="noStrike" kern="1200" cap="none" spc="0" normalizeH="0" baseline="0" noProof="0" dirty="0">
+                          <a:ln>
+                            <a:noFill/>
+                          </a:ln>
+                          <a:solidFill>
+                            <a:prstClr val="black"/>
+                          </a:solidFill>
+                          <a:effectLst/>
+                          <a:uLnTx/>
+                          <a:uFillTx/>
+                          <a:latin typeface="+mn-lt"/>
+                          <a:ea typeface="+mn-ea"/>
+                          <a:cs typeface="+mn-cs"/>
+                        </a:rPr>
+                        <a:t>▼</a:t>
+                      </a:r>
+                      <a:endParaRPr lang="en-IN" dirty="0"/>
+                    </a:p>
+                  </a:txBody>
+                  <a:tcPr>
+                    <a:lnL w="12700" cap="flat" cmpd="sng" algn="ctr">
+                      <a:solidFill>
+                        <a:schemeClr val="tx1"/>
+                      </a:solidFill>
+                      <a:prstDash val="solid"/>
+                      <a:round/>
+                      <a:headEnd type="none" w="med" len="med"/>
+                      <a:tailEnd type="none" w="med" len="med"/>
+                    </a:lnL>
+                    <a:lnR w="12700" cap="flat" cmpd="sng" algn="ctr">
+                      <a:solidFill>
+                        <a:schemeClr val="tx1"/>
+                      </a:solidFill>
+                      <a:prstDash val="solid"/>
+                      <a:round/>
+                      <a:headEnd type="none" w="med" len="med"/>
+                      <a:tailEnd type="none" w="med" len="med"/>
+                    </a:lnR>
+                    <a:lnT w="12700" cap="flat" cmpd="sng" algn="ctr">
+                      <a:solidFill>
+                        <a:schemeClr val="tx1"/>
+                      </a:solidFill>
+                      <a:prstDash val="solid"/>
+                      <a:round/>
+                      <a:headEnd type="none" w="med" len="med"/>
+                      <a:tailEnd type="none" w="med" len="med"/>
+                    </a:lnT>
+                    <a:lnB w="12700" cap="flat" cmpd="sng" algn="ctr">
+                      <a:solidFill>
+                        <a:schemeClr val="tx1"/>
+                      </a:solidFill>
+                      <a:prstDash val="solid"/>
+                      <a:round/>
+                      <a:headEnd type="none" w="med" len="med"/>
+                      <a:tailEnd type="none" w="med" len="med"/>
+                    </a:lnB>
+                    <a:solidFill>
+                      <a:schemeClr val="accent1">
+                        <a:lumMod val="75000"/>
+                      </a:schemeClr>
+                    </a:solidFill>
+                  </a:tcPr>
+                </a:tc>
+                <a:extLst>
+                  <a:ext uri="{0D108BD9-81ED-4DB2-BD59-A6C34878D82A}">
+                    <a16:rowId xmlns:a16="http://schemas.microsoft.com/office/drawing/2014/main" val="2967609491"/>
+                  </a:ext>
+                </a:extLst>
+              </a:tr>
+              <a:tr h="370840">
+                <a:tc>
+                  <a:txBody>
+                    <a:bodyPr/>
+                    <a:lstStyle/>
+                    <a:p>
+                      <a:endParaRPr lang="en-IN" dirty="0"/>
+                    </a:p>
+                  </a:txBody>
+                  <a:tcPr>
+                    <a:lnL w="12700" cap="flat" cmpd="sng" algn="ctr">
+                      <a:solidFill>
+                        <a:schemeClr val="tx1"/>
+                      </a:solidFill>
+                      <a:prstDash val="solid"/>
+                      <a:round/>
+                      <a:headEnd type="none" w="med" len="med"/>
+                      <a:tailEnd type="none" w="med" len="med"/>
+                    </a:lnL>
+                    <a:lnR w="12700" cap="flat" cmpd="sng" algn="ctr">
+                      <a:solidFill>
+                        <a:schemeClr val="tx1"/>
+                      </a:solidFill>
+                      <a:prstDash val="solid"/>
+                      <a:round/>
+                      <a:headEnd type="none" w="med" len="med"/>
+                      <a:tailEnd type="none" w="med" len="med"/>
+                    </a:lnR>
+                    <a:lnT w="12700" cap="flat" cmpd="sng" algn="ctr">
+                      <a:solidFill>
+                        <a:schemeClr val="tx1"/>
+                      </a:solidFill>
+                      <a:prstDash val="solid"/>
+                      <a:round/>
+                      <a:headEnd type="none" w="med" len="med"/>
+                      <a:tailEnd type="none" w="med" len="med"/>
+                    </a:lnT>
+                    <a:lnB w="12700" cap="flat" cmpd="sng" algn="ctr">
+                      <a:solidFill>
+                        <a:schemeClr val="tx1"/>
+                      </a:solidFill>
+                      <a:prstDash val="solid"/>
+                      <a:round/>
+                      <a:headEnd type="none" w="med" len="med"/>
+                      <a:tailEnd type="none" w="med" len="med"/>
+                    </a:lnB>
+                    <a:solidFill>
+                      <a:srgbClr val="8FAADC"/>
+                    </a:solidFill>
+                  </a:tcPr>
+                </a:tc>
+                <a:tc>
+                  <a:txBody>
+                    <a:bodyPr/>
+                    <a:lstStyle/>
+                    <a:p>
+                      <a:endParaRPr lang="en-IN" dirty="0"/>
+                    </a:p>
+                  </a:txBody>
+                  <a:tcPr>
+                    <a:lnL w="12700" cap="flat" cmpd="sng" algn="ctr">
+                      <a:solidFill>
+                        <a:schemeClr val="tx1"/>
+                      </a:solidFill>
+                      <a:prstDash val="solid"/>
+                      <a:round/>
+                      <a:headEnd type="none" w="med" len="med"/>
+                      <a:tailEnd type="none" w="med" len="med"/>
+                    </a:lnL>
+                    <a:lnR w="12700" cap="flat" cmpd="sng" algn="ctr">
+                      <a:solidFill>
+                        <a:schemeClr val="tx1"/>
+                      </a:solidFill>
+                      <a:prstDash val="solid"/>
+                      <a:round/>
+                      <a:headEnd type="none" w="med" len="med"/>
+                      <a:tailEnd type="none" w="med" len="med"/>
+                    </a:lnR>
+                    <a:lnT w="12700" cap="flat" cmpd="sng" algn="ctr">
+                      <a:solidFill>
+                        <a:schemeClr val="tx1"/>
+                      </a:solidFill>
+                      <a:prstDash val="solid"/>
+                      <a:round/>
+                      <a:headEnd type="none" w="med" len="med"/>
+                      <a:tailEnd type="none" w="med" len="med"/>
+                    </a:lnT>
+                    <a:lnB w="12700" cap="flat" cmpd="sng" algn="ctr">
+                      <a:solidFill>
+                        <a:schemeClr val="tx1"/>
+                      </a:solidFill>
+                      <a:prstDash val="solid"/>
+                      <a:round/>
+                      <a:headEnd type="none" w="med" len="med"/>
+                      <a:tailEnd type="none" w="med" len="med"/>
+                    </a:lnB>
+                    <a:solidFill>
+                      <a:srgbClr val="8FAADC"/>
+                    </a:solidFill>
+                  </a:tcPr>
+                </a:tc>
+                <a:tc>
+                  <a:txBody>
+                    <a:bodyPr/>
+                    <a:lstStyle/>
+                    <a:p>
+                      <a:endParaRPr lang="en-IN" dirty="0"/>
+                    </a:p>
+                  </a:txBody>
+                  <a:tcPr>
+                    <a:lnL w="12700" cap="flat" cmpd="sng" algn="ctr">
+                      <a:solidFill>
+                        <a:schemeClr val="tx1"/>
+                      </a:solidFill>
+                      <a:prstDash val="solid"/>
+                      <a:round/>
+                      <a:headEnd type="none" w="med" len="med"/>
+                      <a:tailEnd type="none" w="med" len="med"/>
+                    </a:lnL>
+                    <a:lnR w="12700" cap="flat" cmpd="sng" algn="ctr">
+                      <a:solidFill>
+                        <a:schemeClr val="tx1"/>
+                      </a:solidFill>
+                      <a:prstDash val="solid"/>
+                      <a:round/>
+                      <a:headEnd type="none" w="med" len="med"/>
+                      <a:tailEnd type="none" w="med" len="med"/>
+                    </a:lnR>
+                    <a:lnT w="12700" cap="flat" cmpd="sng" algn="ctr">
+                      <a:solidFill>
+                        <a:schemeClr val="tx1"/>
+                      </a:solidFill>
+                      <a:prstDash val="solid"/>
+                      <a:round/>
+                      <a:headEnd type="none" w="med" len="med"/>
+                      <a:tailEnd type="none" w="med" len="med"/>
+                    </a:lnT>
+                    <a:lnB w="12700" cap="flat" cmpd="sng" algn="ctr">
+                      <a:solidFill>
+                        <a:schemeClr val="tx1"/>
+                      </a:solidFill>
+                      <a:prstDash val="solid"/>
+                      <a:round/>
+                      <a:headEnd type="none" w="med" len="med"/>
+                      <a:tailEnd type="none" w="med" len="med"/>
+                    </a:lnB>
+                    <a:solidFill>
+                      <a:srgbClr val="8FAADC"/>
+                    </a:solidFill>
+                  </a:tcPr>
+                </a:tc>
+                <a:tc>
+                  <a:txBody>
+                    <a:bodyPr/>
+                    <a:lstStyle/>
+                    <a:p>
+                      <a:endParaRPr lang="en-IN" dirty="0"/>
+                    </a:p>
+                  </a:txBody>
+                  <a:tcPr>
+                    <a:lnL w="12700" cap="flat" cmpd="sng" algn="ctr">
+                      <a:solidFill>
+                        <a:schemeClr val="tx1"/>
+                      </a:solidFill>
+                      <a:prstDash val="solid"/>
+                      <a:round/>
+                      <a:headEnd type="none" w="med" len="med"/>
+                      <a:tailEnd type="none" w="med" len="med"/>
+                    </a:lnL>
+                    <a:lnR w="12700" cap="flat" cmpd="sng" algn="ctr">
+                      <a:solidFill>
+                        <a:schemeClr val="tx1"/>
+                      </a:solidFill>
+                      <a:prstDash val="solid"/>
+                      <a:round/>
+                      <a:headEnd type="none" w="med" len="med"/>
+                      <a:tailEnd type="none" w="med" len="med"/>
+                    </a:lnR>
+                    <a:lnT w="12700" cap="flat" cmpd="sng" algn="ctr">
+                      <a:solidFill>
+                        <a:schemeClr val="tx1"/>
+                      </a:solidFill>
+                      <a:prstDash val="solid"/>
+                      <a:round/>
+                      <a:headEnd type="none" w="med" len="med"/>
+                      <a:tailEnd type="none" w="med" len="med"/>
+                    </a:lnT>
+                    <a:lnB w="12700" cap="flat" cmpd="sng" algn="ctr">
+                      <a:solidFill>
+                        <a:schemeClr val="tx1"/>
+                      </a:solidFill>
+                      <a:prstDash val="solid"/>
+                      <a:round/>
+                      <a:headEnd type="none" w="med" len="med"/>
+                      <a:tailEnd type="none" w="med" len="med"/>
+                    </a:lnB>
+                    <a:solidFill>
+                      <a:srgbClr val="8FAADC"/>
+                    </a:solidFill>
+                  </a:tcPr>
+                </a:tc>
+                <a:tc>
+                  <a:txBody>
+                    <a:bodyPr/>
+                    <a:lstStyle/>
+                    <a:p>
+                      <a:endParaRPr lang="en-IN"/>
+                    </a:p>
+                  </a:txBody>
+                  <a:tcPr>
+                    <a:lnL w="12700" cap="flat" cmpd="sng" algn="ctr">
+                      <a:solidFill>
+                        <a:schemeClr val="tx1"/>
+                      </a:solidFill>
+                      <a:prstDash val="solid"/>
+                      <a:round/>
+                      <a:headEnd type="none" w="med" len="med"/>
+                      <a:tailEnd type="none" w="med" len="med"/>
+                    </a:lnL>
+                    <a:lnR w="12700" cap="flat" cmpd="sng" algn="ctr">
+                      <a:solidFill>
+                        <a:schemeClr val="tx1"/>
+                      </a:solidFill>
+                      <a:prstDash val="solid"/>
+                      <a:round/>
+                      <a:headEnd type="none" w="med" len="med"/>
+                      <a:tailEnd type="none" w="med" len="med"/>
+                    </a:lnR>
+                    <a:lnT w="12700" cap="flat" cmpd="sng" algn="ctr">
+                      <a:solidFill>
+                        <a:schemeClr val="tx1"/>
+                      </a:solidFill>
+                      <a:prstDash val="solid"/>
+                      <a:round/>
+                      <a:headEnd type="none" w="med" len="med"/>
+                      <a:tailEnd type="none" w="med" len="med"/>
+                    </a:lnT>
+                    <a:lnB w="12700" cap="flat" cmpd="sng" algn="ctr">
+                      <a:solidFill>
+                        <a:schemeClr val="tx1"/>
+                      </a:solidFill>
+                      <a:prstDash val="solid"/>
+                      <a:round/>
+                      <a:headEnd type="none" w="med" len="med"/>
+                      <a:tailEnd type="none" w="med" len="med"/>
+                    </a:lnB>
+                    <a:solidFill>
+                      <a:srgbClr val="8FAADC"/>
+                    </a:solidFill>
+                  </a:tcPr>
+                </a:tc>
+                <a:extLst>
+                  <a:ext uri="{0D108BD9-81ED-4DB2-BD59-A6C34878D82A}">
+                    <a16:rowId xmlns:a16="http://schemas.microsoft.com/office/drawing/2014/main" val="1665693499"/>
+                  </a:ext>
+                </a:extLst>
+              </a:tr>
+              <a:tr h="370840">
+                <a:tc>
+                  <a:txBody>
+                    <a:bodyPr/>
+                    <a:lstStyle/>
+                    <a:p>
+                      <a:endParaRPr lang="en-IN" dirty="0"/>
+                    </a:p>
+                  </a:txBody>
+                  <a:tcPr>
+                    <a:lnL w="12700" cap="flat" cmpd="sng" algn="ctr">
+                      <a:solidFill>
+                        <a:schemeClr val="tx1"/>
+                      </a:solidFill>
+                      <a:prstDash val="solid"/>
+                      <a:round/>
+                      <a:headEnd type="none" w="med" len="med"/>
+                      <a:tailEnd type="none" w="med" len="med"/>
+                    </a:lnL>
+                    <a:lnR w="12700" cap="flat" cmpd="sng" algn="ctr">
+                      <a:solidFill>
+                        <a:schemeClr val="tx1"/>
+                      </a:solidFill>
+                      <a:prstDash val="solid"/>
+                      <a:round/>
+                      <a:headEnd type="none" w="med" len="med"/>
+                      <a:tailEnd type="none" w="med" len="med"/>
+                    </a:lnR>
+                    <a:lnT w="12700" cap="flat" cmpd="sng" algn="ctr">
+                      <a:solidFill>
+                        <a:schemeClr val="tx1"/>
+                      </a:solidFill>
+                      <a:prstDash val="solid"/>
+                      <a:round/>
+                      <a:headEnd type="none" w="med" len="med"/>
+                      <a:tailEnd type="none" w="med" len="med"/>
+                    </a:lnT>
+                    <a:lnB w="12700" cap="flat" cmpd="sng" algn="ctr">
+                      <a:solidFill>
+                        <a:schemeClr val="tx1"/>
+                      </a:solidFill>
+                      <a:prstDash val="solid"/>
+                      <a:round/>
+                      <a:headEnd type="none" w="med" len="med"/>
+                      <a:tailEnd type="none" w="med" len="med"/>
+                    </a:lnB>
+                    <a:solidFill>
+                      <a:srgbClr val="8FAADC"/>
+                    </a:solidFill>
+                  </a:tcPr>
+                </a:tc>
+                <a:tc>
+                  <a:txBody>
+                    <a:bodyPr/>
+                    <a:lstStyle/>
+                    <a:p>
+                      <a:endParaRPr lang="en-IN" dirty="0"/>
+                    </a:p>
+                  </a:txBody>
+                  <a:tcPr>
+                    <a:lnL w="12700" cap="flat" cmpd="sng" algn="ctr">
+                      <a:solidFill>
+                        <a:schemeClr val="tx1"/>
+                      </a:solidFill>
+                      <a:prstDash val="solid"/>
+                      <a:round/>
+                      <a:headEnd type="none" w="med" len="med"/>
+                      <a:tailEnd type="none" w="med" len="med"/>
+                    </a:lnL>
+                    <a:lnR w="12700" cap="flat" cmpd="sng" algn="ctr">
+                      <a:solidFill>
+                        <a:schemeClr val="tx1"/>
+                      </a:solidFill>
+                      <a:prstDash val="solid"/>
+                      <a:round/>
+                      <a:headEnd type="none" w="med" len="med"/>
+                      <a:tailEnd type="none" w="med" len="med"/>
+                    </a:lnR>
+                    <a:lnT w="12700" cap="flat" cmpd="sng" algn="ctr">
+                      <a:solidFill>
+                        <a:schemeClr val="tx1"/>
+                      </a:solidFill>
+                      <a:prstDash val="solid"/>
+                      <a:round/>
+                      <a:headEnd type="none" w="med" len="med"/>
+                      <a:tailEnd type="none" w="med" len="med"/>
+                    </a:lnT>
+                    <a:lnB w="12700" cap="flat" cmpd="sng" algn="ctr">
+                      <a:solidFill>
+                        <a:schemeClr val="tx1"/>
+                      </a:solidFill>
+                      <a:prstDash val="solid"/>
+                      <a:round/>
+                      <a:headEnd type="none" w="med" len="med"/>
+                      <a:tailEnd type="none" w="med" len="med"/>
+                    </a:lnB>
+                    <a:solidFill>
+                      <a:srgbClr val="8FAADC"/>
+                    </a:solidFill>
+                  </a:tcPr>
+                </a:tc>
+                <a:tc>
+                  <a:txBody>
+                    <a:bodyPr/>
+                    <a:lstStyle/>
+                    <a:p>
+                      <a:endParaRPr lang="en-IN" dirty="0"/>
+                    </a:p>
+                  </a:txBody>
+                  <a:tcPr>
+                    <a:lnL w="12700" cap="flat" cmpd="sng" algn="ctr">
+                      <a:solidFill>
+                        <a:schemeClr val="tx1"/>
+                      </a:solidFill>
+                      <a:prstDash val="solid"/>
+                      <a:round/>
+                      <a:headEnd type="none" w="med" len="med"/>
+                      <a:tailEnd type="none" w="med" len="med"/>
+                    </a:lnL>
+                    <a:lnR w="12700" cap="flat" cmpd="sng" algn="ctr">
+                      <a:solidFill>
+                        <a:schemeClr val="tx1"/>
+                      </a:solidFill>
+                      <a:prstDash val="solid"/>
+                      <a:round/>
+                      <a:headEnd type="none" w="med" len="med"/>
+                      <a:tailEnd type="none" w="med" len="med"/>
+                    </a:lnR>
+                    <a:lnT w="12700" cap="flat" cmpd="sng" algn="ctr">
+                      <a:solidFill>
+                        <a:schemeClr val="tx1"/>
+                      </a:solidFill>
+                      <a:prstDash val="solid"/>
+                      <a:round/>
+                      <a:headEnd type="none" w="med" len="med"/>
+                      <a:tailEnd type="none" w="med" len="med"/>
+                    </a:lnT>
+                    <a:lnB w="12700" cap="flat" cmpd="sng" algn="ctr">
+                      <a:solidFill>
+                        <a:schemeClr val="tx1"/>
+                      </a:solidFill>
+                      <a:prstDash val="solid"/>
+                      <a:round/>
+                      <a:headEnd type="none" w="med" len="med"/>
+                      <a:tailEnd type="none" w="med" len="med"/>
+                    </a:lnB>
+                    <a:solidFill>
+                      <a:srgbClr val="8FAADC"/>
+                    </a:solidFill>
+                  </a:tcPr>
+                </a:tc>
+                <a:tc>
+                  <a:txBody>
+                    <a:bodyPr/>
+                    <a:lstStyle/>
+                    <a:p>
+                      <a:endParaRPr lang="en-IN"/>
+                    </a:p>
+                  </a:txBody>
+                  <a:tcPr>
+                    <a:lnL w="12700" cap="flat" cmpd="sng" algn="ctr">
+                      <a:solidFill>
+                        <a:schemeClr val="tx1"/>
+                      </a:solidFill>
+                      <a:prstDash val="solid"/>
+                      <a:round/>
+                      <a:headEnd type="none" w="med" len="med"/>
+                      <a:tailEnd type="none" w="med" len="med"/>
+                    </a:lnL>
+                    <a:lnR w="12700" cap="flat" cmpd="sng" algn="ctr">
+                      <a:solidFill>
+                        <a:schemeClr val="tx1"/>
+                      </a:solidFill>
+                      <a:prstDash val="solid"/>
+                      <a:round/>
+                      <a:headEnd type="none" w="med" len="med"/>
+                      <a:tailEnd type="none" w="med" len="med"/>
+                    </a:lnR>
+                    <a:lnT w="12700" cap="flat" cmpd="sng" algn="ctr">
+                      <a:solidFill>
+                        <a:schemeClr val="tx1"/>
+                      </a:solidFill>
+                      <a:prstDash val="solid"/>
+                      <a:round/>
+                      <a:headEnd type="none" w="med" len="med"/>
+                      <a:tailEnd type="none" w="med" len="med"/>
+                    </a:lnT>
+                    <a:lnB w="12700" cap="flat" cmpd="sng" algn="ctr">
+                      <a:solidFill>
+                        <a:schemeClr val="tx1"/>
+                      </a:solidFill>
+                      <a:prstDash val="solid"/>
+                      <a:round/>
+                      <a:headEnd type="none" w="med" len="med"/>
+                      <a:tailEnd type="none" w="med" len="med"/>
+                    </a:lnB>
+                    <a:solidFill>
+                      <a:srgbClr val="8FAADC"/>
+                    </a:solidFill>
+                  </a:tcPr>
+                </a:tc>
+                <a:tc>
+                  <a:txBody>
+                    <a:bodyPr/>
+                    <a:lstStyle/>
+                    <a:p>
+                      <a:endParaRPr lang="en-IN"/>
+                    </a:p>
+                  </a:txBody>
+                  <a:tcPr>
+                    <a:lnL w="12700" cap="flat" cmpd="sng" algn="ctr">
+                      <a:solidFill>
+                        <a:schemeClr val="tx1"/>
+                      </a:solidFill>
+                      <a:prstDash val="solid"/>
+                      <a:round/>
+                      <a:headEnd type="none" w="med" len="med"/>
+                      <a:tailEnd type="none" w="med" len="med"/>
+                    </a:lnL>
+                    <a:lnR w="12700" cap="flat" cmpd="sng" algn="ctr">
+                      <a:solidFill>
+                        <a:schemeClr val="tx1"/>
+                      </a:solidFill>
+                      <a:prstDash val="solid"/>
+                      <a:round/>
+                      <a:headEnd type="none" w="med" len="med"/>
+                      <a:tailEnd type="none" w="med" len="med"/>
+                    </a:lnR>
+                    <a:lnT w="12700" cap="flat" cmpd="sng" algn="ctr">
+                      <a:solidFill>
+                        <a:schemeClr val="tx1"/>
+                      </a:solidFill>
+                      <a:prstDash val="solid"/>
+                      <a:round/>
+                      <a:headEnd type="none" w="med" len="med"/>
+                      <a:tailEnd type="none" w="med" len="med"/>
+                    </a:lnT>
+                    <a:lnB w="12700" cap="flat" cmpd="sng" algn="ctr">
+                      <a:solidFill>
+                        <a:schemeClr val="tx1"/>
+                      </a:solidFill>
+                      <a:prstDash val="solid"/>
+                      <a:round/>
+                      <a:headEnd type="none" w="med" len="med"/>
+                      <a:tailEnd type="none" w="med" len="med"/>
+                    </a:lnB>
+                    <a:solidFill>
+                      <a:srgbClr val="8FAADC"/>
+                    </a:solidFill>
+                  </a:tcPr>
+                </a:tc>
+                <a:extLst>
+                  <a:ext uri="{0D108BD9-81ED-4DB2-BD59-A6C34878D82A}">
+                    <a16:rowId xmlns:a16="http://schemas.microsoft.com/office/drawing/2014/main" val="1485392036"/>
+                  </a:ext>
+                </a:extLst>
+              </a:tr>
+              <a:tr h="370840">
+                <a:tc>
+                  <a:txBody>
+                    <a:bodyPr/>
+                    <a:lstStyle/>
+                    <a:p>
+                      <a:endParaRPr lang="en-IN"/>
+                    </a:p>
+                  </a:txBody>
+                  <a:tcPr>
+                    <a:lnL w="12700" cap="flat" cmpd="sng" algn="ctr">
+                      <a:solidFill>
+                        <a:schemeClr val="tx1"/>
+                      </a:solidFill>
+                      <a:prstDash val="solid"/>
+                      <a:round/>
+                      <a:headEnd type="none" w="med" len="med"/>
+                      <a:tailEnd type="none" w="med" len="med"/>
+                    </a:lnL>
+                    <a:lnR w="12700" cap="flat" cmpd="sng" algn="ctr">
+                      <a:solidFill>
+                        <a:schemeClr val="tx1"/>
+                      </a:solidFill>
+                      <a:prstDash val="solid"/>
+                      <a:round/>
+                      <a:headEnd type="none" w="med" len="med"/>
+                      <a:tailEnd type="none" w="med" len="med"/>
+                    </a:lnR>
+                    <a:lnT w="12700" cap="flat" cmpd="sng" algn="ctr">
+                      <a:solidFill>
+                        <a:schemeClr val="tx1"/>
+                      </a:solidFill>
+                      <a:prstDash val="solid"/>
+                      <a:round/>
+                      <a:headEnd type="none" w="med" len="med"/>
+                      <a:tailEnd type="none" w="med" len="med"/>
+                    </a:lnT>
+                    <a:lnB w="12700" cap="flat" cmpd="sng" algn="ctr">
+                      <a:solidFill>
+                        <a:schemeClr val="tx1"/>
+                      </a:solidFill>
+                      <a:prstDash val="solid"/>
+                      <a:round/>
+                      <a:headEnd type="none" w="med" len="med"/>
+                      <a:tailEnd type="none" w="med" len="med"/>
+                    </a:lnB>
+                    <a:solidFill>
+                      <a:srgbClr val="8FAADC"/>
+                    </a:solidFill>
+                  </a:tcPr>
+                </a:tc>
+                <a:tc>
+                  <a:txBody>
+                    <a:bodyPr/>
+                    <a:lstStyle/>
+                    <a:p>
+                      <a:endParaRPr lang="en-IN"/>
+                    </a:p>
+                  </a:txBody>
+                  <a:tcPr>
+                    <a:lnL w="12700" cap="flat" cmpd="sng" algn="ctr">
+                      <a:solidFill>
+                        <a:schemeClr val="tx1"/>
+                      </a:solidFill>
+                      <a:prstDash val="solid"/>
+                      <a:round/>
+                      <a:headEnd type="none" w="med" len="med"/>
+                      <a:tailEnd type="none" w="med" len="med"/>
+                    </a:lnL>
+                    <a:lnR w="12700" cap="flat" cmpd="sng" algn="ctr">
+                      <a:solidFill>
+                        <a:schemeClr val="tx1"/>
+                      </a:solidFill>
+                      <a:prstDash val="solid"/>
+                      <a:round/>
+                      <a:headEnd type="none" w="med" len="med"/>
+                      <a:tailEnd type="none" w="med" len="med"/>
+                    </a:lnR>
+                    <a:lnT w="12700" cap="flat" cmpd="sng" algn="ctr">
+                      <a:solidFill>
+                        <a:schemeClr val="tx1"/>
+                      </a:solidFill>
+                      <a:prstDash val="solid"/>
+                      <a:round/>
+                      <a:headEnd type="none" w="med" len="med"/>
+                      <a:tailEnd type="none" w="med" len="med"/>
+                    </a:lnT>
+                    <a:lnB w="12700" cap="flat" cmpd="sng" algn="ctr">
+                      <a:solidFill>
+                        <a:schemeClr val="tx1"/>
+                      </a:solidFill>
+                      <a:prstDash val="solid"/>
+                      <a:round/>
+                      <a:headEnd type="none" w="med" len="med"/>
+                      <a:tailEnd type="none" w="med" len="med"/>
+                    </a:lnB>
+                    <a:solidFill>
+                      <a:srgbClr val="8FAADC"/>
+                    </a:solidFill>
+                  </a:tcPr>
+                </a:tc>
+                <a:tc>
+                  <a:txBody>
+                    <a:bodyPr/>
+                    <a:lstStyle/>
+                    <a:p>
+                      <a:endParaRPr lang="en-IN" dirty="0"/>
+                    </a:p>
+                  </a:txBody>
+                  <a:tcPr>
+                    <a:lnL w="12700" cap="flat" cmpd="sng" algn="ctr">
+                      <a:solidFill>
+                        <a:schemeClr val="tx1"/>
+                      </a:solidFill>
+                      <a:prstDash val="solid"/>
+                      <a:round/>
+                      <a:headEnd type="none" w="med" len="med"/>
+                      <a:tailEnd type="none" w="med" len="med"/>
+                    </a:lnL>
+                    <a:lnR w="12700" cap="flat" cmpd="sng" algn="ctr">
+                      <a:solidFill>
+                        <a:schemeClr val="tx1"/>
+                      </a:solidFill>
+                      <a:prstDash val="solid"/>
+                      <a:round/>
+                      <a:headEnd type="none" w="med" len="med"/>
+                      <a:tailEnd type="none" w="med" len="med"/>
+                    </a:lnR>
+                    <a:lnT w="12700" cap="flat" cmpd="sng" algn="ctr">
+                      <a:solidFill>
+                        <a:schemeClr val="tx1"/>
+                      </a:solidFill>
+                      <a:prstDash val="solid"/>
+                      <a:round/>
+                      <a:headEnd type="none" w="med" len="med"/>
+                      <a:tailEnd type="none" w="med" len="med"/>
+                    </a:lnT>
+                    <a:lnB w="12700" cap="flat" cmpd="sng" algn="ctr">
+                      <a:solidFill>
+                        <a:schemeClr val="tx1"/>
+                      </a:solidFill>
+                      <a:prstDash val="solid"/>
+                      <a:round/>
+                      <a:headEnd type="none" w="med" len="med"/>
+                      <a:tailEnd type="none" w="med" len="med"/>
+                    </a:lnB>
+                    <a:solidFill>
+                      <a:srgbClr val="8FAADC"/>
+                    </a:solidFill>
+                  </a:tcPr>
+                </a:tc>
+                <a:tc>
+                  <a:txBody>
+                    <a:bodyPr/>
+                    <a:lstStyle/>
+                    <a:p>
+                      <a:endParaRPr lang="en-IN" dirty="0"/>
+                    </a:p>
+                  </a:txBody>
+                  <a:tcPr>
+                    <a:lnL w="12700" cap="flat" cmpd="sng" algn="ctr">
+                      <a:solidFill>
+                        <a:schemeClr val="tx1"/>
+                      </a:solidFill>
+                      <a:prstDash val="solid"/>
+                      <a:round/>
+                      <a:headEnd type="none" w="med" len="med"/>
+                      <a:tailEnd type="none" w="med" len="med"/>
+                    </a:lnL>
+                    <a:lnR w="12700" cap="flat" cmpd="sng" algn="ctr">
+                      <a:solidFill>
+                        <a:schemeClr val="tx1"/>
+                      </a:solidFill>
+                      <a:prstDash val="solid"/>
+                      <a:round/>
+                      <a:headEnd type="none" w="med" len="med"/>
+                      <a:tailEnd type="none" w="med" len="med"/>
+                    </a:lnR>
+                    <a:lnT w="12700" cap="flat" cmpd="sng" algn="ctr">
+                      <a:solidFill>
+                        <a:schemeClr val="tx1"/>
+                      </a:solidFill>
+                      <a:prstDash val="solid"/>
+                      <a:round/>
+                      <a:headEnd type="none" w="med" len="med"/>
+                      <a:tailEnd type="none" w="med" len="med"/>
+                    </a:lnT>
+                    <a:lnB w="12700" cap="flat" cmpd="sng" algn="ctr">
+                      <a:solidFill>
+                        <a:schemeClr val="tx1"/>
+                      </a:solidFill>
+                      <a:prstDash val="solid"/>
+                      <a:round/>
+                      <a:headEnd type="none" w="med" len="med"/>
+                      <a:tailEnd type="none" w="med" len="med"/>
+                    </a:lnB>
+                    <a:solidFill>
+                      <a:srgbClr val="8FAADC"/>
+                    </a:solidFill>
+                  </a:tcPr>
+                </a:tc>
+                <a:tc>
+                  <a:txBody>
+                    <a:bodyPr/>
+                    <a:lstStyle/>
+                    <a:p>
+                      <a:endParaRPr lang="en-IN"/>
+                    </a:p>
+                  </a:txBody>
+                  <a:tcPr>
+                    <a:lnL w="12700" cap="flat" cmpd="sng" algn="ctr">
+                      <a:solidFill>
+                        <a:schemeClr val="tx1"/>
+                      </a:solidFill>
+                      <a:prstDash val="solid"/>
+                      <a:round/>
+                      <a:headEnd type="none" w="med" len="med"/>
+                      <a:tailEnd type="none" w="med" len="med"/>
+                    </a:lnL>
+                    <a:lnR w="12700" cap="flat" cmpd="sng" algn="ctr">
+                      <a:solidFill>
+                        <a:schemeClr val="tx1"/>
+                      </a:solidFill>
+                      <a:prstDash val="solid"/>
+                      <a:round/>
+                      <a:headEnd type="none" w="med" len="med"/>
+                      <a:tailEnd type="none" w="med" len="med"/>
+                    </a:lnR>
+                    <a:lnT w="12700" cap="flat" cmpd="sng" algn="ctr">
+                      <a:solidFill>
+                        <a:schemeClr val="tx1"/>
+                      </a:solidFill>
+                      <a:prstDash val="solid"/>
+                      <a:round/>
+                      <a:headEnd type="none" w="med" len="med"/>
+                      <a:tailEnd type="none" w="med" len="med"/>
+                    </a:lnT>
+                    <a:lnB w="12700" cap="flat" cmpd="sng" algn="ctr">
+                      <a:solidFill>
+                        <a:schemeClr val="tx1"/>
+                      </a:solidFill>
+                      <a:prstDash val="solid"/>
+                      <a:round/>
+                      <a:headEnd type="none" w="med" len="med"/>
+                      <a:tailEnd type="none" w="med" len="med"/>
+                    </a:lnB>
+                    <a:solidFill>
+                      <a:srgbClr val="8FAADC"/>
+                    </a:solidFill>
+                  </a:tcPr>
+                </a:tc>
+                <a:extLst>
+                  <a:ext uri="{0D108BD9-81ED-4DB2-BD59-A6C34878D82A}">
+                    <a16:rowId xmlns:a16="http://schemas.microsoft.com/office/drawing/2014/main" val="430668479"/>
+                  </a:ext>
+                </a:extLst>
+              </a:tr>
+              <a:tr h="370840">
+                <a:tc>
+                  <a:txBody>
+                    <a:bodyPr/>
+                    <a:lstStyle/>
+                    <a:p>
+                      <a:endParaRPr lang="en-IN"/>
+                    </a:p>
+                  </a:txBody>
+                  <a:tcPr>
+                    <a:lnL w="12700" cap="flat" cmpd="sng" algn="ctr">
+                      <a:solidFill>
+                        <a:schemeClr val="tx1"/>
+                      </a:solidFill>
+                      <a:prstDash val="solid"/>
+                      <a:round/>
+                      <a:headEnd type="none" w="med" len="med"/>
+                      <a:tailEnd type="none" w="med" len="med"/>
+                    </a:lnL>
+                    <a:lnR w="12700" cap="flat" cmpd="sng" algn="ctr">
+                      <a:solidFill>
+                        <a:schemeClr val="tx1"/>
+                      </a:solidFill>
+                      <a:prstDash val="solid"/>
+                      <a:round/>
+                      <a:headEnd type="none" w="med" len="med"/>
+                      <a:tailEnd type="none" w="med" len="med"/>
+                    </a:lnR>
+                    <a:lnT w="12700" cap="flat" cmpd="sng" algn="ctr">
+                      <a:solidFill>
+                        <a:schemeClr val="tx1"/>
+                      </a:solidFill>
+                      <a:prstDash val="solid"/>
+                      <a:round/>
+                      <a:headEnd type="none" w="med" len="med"/>
+                      <a:tailEnd type="none" w="med" len="med"/>
+                    </a:lnT>
+                    <a:lnB w="12700" cap="flat" cmpd="sng" algn="ctr">
+                      <a:solidFill>
+                        <a:schemeClr val="tx1"/>
+                      </a:solidFill>
+                      <a:prstDash val="solid"/>
+                      <a:round/>
+                      <a:headEnd type="none" w="med" len="med"/>
+                      <a:tailEnd type="none" w="med" len="med"/>
+                    </a:lnB>
+                    <a:solidFill>
+                      <a:srgbClr val="8FAADC"/>
+                    </a:solidFill>
+                  </a:tcPr>
+                </a:tc>
+                <a:tc>
+                  <a:txBody>
+                    <a:bodyPr/>
+                    <a:lstStyle/>
+                    <a:p>
+                      <a:endParaRPr lang="en-IN"/>
+                    </a:p>
+                  </a:txBody>
+                  <a:tcPr>
+                    <a:lnL w="12700" cap="flat" cmpd="sng" algn="ctr">
+                      <a:solidFill>
+                        <a:schemeClr val="tx1"/>
+                      </a:solidFill>
+                      <a:prstDash val="solid"/>
+                      <a:round/>
+                      <a:headEnd type="none" w="med" len="med"/>
+                      <a:tailEnd type="none" w="med" len="med"/>
+                    </a:lnL>
+                    <a:lnR w="12700" cap="flat" cmpd="sng" algn="ctr">
+                      <a:solidFill>
+                        <a:schemeClr val="tx1"/>
+                      </a:solidFill>
+                      <a:prstDash val="solid"/>
+                      <a:round/>
+                      <a:headEnd type="none" w="med" len="med"/>
+                      <a:tailEnd type="none" w="med" len="med"/>
+                    </a:lnR>
+                    <a:lnT w="12700" cap="flat" cmpd="sng" algn="ctr">
+                      <a:solidFill>
+                        <a:schemeClr val="tx1"/>
+                      </a:solidFill>
+                      <a:prstDash val="solid"/>
+                      <a:round/>
+                      <a:headEnd type="none" w="med" len="med"/>
+                      <a:tailEnd type="none" w="med" len="med"/>
+                    </a:lnT>
+                    <a:lnB w="12700" cap="flat" cmpd="sng" algn="ctr">
+                      <a:solidFill>
+                        <a:schemeClr val="tx1"/>
+                      </a:solidFill>
+                      <a:prstDash val="solid"/>
+                      <a:round/>
+                      <a:headEnd type="none" w="med" len="med"/>
+                      <a:tailEnd type="none" w="med" len="med"/>
+                    </a:lnB>
+                    <a:solidFill>
+                      <a:srgbClr val="8FAADC"/>
+                    </a:solidFill>
+                  </a:tcPr>
+                </a:tc>
+                <a:tc>
+                  <a:txBody>
+                    <a:bodyPr/>
+                    <a:lstStyle/>
+                    <a:p>
+                      <a:endParaRPr lang="en-IN" dirty="0"/>
+                    </a:p>
+                  </a:txBody>
+                  <a:tcPr>
+                    <a:lnL w="12700" cap="flat" cmpd="sng" algn="ctr">
+                      <a:solidFill>
+                        <a:schemeClr val="tx1"/>
+                      </a:solidFill>
+                      <a:prstDash val="solid"/>
+                      <a:round/>
+                      <a:headEnd type="none" w="med" len="med"/>
+                      <a:tailEnd type="none" w="med" len="med"/>
+                    </a:lnL>
+                    <a:lnR w="12700" cap="flat" cmpd="sng" algn="ctr">
+                      <a:solidFill>
+                        <a:schemeClr val="tx1"/>
+                      </a:solidFill>
+                      <a:prstDash val="solid"/>
+                      <a:round/>
+                      <a:headEnd type="none" w="med" len="med"/>
+                      <a:tailEnd type="none" w="med" len="med"/>
+                    </a:lnR>
+                    <a:lnT w="12700" cap="flat" cmpd="sng" algn="ctr">
+                      <a:solidFill>
+                        <a:schemeClr val="tx1"/>
+                      </a:solidFill>
+                      <a:prstDash val="solid"/>
+                      <a:round/>
+                      <a:headEnd type="none" w="med" len="med"/>
+                      <a:tailEnd type="none" w="med" len="med"/>
+                    </a:lnT>
+                    <a:lnB w="12700" cap="flat" cmpd="sng" algn="ctr">
+                      <a:solidFill>
+                        <a:schemeClr val="tx1"/>
+                      </a:solidFill>
+                      <a:prstDash val="solid"/>
+                      <a:round/>
+                      <a:headEnd type="none" w="med" len="med"/>
+                      <a:tailEnd type="none" w="med" len="med"/>
+                    </a:lnB>
+                    <a:solidFill>
+                      <a:srgbClr val="8FAADC"/>
+                    </a:solidFill>
+                  </a:tcPr>
+                </a:tc>
+                <a:tc>
+                  <a:txBody>
+                    <a:bodyPr/>
+                    <a:lstStyle/>
+                    <a:p>
+                      <a:endParaRPr lang="en-IN" dirty="0"/>
+                    </a:p>
+                  </a:txBody>
+                  <a:tcPr>
+                    <a:lnL w="12700" cap="flat" cmpd="sng" algn="ctr">
+                      <a:solidFill>
+                        <a:schemeClr val="tx1"/>
+                      </a:solidFill>
+                      <a:prstDash val="solid"/>
+                      <a:round/>
+                      <a:headEnd type="none" w="med" len="med"/>
+                      <a:tailEnd type="none" w="med" len="med"/>
+                    </a:lnL>
+                    <a:lnR w="12700" cap="flat" cmpd="sng" algn="ctr">
+                      <a:solidFill>
+                        <a:schemeClr val="tx1"/>
+                      </a:solidFill>
+                      <a:prstDash val="solid"/>
+                      <a:round/>
+                      <a:headEnd type="none" w="med" len="med"/>
+                      <a:tailEnd type="none" w="med" len="med"/>
+                    </a:lnR>
+                    <a:lnT w="12700" cap="flat" cmpd="sng" algn="ctr">
+                      <a:solidFill>
+                        <a:schemeClr val="tx1"/>
+                      </a:solidFill>
+                      <a:prstDash val="solid"/>
+                      <a:round/>
+                      <a:headEnd type="none" w="med" len="med"/>
+                      <a:tailEnd type="none" w="med" len="med"/>
+                    </a:lnT>
+                    <a:lnB w="12700" cap="flat" cmpd="sng" algn="ctr">
+                      <a:solidFill>
+                        <a:schemeClr val="tx1"/>
+                      </a:solidFill>
+                      <a:prstDash val="solid"/>
+                      <a:round/>
+                      <a:headEnd type="none" w="med" len="med"/>
+                      <a:tailEnd type="none" w="med" len="med"/>
+                    </a:lnB>
+                    <a:solidFill>
+                      <a:srgbClr val="8FAADC"/>
+                    </a:solidFill>
+                  </a:tcPr>
+                </a:tc>
+                <a:tc>
+                  <a:txBody>
+                    <a:bodyPr/>
+                    <a:lstStyle/>
+                    <a:p>
+                      <a:endParaRPr lang="en-IN"/>
+                    </a:p>
+                  </a:txBody>
+                  <a:tcPr>
+                    <a:lnL w="12700" cap="flat" cmpd="sng" algn="ctr">
+                      <a:solidFill>
+                        <a:schemeClr val="tx1"/>
+                      </a:solidFill>
+                      <a:prstDash val="solid"/>
+                      <a:round/>
+                      <a:headEnd type="none" w="med" len="med"/>
+                      <a:tailEnd type="none" w="med" len="med"/>
+                    </a:lnL>
+                    <a:lnR w="12700" cap="flat" cmpd="sng" algn="ctr">
+                      <a:solidFill>
+                        <a:schemeClr val="tx1"/>
+                      </a:solidFill>
+                      <a:prstDash val="solid"/>
+                      <a:round/>
+                      <a:headEnd type="none" w="med" len="med"/>
+                      <a:tailEnd type="none" w="med" len="med"/>
+                    </a:lnR>
+                    <a:lnT w="12700" cap="flat" cmpd="sng" algn="ctr">
+                      <a:solidFill>
+                        <a:schemeClr val="tx1"/>
+                      </a:solidFill>
+                      <a:prstDash val="solid"/>
+                      <a:round/>
+                      <a:headEnd type="none" w="med" len="med"/>
+                      <a:tailEnd type="none" w="med" len="med"/>
+                    </a:lnT>
+                    <a:lnB w="12700" cap="flat" cmpd="sng" algn="ctr">
+                      <a:solidFill>
+                        <a:schemeClr val="tx1"/>
+                      </a:solidFill>
+                      <a:prstDash val="solid"/>
+                      <a:round/>
+                      <a:headEnd type="none" w="med" len="med"/>
+                      <a:tailEnd type="none" w="med" len="med"/>
+                    </a:lnB>
+                    <a:solidFill>
+                      <a:srgbClr val="8FAADC"/>
+                    </a:solidFill>
+                  </a:tcPr>
+                </a:tc>
+                <a:extLst>
+                  <a:ext uri="{0D108BD9-81ED-4DB2-BD59-A6C34878D82A}">
+                    <a16:rowId xmlns:a16="http://schemas.microsoft.com/office/drawing/2014/main" val="2809319250"/>
+                  </a:ext>
+                </a:extLst>
+              </a:tr>
+              <a:tr h="370840">
+                <a:tc>
+                  <a:txBody>
+                    <a:bodyPr/>
+                    <a:lstStyle/>
+                    <a:p>
+                      <a:endParaRPr lang="en-IN"/>
+                    </a:p>
+                  </a:txBody>
+                  <a:tcPr>
+                    <a:lnL w="12700" cap="flat" cmpd="sng" algn="ctr">
+                      <a:solidFill>
+                        <a:schemeClr val="tx1"/>
+                      </a:solidFill>
+                      <a:prstDash val="solid"/>
+                      <a:round/>
+                      <a:headEnd type="none" w="med" len="med"/>
+                      <a:tailEnd type="none" w="med" len="med"/>
+                    </a:lnL>
+                    <a:lnR w="12700" cap="flat" cmpd="sng" algn="ctr">
+                      <a:solidFill>
+                        <a:schemeClr val="tx1"/>
+                      </a:solidFill>
+                      <a:prstDash val="solid"/>
+                      <a:round/>
+                      <a:headEnd type="none" w="med" len="med"/>
+                      <a:tailEnd type="none" w="med" len="med"/>
+                    </a:lnR>
+                    <a:lnT w="12700" cap="flat" cmpd="sng" algn="ctr">
+                      <a:solidFill>
+                        <a:schemeClr val="tx1"/>
+                      </a:solidFill>
+                      <a:prstDash val="solid"/>
+                      <a:round/>
+                      <a:headEnd type="none" w="med" len="med"/>
+                      <a:tailEnd type="none" w="med" len="med"/>
+                    </a:lnT>
+                    <a:lnB w="12700" cap="flat" cmpd="sng" algn="ctr">
+                      <a:solidFill>
+                        <a:schemeClr val="tx1"/>
+                      </a:solidFill>
+                      <a:prstDash val="solid"/>
+                      <a:round/>
+                      <a:headEnd type="none" w="med" len="med"/>
+                      <a:tailEnd type="none" w="med" len="med"/>
+                    </a:lnB>
+                    <a:solidFill>
+                      <a:srgbClr val="8FAADC"/>
+                    </a:solidFill>
+                  </a:tcPr>
+                </a:tc>
+                <a:tc>
+                  <a:txBody>
+                    <a:bodyPr/>
+                    <a:lstStyle/>
+                    <a:p>
+                      <a:endParaRPr lang="en-IN"/>
+                    </a:p>
+                  </a:txBody>
+                  <a:tcPr>
+                    <a:lnL w="12700" cap="flat" cmpd="sng" algn="ctr">
+                      <a:solidFill>
+                        <a:schemeClr val="tx1"/>
+                      </a:solidFill>
+                      <a:prstDash val="solid"/>
+                      <a:round/>
+                      <a:headEnd type="none" w="med" len="med"/>
+                      <a:tailEnd type="none" w="med" len="med"/>
+                    </a:lnL>
+                    <a:lnR w="12700" cap="flat" cmpd="sng" algn="ctr">
+                      <a:solidFill>
+                        <a:schemeClr val="tx1"/>
+                      </a:solidFill>
+                      <a:prstDash val="solid"/>
+                      <a:round/>
+                      <a:headEnd type="none" w="med" len="med"/>
+                      <a:tailEnd type="none" w="med" len="med"/>
+                    </a:lnR>
+                    <a:lnT w="12700" cap="flat" cmpd="sng" algn="ctr">
+                      <a:solidFill>
+                        <a:schemeClr val="tx1"/>
+                      </a:solidFill>
+                      <a:prstDash val="solid"/>
+                      <a:round/>
+                      <a:headEnd type="none" w="med" len="med"/>
+                      <a:tailEnd type="none" w="med" len="med"/>
+                    </a:lnT>
+                    <a:lnB w="12700" cap="flat" cmpd="sng" algn="ctr">
+                      <a:solidFill>
+                        <a:schemeClr val="tx1"/>
+                      </a:solidFill>
+                      <a:prstDash val="solid"/>
+                      <a:round/>
+                      <a:headEnd type="none" w="med" len="med"/>
+                      <a:tailEnd type="none" w="med" len="med"/>
+                    </a:lnB>
+                    <a:solidFill>
+                      <a:srgbClr val="8FAADC"/>
+                    </a:solidFill>
+                  </a:tcPr>
+                </a:tc>
+                <a:tc>
+                  <a:txBody>
+                    <a:bodyPr/>
+                    <a:lstStyle/>
+                    <a:p>
+                      <a:endParaRPr lang="en-IN" dirty="0"/>
+                    </a:p>
+                  </a:txBody>
+                  <a:tcPr>
+                    <a:lnL w="12700" cap="flat" cmpd="sng" algn="ctr">
+                      <a:solidFill>
+                        <a:schemeClr val="tx1"/>
+                      </a:solidFill>
+                      <a:prstDash val="solid"/>
+                      <a:round/>
+                      <a:headEnd type="none" w="med" len="med"/>
+                      <a:tailEnd type="none" w="med" len="med"/>
+                    </a:lnL>
+                    <a:lnR w="12700" cap="flat" cmpd="sng" algn="ctr">
+                      <a:solidFill>
+                        <a:schemeClr val="tx1"/>
+                      </a:solidFill>
+                      <a:prstDash val="solid"/>
+                      <a:round/>
+                      <a:headEnd type="none" w="med" len="med"/>
+                      <a:tailEnd type="none" w="med" len="med"/>
+                    </a:lnR>
+                    <a:lnT w="12700" cap="flat" cmpd="sng" algn="ctr">
+                      <a:solidFill>
+                        <a:schemeClr val="tx1"/>
+                      </a:solidFill>
+                      <a:prstDash val="solid"/>
+                      <a:round/>
+                      <a:headEnd type="none" w="med" len="med"/>
+                      <a:tailEnd type="none" w="med" len="med"/>
+                    </a:lnT>
+                    <a:lnB w="12700" cap="flat" cmpd="sng" algn="ctr">
+                      <a:solidFill>
+                        <a:schemeClr val="tx1"/>
+                      </a:solidFill>
+                      <a:prstDash val="solid"/>
+                      <a:round/>
+                      <a:headEnd type="none" w="med" len="med"/>
+                      <a:tailEnd type="none" w="med" len="med"/>
+                    </a:lnB>
+                    <a:solidFill>
+                      <a:srgbClr val="8FAADC"/>
+                    </a:solidFill>
+                  </a:tcPr>
+                </a:tc>
+                <a:tc>
+                  <a:txBody>
+                    <a:bodyPr/>
+                    <a:lstStyle/>
+                    <a:p>
+                      <a:endParaRPr lang="en-IN" dirty="0"/>
+                    </a:p>
+                  </a:txBody>
+                  <a:tcPr>
+                    <a:lnL w="12700" cap="flat" cmpd="sng" algn="ctr">
+                      <a:solidFill>
+                        <a:schemeClr val="tx1"/>
+                      </a:solidFill>
+                      <a:prstDash val="solid"/>
+                      <a:round/>
+                      <a:headEnd type="none" w="med" len="med"/>
+                      <a:tailEnd type="none" w="med" len="med"/>
+                    </a:lnL>
+                    <a:lnR w="12700" cap="flat" cmpd="sng" algn="ctr">
+                      <a:solidFill>
+                        <a:schemeClr val="tx1"/>
+                      </a:solidFill>
+                      <a:prstDash val="solid"/>
+                      <a:round/>
+                      <a:headEnd type="none" w="med" len="med"/>
+                      <a:tailEnd type="none" w="med" len="med"/>
+                    </a:lnR>
+                    <a:lnT w="12700" cap="flat" cmpd="sng" algn="ctr">
+                      <a:solidFill>
+                        <a:schemeClr val="tx1"/>
+                      </a:solidFill>
+                      <a:prstDash val="solid"/>
+                      <a:round/>
+                      <a:headEnd type="none" w="med" len="med"/>
+                      <a:tailEnd type="none" w="med" len="med"/>
+                    </a:lnT>
+                    <a:lnB w="12700" cap="flat" cmpd="sng" algn="ctr">
+                      <a:solidFill>
+                        <a:schemeClr val="tx1"/>
+                      </a:solidFill>
+                      <a:prstDash val="solid"/>
+                      <a:round/>
+                      <a:headEnd type="none" w="med" len="med"/>
+                      <a:tailEnd type="none" w="med" len="med"/>
+                    </a:lnB>
+                    <a:solidFill>
+                      <a:srgbClr val="8FAADC"/>
+                    </a:solidFill>
+                  </a:tcPr>
+                </a:tc>
+                <a:tc>
+                  <a:txBody>
+                    <a:bodyPr/>
+                    <a:lstStyle/>
+                    <a:p>
+                      <a:endParaRPr lang="en-IN"/>
+                    </a:p>
+                  </a:txBody>
+                  <a:tcPr>
+                    <a:lnL w="12700" cap="flat" cmpd="sng" algn="ctr">
+                      <a:solidFill>
+                        <a:schemeClr val="tx1"/>
+                      </a:solidFill>
+                      <a:prstDash val="solid"/>
+                      <a:round/>
+                      <a:headEnd type="none" w="med" len="med"/>
+                      <a:tailEnd type="none" w="med" len="med"/>
+                    </a:lnL>
+                    <a:lnR w="12700" cap="flat" cmpd="sng" algn="ctr">
+                      <a:solidFill>
+                        <a:schemeClr val="tx1"/>
+                      </a:solidFill>
+                      <a:prstDash val="solid"/>
+                      <a:round/>
+                      <a:headEnd type="none" w="med" len="med"/>
+                      <a:tailEnd type="none" w="med" len="med"/>
+                    </a:lnR>
+                    <a:lnT w="12700" cap="flat" cmpd="sng" algn="ctr">
+                      <a:solidFill>
+                        <a:schemeClr val="tx1"/>
+                      </a:solidFill>
+                      <a:prstDash val="solid"/>
+                      <a:round/>
+                      <a:headEnd type="none" w="med" len="med"/>
+                      <a:tailEnd type="none" w="med" len="med"/>
+                    </a:lnT>
+                    <a:lnB w="12700" cap="flat" cmpd="sng" algn="ctr">
+                      <a:solidFill>
+                        <a:schemeClr val="tx1"/>
+                      </a:solidFill>
+                      <a:prstDash val="solid"/>
+                      <a:round/>
+                      <a:headEnd type="none" w="med" len="med"/>
+                      <a:tailEnd type="none" w="med" len="med"/>
+                    </a:lnB>
+                    <a:solidFill>
+                      <a:srgbClr val="8FAADC"/>
+                    </a:solidFill>
+                  </a:tcPr>
+                </a:tc>
+                <a:extLst>
+                  <a:ext uri="{0D108BD9-81ED-4DB2-BD59-A6C34878D82A}">
+                    <a16:rowId xmlns:a16="http://schemas.microsoft.com/office/drawing/2014/main" val="1170336215"/>
+                  </a:ext>
+                </a:extLst>
+              </a:tr>
+              <a:tr h="370840">
+                <a:tc>
+                  <a:txBody>
+                    <a:bodyPr/>
+                    <a:lstStyle/>
+                    <a:p>
+                      <a:endParaRPr lang="en-IN" dirty="0"/>
+                    </a:p>
+                  </a:txBody>
+                  <a:tcPr>
+                    <a:lnL w="12700" cap="flat" cmpd="sng" algn="ctr">
+                      <a:solidFill>
+                        <a:schemeClr val="tx1"/>
+                      </a:solidFill>
+                      <a:prstDash val="solid"/>
+                      <a:round/>
+                      <a:headEnd type="none" w="med" len="med"/>
+                      <a:tailEnd type="none" w="med" len="med"/>
+                    </a:lnL>
+                    <a:lnR w="12700" cap="flat" cmpd="sng" algn="ctr">
+                      <a:solidFill>
+                        <a:schemeClr val="tx1"/>
+                      </a:solidFill>
+                      <a:prstDash val="solid"/>
+                      <a:round/>
+                      <a:headEnd type="none" w="med" len="med"/>
+                      <a:tailEnd type="none" w="med" len="med"/>
+                    </a:lnR>
+                    <a:lnT w="12700" cap="flat" cmpd="sng" algn="ctr">
+                      <a:solidFill>
+                        <a:schemeClr val="tx1"/>
+                      </a:solidFill>
+                      <a:prstDash val="solid"/>
+                      <a:round/>
+                      <a:headEnd type="none" w="med" len="med"/>
+                      <a:tailEnd type="none" w="med" len="med"/>
+                    </a:lnT>
+                    <a:lnB w="12700" cap="flat" cmpd="sng" algn="ctr">
+                      <a:solidFill>
+                        <a:schemeClr val="tx1"/>
+                      </a:solidFill>
+                      <a:prstDash val="solid"/>
+                      <a:round/>
+                      <a:headEnd type="none" w="med" len="med"/>
+                      <a:tailEnd type="none" w="med" len="med"/>
+                    </a:lnB>
+                    <a:solidFill>
+                      <a:srgbClr val="8FAADC"/>
+                    </a:solidFill>
+                  </a:tcPr>
+                </a:tc>
+                <a:tc>
+                  <a:txBody>
+                    <a:bodyPr/>
+                    <a:lstStyle/>
+                    <a:p>
+                      <a:endParaRPr lang="en-IN" dirty="0"/>
+                    </a:p>
+                  </a:txBody>
+                  <a:tcPr>
+                    <a:lnL w="12700" cap="flat" cmpd="sng" algn="ctr">
+                      <a:solidFill>
+                        <a:schemeClr val="tx1"/>
+                      </a:solidFill>
+                      <a:prstDash val="solid"/>
+                      <a:round/>
+                      <a:headEnd type="none" w="med" len="med"/>
+                      <a:tailEnd type="none" w="med" len="med"/>
+                    </a:lnL>
+                    <a:lnR w="12700" cap="flat" cmpd="sng" algn="ctr">
+                      <a:solidFill>
+                        <a:schemeClr val="tx1"/>
+                      </a:solidFill>
+                      <a:prstDash val="solid"/>
+                      <a:round/>
+                      <a:headEnd type="none" w="med" len="med"/>
+                      <a:tailEnd type="none" w="med" len="med"/>
+                    </a:lnR>
+                    <a:lnT w="12700" cap="flat" cmpd="sng" algn="ctr">
+                      <a:solidFill>
+                        <a:schemeClr val="tx1"/>
+                      </a:solidFill>
+                      <a:prstDash val="solid"/>
+                      <a:round/>
+                      <a:headEnd type="none" w="med" len="med"/>
+                      <a:tailEnd type="none" w="med" len="med"/>
+                    </a:lnT>
+                    <a:lnB w="12700" cap="flat" cmpd="sng" algn="ctr">
+                      <a:solidFill>
+                        <a:schemeClr val="tx1"/>
+                      </a:solidFill>
+                      <a:prstDash val="solid"/>
+                      <a:round/>
+                      <a:headEnd type="none" w="med" len="med"/>
+                      <a:tailEnd type="none" w="med" len="med"/>
+                    </a:lnB>
+                    <a:solidFill>
+                      <a:srgbClr val="8FAADC"/>
+                    </a:solidFill>
+                  </a:tcPr>
+                </a:tc>
+                <a:tc>
+                  <a:txBody>
+                    <a:bodyPr/>
+                    <a:lstStyle/>
+                    <a:p>
+                      <a:endParaRPr lang="en-IN"/>
+                    </a:p>
+                  </a:txBody>
+                  <a:tcPr>
+                    <a:lnL w="12700" cap="flat" cmpd="sng" algn="ctr">
+                      <a:solidFill>
+                        <a:schemeClr val="tx1"/>
+                      </a:solidFill>
+                      <a:prstDash val="solid"/>
+                      <a:round/>
+                      <a:headEnd type="none" w="med" len="med"/>
+                      <a:tailEnd type="none" w="med" len="med"/>
+                    </a:lnL>
+                    <a:lnR w="12700" cap="flat" cmpd="sng" algn="ctr">
+                      <a:solidFill>
+                        <a:schemeClr val="tx1"/>
+                      </a:solidFill>
+                      <a:prstDash val="solid"/>
+                      <a:round/>
+                      <a:headEnd type="none" w="med" len="med"/>
+                      <a:tailEnd type="none" w="med" len="med"/>
+                    </a:lnR>
+                    <a:lnT w="12700" cap="flat" cmpd="sng" algn="ctr">
+                      <a:solidFill>
+                        <a:schemeClr val="tx1"/>
+                      </a:solidFill>
+                      <a:prstDash val="solid"/>
+                      <a:round/>
+                      <a:headEnd type="none" w="med" len="med"/>
+                      <a:tailEnd type="none" w="med" len="med"/>
+                    </a:lnT>
+                    <a:lnB w="12700" cap="flat" cmpd="sng" algn="ctr">
+                      <a:solidFill>
+                        <a:schemeClr val="tx1"/>
+                      </a:solidFill>
+                      <a:prstDash val="solid"/>
+                      <a:round/>
+                      <a:headEnd type="none" w="med" len="med"/>
+                      <a:tailEnd type="none" w="med" len="med"/>
+                    </a:lnB>
+                    <a:solidFill>
+                      <a:srgbClr val="8FAADC"/>
+                    </a:solidFill>
+                  </a:tcPr>
+                </a:tc>
+                <a:tc>
+                  <a:txBody>
+                    <a:bodyPr/>
+                    <a:lstStyle/>
+                    <a:p>
+                      <a:endParaRPr lang="en-IN" dirty="0"/>
+                    </a:p>
+                  </a:txBody>
+                  <a:tcPr>
+                    <a:lnL w="12700" cap="flat" cmpd="sng" algn="ctr">
+                      <a:solidFill>
+                        <a:schemeClr val="tx1"/>
+                      </a:solidFill>
+                      <a:prstDash val="solid"/>
+                      <a:round/>
+                      <a:headEnd type="none" w="med" len="med"/>
+                      <a:tailEnd type="none" w="med" len="med"/>
+                    </a:lnL>
+                    <a:lnR w="12700" cap="flat" cmpd="sng" algn="ctr">
+                      <a:solidFill>
+                        <a:schemeClr val="tx1"/>
+                      </a:solidFill>
+                      <a:prstDash val="solid"/>
+                      <a:round/>
+                      <a:headEnd type="none" w="med" len="med"/>
+                      <a:tailEnd type="none" w="med" len="med"/>
+                    </a:lnR>
+                    <a:lnT w="12700" cap="flat" cmpd="sng" algn="ctr">
+                      <a:solidFill>
+                        <a:schemeClr val="tx1"/>
+                      </a:solidFill>
+                      <a:prstDash val="solid"/>
+                      <a:round/>
+                      <a:headEnd type="none" w="med" len="med"/>
+                      <a:tailEnd type="none" w="med" len="med"/>
+                    </a:lnT>
+                    <a:lnB w="12700" cap="flat" cmpd="sng" algn="ctr">
+                      <a:solidFill>
+                        <a:schemeClr val="tx1"/>
+                      </a:solidFill>
+                      <a:prstDash val="solid"/>
+                      <a:round/>
+                      <a:headEnd type="none" w="med" len="med"/>
+                      <a:tailEnd type="none" w="med" len="med"/>
+                    </a:lnB>
+                    <a:solidFill>
+                      <a:srgbClr val="8FAADC"/>
+                    </a:solidFill>
+                  </a:tcPr>
+                </a:tc>
+                <a:tc>
+                  <a:txBody>
+                    <a:bodyPr/>
+                    <a:lstStyle/>
+                    <a:p>
+                      <a:endParaRPr lang="en-IN"/>
+                    </a:p>
+                  </a:txBody>
+                  <a:tcPr>
+                    <a:lnL w="12700" cap="flat" cmpd="sng" algn="ctr">
+                      <a:solidFill>
+                        <a:schemeClr val="tx1"/>
+                      </a:solidFill>
+                      <a:prstDash val="solid"/>
+                      <a:round/>
+                      <a:headEnd type="none" w="med" len="med"/>
+                      <a:tailEnd type="none" w="med" len="med"/>
+                    </a:lnL>
+                    <a:lnR w="12700" cap="flat" cmpd="sng" algn="ctr">
+                      <a:solidFill>
+                        <a:schemeClr val="tx1"/>
+                      </a:solidFill>
+                      <a:prstDash val="solid"/>
+                      <a:round/>
+                      <a:headEnd type="none" w="med" len="med"/>
+                      <a:tailEnd type="none" w="med" len="med"/>
+                    </a:lnR>
+                    <a:lnT w="12700" cap="flat" cmpd="sng" algn="ctr">
+                      <a:solidFill>
+                        <a:schemeClr val="tx1"/>
+                      </a:solidFill>
+                      <a:prstDash val="solid"/>
+                      <a:round/>
+                      <a:headEnd type="none" w="med" len="med"/>
+                      <a:tailEnd type="none" w="med" len="med"/>
+                    </a:lnT>
+                    <a:lnB w="12700" cap="flat" cmpd="sng" algn="ctr">
+                      <a:solidFill>
+                        <a:schemeClr val="tx1"/>
+                      </a:solidFill>
+                      <a:prstDash val="solid"/>
+                      <a:round/>
+                      <a:headEnd type="none" w="med" len="med"/>
+                      <a:tailEnd type="none" w="med" len="med"/>
+                    </a:lnB>
+                    <a:solidFill>
+                      <a:srgbClr val="8FAADC"/>
+                    </a:solidFill>
+                  </a:tcPr>
+                </a:tc>
+                <a:extLst>
+                  <a:ext uri="{0D108BD9-81ED-4DB2-BD59-A6C34878D82A}">
+                    <a16:rowId xmlns:a16="http://schemas.microsoft.com/office/drawing/2014/main" val="2363680877"/>
+                  </a:ext>
+                </a:extLst>
+              </a:tr>
+              <a:tr h="370840">
+                <a:tc>
+                  <a:txBody>
+                    <a:bodyPr/>
+                    <a:lstStyle/>
+                    <a:p>
+                      <a:endParaRPr lang="en-IN"/>
+                    </a:p>
+                  </a:txBody>
+                  <a:tcPr>
+                    <a:lnL w="12700" cap="flat" cmpd="sng" algn="ctr">
+                      <a:solidFill>
+                        <a:schemeClr val="tx1"/>
+                      </a:solidFill>
+                      <a:prstDash val="solid"/>
+                      <a:round/>
+                      <a:headEnd type="none" w="med" len="med"/>
+                      <a:tailEnd type="none" w="med" len="med"/>
+                    </a:lnL>
+                    <a:lnR w="12700" cap="flat" cmpd="sng" algn="ctr">
+                      <a:solidFill>
+                        <a:schemeClr val="tx1"/>
+                      </a:solidFill>
+                      <a:prstDash val="solid"/>
+                      <a:round/>
+                      <a:headEnd type="none" w="med" len="med"/>
+                      <a:tailEnd type="none" w="med" len="med"/>
+                    </a:lnR>
+                    <a:lnT w="12700" cap="flat" cmpd="sng" algn="ctr">
+                      <a:solidFill>
+                        <a:schemeClr val="tx1"/>
+                      </a:solidFill>
+                      <a:prstDash val="solid"/>
+                      <a:round/>
+                      <a:headEnd type="none" w="med" len="med"/>
+                      <a:tailEnd type="none" w="med" len="med"/>
+                    </a:lnT>
+                    <a:lnB w="12700" cap="flat" cmpd="sng" algn="ctr">
+                      <a:solidFill>
+                        <a:schemeClr val="tx1"/>
+                      </a:solidFill>
+                      <a:prstDash val="solid"/>
+                      <a:round/>
+                      <a:headEnd type="none" w="med" len="med"/>
+                      <a:tailEnd type="none" w="med" len="med"/>
+                    </a:lnB>
+                    <a:solidFill>
+                      <a:srgbClr val="8FAADC"/>
+                    </a:solidFill>
+                  </a:tcPr>
+                </a:tc>
+                <a:tc>
+                  <a:txBody>
+                    <a:bodyPr/>
+                    <a:lstStyle/>
+                    <a:p>
+                      <a:endParaRPr lang="en-IN"/>
+                    </a:p>
+                  </a:txBody>
+                  <a:tcPr>
+                    <a:lnL w="12700" cap="flat" cmpd="sng" algn="ctr">
+                      <a:solidFill>
+                        <a:schemeClr val="tx1"/>
+                      </a:solidFill>
+                      <a:prstDash val="solid"/>
+                      <a:round/>
+                      <a:headEnd type="none" w="med" len="med"/>
+                      <a:tailEnd type="none" w="med" len="med"/>
+                    </a:lnL>
+                    <a:lnR w="12700" cap="flat" cmpd="sng" algn="ctr">
+                      <a:solidFill>
+                        <a:schemeClr val="tx1"/>
+                      </a:solidFill>
+                      <a:prstDash val="solid"/>
+                      <a:round/>
+                      <a:headEnd type="none" w="med" len="med"/>
+                      <a:tailEnd type="none" w="med" len="med"/>
+                    </a:lnR>
+                    <a:lnT w="12700" cap="flat" cmpd="sng" algn="ctr">
+                      <a:solidFill>
+                        <a:schemeClr val="tx1"/>
+                      </a:solidFill>
+                      <a:prstDash val="solid"/>
+                      <a:round/>
+                      <a:headEnd type="none" w="med" len="med"/>
+                      <a:tailEnd type="none" w="med" len="med"/>
+                    </a:lnT>
+                    <a:lnB w="12700" cap="flat" cmpd="sng" algn="ctr">
+                      <a:solidFill>
+                        <a:schemeClr val="tx1"/>
+                      </a:solidFill>
+                      <a:prstDash val="solid"/>
+                      <a:round/>
+                      <a:headEnd type="none" w="med" len="med"/>
+                      <a:tailEnd type="none" w="med" len="med"/>
+                    </a:lnB>
+                    <a:solidFill>
+                      <a:srgbClr val="8FAADC"/>
+                    </a:solidFill>
+                  </a:tcPr>
+                </a:tc>
+                <a:tc>
+                  <a:txBody>
+                    <a:bodyPr/>
+                    <a:lstStyle/>
+                    <a:p>
+                      <a:endParaRPr lang="en-IN"/>
+                    </a:p>
+                  </a:txBody>
+                  <a:tcPr>
+                    <a:lnL w="12700" cap="flat" cmpd="sng" algn="ctr">
+                      <a:solidFill>
+                        <a:schemeClr val="tx1"/>
+                      </a:solidFill>
+                      <a:prstDash val="solid"/>
+                      <a:round/>
+                      <a:headEnd type="none" w="med" len="med"/>
+                      <a:tailEnd type="none" w="med" len="med"/>
+                    </a:lnL>
+                    <a:lnR w="12700" cap="flat" cmpd="sng" algn="ctr">
+                      <a:solidFill>
+                        <a:schemeClr val="tx1"/>
+                      </a:solidFill>
+                      <a:prstDash val="solid"/>
+                      <a:round/>
+                      <a:headEnd type="none" w="med" len="med"/>
+                      <a:tailEnd type="none" w="med" len="med"/>
+                    </a:lnR>
+                    <a:lnT w="12700" cap="flat" cmpd="sng" algn="ctr">
+                      <a:solidFill>
+                        <a:schemeClr val="tx1"/>
+                      </a:solidFill>
+                      <a:prstDash val="solid"/>
+                      <a:round/>
+                      <a:headEnd type="none" w="med" len="med"/>
+                      <a:tailEnd type="none" w="med" len="med"/>
+                    </a:lnT>
+                    <a:lnB w="12700" cap="flat" cmpd="sng" algn="ctr">
+                      <a:solidFill>
+                        <a:schemeClr val="tx1"/>
+                      </a:solidFill>
+                      <a:prstDash val="solid"/>
+                      <a:round/>
+                      <a:headEnd type="none" w="med" len="med"/>
+                      <a:tailEnd type="none" w="med" len="med"/>
+                    </a:lnB>
+                    <a:solidFill>
+                      <a:srgbClr val="8FAADC"/>
+                    </a:solidFill>
+                  </a:tcPr>
+                </a:tc>
+                <a:tc>
+                  <a:txBody>
+                    <a:bodyPr/>
+                    <a:lstStyle/>
+                    <a:p>
+                      <a:endParaRPr lang="en-IN" dirty="0"/>
+                    </a:p>
+                  </a:txBody>
+                  <a:tcPr>
+                    <a:lnL w="12700" cap="flat" cmpd="sng" algn="ctr">
+                      <a:solidFill>
+                        <a:schemeClr val="tx1"/>
+                      </a:solidFill>
+                      <a:prstDash val="solid"/>
+                      <a:round/>
+                      <a:headEnd type="none" w="med" len="med"/>
+                      <a:tailEnd type="none" w="med" len="med"/>
+                    </a:lnL>
+                    <a:lnR w="12700" cap="flat" cmpd="sng" algn="ctr">
+                      <a:solidFill>
+                        <a:schemeClr val="tx1"/>
+                      </a:solidFill>
+                      <a:prstDash val="solid"/>
+                      <a:round/>
+                      <a:headEnd type="none" w="med" len="med"/>
+                      <a:tailEnd type="none" w="med" len="med"/>
+                    </a:lnR>
+                    <a:lnT w="12700" cap="flat" cmpd="sng" algn="ctr">
+                      <a:solidFill>
+                        <a:schemeClr val="tx1"/>
+                      </a:solidFill>
+                      <a:prstDash val="solid"/>
+                      <a:round/>
+                      <a:headEnd type="none" w="med" len="med"/>
+                      <a:tailEnd type="none" w="med" len="med"/>
+                    </a:lnT>
+                    <a:lnB w="12700" cap="flat" cmpd="sng" algn="ctr">
+                      <a:solidFill>
+                        <a:schemeClr val="tx1"/>
+                      </a:solidFill>
+                      <a:prstDash val="solid"/>
+                      <a:round/>
+                      <a:headEnd type="none" w="med" len="med"/>
+                      <a:tailEnd type="none" w="med" len="med"/>
+                    </a:lnB>
+                    <a:solidFill>
+                      <a:srgbClr val="8FAADC"/>
+                    </a:solidFill>
+                  </a:tcPr>
+                </a:tc>
+                <a:tc>
+                  <a:txBody>
+                    <a:bodyPr/>
+                    <a:lstStyle/>
+                    <a:p>
+                      <a:endParaRPr lang="en-IN" dirty="0"/>
+                    </a:p>
+                  </a:txBody>
+                  <a:tcPr>
+                    <a:lnL w="12700" cap="flat" cmpd="sng" algn="ctr">
+                      <a:solidFill>
+                        <a:schemeClr val="tx1"/>
+                      </a:solidFill>
+                      <a:prstDash val="solid"/>
+                      <a:round/>
+                      <a:headEnd type="none" w="med" len="med"/>
+                      <a:tailEnd type="none" w="med" len="med"/>
+                    </a:lnL>
+                    <a:lnR w="12700" cap="flat" cmpd="sng" algn="ctr">
+                      <a:solidFill>
+                        <a:schemeClr val="tx1"/>
+                      </a:solidFill>
+                      <a:prstDash val="solid"/>
+                      <a:round/>
+                      <a:headEnd type="none" w="med" len="med"/>
+                      <a:tailEnd type="none" w="med" len="med"/>
+                    </a:lnR>
+                    <a:lnT w="12700" cap="flat" cmpd="sng" algn="ctr">
+                      <a:solidFill>
+                        <a:schemeClr val="tx1"/>
+                      </a:solidFill>
+                      <a:prstDash val="solid"/>
+                      <a:round/>
+                      <a:headEnd type="none" w="med" len="med"/>
+                      <a:tailEnd type="none" w="med" len="med"/>
+                    </a:lnT>
+                    <a:lnB w="12700" cap="flat" cmpd="sng" algn="ctr">
+                      <a:solidFill>
+                        <a:schemeClr val="tx1"/>
+                      </a:solidFill>
+                      <a:prstDash val="solid"/>
+                      <a:round/>
+                      <a:headEnd type="none" w="med" len="med"/>
+                      <a:tailEnd type="none" w="med" len="med"/>
+                    </a:lnB>
+                    <a:solidFill>
+                      <a:srgbClr val="8FAADC"/>
+                    </a:solidFill>
+                  </a:tcPr>
+                </a:tc>
+                <a:extLst>
+                  <a:ext uri="{0D108BD9-81ED-4DB2-BD59-A6C34878D82A}">
+                    <a16:rowId xmlns:a16="http://schemas.microsoft.com/office/drawing/2014/main" val="2031315940"/>
+                  </a:ext>
+                </a:extLst>
+              </a:tr>
+              <a:tr h="370840">
+                <a:tc>
+                  <a:txBody>
+                    <a:bodyPr/>
+                    <a:lstStyle/>
+                    <a:p>
+                      <a:endParaRPr lang="en-IN" dirty="0"/>
+                    </a:p>
+                  </a:txBody>
+                  <a:tcPr>
+                    <a:lnL w="12700" cap="flat" cmpd="sng" algn="ctr">
+                      <a:solidFill>
+                        <a:schemeClr val="tx1"/>
+                      </a:solidFill>
+                      <a:prstDash val="solid"/>
+                      <a:round/>
+                      <a:headEnd type="none" w="med" len="med"/>
+                      <a:tailEnd type="none" w="med" len="med"/>
+                    </a:lnL>
+                    <a:lnR w="12700" cap="flat" cmpd="sng" algn="ctr">
+                      <a:solidFill>
+                        <a:schemeClr val="tx1"/>
+                      </a:solidFill>
+                      <a:prstDash val="solid"/>
+                      <a:round/>
+                      <a:headEnd type="none" w="med" len="med"/>
+                      <a:tailEnd type="none" w="med" len="med"/>
+                    </a:lnR>
+                    <a:lnT w="12700" cap="flat" cmpd="sng" algn="ctr">
+                      <a:solidFill>
+                        <a:schemeClr val="tx1"/>
+                      </a:solidFill>
+                      <a:prstDash val="solid"/>
+                      <a:round/>
+                      <a:headEnd type="none" w="med" len="med"/>
+                      <a:tailEnd type="none" w="med" len="med"/>
+                    </a:lnT>
+                    <a:lnB w="12700" cap="flat" cmpd="sng" algn="ctr">
+                      <a:solidFill>
+                        <a:schemeClr val="tx1"/>
+                      </a:solidFill>
+                      <a:prstDash val="solid"/>
+                      <a:round/>
+                      <a:headEnd type="none" w="med" len="med"/>
+                      <a:tailEnd type="none" w="med" len="med"/>
+                    </a:lnB>
+                    <a:solidFill>
+                      <a:srgbClr val="8FAADC"/>
+                    </a:solidFill>
+                  </a:tcPr>
+                </a:tc>
+                <a:tc>
+                  <a:txBody>
+                    <a:bodyPr/>
+                    <a:lstStyle/>
+                    <a:p>
+                      <a:endParaRPr lang="en-IN"/>
+                    </a:p>
+                  </a:txBody>
+                  <a:tcPr>
+                    <a:lnL w="12700" cap="flat" cmpd="sng" algn="ctr">
+                      <a:solidFill>
+                        <a:schemeClr val="tx1"/>
+                      </a:solidFill>
+                      <a:prstDash val="solid"/>
+                      <a:round/>
+                      <a:headEnd type="none" w="med" len="med"/>
+                      <a:tailEnd type="none" w="med" len="med"/>
+                    </a:lnL>
+                    <a:lnR w="12700" cap="flat" cmpd="sng" algn="ctr">
+                      <a:solidFill>
+                        <a:schemeClr val="tx1"/>
+                      </a:solidFill>
+                      <a:prstDash val="solid"/>
+                      <a:round/>
+                      <a:headEnd type="none" w="med" len="med"/>
+                      <a:tailEnd type="none" w="med" len="med"/>
+                    </a:lnR>
+                    <a:lnT w="12700" cap="flat" cmpd="sng" algn="ctr">
+                      <a:solidFill>
+                        <a:schemeClr val="tx1"/>
+                      </a:solidFill>
+                      <a:prstDash val="solid"/>
+                      <a:round/>
+                      <a:headEnd type="none" w="med" len="med"/>
+                      <a:tailEnd type="none" w="med" len="med"/>
+                    </a:lnT>
+                    <a:lnB w="12700" cap="flat" cmpd="sng" algn="ctr">
+                      <a:solidFill>
+                        <a:schemeClr val="tx1"/>
+                      </a:solidFill>
+                      <a:prstDash val="solid"/>
+                      <a:round/>
+                      <a:headEnd type="none" w="med" len="med"/>
+                      <a:tailEnd type="none" w="med" len="med"/>
+                    </a:lnB>
+                    <a:solidFill>
+                      <a:srgbClr val="8FAADC"/>
+                    </a:solidFill>
+                  </a:tcPr>
+                </a:tc>
+                <a:tc>
+                  <a:txBody>
+                    <a:bodyPr/>
+                    <a:lstStyle/>
+                    <a:p>
+                      <a:endParaRPr lang="en-IN"/>
+                    </a:p>
+                  </a:txBody>
+                  <a:tcPr>
+                    <a:lnL w="12700" cap="flat" cmpd="sng" algn="ctr">
+                      <a:solidFill>
+                        <a:schemeClr val="tx1"/>
+                      </a:solidFill>
+                      <a:prstDash val="solid"/>
+                      <a:round/>
+                      <a:headEnd type="none" w="med" len="med"/>
+                      <a:tailEnd type="none" w="med" len="med"/>
+                    </a:lnL>
+                    <a:lnR w="12700" cap="flat" cmpd="sng" algn="ctr">
+                      <a:solidFill>
+                        <a:schemeClr val="tx1"/>
+                      </a:solidFill>
+                      <a:prstDash val="solid"/>
+                      <a:round/>
+                      <a:headEnd type="none" w="med" len="med"/>
+                      <a:tailEnd type="none" w="med" len="med"/>
+                    </a:lnR>
+                    <a:lnT w="12700" cap="flat" cmpd="sng" algn="ctr">
+                      <a:solidFill>
+                        <a:schemeClr val="tx1"/>
+                      </a:solidFill>
+                      <a:prstDash val="solid"/>
+                      <a:round/>
+                      <a:headEnd type="none" w="med" len="med"/>
+                      <a:tailEnd type="none" w="med" len="med"/>
+                    </a:lnT>
+                    <a:lnB w="12700" cap="flat" cmpd="sng" algn="ctr">
+                      <a:solidFill>
+                        <a:schemeClr val="tx1"/>
+                      </a:solidFill>
+                      <a:prstDash val="solid"/>
+                      <a:round/>
+                      <a:headEnd type="none" w="med" len="med"/>
+                      <a:tailEnd type="none" w="med" len="med"/>
+                    </a:lnB>
+                    <a:solidFill>
+                      <a:srgbClr val="8FAADC"/>
+                    </a:solidFill>
+                  </a:tcPr>
+                </a:tc>
+                <a:tc>
+                  <a:txBody>
+                    <a:bodyPr/>
+                    <a:lstStyle/>
+                    <a:p>
+                      <a:endParaRPr lang="en-IN"/>
+                    </a:p>
+                  </a:txBody>
+                  <a:tcPr>
+                    <a:lnL w="12700" cap="flat" cmpd="sng" algn="ctr">
+                      <a:solidFill>
+                        <a:schemeClr val="tx1"/>
+                      </a:solidFill>
+                      <a:prstDash val="solid"/>
+                      <a:round/>
+                      <a:headEnd type="none" w="med" len="med"/>
+                      <a:tailEnd type="none" w="med" len="med"/>
+                    </a:lnL>
+                    <a:lnR w="12700" cap="flat" cmpd="sng" algn="ctr">
+                      <a:solidFill>
+                        <a:schemeClr val="tx1"/>
+                      </a:solidFill>
+                      <a:prstDash val="solid"/>
+                      <a:round/>
+                      <a:headEnd type="none" w="med" len="med"/>
+                      <a:tailEnd type="none" w="med" len="med"/>
+                    </a:lnR>
+                    <a:lnT w="12700" cap="flat" cmpd="sng" algn="ctr">
+                      <a:solidFill>
+                        <a:schemeClr val="tx1"/>
+                      </a:solidFill>
+                      <a:prstDash val="solid"/>
+                      <a:round/>
+                      <a:headEnd type="none" w="med" len="med"/>
+                      <a:tailEnd type="none" w="med" len="med"/>
+                    </a:lnT>
+                    <a:lnB w="12700" cap="flat" cmpd="sng" algn="ctr">
+                      <a:solidFill>
+                        <a:schemeClr val="tx1"/>
+                      </a:solidFill>
+                      <a:prstDash val="solid"/>
+                      <a:round/>
+                      <a:headEnd type="none" w="med" len="med"/>
+                      <a:tailEnd type="none" w="med" len="med"/>
+                    </a:lnB>
+                    <a:solidFill>
+                      <a:srgbClr val="8FAADC"/>
+                    </a:solidFill>
+                  </a:tcPr>
+                </a:tc>
+                <a:tc>
+                  <a:txBody>
+                    <a:bodyPr/>
+                    <a:lstStyle/>
+                    <a:p>
+                      <a:endParaRPr lang="en-IN" dirty="0"/>
+                    </a:p>
+                  </a:txBody>
+                  <a:tcPr>
+                    <a:lnL w="12700" cap="flat" cmpd="sng" algn="ctr">
+                      <a:solidFill>
+                        <a:schemeClr val="tx1"/>
+                      </a:solidFill>
+                      <a:prstDash val="solid"/>
+                      <a:round/>
+                      <a:headEnd type="none" w="med" len="med"/>
+                      <a:tailEnd type="none" w="med" len="med"/>
+                    </a:lnL>
+                    <a:lnR w="12700" cap="flat" cmpd="sng" algn="ctr">
+                      <a:solidFill>
+                        <a:schemeClr val="tx1"/>
+                      </a:solidFill>
+                      <a:prstDash val="solid"/>
+                      <a:round/>
+                      <a:headEnd type="none" w="med" len="med"/>
+                      <a:tailEnd type="none" w="med" len="med"/>
+                    </a:lnR>
+                    <a:lnT w="12700" cap="flat" cmpd="sng" algn="ctr">
+                      <a:solidFill>
+                        <a:schemeClr val="tx1"/>
+                      </a:solidFill>
+                      <a:prstDash val="solid"/>
+                      <a:round/>
+                      <a:headEnd type="none" w="med" len="med"/>
+                      <a:tailEnd type="none" w="med" len="med"/>
+                    </a:lnT>
+                    <a:lnB w="12700" cap="flat" cmpd="sng" algn="ctr">
+                      <a:solidFill>
+                        <a:schemeClr val="tx1"/>
+                      </a:solidFill>
+                      <a:prstDash val="solid"/>
+                      <a:round/>
+                      <a:headEnd type="none" w="med" len="med"/>
+                      <a:tailEnd type="none" w="med" len="med"/>
+                    </a:lnB>
+                    <a:solidFill>
+                      <a:srgbClr val="8FAADC"/>
+                    </a:solidFill>
+                  </a:tcPr>
+                </a:tc>
+                <a:extLst>
+                  <a:ext uri="{0D108BD9-81ED-4DB2-BD59-A6C34878D82A}">
+                    <a16:rowId xmlns:a16="http://schemas.microsoft.com/office/drawing/2014/main" val="992374018"/>
+                  </a:ext>
+                </a:extLst>
+              </a:tr>
             </a:tbl>
           </a:graphicData>
         </a:graphic>
       </p:graphicFrame>
       <p:sp>
         <p:nvSpPr>
-          <p:cNvPr id="18" name="Rectangle: Rounded Corners 17">
+          <p:cNvPr id="11" name="Rectangle 10">
             <a:extLst>
               <a:ext uri="{FF2B5EF4-FFF2-40B4-BE49-F238E27FC236}">
-                <a16:creationId xmlns:a16="http://schemas.microsoft.com/office/drawing/2014/main" id="{A45079E6-FE55-D184-7811-D91C2B172D38}"/>
+                <a16:creationId xmlns:a16="http://schemas.microsoft.com/office/drawing/2014/main" id="{328FB500-30F7-9C84-4A7C-E575E1B718D4}"/>
               </a:ext>
             </a:extLst>
           </p:cNvPr>
@@ -29956,10 +32508,10 @@
         </p:nvSpPr>
         <p:spPr>
           <a:xfrm>
-            <a:off x="8915401" y="2204232"/>
-            <a:ext cx="3033346" cy="4202722"/>
+            <a:off x="8974020" y="1914087"/>
+            <a:ext cx="2901461" cy="3337560"/>
           </a:xfrm>
-          <a:prstGeom prst="roundRect">
+          <a:prstGeom prst="rect">
             <a:avLst/>
           </a:prstGeom>
         </p:spPr>
@@ -29990,10 +32542,10 @@
       </p:sp>
       <p:sp>
         <p:nvSpPr>
-          <p:cNvPr id="19" name="Rectangle: Rounded Corners 18">
+          <p:cNvPr id="12" name="Rectangle: Rounded Corners 11">
             <a:extLst>
               <a:ext uri="{FF2B5EF4-FFF2-40B4-BE49-F238E27FC236}">
-                <a16:creationId xmlns:a16="http://schemas.microsoft.com/office/drawing/2014/main" id="{94FF22C4-A85E-2235-9520-22C57759C6DE}"/>
+                <a16:creationId xmlns:a16="http://schemas.microsoft.com/office/drawing/2014/main" id="{09483DB8-DF19-C35B-4C26-EFC3A863BB99}"/>
               </a:ext>
             </a:extLst>
           </p:cNvPr>
@@ -30002,10 +32554,4377 @@
         </p:nvSpPr>
         <p:spPr>
           <a:xfrm>
-            <a:off x="8952034" y="593481"/>
-            <a:ext cx="2664070" cy="1178169"/>
+            <a:off x="10587892" y="1373245"/>
+            <a:ext cx="1301262" cy="370840"/>
           </a:xfrm>
           <a:prstGeom prst="roundRect">
+            <a:avLst/>
+          </a:prstGeom>
+        </p:spPr>
+        <p:style>
+          <a:lnRef idx="2">
+            <a:schemeClr val="accent1">
+              <a:shade val="15000"/>
+            </a:schemeClr>
+          </a:lnRef>
+          <a:fillRef idx="1">
+            <a:schemeClr val="accent1"/>
+          </a:fillRef>
+          <a:effectRef idx="0">
+            <a:schemeClr val="accent1"/>
+          </a:effectRef>
+          <a:fontRef idx="minor">
+            <a:schemeClr val="lt1"/>
+          </a:fontRef>
+        </p:style>
+        <p:txBody>
+          <a:bodyPr rtlCol="0" anchor="ctr"/>
+          <a:lstStyle/>
+          <a:p>
+            <a:pPr algn="ctr"/>
+            <a:r>
+              <a:rPr lang="en-US" dirty="0"/>
+              <a:t>Filters</a:t>
+            </a:r>
+            <a:endParaRPr lang="en-IN" dirty="0"/>
+          </a:p>
+        </p:txBody>
+      </p:sp>
+      <p:sp>
+        <p:nvSpPr>
+          <p:cNvPr id="13" name="Rectangle: Rounded Corners 12">
+            <a:extLst>
+              <a:ext uri="{FF2B5EF4-FFF2-40B4-BE49-F238E27FC236}">
+                <a16:creationId xmlns:a16="http://schemas.microsoft.com/office/drawing/2014/main" id="{BA16ECAA-251B-AF85-993E-0C8DA070CAFE}"/>
+              </a:ext>
+            </a:extLst>
+          </p:cNvPr>
+          <p:cNvSpPr/>
+          <p:nvPr/>
+        </p:nvSpPr>
+        <p:spPr>
+          <a:xfrm>
+            <a:off x="10588479" y="6109944"/>
+            <a:ext cx="1301262" cy="370840"/>
+          </a:xfrm>
+          <a:prstGeom prst="roundRect">
+            <a:avLst/>
+          </a:prstGeom>
+        </p:spPr>
+        <p:style>
+          <a:lnRef idx="2">
+            <a:schemeClr val="accent1">
+              <a:shade val="15000"/>
+            </a:schemeClr>
+          </a:lnRef>
+          <a:fillRef idx="1">
+            <a:schemeClr val="accent1"/>
+          </a:fillRef>
+          <a:effectRef idx="0">
+            <a:schemeClr val="accent1"/>
+          </a:effectRef>
+          <a:fontRef idx="minor">
+            <a:schemeClr val="lt1"/>
+          </a:fontRef>
+        </p:style>
+        <p:txBody>
+          <a:bodyPr rtlCol="0" anchor="ctr"/>
+          <a:lstStyle/>
+          <a:p>
+            <a:pPr algn="ctr"/>
+            <a:r>
+              <a:rPr lang="en-US" dirty="0"/>
+              <a:t>Export</a:t>
+            </a:r>
+            <a:endParaRPr lang="en-IN" dirty="0"/>
+          </a:p>
+        </p:txBody>
+      </p:sp>
+      <p:sp>
+        <p:nvSpPr>
+          <p:cNvPr id="14" name="Rectangle: Rounded Corners 13">
+            <a:extLst>
+              <a:ext uri="{FF2B5EF4-FFF2-40B4-BE49-F238E27FC236}">
+                <a16:creationId xmlns:a16="http://schemas.microsoft.com/office/drawing/2014/main" id="{A27276F0-128B-5C62-E4F3-B7A5ACBCFA8F}"/>
+              </a:ext>
+            </a:extLst>
+          </p:cNvPr>
+          <p:cNvSpPr/>
+          <p:nvPr/>
+        </p:nvSpPr>
+        <p:spPr>
+          <a:xfrm>
+            <a:off x="10588479" y="626327"/>
+            <a:ext cx="1301262" cy="370840"/>
+          </a:xfrm>
+          <a:prstGeom prst="roundRect">
+            <a:avLst/>
+          </a:prstGeom>
+        </p:spPr>
+        <p:style>
+          <a:lnRef idx="2">
+            <a:schemeClr val="accent1">
+              <a:shade val="15000"/>
+            </a:schemeClr>
+          </a:lnRef>
+          <a:fillRef idx="1">
+            <a:schemeClr val="accent1"/>
+          </a:fillRef>
+          <a:effectRef idx="0">
+            <a:schemeClr val="accent1"/>
+          </a:effectRef>
+          <a:fontRef idx="minor">
+            <a:schemeClr val="lt1"/>
+          </a:fontRef>
+        </p:style>
+        <p:txBody>
+          <a:bodyPr rtlCol="0" anchor="ctr"/>
+          <a:lstStyle/>
+          <a:p>
+            <a:pPr algn="ctr"/>
+            <a:r>
+              <a:rPr lang="en-US" dirty="0"/>
+              <a:t>Add</a:t>
+            </a:r>
+            <a:endParaRPr lang="en-IN" dirty="0"/>
+          </a:p>
+        </p:txBody>
+      </p:sp>
+    </p:spTree>
+    <p:extLst>
+      <p:ext uri="{BB962C8B-B14F-4D97-AF65-F5344CB8AC3E}">
+        <p14:creationId xmlns:p14="http://schemas.microsoft.com/office/powerpoint/2010/main" val="2150309207"/>
+      </p:ext>
+    </p:extLst>
+  </p:cSld>
+  <p:clrMapOvr>
+    <a:masterClrMapping/>
+  </p:clrMapOvr>
+</p:sld>
+</file>
+
+<file path=ppt/slides/slide7.xml><?xml version="1.0" encoding="utf-8"?>
+<p:sld xmlns:a="http://schemas.openxmlformats.org/drawingml/2006/main" xmlns:r="http://schemas.openxmlformats.org/officeDocument/2006/relationships" xmlns:p="http://schemas.openxmlformats.org/presentationml/2006/main">
+  <p:cSld>
+    <p:spTree>
+      <p:nvGrpSpPr>
+        <p:cNvPr id="1" name="">
+          <a:extLst>
+            <a:ext uri="{FF2B5EF4-FFF2-40B4-BE49-F238E27FC236}">
+              <a16:creationId xmlns:a16="http://schemas.microsoft.com/office/drawing/2014/main" id="{39818277-322D-7B09-654F-86B5479B7B30}"/>
+            </a:ext>
+          </a:extLst>
+        </p:cNvPr>
+        <p:cNvGrpSpPr/>
+        <p:nvPr/>
+      </p:nvGrpSpPr>
+      <p:grpSpPr>
+        <a:xfrm>
+          <a:off x="0" y="0"/>
+          <a:ext cx="0" cy="0"/>
+          <a:chOff x="0" y="0"/>
+          <a:chExt cx="0" cy="0"/>
+        </a:xfrm>
+      </p:grpSpPr>
+      <p:grpSp>
+        <p:nvGrpSpPr>
+          <p:cNvPr id="2" name="Group 1">
+            <a:extLst>
+              <a:ext uri="{FF2B5EF4-FFF2-40B4-BE49-F238E27FC236}">
+                <a16:creationId xmlns:a16="http://schemas.microsoft.com/office/drawing/2014/main" id="{58AE1C24-45D9-914D-35C8-93CAA616E0A7}"/>
+              </a:ext>
+            </a:extLst>
+          </p:cNvPr>
+          <p:cNvGrpSpPr/>
+          <p:nvPr/>
+        </p:nvGrpSpPr>
+        <p:grpSpPr>
+          <a:xfrm>
+            <a:off x="96714" y="19663"/>
+            <a:ext cx="11989778" cy="6741622"/>
+            <a:chOff x="96714" y="19663"/>
+            <a:chExt cx="11989778" cy="6741622"/>
+          </a:xfrm>
+        </p:grpSpPr>
+        <p:grpSp>
+          <p:nvGrpSpPr>
+            <p:cNvPr id="3" name="Group 2">
+              <a:extLst>
+                <a:ext uri="{FF2B5EF4-FFF2-40B4-BE49-F238E27FC236}">
+                  <a16:creationId xmlns:a16="http://schemas.microsoft.com/office/drawing/2014/main" id="{1D0AA344-CECA-DCE3-72AD-9C59F7950949}"/>
+                </a:ext>
+              </a:extLst>
+            </p:cNvPr>
+            <p:cNvGrpSpPr/>
+            <p:nvPr/>
+          </p:nvGrpSpPr>
+          <p:grpSpPr>
+            <a:xfrm>
+              <a:off x="96714" y="61544"/>
+              <a:ext cx="11989778" cy="6699741"/>
+              <a:chOff x="96714" y="61544"/>
+              <a:chExt cx="11989778" cy="6699741"/>
+            </a:xfrm>
+          </p:grpSpPr>
+          <p:sp>
+            <p:nvSpPr>
+              <p:cNvPr id="7" name="Rectangle 6">
+                <a:extLst>
+                  <a:ext uri="{FF2B5EF4-FFF2-40B4-BE49-F238E27FC236}">
+                    <a16:creationId xmlns:a16="http://schemas.microsoft.com/office/drawing/2014/main" id="{2B929B73-F185-5651-5B17-6DAD07181672}"/>
+                  </a:ext>
+                </a:extLst>
+              </p:cNvPr>
+              <p:cNvSpPr/>
+              <p:nvPr/>
+            </p:nvSpPr>
+            <p:spPr>
+              <a:xfrm>
+                <a:off x="96714" y="439616"/>
+                <a:ext cx="2417885" cy="6321669"/>
+              </a:xfrm>
+              <a:prstGeom prst="rect">
+                <a:avLst/>
+              </a:prstGeom>
+            </p:spPr>
+            <p:style>
+              <a:lnRef idx="2">
+                <a:schemeClr val="accent1">
+                  <a:shade val="15000"/>
+                </a:schemeClr>
+              </a:lnRef>
+              <a:fillRef idx="1">
+                <a:schemeClr val="accent1"/>
+              </a:fillRef>
+              <a:effectRef idx="0">
+                <a:schemeClr val="accent1"/>
+              </a:effectRef>
+              <a:fontRef idx="minor">
+                <a:schemeClr val="lt1"/>
+              </a:fontRef>
+            </p:style>
+            <p:txBody>
+              <a:bodyPr rtlCol="0" anchor="ctr"/>
+              <a:lstStyle/>
+              <a:p>
+                <a:pPr algn="ctr"/>
+                <a:endParaRPr lang="en-IN"/>
+              </a:p>
+            </p:txBody>
+          </p:sp>
+          <p:sp>
+            <p:nvSpPr>
+              <p:cNvPr id="8" name="Rectangle 7">
+                <a:extLst>
+                  <a:ext uri="{FF2B5EF4-FFF2-40B4-BE49-F238E27FC236}">
+                    <a16:creationId xmlns:a16="http://schemas.microsoft.com/office/drawing/2014/main" id="{B4148B97-8A17-6F24-0F5E-B5410B1C6E1D}"/>
+                  </a:ext>
+                </a:extLst>
+              </p:cNvPr>
+              <p:cNvSpPr/>
+              <p:nvPr/>
+            </p:nvSpPr>
+            <p:spPr>
+              <a:xfrm>
+                <a:off x="2523395" y="451046"/>
+                <a:ext cx="9563096" cy="6310239"/>
+              </a:xfrm>
+              <a:prstGeom prst="rect">
+                <a:avLst/>
+              </a:prstGeom>
+              <a:solidFill>
+                <a:schemeClr val="accent3">
+                  <a:lumMod val="40000"/>
+                  <a:lumOff val="60000"/>
+                </a:schemeClr>
+              </a:solidFill>
+            </p:spPr>
+            <p:style>
+              <a:lnRef idx="2">
+                <a:schemeClr val="accent1">
+                  <a:shade val="15000"/>
+                </a:schemeClr>
+              </a:lnRef>
+              <a:fillRef idx="1">
+                <a:schemeClr val="accent1"/>
+              </a:fillRef>
+              <a:effectRef idx="0">
+                <a:schemeClr val="accent1"/>
+              </a:effectRef>
+              <a:fontRef idx="minor">
+                <a:schemeClr val="lt1"/>
+              </a:fontRef>
+            </p:style>
+            <p:txBody>
+              <a:bodyPr rtlCol="0" anchor="ctr"/>
+              <a:lstStyle/>
+              <a:p>
+                <a:pPr algn="ctr"/>
+                <a:endParaRPr lang="en-IN" dirty="0"/>
+              </a:p>
+            </p:txBody>
+          </p:sp>
+          <p:sp>
+            <p:nvSpPr>
+              <p:cNvPr id="9" name="Rectangle 8">
+                <a:extLst>
+                  <a:ext uri="{FF2B5EF4-FFF2-40B4-BE49-F238E27FC236}">
+                    <a16:creationId xmlns:a16="http://schemas.microsoft.com/office/drawing/2014/main" id="{5A0AE6FC-F799-9B34-D131-6C996A6C7C1C}"/>
+                  </a:ext>
+                </a:extLst>
+              </p:cNvPr>
+              <p:cNvSpPr/>
+              <p:nvPr/>
+            </p:nvSpPr>
+            <p:spPr>
+              <a:xfrm>
+                <a:off x="96714" y="61544"/>
+                <a:ext cx="11989778" cy="378070"/>
+              </a:xfrm>
+              <a:prstGeom prst="rect">
+                <a:avLst/>
+              </a:prstGeom>
+              <a:solidFill>
+                <a:schemeClr val="bg2">
+                  <a:lumMod val="75000"/>
+                </a:schemeClr>
+              </a:solidFill>
+            </p:spPr>
+            <p:style>
+              <a:lnRef idx="2">
+                <a:schemeClr val="accent1">
+                  <a:shade val="15000"/>
+                </a:schemeClr>
+              </a:lnRef>
+              <a:fillRef idx="1">
+                <a:schemeClr val="accent1"/>
+              </a:fillRef>
+              <a:effectRef idx="0">
+                <a:schemeClr val="accent1"/>
+              </a:effectRef>
+              <a:fontRef idx="minor">
+                <a:schemeClr val="lt1"/>
+              </a:fontRef>
+            </p:style>
+            <p:txBody>
+              <a:bodyPr rtlCol="0" anchor="ctr"/>
+              <a:lstStyle/>
+              <a:p>
+                <a:pPr algn="ctr"/>
+                <a:endParaRPr lang="en-IN" dirty="0"/>
+              </a:p>
+            </p:txBody>
+          </p:sp>
+        </p:grpSp>
+        <p:sp>
+          <p:nvSpPr>
+            <p:cNvPr id="4" name="Rectangle: Rounded Corners 3">
+              <a:extLst>
+                <a:ext uri="{FF2B5EF4-FFF2-40B4-BE49-F238E27FC236}">
+                  <a16:creationId xmlns:a16="http://schemas.microsoft.com/office/drawing/2014/main" id="{24CA0504-351A-7BC2-1EC1-3336BE82D0F9}"/>
+                </a:ext>
+              </a:extLst>
+            </p:cNvPr>
+            <p:cNvSpPr/>
+            <p:nvPr/>
+          </p:nvSpPr>
+          <p:spPr>
+            <a:xfrm>
+              <a:off x="11201400" y="123092"/>
+              <a:ext cx="829409" cy="254977"/>
+            </a:xfrm>
+            <a:prstGeom prst="roundRect">
+              <a:avLst/>
+            </a:prstGeom>
+          </p:spPr>
+          <p:style>
+            <a:lnRef idx="2">
+              <a:schemeClr val="accent1">
+                <a:shade val="15000"/>
+              </a:schemeClr>
+            </a:lnRef>
+            <a:fillRef idx="1">
+              <a:schemeClr val="accent1"/>
+            </a:fillRef>
+            <a:effectRef idx="0">
+              <a:schemeClr val="accent1"/>
+            </a:effectRef>
+            <a:fontRef idx="minor">
+              <a:schemeClr val="lt1"/>
+            </a:fontRef>
+          </p:style>
+          <p:txBody>
+            <a:bodyPr rtlCol="0" anchor="ctr"/>
+            <a:lstStyle/>
+            <a:p>
+              <a:pPr algn="ctr"/>
+              <a:r>
+                <a:rPr lang="en-US" dirty="0"/>
+                <a:t>logout</a:t>
+              </a:r>
+              <a:endParaRPr lang="en-IN" dirty="0"/>
+            </a:p>
+          </p:txBody>
+        </p:sp>
+        <p:sp>
+          <p:nvSpPr>
+            <p:cNvPr id="5" name="Oval 4">
+              <a:extLst>
+                <a:ext uri="{FF2B5EF4-FFF2-40B4-BE49-F238E27FC236}">
+                  <a16:creationId xmlns:a16="http://schemas.microsoft.com/office/drawing/2014/main" id="{76968FF4-03C5-544A-26CA-4333FE1481DA}"/>
+                </a:ext>
+              </a:extLst>
+            </p:cNvPr>
+            <p:cNvSpPr/>
+            <p:nvPr/>
+          </p:nvSpPr>
+          <p:spPr>
+            <a:xfrm>
+              <a:off x="10864362" y="108144"/>
+              <a:ext cx="281354" cy="281354"/>
+            </a:xfrm>
+            <a:prstGeom prst="ellipse">
+              <a:avLst/>
+            </a:prstGeom>
+          </p:spPr>
+          <p:style>
+            <a:lnRef idx="2">
+              <a:schemeClr val="accent1">
+                <a:shade val="15000"/>
+              </a:schemeClr>
+            </a:lnRef>
+            <a:fillRef idx="1">
+              <a:schemeClr val="accent1"/>
+            </a:fillRef>
+            <a:effectRef idx="0">
+              <a:schemeClr val="accent1"/>
+            </a:effectRef>
+            <a:fontRef idx="minor">
+              <a:schemeClr val="lt1"/>
+            </a:fontRef>
+          </p:style>
+          <p:txBody>
+            <a:bodyPr rtlCol="0" anchor="ctr"/>
+            <a:lstStyle/>
+            <a:p>
+              <a:pPr algn="ctr"/>
+              <a:endParaRPr lang="en-IN" dirty="0"/>
+            </a:p>
+          </p:txBody>
+        </p:sp>
+        <p:pic>
+          <p:nvPicPr>
+            <p:cNvPr id="6" name="Picture 2" descr="Logo">
+              <a:extLst>
+                <a:ext uri="{FF2B5EF4-FFF2-40B4-BE49-F238E27FC236}">
+                  <a16:creationId xmlns:a16="http://schemas.microsoft.com/office/drawing/2014/main" id="{CC782434-4F16-6863-4630-E477B680366D}"/>
+                </a:ext>
+              </a:extLst>
+            </p:cNvPr>
+            <p:cNvPicPr>
+              <a:picLocks noChangeAspect="1" noChangeArrowheads="1"/>
+            </p:cNvPicPr>
+            <p:nvPr/>
+          </p:nvPicPr>
+          <p:blipFill>
+            <a:blip r:embed="rId2">
+              <a:extLst>
+                <a:ext uri="{28A0092B-C50C-407E-A947-70E740481C1C}">
+                  <a14:useLocalDpi xmlns:a14="http://schemas.microsoft.com/office/drawing/2010/main" val="0"/>
+                </a:ext>
+              </a:extLst>
+            </a:blip>
+            <a:srcRect/>
+            <a:stretch>
+              <a:fillRect/>
+            </a:stretch>
+          </p:blipFill>
+          <p:spPr bwMode="auto">
+            <a:xfrm>
+              <a:off x="161191" y="19663"/>
+              <a:ext cx="1285564" cy="419951"/>
+            </a:xfrm>
+            <a:prstGeom prst="rect">
+              <a:avLst/>
+            </a:prstGeom>
+            <a:noFill/>
+            <a:extLst>
+              <a:ext uri="{909E8E84-426E-40DD-AFC4-6F175D3DCCD1}">
+                <a14:hiddenFill xmlns:a14="http://schemas.microsoft.com/office/drawing/2010/main">
+                  <a:solidFill>
+                    <a:srgbClr val="FFFFFF"/>
+                  </a:solidFill>
+                </a14:hiddenFill>
+              </a:ext>
+            </a:extLst>
+          </p:spPr>
+        </p:pic>
+      </p:grpSp>
+      <p:graphicFrame>
+        <p:nvGraphicFramePr>
+          <p:cNvPr id="10" name="Table 9">
+            <a:extLst>
+              <a:ext uri="{FF2B5EF4-FFF2-40B4-BE49-F238E27FC236}">
+                <a16:creationId xmlns:a16="http://schemas.microsoft.com/office/drawing/2014/main" id="{53190F6D-0B8A-51FC-A8D1-D791F8660E54}"/>
+              </a:ext>
+            </a:extLst>
+          </p:cNvPr>
+          <p:cNvGraphicFramePr>
+            <a:graphicFrameLocks noGrp="1"/>
+          </p:cNvGraphicFramePr>
+          <p:nvPr>
+            <p:extLst>
+              <p:ext uri="{D42A27DB-BD31-4B8C-83A1-F6EECF244321}">
+                <p14:modId xmlns:p14="http://schemas.microsoft.com/office/powerpoint/2010/main" val="1543762203"/>
+              </p:ext>
+            </p:extLst>
+          </p:nvPr>
+        </p:nvGraphicFramePr>
+        <p:xfrm>
+          <a:off x="105509" y="451046"/>
+          <a:ext cx="2409090" cy="1828800"/>
+        </p:xfrm>
+        <a:graphic>
+          <a:graphicData uri="http://schemas.openxmlformats.org/drawingml/2006/table">
+            <a:tbl>
+              <a:tblPr firstRow="1" bandRow="1">
+                <a:tableStyleId>{2D5ABB26-0587-4C30-8999-92F81FD0307C}</a:tableStyleId>
+              </a:tblPr>
+              <a:tblGrid>
+                <a:gridCol w="2409090">
+                  <a:extLst>
+                    <a:ext uri="{9D8B030D-6E8A-4147-A177-3AD203B41FA5}">
+                      <a16:colId xmlns:a16="http://schemas.microsoft.com/office/drawing/2014/main" val="257110173"/>
+                    </a:ext>
+                  </a:extLst>
+                </a:gridCol>
+              </a:tblGrid>
+              <a:tr h="327514">
+                <a:tc>
+                  <a:txBody>
+                    <a:bodyPr/>
+                    <a:lstStyle/>
+                    <a:p>
+                      <a:r>
+                        <a:rPr lang="en-US" dirty="0"/>
+                        <a:t>Dashboard</a:t>
+                      </a:r>
+                      <a:endParaRPr lang="en-IN" dirty="0"/>
+                    </a:p>
+                  </a:txBody>
+                  <a:tcPr>
+                    <a:lnL w="12700" cap="flat" cmpd="sng" algn="ctr">
+                      <a:solidFill>
+                        <a:schemeClr val="tx1"/>
+                      </a:solidFill>
+                      <a:prstDash val="solid"/>
+                      <a:round/>
+                      <a:headEnd type="none" w="med" len="med"/>
+                      <a:tailEnd type="none" w="med" len="med"/>
+                    </a:lnL>
+                    <a:lnR w="12700" cap="flat" cmpd="sng" algn="ctr">
+                      <a:solidFill>
+                        <a:schemeClr val="tx1"/>
+                      </a:solidFill>
+                      <a:prstDash val="solid"/>
+                      <a:round/>
+                      <a:headEnd type="none" w="med" len="med"/>
+                      <a:tailEnd type="none" w="med" len="med"/>
+                    </a:lnR>
+                    <a:lnT w="12700" cap="flat" cmpd="sng" algn="ctr">
+                      <a:solidFill>
+                        <a:schemeClr val="tx1"/>
+                      </a:solidFill>
+                      <a:prstDash val="solid"/>
+                      <a:round/>
+                      <a:headEnd type="none" w="med" len="med"/>
+                      <a:tailEnd type="none" w="med" len="med"/>
+                    </a:lnT>
+                    <a:lnB w="12700" cap="flat" cmpd="sng" algn="ctr">
+                      <a:solidFill>
+                        <a:schemeClr val="tx1"/>
+                      </a:solidFill>
+                      <a:prstDash val="solid"/>
+                      <a:round/>
+                      <a:headEnd type="none" w="med" len="med"/>
+                      <a:tailEnd type="none" w="med" len="med"/>
+                    </a:lnB>
+                    <a:lnTlToBr w="12700" cmpd="sng">
+                      <a:noFill/>
+                      <a:prstDash val="solid"/>
+                    </a:lnTlToBr>
+                    <a:lnBlToTr w="12700" cmpd="sng">
+                      <a:noFill/>
+                      <a:prstDash val="solid"/>
+                    </a:lnBlToTr>
+                    <a:solidFill>
+                      <a:srgbClr val="FF6E02"/>
+                    </a:solidFill>
+                  </a:tcPr>
+                </a:tc>
+                <a:extLst>
+                  <a:ext uri="{0D108BD9-81ED-4DB2-BD59-A6C34878D82A}">
+                    <a16:rowId xmlns:a16="http://schemas.microsoft.com/office/drawing/2014/main" val="4053817432"/>
+                  </a:ext>
+                </a:extLst>
+              </a:tr>
+              <a:tr h="327514">
+                <a:tc>
+                  <a:txBody>
+                    <a:bodyPr/>
+                    <a:lstStyle/>
+                    <a:p>
+                      <a:pPr marL="0" marR="0" lvl="0" indent="0" algn="l" defTabSz="914400" rtl="0" eaLnBrk="1" fontAlgn="auto" latinLnBrk="0" hangingPunct="1">
+                        <a:lnSpc>
+                          <a:spcPct val="100000"/>
+                        </a:lnSpc>
+                        <a:spcBef>
+                          <a:spcPts val="0"/>
+                        </a:spcBef>
+                        <a:spcAft>
+                          <a:spcPts val="0"/>
+                        </a:spcAft>
+                        <a:buClrTx/>
+                        <a:buSzTx/>
+                        <a:buFontTx/>
+                        <a:buNone/>
+                        <a:tabLst/>
+                        <a:defRPr/>
+                      </a:pPr>
+                      <a:r>
+                        <a:rPr lang="en-US" dirty="0"/>
+                        <a:t>Employee</a:t>
+                      </a:r>
+                      <a:endParaRPr lang="en-IN" dirty="0"/>
+                    </a:p>
+                  </a:txBody>
+                  <a:tcPr>
+                    <a:lnL w="12700" cap="flat" cmpd="sng" algn="ctr">
+                      <a:solidFill>
+                        <a:schemeClr val="tx1"/>
+                      </a:solidFill>
+                      <a:prstDash val="solid"/>
+                      <a:round/>
+                      <a:headEnd type="none" w="med" len="med"/>
+                      <a:tailEnd type="none" w="med" len="med"/>
+                    </a:lnL>
+                    <a:lnR w="12700" cap="flat" cmpd="sng" algn="ctr">
+                      <a:solidFill>
+                        <a:schemeClr val="tx1"/>
+                      </a:solidFill>
+                      <a:prstDash val="solid"/>
+                      <a:round/>
+                      <a:headEnd type="none" w="med" len="med"/>
+                      <a:tailEnd type="none" w="med" len="med"/>
+                    </a:lnR>
+                    <a:lnT w="12700" cap="flat" cmpd="sng" algn="ctr">
+                      <a:solidFill>
+                        <a:schemeClr val="tx1"/>
+                      </a:solidFill>
+                      <a:prstDash val="solid"/>
+                      <a:round/>
+                      <a:headEnd type="none" w="med" len="med"/>
+                      <a:tailEnd type="none" w="med" len="med"/>
+                    </a:lnT>
+                    <a:lnB w="12700" cap="flat" cmpd="sng" algn="ctr">
+                      <a:solidFill>
+                        <a:schemeClr val="tx1"/>
+                      </a:solidFill>
+                      <a:prstDash val="solid"/>
+                      <a:round/>
+                      <a:headEnd type="none" w="med" len="med"/>
+                      <a:tailEnd type="none" w="med" len="med"/>
+                    </a:lnB>
+                    <a:lnTlToBr w="12700" cmpd="sng">
+                      <a:noFill/>
+                      <a:prstDash val="solid"/>
+                    </a:lnTlToBr>
+                    <a:lnBlToTr w="12700" cmpd="sng">
+                      <a:noFill/>
+                      <a:prstDash val="solid"/>
+                    </a:lnBlToTr>
+                    <a:solidFill>
+                      <a:srgbClr val="FF6E02"/>
+                    </a:solidFill>
+                  </a:tcPr>
+                </a:tc>
+                <a:extLst>
+                  <a:ext uri="{0D108BD9-81ED-4DB2-BD59-A6C34878D82A}">
+                    <a16:rowId xmlns:a16="http://schemas.microsoft.com/office/drawing/2014/main" val="873173775"/>
+                  </a:ext>
+                </a:extLst>
+              </a:tr>
+              <a:tr h="327514">
+                <a:tc>
+                  <a:txBody>
+                    <a:bodyPr/>
+                    <a:lstStyle/>
+                    <a:p>
+                      <a:r>
+                        <a:rPr lang="en-US" dirty="0"/>
+                        <a:t>Attendance</a:t>
+                      </a:r>
+                      <a:endParaRPr lang="en-IN" dirty="0"/>
+                    </a:p>
+                  </a:txBody>
+                  <a:tcPr>
+                    <a:lnL w="12700" cap="flat" cmpd="sng" algn="ctr">
+                      <a:solidFill>
+                        <a:schemeClr val="tx1"/>
+                      </a:solidFill>
+                      <a:prstDash val="solid"/>
+                      <a:round/>
+                      <a:headEnd type="none" w="med" len="med"/>
+                      <a:tailEnd type="none" w="med" len="med"/>
+                    </a:lnL>
+                    <a:lnR w="12700" cap="flat" cmpd="sng" algn="ctr">
+                      <a:solidFill>
+                        <a:schemeClr val="tx1"/>
+                      </a:solidFill>
+                      <a:prstDash val="solid"/>
+                      <a:round/>
+                      <a:headEnd type="none" w="med" len="med"/>
+                      <a:tailEnd type="none" w="med" len="med"/>
+                    </a:lnR>
+                    <a:lnT w="12700" cap="flat" cmpd="sng" algn="ctr">
+                      <a:solidFill>
+                        <a:schemeClr val="tx1"/>
+                      </a:solidFill>
+                      <a:prstDash val="solid"/>
+                      <a:round/>
+                      <a:headEnd type="none" w="med" len="med"/>
+                      <a:tailEnd type="none" w="med" len="med"/>
+                    </a:lnT>
+                    <a:lnB w="12700" cap="flat" cmpd="sng" algn="ctr">
+                      <a:solidFill>
+                        <a:schemeClr val="tx1"/>
+                      </a:solidFill>
+                      <a:prstDash val="solid"/>
+                      <a:round/>
+                      <a:headEnd type="none" w="med" len="med"/>
+                      <a:tailEnd type="none" w="med" len="med"/>
+                    </a:lnB>
+                    <a:lnTlToBr w="12700" cmpd="sng">
+                      <a:noFill/>
+                      <a:prstDash val="solid"/>
+                    </a:lnTlToBr>
+                    <a:lnBlToTr w="12700" cmpd="sng">
+                      <a:noFill/>
+                      <a:prstDash val="solid"/>
+                    </a:lnBlToTr>
+                    <a:solidFill>
+                      <a:srgbClr val="FF6E02"/>
+                    </a:solidFill>
+                  </a:tcPr>
+                </a:tc>
+                <a:extLst>
+                  <a:ext uri="{0D108BD9-81ED-4DB2-BD59-A6C34878D82A}">
+                    <a16:rowId xmlns:a16="http://schemas.microsoft.com/office/drawing/2014/main" val="1259353342"/>
+                  </a:ext>
+                </a:extLst>
+              </a:tr>
+              <a:tr h="327514">
+                <a:tc>
+                  <a:txBody>
+                    <a:bodyPr/>
+                    <a:lstStyle/>
+                    <a:p>
+                      <a:r>
+                        <a:rPr lang="en-US" dirty="0"/>
+                        <a:t>Payroll</a:t>
+                      </a:r>
+                      <a:endParaRPr lang="en-IN" dirty="0"/>
+                    </a:p>
+                  </a:txBody>
+                  <a:tcPr>
+                    <a:lnL w="12700" cap="flat" cmpd="sng" algn="ctr">
+                      <a:solidFill>
+                        <a:schemeClr val="tx1"/>
+                      </a:solidFill>
+                      <a:prstDash val="solid"/>
+                      <a:round/>
+                      <a:headEnd type="none" w="med" len="med"/>
+                      <a:tailEnd type="none" w="med" len="med"/>
+                    </a:lnL>
+                    <a:lnR w="12700" cap="flat" cmpd="sng" algn="ctr">
+                      <a:solidFill>
+                        <a:schemeClr val="tx1"/>
+                      </a:solidFill>
+                      <a:prstDash val="solid"/>
+                      <a:round/>
+                      <a:headEnd type="none" w="med" len="med"/>
+                      <a:tailEnd type="none" w="med" len="med"/>
+                    </a:lnR>
+                    <a:lnT w="12700" cap="flat" cmpd="sng" algn="ctr">
+                      <a:solidFill>
+                        <a:schemeClr val="tx1"/>
+                      </a:solidFill>
+                      <a:prstDash val="solid"/>
+                      <a:round/>
+                      <a:headEnd type="none" w="med" len="med"/>
+                      <a:tailEnd type="none" w="med" len="med"/>
+                    </a:lnT>
+                    <a:lnB w="12700" cap="flat" cmpd="sng" algn="ctr">
+                      <a:solidFill>
+                        <a:schemeClr val="tx1"/>
+                      </a:solidFill>
+                      <a:prstDash val="solid"/>
+                      <a:round/>
+                      <a:headEnd type="none" w="med" len="med"/>
+                      <a:tailEnd type="none" w="med" len="med"/>
+                    </a:lnB>
+                    <a:lnTlToBr w="12700" cmpd="sng">
+                      <a:noFill/>
+                      <a:prstDash val="solid"/>
+                    </a:lnTlToBr>
+                    <a:lnBlToTr w="12700" cmpd="sng">
+                      <a:noFill/>
+                      <a:prstDash val="solid"/>
+                    </a:lnBlToTr>
+                    <a:solidFill>
+                      <a:srgbClr val="FF6E02"/>
+                    </a:solidFill>
+                  </a:tcPr>
+                </a:tc>
+                <a:extLst>
+                  <a:ext uri="{0D108BD9-81ED-4DB2-BD59-A6C34878D82A}">
+                    <a16:rowId xmlns:a16="http://schemas.microsoft.com/office/drawing/2014/main" val="456084904"/>
+                  </a:ext>
+                </a:extLst>
+              </a:tr>
+              <a:tr h="327514">
+                <a:tc>
+                  <a:txBody>
+                    <a:bodyPr/>
+                    <a:lstStyle/>
+                    <a:p>
+                      <a:r>
+                        <a:rPr lang="en-US" dirty="0"/>
+                        <a:t>Payslip</a:t>
+                      </a:r>
+                      <a:endParaRPr lang="en-IN" dirty="0"/>
+                    </a:p>
+                  </a:txBody>
+                  <a:tcPr>
+                    <a:lnL w="12700" cap="flat" cmpd="sng" algn="ctr">
+                      <a:solidFill>
+                        <a:schemeClr val="tx1"/>
+                      </a:solidFill>
+                      <a:prstDash val="solid"/>
+                      <a:round/>
+                      <a:headEnd type="none" w="med" len="med"/>
+                      <a:tailEnd type="none" w="med" len="med"/>
+                    </a:lnL>
+                    <a:lnR w="12700" cap="flat" cmpd="sng" algn="ctr">
+                      <a:solidFill>
+                        <a:schemeClr val="tx1"/>
+                      </a:solidFill>
+                      <a:prstDash val="solid"/>
+                      <a:round/>
+                      <a:headEnd type="none" w="med" len="med"/>
+                      <a:tailEnd type="none" w="med" len="med"/>
+                    </a:lnR>
+                    <a:lnT w="12700" cap="flat" cmpd="sng" algn="ctr">
+                      <a:solidFill>
+                        <a:schemeClr val="tx1"/>
+                      </a:solidFill>
+                      <a:prstDash val="solid"/>
+                      <a:round/>
+                      <a:headEnd type="none" w="med" len="med"/>
+                      <a:tailEnd type="none" w="med" len="med"/>
+                    </a:lnT>
+                    <a:lnB w="12700" cap="flat" cmpd="sng" algn="ctr">
+                      <a:solidFill>
+                        <a:schemeClr val="tx1"/>
+                      </a:solidFill>
+                      <a:prstDash val="solid"/>
+                      <a:round/>
+                      <a:headEnd type="none" w="med" len="med"/>
+                      <a:tailEnd type="none" w="med" len="med"/>
+                    </a:lnB>
+                    <a:lnTlToBr w="12700" cmpd="sng">
+                      <a:noFill/>
+                      <a:prstDash val="solid"/>
+                    </a:lnTlToBr>
+                    <a:lnBlToTr w="12700" cmpd="sng">
+                      <a:noFill/>
+                      <a:prstDash val="solid"/>
+                    </a:lnBlToTr>
+                    <a:solidFill>
+                      <a:srgbClr val="FF8D37"/>
+                    </a:solidFill>
+                  </a:tcPr>
+                </a:tc>
+                <a:extLst>
+                  <a:ext uri="{0D108BD9-81ED-4DB2-BD59-A6C34878D82A}">
+                    <a16:rowId xmlns:a16="http://schemas.microsoft.com/office/drawing/2014/main" val="1084039688"/>
+                  </a:ext>
+                </a:extLst>
+              </a:tr>
+            </a:tbl>
+          </a:graphicData>
+        </a:graphic>
+      </p:graphicFrame>
+      <p:graphicFrame>
+        <p:nvGraphicFramePr>
+          <p:cNvPr id="24" name="Table 23">
+            <a:extLst>
+              <a:ext uri="{FF2B5EF4-FFF2-40B4-BE49-F238E27FC236}">
+                <a16:creationId xmlns:a16="http://schemas.microsoft.com/office/drawing/2014/main" id="{198AF9D3-B0CE-25F0-F13A-59F538FFAB57}"/>
+              </a:ext>
+            </a:extLst>
+          </p:cNvPr>
+          <p:cNvGraphicFramePr>
+            <a:graphicFrameLocks noGrp="1"/>
+          </p:cNvGraphicFramePr>
+          <p:nvPr>
+            <p:extLst>
+              <p:ext uri="{D42A27DB-BD31-4B8C-83A1-F6EECF244321}">
+                <p14:modId xmlns:p14="http://schemas.microsoft.com/office/powerpoint/2010/main" val="969665064"/>
+              </p:ext>
+            </p:extLst>
+          </p:nvPr>
+        </p:nvGraphicFramePr>
+        <p:xfrm>
+          <a:off x="2980596" y="1914086"/>
+          <a:ext cx="5873260" cy="4048760"/>
+        </p:xfrm>
+        <a:graphic>
+          <a:graphicData uri="http://schemas.openxmlformats.org/drawingml/2006/table">
+            <a:tbl>
+              <a:tblPr firstRow="1" bandRow="1">
+                <a:tableStyleId>{2D5ABB26-0587-4C30-8999-92F81FD0307C}</a:tableStyleId>
+              </a:tblPr>
+              <a:tblGrid>
+                <a:gridCol w="509950">
+                  <a:extLst>
+                    <a:ext uri="{9D8B030D-6E8A-4147-A177-3AD203B41FA5}">
+                      <a16:colId xmlns:a16="http://schemas.microsoft.com/office/drawing/2014/main" val="1513592348"/>
+                    </a:ext>
+                  </a:extLst>
+                </a:gridCol>
+                <a:gridCol w="893885">
+                  <a:extLst>
+                    <a:ext uri="{9D8B030D-6E8A-4147-A177-3AD203B41FA5}">
+                      <a16:colId xmlns:a16="http://schemas.microsoft.com/office/drawing/2014/main" val="519203008"/>
+                    </a:ext>
+                  </a:extLst>
+                </a:gridCol>
+                <a:gridCol w="893885">
+                  <a:extLst>
+                    <a:ext uri="{9D8B030D-6E8A-4147-A177-3AD203B41FA5}">
+                      <a16:colId xmlns:a16="http://schemas.microsoft.com/office/drawing/2014/main" val="2182870733"/>
+                    </a:ext>
+                  </a:extLst>
+                </a:gridCol>
+                <a:gridCol w="893885">
+                  <a:extLst>
+                    <a:ext uri="{9D8B030D-6E8A-4147-A177-3AD203B41FA5}">
+                      <a16:colId xmlns:a16="http://schemas.microsoft.com/office/drawing/2014/main" val="2948238244"/>
+                    </a:ext>
+                  </a:extLst>
+                </a:gridCol>
+                <a:gridCol w="893885">
+                  <a:extLst>
+                    <a:ext uri="{9D8B030D-6E8A-4147-A177-3AD203B41FA5}">
+                      <a16:colId xmlns:a16="http://schemas.microsoft.com/office/drawing/2014/main" val="1499066006"/>
+                    </a:ext>
+                  </a:extLst>
+                </a:gridCol>
+                <a:gridCol w="893885">
+                  <a:extLst>
+                    <a:ext uri="{9D8B030D-6E8A-4147-A177-3AD203B41FA5}">
+                      <a16:colId xmlns:a16="http://schemas.microsoft.com/office/drawing/2014/main" val="1973139440"/>
+                    </a:ext>
+                  </a:extLst>
+                </a:gridCol>
+                <a:gridCol w="893885">
+                  <a:extLst>
+                    <a:ext uri="{9D8B030D-6E8A-4147-A177-3AD203B41FA5}">
+                      <a16:colId xmlns:a16="http://schemas.microsoft.com/office/drawing/2014/main" val="2207014920"/>
+                    </a:ext>
+                  </a:extLst>
+                </a:gridCol>
+              </a:tblGrid>
+              <a:tr h="370840">
+                <a:tc>
+                  <a:txBody>
+                    <a:bodyPr/>
+                    <a:lstStyle/>
+                    <a:p>
+                      <a:r>
+                        <a:rPr lang="en-US" dirty="0"/>
+                        <a:t>Sr. No.</a:t>
+                      </a:r>
+                      <a:endParaRPr lang="en-IN" dirty="0"/>
+                    </a:p>
+                  </a:txBody>
+                  <a:tcPr>
+                    <a:lnL w="12700" cap="flat" cmpd="sng" algn="ctr">
+                      <a:solidFill>
+                        <a:schemeClr val="tx1"/>
+                      </a:solidFill>
+                      <a:prstDash val="solid"/>
+                      <a:round/>
+                      <a:headEnd type="none" w="med" len="med"/>
+                      <a:tailEnd type="none" w="med" len="med"/>
+                    </a:lnL>
+                    <a:lnR w="12700" cap="flat" cmpd="sng" algn="ctr">
+                      <a:solidFill>
+                        <a:schemeClr val="tx1"/>
+                      </a:solidFill>
+                      <a:prstDash val="solid"/>
+                      <a:round/>
+                      <a:headEnd type="none" w="med" len="med"/>
+                      <a:tailEnd type="none" w="med" len="med"/>
+                    </a:lnR>
+                    <a:lnT w="12700" cap="flat" cmpd="sng" algn="ctr">
+                      <a:solidFill>
+                        <a:schemeClr val="tx1"/>
+                      </a:solidFill>
+                      <a:prstDash val="solid"/>
+                      <a:round/>
+                      <a:headEnd type="none" w="med" len="med"/>
+                      <a:tailEnd type="none" w="med" len="med"/>
+                    </a:lnT>
+                    <a:lnB w="12700" cap="flat" cmpd="sng" algn="ctr">
+                      <a:solidFill>
+                        <a:schemeClr val="tx1"/>
+                      </a:solidFill>
+                      <a:prstDash val="solid"/>
+                      <a:round/>
+                      <a:headEnd type="none" w="med" len="med"/>
+                      <a:tailEnd type="none" w="med" len="med"/>
+                    </a:lnB>
+                    <a:solidFill>
+                      <a:schemeClr val="accent1">
+                        <a:lumMod val="75000"/>
+                      </a:schemeClr>
+                    </a:solidFill>
+                  </a:tcPr>
+                </a:tc>
+                <a:tc>
+                  <a:txBody>
+                    <a:bodyPr/>
+                    <a:lstStyle/>
+                    <a:p>
+                      <a:r>
+                        <a:rPr lang="en-US" dirty="0"/>
+                        <a:t>Name </a:t>
+                      </a:r>
+                      <a:r>
+                        <a:rPr kumimoji="0" lang="en-US" sz="1100" b="0" i="0" u="none" strike="noStrike" kern="1200" cap="none" spc="0" normalizeH="0" baseline="0" noProof="0" dirty="0">
+                          <a:ln>
+                            <a:noFill/>
+                          </a:ln>
+                          <a:solidFill>
+                            <a:prstClr val="black"/>
+                          </a:solidFill>
+                          <a:effectLst/>
+                          <a:uLnTx/>
+                          <a:uFillTx/>
+                          <a:latin typeface="+mn-lt"/>
+                          <a:ea typeface="+mn-ea"/>
+                          <a:cs typeface="+mn-cs"/>
+                        </a:rPr>
+                        <a:t>▼</a:t>
+                      </a:r>
+                      <a:endParaRPr lang="en-IN" dirty="0"/>
+                    </a:p>
+                  </a:txBody>
+                  <a:tcPr>
+                    <a:lnL w="12700" cap="flat" cmpd="sng" algn="ctr">
+                      <a:solidFill>
+                        <a:schemeClr val="tx1"/>
+                      </a:solidFill>
+                      <a:prstDash val="solid"/>
+                      <a:round/>
+                      <a:headEnd type="none" w="med" len="med"/>
+                      <a:tailEnd type="none" w="med" len="med"/>
+                    </a:lnL>
+                    <a:lnR w="12700" cap="flat" cmpd="sng" algn="ctr">
+                      <a:solidFill>
+                        <a:schemeClr val="tx1"/>
+                      </a:solidFill>
+                      <a:prstDash val="solid"/>
+                      <a:round/>
+                      <a:headEnd type="none" w="med" len="med"/>
+                      <a:tailEnd type="none" w="med" len="med"/>
+                    </a:lnR>
+                    <a:lnT w="12700" cap="flat" cmpd="sng" algn="ctr">
+                      <a:solidFill>
+                        <a:schemeClr val="tx1"/>
+                      </a:solidFill>
+                      <a:prstDash val="solid"/>
+                      <a:round/>
+                      <a:headEnd type="none" w="med" len="med"/>
+                      <a:tailEnd type="none" w="med" len="med"/>
+                    </a:lnT>
+                    <a:lnB w="12700" cap="flat" cmpd="sng" algn="ctr">
+                      <a:solidFill>
+                        <a:schemeClr val="tx1"/>
+                      </a:solidFill>
+                      <a:prstDash val="solid"/>
+                      <a:round/>
+                      <a:headEnd type="none" w="med" len="med"/>
+                      <a:tailEnd type="none" w="med" len="med"/>
+                    </a:lnB>
+                    <a:solidFill>
+                      <a:schemeClr val="accent1">
+                        <a:lumMod val="75000"/>
+                      </a:schemeClr>
+                    </a:solidFill>
+                  </a:tcPr>
+                </a:tc>
+                <a:tc>
+                  <a:txBody>
+                    <a:bodyPr/>
+                    <a:lstStyle/>
+                    <a:p>
+                      <a:r>
+                        <a:rPr lang="en-US" dirty="0"/>
+                        <a:t>Monthly Salary </a:t>
+                      </a:r>
+                      <a:r>
+                        <a:rPr kumimoji="0" lang="en-US" sz="1100" b="0" i="0" u="none" strike="noStrike" kern="1200" cap="none" spc="0" normalizeH="0" baseline="0" noProof="0" dirty="0">
+                          <a:ln>
+                            <a:noFill/>
+                          </a:ln>
+                          <a:solidFill>
+                            <a:prstClr val="black"/>
+                          </a:solidFill>
+                          <a:effectLst/>
+                          <a:uLnTx/>
+                          <a:uFillTx/>
+                          <a:latin typeface="+mn-lt"/>
+                          <a:ea typeface="+mn-ea"/>
+                          <a:cs typeface="+mn-cs"/>
+                        </a:rPr>
+                        <a:t>▼</a:t>
+                      </a:r>
+                      <a:endParaRPr lang="en-IN" dirty="0"/>
+                    </a:p>
+                  </a:txBody>
+                  <a:tcPr>
+                    <a:lnL w="12700" cap="flat" cmpd="sng" algn="ctr">
+                      <a:solidFill>
+                        <a:schemeClr val="tx1"/>
+                      </a:solidFill>
+                      <a:prstDash val="solid"/>
+                      <a:round/>
+                      <a:headEnd type="none" w="med" len="med"/>
+                      <a:tailEnd type="none" w="med" len="med"/>
+                    </a:lnL>
+                    <a:lnR w="12700" cap="flat" cmpd="sng" algn="ctr">
+                      <a:solidFill>
+                        <a:schemeClr val="tx1"/>
+                      </a:solidFill>
+                      <a:prstDash val="solid"/>
+                      <a:round/>
+                      <a:headEnd type="none" w="med" len="med"/>
+                      <a:tailEnd type="none" w="med" len="med"/>
+                    </a:lnR>
+                    <a:lnT w="12700" cap="flat" cmpd="sng" algn="ctr">
+                      <a:solidFill>
+                        <a:schemeClr val="tx1"/>
+                      </a:solidFill>
+                      <a:prstDash val="solid"/>
+                      <a:round/>
+                      <a:headEnd type="none" w="med" len="med"/>
+                      <a:tailEnd type="none" w="med" len="med"/>
+                    </a:lnT>
+                    <a:lnB w="12700" cap="flat" cmpd="sng" algn="ctr">
+                      <a:solidFill>
+                        <a:schemeClr val="tx1"/>
+                      </a:solidFill>
+                      <a:prstDash val="solid"/>
+                      <a:round/>
+                      <a:headEnd type="none" w="med" len="med"/>
+                      <a:tailEnd type="none" w="med" len="med"/>
+                    </a:lnB>
+                    <a:solidFill>
+                      <a:schemeClr val="accent1">
+                        <a:lumMod val="75000"/>
+                      </a:schemeClr>
+                    </a:solidFill>
+                  </a:tcPr>
+                </a:tc>
+                <a:tc>
+                  <a:txBody>
+                    <a:bodyPr/>
+                    <a:lstStyle/>
+                    <a:p>
+                      <a:r>
+                        <a:rPr lang="en-US" dirty="0"/>
+                        <a:t>Deduction </a:t>
+                      </a:r>
+                      <a:r>
+                        <a:rPr kumimoji="0" lang="en-US" sz="1100" b="0" i="0" u="none" strike="noStrike" kern="1200" cap="none" spc="0" normalizeH="0" baseline="0" noProof="0" dirty="0">
+                          <a:ln>
+                            <a:noFill/>
+                          </a:ln>
+                          <a:solidFill>
+                            <a:prstClr val="black"/>
+                          </a:solidFill>
+                          <a:effectLst/>
+                          <a:uLnTx/>
+                          <a:uFillTx/>
+                          <a:latin typeface="+mn-lt"/>
+                          <a:ea typeface="+mn-ea"/>
+                          <a:cs typeface="+mn-cs"/>
+                        </a:rPr>
+                        <a:t>▼</a:t>
+                      </a:r>
+                      <a:endParaRPr lang="en-IN" dirty="0"/>
+                    </a:p>
+                  </a:txBody>
+                  <a:tcPr>
+                    <a:lnL w="12700" cap="flat" cmpd="sng" algn="ctr">
+                      <a:solidFill>
+                        <a:schemeClr val="tx1"/>
+                      </a:solidFill>
+                      <a:prstDash val="solid"/>
+                      <a:round/>
+                      <a:headEnd type="none" w="med" len="med"/>
+                      <a:tailEnd type="none" w="med" len="med"/>
+                    </a:lnL>
+                    <a:lnR w="12700" cap="flat" cmpd="sng" algn="ctr">
+                      <a:solidFill>
+                        <a:schemeClr val="tx1"/>
+                      </a:solidFill>
+                      <a:prstDash val="solid"/>
+                      <a:round/>
+                      <a:headEnd type="none" w="med" len="med"/>
+                      <a:tailEnd type="none" w="med" len="med"/>
+                    </a:lnR>
+                    <a:lnT w="12700" cap="flat" cmpd="sng" algn="ctr">
+                      <a:solidFill>
+                        <a:schemeClr val="tx1"/>
+                      </a:solidFill>
+                      <a:prstDash val="solid"/>
+                      <a:round/>
+                      <a:headEnd type="none" w="med" len="med"/>
+                      <a:tailEnd type="none" w="med" len="med"/>
+                    </a:lnT>
+                    <a:lnB w="12700" cap="flat" cmpd="sng" algn="ctr">
+                      <a:solidFill>
+                        <a:schemeClr val="tx1"/>
+                      </a:solidFill>
+                      <a:prstDash val="solid"/>
+                      <a:round/>
+                      <a:headEnd type="none" w="med" len="med"/>
+                      <a:tailEnd type="none" w="med" len="med"/>
+                    </a:lnB>
+                    <a:solidFill>
+                      <a:schemeClr val="accent1">
+                        <a:lumMod val="75000"/>
+                      </a:schemeClr>
+                    </a:solidFill>
+                  </a:tcPr>
+                </a:tc>
+                <a:tc>
+                  <a:txBody>
+                    <a:bodyPr/>
+                    <a:lstStyle/>
+                    <a:p>
+                      <a:r>
+                        <a:rPr lang="en-US" dirty="0"/>
+                        <a:t>Bonuses </a:t>
+                      </a:r>
+                      <a:r>
+                        <a:rPr kumimoji="0" lang="en-US" sz="1100" b="0" i="0" u="none" strike="noStrike" kern="1200" cap="none" spc="0" normalizeH="0" baseline="0" noProof="0" dirty="0">
+                          <a:ln>
+                            <a:noFill/>
+                          </a:ln>
+                          <a:solidFill>
+                            <a:prstClr val="black"/>
+                          </a:solidFill>
+                          <a:effectLst/>
+                          <a:uLnTx/>
+                          <a:uFillTx/>
+                          <a:latin typeface="+mn-lt"/>
+                          <a:ea typeface="+mn-ea"/>
+                          <a:cs typeface="+mn-cs"/>
+                        </a:rPr>
+                        <a:t>▼</a:t>
+                      </a:r>
+                      <a:endParaRPr lang="en-IN" dirty="0"/>
+                    </a:p>
+                  </a:txBody>
+                  <a:tcPr>
+                    <a:lnL w="12700" cap="flat" cmpd="sng" algn="ctr">
+                      <a:solidFill>
+                        <a:schemeClr val="tx1"/>
+                      </a:solidFill>
+                      <a:prstDash val="solid"/>
+                      <a:round/>
+                      <a:headEnd type="none" w="med" len="med"/>
+                      <a:tailEnd type="none" w="med" len="med"/>
+                    </a:lnL>
+                    <a:lnR w="12700" cap="flat" cmpd="sng" algn="ctr">
+                      <a:solidFill>
+                        <a:schemeClr val="tx1"/>
+                      </a:solidFill>
+                      <a:prstDash val="solid"/>
+                      <a:round/>
+                      <a:headEnd type="none" w="med" len="med"/>
+                      <a:tailEnd type="none" w="med" len="med"/>
+                    </a:lnR>
+                    <a:lnT w="12700" cap="flat" cmpd="sng" algn="ctr">
+                      <a:solidFill>
+                        <a:schemeClr val="tx1"/>
+                      </a:solidFill>
+                      <a:prstDash val="solid"/>
+                      <a:round/>
+                      <a:headEnd type="none" w="med" len="med"/>
+                      <a:tailEnd type="none" w="med" len="med"/>
+                    </a:lnT>
+                    <a:lnB w="12700" cap="flat" cmpd="sng" algn="ctr">
+                      <a:solidFill>
+                        <a:schemeClr val="tx1"/>
+                      </a:solidFill>
+                      <a:prstDash val="solid"/>
+                      <a:round/>
+                      <a:headEnd type="none" w="med" len="med"/>
+                      <a:tailEnd type="none" w="med" len="med"/>
+                    </a:lnB>
+                    <a:solidFill>
+                      <a:schemeClr val="accent1">
+                        <a:lumMod val="75000"/>
+                      </a:schemeClr>
+                    </a:solidFill>
+                  </a:tcPr>
+                </a:tc>
+                <a:tc>
+                  <a:txBody>
+                    <a:bodyPr/>
+                    <a:lstStyle/>
+                    <a:p>
+                      <a:r>
+                        <a:rPr lang="en-US" dirty="0"/>
+                        <a:t>Net Salary </a:t>
+                      </a:r>
+                      <a:r>
+                        <a:rPr kumimoji="0" lang="en-US" sz="1100" b="0" i="0" u="none" strike="noStrike" kern="1200" cap="none" spc="0" normalizeH="0" baseline="0" noProof="0" dirty="0">
+                          <a:ln>
+                            <a:noFill/>
+                          </a:ln>
+                          <a:solidFill>
+                            <a:prstClr val="black"/>
+                          </a:solidFill>
+                          <a:effectLst/>
+                          <a:uLnTx/>
+                          <a:uFillTx/>
+                          <a:latin typeface="+mn-lt"/>
+                          <a:ea typeface="+mn-ea"/>
+                          <a:cs typeface="+mn-cs"/>
+                        </a:rPr>
+                        <a:t>▼</a:t>
+                      </a:r>
+                      <a:endParaRPr lang="en-IN" dirty="0"/>
+                    </a:p>
+                  </a:txBody>
+                  <a:tcPr>
+                    <a:lnL w="12700" cap="flat" cmpd="sng" algn="ctr">
+                      <a:solidFill>
+                        <a:schemeClr val="tx1"/>
+                      </a:solidFill>
+                      <a:prstDash val="solid"/>
+                      <a:round/>
+                      <a:headEnd type="none" w="med" len="med"/>
+                      <a:tailEnd type="none" w="med" len="med"/>
+                    </a:lnL>
+                    <a:lnR w="12700" cap="flat" cmpd="sng" algn="ctr">
+                      <a:solidFill>
+                        <a:schemeClr val="tx1"/>
+                      </a:solidFill>
+                      <a:prstDash val="solid"/>
+                      <a:round/>
+                      <a:headEnd type="none" w="med" len="med"/>
+                      <a:tailEnd type="none" w="med" len="med"/>
+                    </a:lnR>
+                    <a:lnT w="12700" cap="flat" cmpd="sng" algn="ctr">
+                      <a:solidFill>
+                        <a:schemeClr val="tx1"/>
+                      </a:solidFill>
+                      <a:prstDash val="solid"/>
+                      <a:round/>
+                      <a:headEnd type="none" w="med" len="med"/>
+                      <a:tailEnd type="none" w="med" len="med"/>
+                    </a:lnT>
+                    <a:lnB w="12700" cap="flat" cmpd="sng" algn="ctr">
+                      <a:solidFill>
+                        <a:schemeClr val="tx1"/>
+                      </a:solidFill>
+                      <a:prstDash val="solid"/>
+                      <a:round/>
+                      <a:headEnd type="none" w="med" len="med"/>
+                      <a:tailEnd type="none" w="med" len="med"/>
+                    </a:lnB>
+                    <a:solidFill>
+                      <a:schemeClr val="accent1">
+                        <a:lumMod val="75000"/>
+                      </a:schemeClr>
+                    </a:solidFill>
+                  </a:tcPr>
+                </a:tc>
+                <a:tc>
+                  <a:txBody>
+                    <a:bodyPr/>
+                    <a:lstStyle/>
+                    <a:p>
+                      <a:r>
+                        <a:rPr lang="en-US" dirty="0"/>
+                        <a:t>Payslip Status </a:t>
+                      </a:r>
+                      <a:r>
+                        <a:rPr kumimoji="0" lang="en-US" sz="1100" b="0" i="0" u="none" strike="noStrike" kern="1200" cap="none" spc="0" normalizeH="0" baseline="0" noProof="0" dirty="0">
+                          <a:ln>
+                            <a:noFill/>
+                          </a:ln>
+                          <a:solidFill>
+                            <a:prstClr val="black"/>
+                          </a:solidFill>
+                          <a:effectLst/>
+                          <a:uLnTx/>
+                          <a:uFillTx/>
+                          <a:latin typeface="+mn-lt"/>
+                          <a:ea typeface="+mn-ea"/>
+                          <a:cs typeface="+mn-cs"/>
+                        </a:rPr>
+                        <a:t>▼</a:t>
+                      </a:r>
+                      <a:endParaRPr lang="en-IN" dirty="0"/>
+                    </a:p>
+                  </a:txBody>
+                  <a:tcPr>
+                    <a:lnL w="12700" cap="flat" cmpd="sng" algn="ctr">
+                      <a:solidFill>
+                        <a:schemeClr val="tx1"/>
+                      </a:solidFill>
+                      <a:prstDash val="solid"/>
+                      <a:round/>
+                      <a:headEnd type="none" w="med" len="med"/>
+                      <a:tailEnd type="none" w="med" len="med"/>
+                    </a:lnL>
+                    <a:lnR w="12700" cap="flat" cmpd="sng" algn="ctr">
+                      <a:solidFill>
+                        <a:schemeClr val="tx1"/>
+                      </a:solidFill>
+                      <a:prstDash val="solid"/>
+                      <a:round/>
+                      <a:headEnd type="none" w="med" len="med"/>
+                      <a:tailEnd type="none" w="med" len="med"/>
+                    </a:lnR>
+                    <a:lnT w="12700" cap="flat" cmpd="sng" algn="ctr">
+                      <a:solidFill>
+                        <a:schemeClr val="tx1"/>
+                      </a:solidFill>
+                      <a:prstDash val="solid"/>
+                      <a:round/>
+                      <a:headEnd type="none" w="med" len="med"/>
+                      <a:tailEnd type="none" w="med" len="med"/>
+                    </a:lnT>
+                    <a:lnB w="12700" cap="flat" cmpd="sng" algn="ctr">
+                      <a:solidFill>
+                        <a:schemeClr val="tx1"/>
+                      </a:solidFill>
+                      <a:prstDash val="solid"/>
+                      <a:round/>
+                      <a:headEnd type="none" w="med" len="med"/>
+                      <a:tailEnd type="none" w="med" len="med"/>
+                    </a:lnB>
+                    <a:solidFill>
+                      <a:schemeClr val="accent1">
+                        <a:lumMod val="75000"/>
+                      </a:schemeClr>
+                    </a:solidFill>
+                  </a:tcPr>
+                </a:tc>
+                <a:extLst>
+                  <a:ext uri="{0D108BD9-81ED-4DB2-BD59-A6C34878D82A}">
+                    <a16:rowId xmlns:a16="http://schemas.microsoft.com/office/drawing/2014/main" val="2967609491"/>
+                  </a:ext>
+                </a:extLst>
+              </a:tr>
+              <a:tr h="370840">
+                <a:tc>
+                  <a:txBody>
+                    <a:bodyPr/>
+                    <a:lstStyle/>
+                    <a:p>
+                      <a:endParaRPr lang="en-IN" dirty="0"/>
+                    </a:p>
+                  </a:txBody>
+                  <a:tcPr>
+                    <a:lnL w="12700" cap="flat" cmpd="sng" algn="ctr">
+                      <a:solidFill>
+                        <a:schemeClr val="tx1"/>
+                      </a:solidFill>
+                      <a:prstDash val="solid"/>
+                      <a:round/>
+                      <a:headEnd type="none" w="med" len="med"/>
+                      <a:tailEnd type="none" w="med" len="med"/>
+                    </a:lnL>
+                    <a:lnR w="12700" cap="flat" cmpd="sng" algn="ctr">
+                      <a:solidFill>
+                        <a:schemeClr val="tx1"/>
+                      </a:solidFill>
+                      <a:prstDash val="solid"/>
+                      <a:round/>
+                      <a:headEnd type="none" w="med" len="med"/>
+                      <a:tailEnd type="none" w="med" len="med"/>
+                    </a:lnR>
+                    <a:lnT w="12700" cap="flat" cmpd="sng" algn="ctr">
+                      <a:solidFill>
+                        <a:schemeClr val="tx1"/>
+                      </a:solidFill>
+                      <a:prstDash val="solid"/>
+                      <a:round/>
+                      <a:headEnd type="none" w="med" len="med"/>
+                      <a:tailEnd type="none" w="med" len="med"/>
+                    </a:lnT>
+                    <a:lnB w="12700" cap="flat" cmpd="sng" algn="ctr">
+                      <a:solidFill>
+                        <a:schemeClr val="tx1"/>
+                      </a:solidFill>
+                      <a:prstDash val="solid"/>
+                      <a:round/>
+                      <a:headEnd type="none" w="med" len="med"/>
+                      <a:tailEnd type="none" w="med" len="med"/>
+                    </a:lnB>
+                    <a:solidFill>
+                      <a:srgbClr val="8FAADC"/>
+                    </a:solidFill>
+                  </a:tcPr>
+                </a:tc>
+                <a:tc>
+                  <a:txBody>
+                    <a:bodyPr/>
+                    <a:lstStyle/>
+                    <a:p>
+                      <a:endParaRPr lang="en-IN" dirty="0"/>
+                    </a:p>
+                  </a:txBody>
+                  <a:tcPr>
+                    <a:lnL w="12700" cap="flat" cmpd="sng" algn="ctr">
+                      <a:solidFill>
+                        <a:schemeClr val="tx1"/>
+                      </a:solidFill>
+                      <a:prstDash val="solid"/>
+                      <a:round/>
+                      <a:headEnd type="none" w="med" len="med"/>
+                      <a:tailEnd type="none" w="med" len="med"/>
+                    </a:lnL>
+                    <a:lnR w="12700" cap="flat" cmpd="sng" algn="ctr">
+                      <a:solidFill>
+                        <a:schemeClr val="tx1"/>
+                      </a:solidFill>
+                      <a:prstDash val="solid"/>
+                      <a:round/>
+                      <a:headEnd type="none" w="med" len="med"/>
+                      <a:tailEnd type="none" w="med" len="med"/>
+                    </a:lnR>
+                    <a:lnT w="12700" cap="flat" cmpd="sng" algn="ctr">
+                      <a:solidFill>
+                        <a:schemeClr val="tx1"/>
+                      </a:solidFill>
+                      <a:prstDash val="solid"/>
+                      <a:round/>
+                      <a:headEnd type="none" w="med" len="med"/>
+                      <a:tailEnd type="none" w="med" len="med"/>
+                    </a:lnT>
+                    <a:lnB w="12700" cap="flat" cmpd="sng" algn="ctr">
+                      <a:solidFill>
+                        <a:schemeClr val="tx1"/>
+                      </a:solidFill>
+                      <a:prstDash val="solid"/>
+                      <a:round/>
+                      <a:headEnd type="none" w="med" len="med"/>
+                      <a:tailEnd type="none" w="med" len="med"/>
+                    </a:lnB>
+                    <a:solidFill>
+                      <a:srgbClr val="8FAADC"/>
+                    </a:solidFill>
+                  </a:tcPr>
+                </a:tc>
+                <a:tc>
+                  <a:txBody>
+                    <a:bodyPr/>
+                    <a:lstStyle/>
+                    <a:p>
+                      <a:endParaRPr lang="en-IN" dirty="0"/>
+                    </a:p>
+                  </a:txBody>
+                  <a:tcPr>
+                    <a:lnL w="12700" cap="flat" cmpd="sng" algn="ctr">
+                      <a:solidFill>
+                        <a:schemeClr val="tx1"/>
+                      </a:solidFill>
+                      <a:prstDash val="solid"/>
+                      <a:round/>
+                      <a:headEnd type="none" w="med" len="med"/>
+                      <a:tailEnd type="none" w="med" len="med"/>
+                    </a:lnL>
+                    <a:lnR w="12700" cap="flat" cmpd="sng" algn="ctr">
+                      <a:solidFill>
+                        <a:schemeClr val="tx1"/>
+                      </a:solidFill>
+                      <a:prstDash val="solid"/>
+                      <a:round/>
+                      <a:headEnd type="none" w="med" len="med"/>
+                      <a:tailEnd type="none" w="med" len="med"/>
+                    </a:lnR>
+                    <a:lnT w="12700" cap="flat" cmpd="sng" algn="ctr">
+                      <a:solidFill>
+                        <a:schemeClr val="tx1"/>
+                      </a:solidFill>
+                      <a:prstDash val="solid"/>
+                      <a:round/>
+                      <a:headEnd type="none" w="med" len="med"/>
+                      <a:tailEnd type="none" w="med" len="med"/>
+                    </a:lnT>
+                    <a:lnB w="12700" cap="flat" cmpd="sng" algn="ctr">
+                      <a:solidFill>
+                        <a:schemeClr val="tx1"/>
+                      </a:solidFill>
+                      <a:prstDash val="solid"/>
+                      <a:round/>
+                      <a:headEnd type="none" w="med" len="med"/>
+                      <a:tailEnd type="none" w="med" len="med"/>
+                    </a:lnB>
+                    <a:solidFill>
+                      <a:srgbClr val="8FAADC"/>
+                    </a:solidFill>
+                  </a:tcPr>
+                </a:tc>
+                <a:tc>
+                  <a:txBody>
+                    <a:bodyPr/>
+                    <a:lstStyle/>
+                    <a:p>
+                      <a:endParaRPr lang="en-IN" dirty="0"/>
+                    </a:p>
+                  </a:txBody>
+                  <a:tcPr>
+                    <a:lnL w="12700" cap="flat" cmpd="sng" algn="ctr">
+                      <a:solidFill>
+                        <a:schemeClr val="tx1"/>
+                      </a:solidFill>
+                      <a:prstDash val="solid"/>
+                      <a:round/>
+                      <a:headEnd type="none" w="med" len="med"/>
+                      <a:tailEnd type="none" w="med" len="med"/>
+                    </a:lnL>
+                    <a:lnR w="12700" cap="flat" cmpd="sng" algn="ctr">
+                      <a:solidFill>
+                        <a:schemeClr val="tx1"/>
+                      </a:solidFill>
+                      <a:prstDash val="solid"/>
+                      <a:round/>
+                      <a:headEnd type="none" w="med" len="med"/>
+                      <a:tailEnd type="none" w="med" len="med"/>
+                    </a:lnR>
+                    <a:lnT w="12700" cap="flat" cmpd="sng" algn="ctr">
+                      <a:solidFill>
+                        <a:schemeClr val="tx1"/>
+                      </a:solidFill>
+                      <a:prstDash val="solid"/>
+                      <a:round/>
+                      <a:headEnd type="none" w="med" len="med"/>
+                      <a:tailEnd type="none" w="med" len="med"/>
+                    </a:lnT>
+                    <a:lnB w="12700" cap="flat" cmpd="sng" algn="ctr">
+                      <a:solidFill>
+                        <a:schemeClr val="tx1"/>
+                      </a:solidFill>
+                      <a:prstDash val="solid"/>
+                      <a:round/>
+                      <a:headEnd type="none" w="med" len="med"/>
+                      <a:tailEnd type="none" w="med" len="med"/>
+                    </a:lnB>
+                    <a:solidFill>
+                      <a:srgbClr val="8FAADC"/>
+                    </a:solidFill>
+                  </a:tcPr>
+                </a:tc>
+                <a:tc>
+                  <a:txBody>
+                    <a:bodyPr/>
+                    <a:lstStyle/>
+                    <a:p>
+                      <a:endParaRPr lang="en-IN" dirty="0"/>
+                    </a:p>
+                  </a:txBody>
+                  <a:tcPr>
+                    <a:lnL w="12700" cap="flat" cmpd="sng" algn="ctr">
+                      <a:solidFill>
+                        <a:schemeClr val="tx1"/>
+                      </a:solidFill>
+                      <a:prstDash val="solid"/>
+                      <a:round/>
+                      <a:headEnd type="none" w="med" len="med"/>
+                      <a:tailEnd type="none" w="med" len="med"/>
+                    </a:lnL>
+                    <a:lnR w="12700" cap="flat" cmpd="sng" algn="ctr">
+                      <a:solidFill>
+                        <a:schemeClr val="tx1"/>
+                      </a:solidFill>
+                      <a:prstDash val="solid"/>
+                      <a:round/>
+                      <a:headEnd type="none" w="med" len="med"/>
+                      <a:tailEnd type="none" w="med" len="med"/>
+                    </a:lnR>
+                    <a:lnT w="12700" cap="flat" cmpd="sng" algn="ctr">
+                      <a:solidFill>
+                        <a:schemeClr val="tx1"/>
+                      </a:solidFill>
+                      <a:prstDash val="solid"/>
+                      <a:round/>
+                      <a:headEnd type="none" w="med" len="med"/>
+                      <a:tailEnd type="none" w="med" len="med"/>
+                    </a:lnT>
+                    <a:lnB w="12700" cap="flat" cmpd="sng" algn="ctr">
+                      <a:solidFill>
+                        <a:schemeClr val="tx1"/>
+                      </a:solidFill>
+                      <a:prstDash val="solid"/>
+                      <a:round/>
+                      <a:headEnd type="none" w="med" len="med"/>
+                      <a:tailEnd type="none" w="med" len="med"/>
+                    </a:lnB>
+                    <a:solidFill>
+                      <a:srgbClr val="8FAADC"/>
+                    </a:solidFill>
+                  </a:tcPr>
+                </a:tc>
+                <a:tc>
+                  <a:txBody>
+                    <a:bodyPr/>
+                    <a:lstStyle/>
+                    <a:p>
+                      <a:endParaRPr lang="en-IN" dirty="0"/>
+                    </a:p>
+                  </a:txBody>
+                  <a:tcPr>
+                    <a:lnL w="12700" cap="flat" cmpd="sng" algn="ctr">
+                      <a:solidFill>
+                        <a:schemeClr val="tx1"/>
+                      </a:solidFill>
+                      <a:prstDash val="solid"/>
+                      <a:round/>
+                      <a:headEnd type="none" w="med" len="med"/>
+                      <a:tailEnd type="none" w="med" len="med"/>
+                    </a:lnL>
+                    <a:lnR w="12700" cap="flat" cmpd="sng" algn="ctr">
+                      <a:solidFill>
+                        <a:schemeClr val="tx1"/>
+                      </a:solidFill>
+                      <a:prstDash val="solid"/>
+                      <a:round/>
+                      <a:headEnd type="none" w="med" len="med"/>
+                      <a:tailEnd type="none" w="med" len="med"/>
+                    </a:lnR>
+                    <a:lnT w="12700" cap="flat" cmpd="sng" algn="ctr">
+                      <a:solidFill>
+                        <a:schemeClr val="tx1"/>
+                      </a:solidFill>
+                      <a:prstDash val="solid"/>
+                      <a:round/>
+                      <a:headEnd type="none" w="med" len="med"/>
+                      <a:tailEnd type="none" w="med" len="med"/>
+                    </a:lnT>
+                    <a:lnB w="12700" cap="flat" cmpd="sng" algn="ctr">
+                      <a:solidFill>
+                        <a:schemeClr val="tx1"/>
+                      </a:solidFill>
+                      <a:prstDash val="solid"/>
+                      <a:round/>
+                      <a:headEnd type="none" w="med" len="med"/>
+                      <a:tailEnd type="none" w="med" len="med"/>
+                    </a:lnB>
+                    <a:solidFill>
+                      <a:srgbClr val="8FAADC"/>
+                    </a:solidFill>
+                  </a:tcPr>
+                </a:tc>
+                <a:tc>
+                  <a:txBody>
+                    <a:bodyPr/>
+                    <a:lstStyle/>
+                    <a:p>
+                      <a:endParaRPr lang="en-IN" dirty="0"/>
+                    </a:p>
+                  </a:txBody>
+                  <a:tcPr>
+                    <a:lnL w="12700" cap="flat" cmpd="sng" algn="ctr">
+                      <a:solidFill>
+                        <a:schemeClr val="tx1"/>
+                      </a:solidFill>
+                      <a:prstDash val="solid"/>
+                      <a:round/>
+                      <a:headEnd type="none" w="med" len="med"/>
+                      <a:tailEnd type="none" w="med" len="med"/>
+                    </a:lnL>
+                    <a:lnR w="12700" cap="flat" cmpd="sng" algn="ctr">
+                      <a:solidFill>
+                        <a:schemeClr val="tx1"/>
+                      </a:solidFill>
+                      <a:prstDash val="solid"/>
+                      <a:round/>
+                      <a:headEnd type="none" w="med" len="med"/>
+                      <a:tailEnd type="none" w="med" len="med"/>
+                    </a:lnR>
+                    <a:lnT w="12700" cap="flat" cmpd="sng" algn="ctr">
+                      <a:solidFill>
+                        <a:schemeClr val="tx1"/>
+                      </a:solidFill>
+                      <a:prstDash val="solid"/>
+                      <a:round/>
+                      <a:headEnd type="none" w="med" len="med"/>
+                      <a:tailEnd type="none" w="med" len="med"/>
+                    </a:lnT>
+                    <a:lnB w="12700" cap="flat" cmpd="sng" algn="ctr">
+                      <a:solidFill>
+                        <a:schemeClr val="tx1"/>
+                      </a:solidFill>
+                      <a:prstDash val="solid"/>
+                      <a:round/>
+                      <a:headEnd type="none" w="med" len="med"/>
+                      <a:tailEnd type="none" w="med" len="med"/>
+                    </a:lnB>
+                    <a:solidFill>
+                      <a:srgbClr val="8FAADC"/>
+                    </a:solidFill>
+                  </a:tcPr>
+                </a:tc>
+                <a:extLst>
+                  <a:ext uri="{0D108BD9-81ED-4DB2-BD59-A6C34878D82A}">
+                    <a16:rowId xmlns:a16="http://schemas.microsoft.com/office/drawing/2014/main" val="1665693499"/>
+                  </a:ext>
+                </a:extLst>
+              </a:tr>
+              <a:tr h="370840">
+                <a:tc>
+                  <a:txBody>
+                    <a:bodyPr/>
+                    <a:lstStyle/>
+                    <a:p>
+                      <a:endParaRPr lang="en-IN" dirty="0"/>
+                    </a:p>
+                  </a:txBody>
+                  <a:tcPr>
+                    <a:lnL w="12700" cap="flat" cmpd="sng" algn="ctr">
+                      <a:solidFill>
+                        <a:schemeClr val="tx1"/>
+                      </a:solidFill>
+                      <a:prstDash val="solid"/>
+                      <a:round/>
+                      <a:headEnd type="none" w="med" len="med"/>
+                      <a:tailEnd type="none" w="med" len="med"/>
+                    </a:lnL>
+                    <a:lnR w="12700" cap="flat" cmpd="sng" algn="ctr">
+                      <a:solidFill>
+                        <a:schemeClr val="tx1"/>
+                      </a:solidFill>
+                      <a:prstDash val="solid"/>
+                      <a:round/>
+                      <a:headEnd type="none" w="med" len="med"/>
+                      <a:tailEnd type="none" w="med" len="med"/>
+                    </a:lnR>
+                    <a:lnT w="12700" cap="flat" cmpd="sng" algn="ctr">
+                      <a:solidFill>
+                        <a:schemeClr val="tx1"/>
+                      </a:solidFill>
+                      <a:prstDash val="solid"/>
+                      <a:round/>
+                      <a:headEnd type="none" w="med" len="med"/>
+                      <a:tailEnd type="none" w="med" len="med"/>
+                    </a:lnT>
+                    <a:lnB w="12700" cap="flat" cmpd="sng" algn="ctr">
+                      <a:solidFill>
+                        <a:schemeClr val="tx1"/>
+                      </a:solidFill>
+                      <a:prstDash val="solid"/>
+                      <a:round/>
+                      <a:headEnd type="none" w="med" len="med"/>
+                      <a:tailEnd type="none" w="med" len="med"/>
+                    </a:lnB>
+                    <a:solidFill>
+                      <a:srgbClr val="8FAADC"/>
+                    </a:solidFill>
+                  </a:tcPr>
+                </a:tc>
+                <a:tc>
+                  <a:txBody>
+                    <a:bodyPr/>
+                    <a:lstStyle/>
+                    <a:p>
+                      <a:endParaRPr lang="en-IN" dirty="0"/>
+                    </a:p>
+                  </a:txBody>
+                  <a:tcPr>
+                    <a:lnL w="12700" cap="flat" cmpd="sng" algn="ctr">
+                      <a:solidFill>
+                        <a:schemeClr val="tx1"/>
+                      </a:solidFill>
+                      <a:prstDash val="solid"/>
+                      <a:round/>
+                      <a:headEnd type="none" w="med" len="med"/>
+                      <a:tailEnd type="none" w="med" len="med"/>
+                    </a:lnL>
+                    <a:lnR w="12700" cap="flat" cmpd="sng" algn="ctr">
+                      <a:solidFill>
+                        <a:schemeClr val="tx1"/>
+                      </a:solidFill>
+                      <a:prstDash val="solid"/>
+                      <a:round/>
+                      <a:headEnd type="none" w="med" len="med"/>
+                      <a:tailEnd type="none" w="med" len="med"/>
+                    </a:lnR>
+                    <a:lnT w="12700" cap="flat" cmpd="sng" algn="ctr">
+                      <a:solidFill>
+                        <a:schemeClr val="tx1"/>
+                      </a:solidFill>
+                      <a:prstDash val="solid"/>
+                      <a:round/>
+                      <a:headEnd type="none" w="med" len="med"/>
+                      <a:tailEnd type="none" w="med" len="med"/>
+                    </a:lnT>
+                    <a:lnB w="12700" cap="flat" cmpd="sng" algn="ctr">
+                      <a:solidFill>
+                        <a:schemeClr val="tx1"/>
+                      </a:solidFill>
+                      <a:prstDash val="solid"/>
+                      <a:round/>
+                      <a:headEnd type="none" w="med" len="med"/>
+                      <a:tailEnd type="none" w="med" len="med"/>
+                    </a:lnB>
+                    <a:solidFill>
+                      <a:srgbClr val="8FAADC"/>
+                    </a:solidFill>
+                  </a:tcPr>
+                </a:tc>
+                <a:tc>
+                  <a:txBody>
+                    <a:bodyPr/>
+                    <a:lstStyle/>
+                    <a:p>
+                      <a:endParaRPr lang="en-IN" dirty="0"/>
+                    </a:p>
+                  </a:txBody>
+                  <a:tcPr>
+                    <a:lnL w="12700" cap="flat" cmpd="sng" algn="ctr">
+                      <a:solidFill>
+                        <a:schemeClr val="tx1"/>
+                      </a:solidFill>
+                      <a:prstDash val="solid"/>
+                      <a:round/>
+                      <a:headEnd type="none" w="med" len="med"/>
+                      <a:tailEnd type="none" w="med" len="med"/>
+                    </a:lnL>
+                    <a:lnR w="12700" cap="flat" cmpd="sng" algn="ctr">
+                      <a:solidFill>
+                        <a:schemeClr val="tx1"/>
+                      </a:solidFill>
+                      <a:prstDash val="solid"/>
+                      <a:round/>
+                      <a:headEnd type="none" w="med" len="med"/>
+                      <a:tailEnd type="none" w="med" len="med"/>
+                    </a:lnR>
+                    <a:lnT w="12700" cap="flat" cmpd="sng" algn="ctr">
+                      <a:solidFill>
+                        <a:schemeClr val="tx1"/>
+                      </a:solidFill>
+                      <a:prstDash val="solid"/>
+                      <a:round/>
+                      <a:headEnd type="none" w="med" len="med"/>
+                      <a:tailEnd type="none" w="med" len="med"/>
+                    </a:lnT>
+                    <a:lnB w="12700" cap="flat" cmpd="sng" algn="ctr">
+                      <a:solidFill>
+                        <a:schemeClr val="tx1"/>
+                      </a:solidFill>
+                      <a:prstDash val="solid"/>
+                      <a:round/>
+                      <a:headEnd type="none" w="med" len="med"/>
+                      <a:tailEnd type="none" w="med" len="med"/>
+                    </a:lnB>
+                    <a:solidFill>
+                      <a:srgbClr val="8FAADC"/>
+                    </a:solidFill>
+                  </a:tcPr>
+                </a:tc>
+                <a:tc>
+                  <a:txBody>
+                    <a:bodyPr/>
+                    <a:lstStyle/>
+                    <a:p>
+                      <a:endParaRPr lang="en-IN" dirty="0"/>
+                    </a:p>
+                  </a:txBody>
+                  <a:tcPr>
+                    <a:lnL w="12700" cap="flat" cmpd="sng" algn="ctr">
+                      <a:solidFill>
+                        <a:schemeClr val="tx1"/>
+                      </a:solidFill>
+                      <a:prstDash val="solid"/>
+                      <a:round/>
+                      <a:headEnd type="none" w="med" len="med"/>
+                      <a:tailEnd type="none" w="med" len="med"/>
+                    </a:lnL>
+                    <a:lnR w="12700" cap="flat" cmpd="sng" algn="ctr">
+                      <a:solidFill>
+                        <a:schemeClr val="tx1"/>
+                      </a:solidFill>
+                      <a:prstDash val="solid"/>
+                      <a:round/>
+                      <a:headEnd type="none" w="med" len="med"/>
+                      <a:tailEnd type="none" w="med" len="med"/>
+                    </a:lnR>
+                    <a:lnT w="12700" cap="flat" cmpd="sng" algn="ctr">
+                      <a:solidFill>
+                        <a:schemeClr val="tx1"/>
+                      </a:solidFill>
+                      <a:prstDash val="solid"/>
+                      <a:round/>
+                      <a:headEnd type="none" w="med" len="med"/>
+                      <a:tailEnd type="none" w="med" len="med"/>
+                    </a:lnT>
+                    <a:lnB w="12700" cap="flat" cmpd="sng" algn="ctr">
+                      <a:solidFill>
+                        <a:schemeClr val="tx1"/>
+                      </a:solidFill>
+                      <a:prstDash val="solid"/>
+                      <a:round/>
+                      <a:headEnd type="none" w="med" len="med"/>
+                      <a:tailEnd type="none" w="med" len="med"/>
+                    </a:lnB>
+                    <a:solidFill>
+                      <a:srgbClr val="8FAADC"/>
+                    </a:solidFill>
+                  </a:tcPr>
+                </a:tc>
+                <a:tc>
+                  <a:txBody>
+                    <a:bodyPr/>
+                    <a:lstStyle/>
+                    <a:p>
+                      <a:endParaRPr lang="en-IN"/>
+                    </a:p>
+                  </a:txBody>
+                  <a:tcPr>
+                    <a:lnL w="12700" cap="flat" cmpd="sng" algn="ctr">
+                      <a:solidFill>
+                        <a:schemeClr val="tx1"/>
+                      </a:solidFill>
+                      <a:prstDash val="solid"/>
+                      <a:round/>
+                      <a:headEnd type="none" w="med" len="med"/>
+                      <a:tailEnd type="none" w="med" len="med"/>
+                    </a:lnL>
+                    <a:lnR w="12700" cap="flat" cmpd="sng" algn="ctr">
+                      <a:solidFill>
+                        <a:schemeClr val="tx1"/>
+                      </a:solidFill>
+                      <a:prstDash val="solid"/>
+                      <a:round/>
+                      <a:headEnd type="none" w="med" len="med"/>
+                      <a:tailEnd type="none" w="med" len="med"/>
+                    </a:lnR>
+                    <a:lnT w="12700" cap="flat" cmpd="sng" algn="ctr">
+                      <a:solidFill>
+                        <a:schemeClr val="tx1"/>
+                      </a:solidFill>
+                      <a:prstDash val="solid"/>
+                      <a:round/>
+                      <a:headEnd type="none" w="med" len="med"/>
+                      <a:tailEnd type="none" w="med" len="med"/>
+                    </a:lnT>
+                    <a:lnB w="12700" cap="flat" cmpd="sng" algn="ctr">
+                      <a:solidFill>
+                        <a:schemeClr val="tx1"/>
+                      </a:solidFill>
+                      <a:prstDash val="solid"/>
+                      <a:round/>
+                      <a:headEnd type="none" w="med" len="med"/>
+                      <a:tailEnd type="none" w="med" len="med"/>
+                    </a:lnB>
+                    <a:solidFill>
+                      <a:srgbClr val="8FAADC"/>
+                    </a:solidFill>
+                  </a:tcPr>
+                </a:tc>
+                <a:tc>
+                  <a:txBody>
+                    <a:bodyPr/>
+                    <a:lstStyle/>
+                    <a:p>
+                      <a:endParaRPr lang="en-IN"/>
+                    </a:p>
+                  </a:txBody>
+                  <a:tcPr>
+                    <a:lnL w="12700" cap="flat" cmpd="sng" algn="ctr">
+                      <a:solidFill>
+                        <a:schemeClr val="tx1"/>
+                      </a:solidFill>
+                      <a:prstDash val="solid"/>
+                      <a:round/>
+                      <a:headEnd type="none" w="med" len="med"/>
+                      <a:tailEnd type="none" w="med" len="med"/>
+                    </a:lnL>
+                    <a:lnR w="12700" cap="flat" cmpd="sng" algn="ctr">
+                      <a:solidFill>
+                        <a:schemeClr val="tx1"/>
+                      </a:solidFill>
+                      <a:prstDash val="solid"/>
+                      <a:round/>
+                      <a:headEnd type="none" w="med" len="med"/>
+                      <a:tailEnd type="none" w="med" len="med"/>
+                    </a:lnR>
+                    <a:lnT w="12700" cap="flat" cmpd="sng" algn="ctr">
+                      <a:solidFill>
+                        <a:schemeClr val="tx1"/>
+                      </a:solidFill>
+                      <a:prstDash val="solid"/>
+                      <a:round/>
+                      <a:headEnd type="none" w="med" len="med"/>
+                      <a:tailEnd type="none" w="med" len="med"/>
+                    </a:lnT>
+                    <a:lnB w="12700" cap="flat" cmpd="sng" algn="ctr">
+                      <a:solidFill>
+                        <a:schemeClr val="tx1"/>
+                      </a:solidFill>
+                      <a:prstDash val="solid"/>
+                      <a:round/>
+                      <a:headEnd type="none" w="med" len="med"/>
+                      <a:tailEnd type="none" w="med" len="med"/>
+                    </a:lnB>
+                    <a:solidFill>
+                      <a:srgbClr val="8FAADC"/>
+                    </a:solidFill>
+                  </a:tcPr>
+                </a:tc>
+                <a:tc>
+                  <a:txBody>
+                    <a:bodyPr/>
+                    <a:lstStyle/>
+                    <a:p>
+                      <a:endParaRPr lang="en-IN" dirty="0"/>
+                    </a:p>
+                  </a:txBody>
+                  <a:tcPr>
+                    <a:lnL w="12700" cap="flat" cmpd="sng" algn="ctr">
+                      <a:solidFill>
+                        <a:schemeClr val="tx1"/>
+                      </a:solidFill>
+                      <a:prstDash val="solid"/>
+                      <a:round/>
+                      <a:headEnd type="none" w="med" len="med"/>
+                      <a:tailEnd type="none" w="med" len="med"/>
+                    </a:lnL>
+                    <a:lnR w="12700" cap="flat" cmpd="sng" algn="ctr">
+                      <a:solidFill>
+                        <a:schemeClr val="tx1"/>
+                      </a:solidFill>
+                      <a:prstDash val="solid"/>
+                      <a:round/>
+                      <a:headEnd type="none" w="med" len="med"/>
+                      <a:tailEnd type="none" w="med" len="med"/>
+                    </a:lnR>
+                    <a:lnT w="12700" cap="flat" cmpd="sng" algn="ctr">
+                      <a:solidFill>
+                        <a:schemeClr val="tx1"/>
+                      </a:solidFill>
+                      <a:prstDash val="solid"/>
+                      <a:round/>
+                      <a:headEnd type="none" w="med" len="med"/>
+                      <a:tailEnd type="none" w="med" len="med"/>
+                    </a:lnT>
+                    <a:lnB w="12700" cap="flat" cmpd="sng" algn="ctr">
+                      <a:solidFill>
+                        <a:schemeClr val="tx1"/>
+                      </a:solidFill>
+                      <a:prstDash val="solid"/>
+                      <a:round/>
+                      <a:headEnd type="none" w="med" len="med"/>
+                      <a:tailEnd type="none" w="med" len="med"/>
+                    </a:lnB>
+                    <a:solidFill>
+                      <a:srgbClr val="8FAADC"/>
+                    </a:solidFill>
+                  </a:tcPr>
+                </a:tc>
+                <a:extLst>
+                  <a:ext uri="{0D108BD9-81ED-4DB2-BD59-A6C34878D82A}">
+                    <a16:rowId xmlns:a16="http://schemas.microsoft.com/office/drawing/2014/main" val="1485392036"/>
+                  </a:ext>
+                </a:extLst>
+              </a:tr>
+              <a:tr h="370840">
+                <a:tc>
+                  <a:txBody>
+                    <a:bodyPr/>
+                    <a:lstStyle/>
+                    <a:p>
+                      <a:endParaRPr lang="en-IN"/>
+                    </a:p>
+                  </a:txBody>
+                  <a:tcPr>
+                    <a:lnL w="12700" cap="flat" cmpd="sng" algn="ctr">
+                      <a:solidFill>
+                        <a:schemeClr val="tx1"/>
+                      </a:solidFill>
+                      <a:prstDash val="solid"/>
+                      <a:round/>
+                      <a:headEnd type="none" w="med" len="med"/>
+                      <a:tailEnd type="none" w="med" len="med"/>
+                    </a:lnL>
+                    <a:lnR w="12700" cap="flat" cmpd="sng" algn="ctr">
+                      <a:solidFill>
+                        <a:schemeClr val="tx1"/>
+                      </a:solidFill>
+                      <a:prstDash val="solid"/>
+                      <a:round/>
+                      <a:headEnd type="none" w="med" len="med"/>
+                      <a:tailEnd type="none" w="med" len="med"/>
+                    </a:lnR>
+                    <a:lnT w="12700" cap="flat" cmpd="sng" algn="ctr">
+                      <a:solidFill>
+                        <a:schemeClr val="tx1"/>
+                      </a:solidFill>
+                      <a:prstDash val="solid"/>
+                      <a:round/>
+                      <a:headEnd type="none" w="med" len="med"/>
+                      <a:tailEnd type="none" w="med" len="med"/>
+                    </a:lnT>
+                    <a:lnB w="12700" cap="flat" cmpd="sng" algn="ctr">
+                      <a:solidFill>
+                        <a:schemeClr val="tx1"/>
+                      </a:solidFill>
+                      <a:prstDash val="solid"/>
+                      <a:round/>
+                      <a:headEnd type="none" w="med" len="med"/>
+                      <a:tailEnd type="none" w="med" len="med"/>
+                    </a:lnB>
+                    <a:solidFill>
+                      <a:srgbClr val="8FAADC"/>
+                    </a:solidFill>
+                  </a:tcPr>
+                </a:tc>
+                <a:tc>
+                  <a:txBody>
+                    <a:bodyPr/>
+                    <a:lstStyle/>
+                    <a:p>
+                      <a:endParaRPr lang="en-IN"/>
+                    </a:p>
+                  </a:txBody>
+                  <a:tcPr>
+                    <a:lnL w="12700" cap="flat" cmpd="sng" algn="ctr">
+                      <a:solidFill>
+                        <a:schemeClr val="tx1"/>
+                      </a:solidFill>
+                      <a:prstDash val="solid"/>
+                      <a:round/>
+                      <a:headEnd type="none" w="med" len="med"/>
+                      <a:tailEnd type="none" w="med" len="med"/>
+                    </a:lnL>
+                    <a:lnR w="12700" cap="flat" cmpd="sng" algn="ctr">
+                      <a:solidFill>
+                        <a:schemeClr val="tx1"/>
+                      </a:solidFill>
+                      <a:prstDash val="solid"/>
+                      <a:round/>
+                      <a:headEnd type="none" w="med" len="med"/>
+                      <a:tailEnd type="none" w="med" len="med"/>
+                    </a:lnR>
+                    <a:lnT w="12700" cap="flat" cmpd="sng" algn="ctr">
+                      <a:solidFill>
+                        <a:schemeClr val="tx1"/>
+                      </a:solidFill>
+                      <a:prstDash val="solid"/>
+                      <a:round/>
+                      <a:headEnd type="none" w="med" len="med"/>
+                      <a:tailEnd type="none" w="med" len="med"/>
+                    </a:lnT>
+                    <a:lnB w="12700" cap="flat" cmpd="sng" algn="ctr">
+                      <a:solidFill>
+                        <a:schemeClr val="tx1"/>
+                      </a:solidFill>
+                      <a:prstDash val="solid"/>
+                      <a:round/>
+                      <a:headEnd type="none" w="med" len="med"/>
+                      <a:tailEnd type="none" w="med" len="med"/>
+                    </a:lnB>
+                    <a:solidFill>
+                      <a:srgbClr val="8FAADC"/>
+                    </a:solidFill>
+                  </a:tcPr>
+                </a:tc>
+                <a:tc>
+                  <a:txBody>
+                    <a:bodyPr/>
+                    <a:lstStyle/>
+                    <a:p>
+                      <a:endParaRPr lang="en-IN" dirty="0"/>
+                    </a:p>
+                  </a:txBody>
+                  <a:tcPr>
+                    <a:lnL w="12700" cap="flat" cmpd="sng" algn="ctr">
+                      <a:solidFill>
+                        <a:schemeClr val="tx1"/>
+                      </a:solidFill>
+                      <a:prstDash val="solid"/>
+                      <a:round/>
+                      <a:headEnd type="none" w="med" len="med"/>
+                      <a:tailEnd type="none" w="med" len="med"/>
+                    </a:lnL>
+                    <a:lnR w="12700" cap="flat" cmpd="sng" algn="ctr">
+                      <a:solidFill>
+                        <a:schemeClr val="tx1"/>
+                      </a:solidFill>
+                      <a:prstDash val="solid"/>
+                      <a:round/>
+                      <a:headEnd type="none" w="med" len="med"/>
+                      <a:tailEnd type="none" w="med" len="med"/>
+                    </a:lnR>
+                    <a:lnT w="12700" cap="flat" cmpd="sng" algn="ctr">
+                      <a:solidFill>
+                        <a:schemeClr val="tx1"/>
+                      </a:solidFill>
+                      <a:prstDash val="solid"/>
+                      <a:round/>
+                      <a:headEnd type="none" w="med" len="med"/>
+                      <a:tailEnd type="none" w="med" len="med"/>
+                    </a:lnT>
+                    <a:lnB w="12700" cap="flat" cmpd="sng" algn="ctr">
+                      <a:solidFill>
+                        <a:schemeClr val="tx1"/>
+                      </a:solidFill>
+                      <a:prstDash val="solid"/>
+                      <a:round/>
+                      <a:headEnd type="none" w="med" len="med"/>
+                      <a:tailEnd type="none" w="med" len="med"/>
+                    </a:lnB>
+                    <a:solidFill>
+                      <a:srgbClr val="8FAADC"/>
+                    </a:solidFill>
+                  </a:tcPr>
+                </a:tc>
+                <a:tc>
+                  <a:txBody>
+                    <a:bodyPr/>
+                    <a:lstStyle/>
+                    <a:p>
+                      <a:endParaRPr lang="en-IN"/>
+                    </a:p>
+                  </a:txBody>
+                  <a:tcPr>
+                    <a:lnL w="12700" cap="flat" cmpd="sng" algn="ctr">
+                      <a:solidFill>
+                        <a:schemeClr val="tx1"/>
+                      </a:solidFill>
+                      <a:prstDash val="solid"/>
+                      <a:round/>
+                      <a:headEnd type="none" w="med" len="med"/>
+                      <a:tailEnd type="none" w="med" len="med"/>
+                    </a:lnL>
+                    <a:lnR w="12700" cap="flat" cmpd="sng" algn="ctr">
+                      <a:solidFill>
+                        <a:schemeClr val="tx1"/>
+                      </a:solidFill>
+                      <a:prstDash val="solid"/>
+                      <a:round/>
+                      <a:headEnd type="none" w="med" len="med"/>
+                      <a:tailEnd type="none" w="med" len="med"/>
+                    </a:lnR>
+                    <a:lnT w="12700" cap="flat" cmpd="sng" algn="ctr">
+                      <a:solidFill>
+                        <a:schemeClr val="tx1"/>
+                      </a:solidFill>
+                      <a:prstDash val="solid"/>
+                      <a:round/>
+                      <a:headEnd type="none" w="med" len="med"/>
+                      <a:tailEnd type="none" w="med" len="med"/>
+                    </a:lnT>
+                    <a:lnB w="12700" cap="flat" cmpd="sng" algn="ctr">
+                      <a:solidFill>
+                        <a:schemeClr val="tx1"/>
+                      </a:solidFill>
+                      <a:prstDash val="solid"/>
+                      <a:round/>
+                      <a:headEnd type="none" w="med" len="med"/>
+                      <a:tailEnd type="none" w="med" len="med"/>
+                    </a:lnB>
+                    <a:solidFill>
+                      <a:srgbClr val="8FAADC"/>
+                    </a:solidFill>
+                  </a:tcPr>
+                </a:tc>
+                <a:tc>
+                  <a:txBody>
+                    <a:bodyPr/>
+                    <a:lstStyle/>
+                    <a:p>
+                      <a:endParaRPr lang="en-IN"/>
+                    </a:p>
+                  </a:txBody>
+                  <a:tcPr>
+                    <a:lnL w="12700" cap="flat" cmpd="sng" algn="ctr">
+                      <a:solidFill>
+                        <a:schemeClr val="tx1"/>
+                      </a:solidFill>
+                      <a:prstDash val="solid"/>
+                      <a:round/>
+                      <a:headEnd type="none" w="med" len="med"/>
+                      <a:tailEnd type="none" w="med" len="med"/>
+                    </a:lnL>
+                    <a:lnR w="12700" cap="flat" cmpd="sng" algn="ctr">
+                      <a:solidFill>
+                        <a:schemeClr val="tx1"/>
+                      </a:solidFill>
+                      <a:prstDash val="solid"/>
+                      <a:round/>
+                      <a:headEnd type="none" w="med" len="med"/>
+                      <a:tailEnd type="none" w="med" len="med"/>
+                    </a:lnR>
+                    <a:lnT w="12700" cap="flat" cmpd="sng" algn="ctr">
+                      <a:solidFill>
+                        <a:schemeClr val="tx1"/>
+                      </a:solidFill>
+                      <a:prstDash val="solid"/>
+                      <a:round/>
+                      <a:headEnd type="none" w="med" len="med"/>
+                      <a:tailEnd type="none" w="med" len="med"/>
+                    </a:lnT>
+                    <a:lnB w="12700" cap="flat" cmpd="sng" algn="ctr">
+                      <a:solidFill>
+                        <a:schemeClr val="tx1"/>
+                      </a:solidFill>
+                      <a:prstDash val="solid"/>
+                      <a:round/>
+                      <a:headEnd type="none" w="med" len="med"/>
+                      <a:tailEnd type="none" w="med" len="med"/>
+                    </a:lnB>
+                    <a:solidFill>
+                      <a:srgbClr val="8FAADC"/>
+                    </a:solidFill>
+                  </a:tcPr>
+                </a:tc>
+                <a:tc>
+                  <a:txBody>
+                    <a:bodyPr/>
+                    <a:lstStyle/>
+                    <a:p>
+                      <a:endParaRPr lang="en-IN"/>
+                    </a:p>
+                  </a:txBody>
+                  <a:tcPr>
+                    <a:lnL w="12700" cap="flat" cmpd="sng" algn="ctr">
+                      <a:solidFill>
+                        <a:schemeClr val="tx1"/>
+                      </a:solidFill>
+                      <a:prstDash val="solid"/>
+                      <a:round/>
+                      <a:headEnd type="none" w="med" len="med"/>
+                      <a:tailEnd type="none" w="med" len="med"/>
+                    </a:lnL>
+                    <a:lnR w="12700" cap="flat" cmpd="sng" algn="ctr">
+                      <a:solidFill>
+                        <a:schemeClr val="tx1"/>
+                      </a:solidFill>
+                      <a:prstDash val="solid"/>
+                      <a:round/>
+                      <a:headEnd type="none" w="med" len="med"/>
+                      <a:tailEnd type="none" w="med" len="med"/>
+                    </a:lnR>
+                    <a:lnT w="12700" cap="flat" cmpd="sng" algn="ctr">
+                      <a:solidFill>
+                        <a:schemeClr val="tx1"/>
+                      </a:solidFill>
+                      <a:prstDash val="solid"/>
+                      <a:round/>
+                      <a:headEnd type="none" w="med" len="med"/>
+                      <a:tailEnd type="none" w="med" len="med"/>
+                    </a:lnT>
+                    <a:lnB w="12700" cap="flat" cmpd="sng" algn="ctr">
+                      <a:solidFill>
+                        <a:schemeClr val="tx1"/>
+                      </a:solidFill>
+                      <a:prstDash val="solid"/>
+                      <a:round/>
+                      <a:headEnd type="none" w="med" len="med"/>
+                      <a:tailEnd type="none" w="med" len="med"/>
+                    </a:lnB>
+                    <a:solidFill>
+                      <a:srgbClr val="8FAADC"/>
+                    </a:solidFill>
+                  </a:tcPr>
+                </a:tc>
+                <a:tc>
+                  <a:txBody>
+                    <a:bodyPr/>
+                    <a:lstStyle/>
+                    <a:p>
+                      <a:endParaRPr lang="en-IN" dirty="0"/>
+                    </a:p>
+                  </a:txBody>
+                  <a:tcPr>
+                    <a:lnL w="12700" cap="flat" cmpd="sng" algn="ctr">
+                      <a:solidFill>
+                        <a:schemeClr val="tx1"/>
+                      </a:solidFill>
+                      <a:prstDash val="solid"/>
+                      <a:round/>
+                      <a:headEnd type="none" w="med" len="med"/>
+                      <a:tailEnd type="none" w="med" len="med"/>
+                    </a:lnL>
+                    <a:lnR w="12700" cap="flat" cmpd="sng" algn="ctr">
+                      <a:solidFill>
+                        <a:schemeClr val="tx1"/>
+                      </a:solidFill>
+                      <a:prstDash val="solid"/>
+                      <a:round/>
+                      <a:headEnd type="none" w="med" len="med"/>
+                      <a:tailEnd type="none" w="med" len="med"/>
+                    </a:lnR>
+                    <a:lnT w="12700" cap="flat" cmpd="sng" algn="ctr">
+                      <a:solidFill>
+                        <a:schemeClr val="tx1"/>
+                      </a:solidFill>
+                      <a:prstDash val="solid"/>
+                      <a:round/>
+                      <a:headEnd type="none" w="med" len="med"/>
+                      <a:tailEnd type="none" w="med" len="med"/>
+                    </a:lnT>
+                    <a:lnB w="12700" cap="flat" cmpd="sng" algn="ctr">
+                      <a:solidFill>
+                        <a:schemeClr val="tx1"/>
+                      </a:solidFill>
+                      <a:prstDash val="solid"/>
+                      <a:round/>
+                      <a:headEnd type="none" w="med" len="med"/>
+                      <a:tailEnd type="none" w="med" len="med"/>
+                    </a:lnB>
+                    <a:solidFill>
+                      <a:srgbClr val="8FAADC"/>
+                    </a:solidFill>
+                  </a:tcPr>
+                </a:tc>
+                <a:extLst>
+                  <a:ext uri="{0D108BD9-81ED-4DB2-BD59-A6C34878D82A}">
+                    <a16:rowId xmlns:a16="http://schemas.microsoft.com/office/drawing/2014/main" val="430668479"/>
+                  </a:ext>
+                </a:extLst>
+              </a:tr>
+              <a:tr h="370840">
+                <a:tc>
+                  <a:txBody>
+                    <a:bodyPr/>
+                    <a:lstStyle/>
+                    <a:p>
+                      <a:endParaRPr lang="en-IN"/>
+                    </a:p>
+                  </a:txBody>
+                  <a:tcPr>
+                    <a:lnL w="12700" cap="flat" cmpd="sng" algn="ctr">
+                      <a:solidFill>
+                        <a:schemeClr val="tx1"/>
+                      </a:solidFill>
+                      <a:prstDash val="solid"/>
+                      <a:round/>
+                      <a:headEnd type="none" w="med" len="med"/>
+                      <a:tailEnd type="none" w="med" len="med"/>
+                    </a:lnL>
+                    <a:lnR w="12700" cap="flat" cmpd="sng" algn="ctr">
+                      <a:solidFill>
+                        <a:schemeClr val="tx1"/>
+                      </a:solidFill>
+                      <a:prstDash val="solid"/>
+                      <a:round/>
+                      <a:headEnd type="none" w="med" len="med"/>
+                      <a:tailEnd type="none" w="med" len="med"/>
+                    </a:lnR>
+                    <a:lnT w="12700" cap="flat" cmpd="sng" algn="ctr">
+                      <a:solidFill>
+                        <a:schemeClr val="tx1"/>
+                      </a:solidFill>
+                      <a:prstDash val="solid"/>
+                      <a:round/>
+                      <a:headEnd type="none" w="med" len="med"/>
+                      <a:tailEnd type="none" w="med" len="med"/>
+                    </a:lnT>
+                    <a:lnB w="12700" cap="flat" cmpd="sng" algn="ctr">
+                      <a:solidFill>
+                        <a:schemeClr val="tx1"/>
+                      </a:solidFill>
+                      <a:prstDash val="solid"/>
+                      <a:round/>
+                      <a:headEnd type="none" w="med" len="med"/>
+                      <a:tailEnd type="none" w="med" len="med"/>
+                    </a:lnB>
+                    <a:solidFill>
+                      <a:srgbClr val="8FAADC"/>
+                    </a:solidFill>
+                  </a:tcPr>
+                </a:tc>
+                <a:tc>
+                  <a:txBody>
+                    <a:bodyPr/>
+                    <a:lstStyle/>
+                    <a:p>
+                      <a:endParaRPr lang="en-IN"/>
+                    </a:p>
+                  </a:txBody>
+                  <a:tcPr>
+                    <a:lnL w="12700" cap="flat" cmpd="sng" algn="ctr">
+                      <a:solidFill>
+                        <a:schemeClr val="tx1"/>
+                      </a:solidFill>
+                      <a:prstDash val="solid"/>
+                      <a:round/>
+                      <a:headEnd type="none" w="med" len="med"/>
+                      <a:tailEnd type="none" w="med" len="med"/>
+                    </a:lnL>
+                    <a:lnR w="12700" cap="flat" cmpd="sng" algn="ctr">
+                      <a:solidFill>
+                        <a:schemeClr val="tx1"/>
+                      </a:solidFill>
+                      <a:prstDash val="solid"/>
+                      <a:round/>
+                      <a:headEnd type="none" w="med" len="med"/>
+                      <a:tailEnd type="none" w="med" len="med"/>
+                    </a:lnR>
+                    <a:lnT w="12700" cap="flat" cmpd="sng" algn="ctr">
+                      <a:solidFill>
+                        <a:schemeClr val="tx1"/>
+                      </a:solidFill>
+                      <a:prstDash val="solid"/>
+                      <a:round/>
+                      <a:headEnd type="none" w="med" len="med"/>
+                      <a:tailEnd type="none" w="med" len="med"/>
+                    </a:lnT>
+                    <a:lnB w="12700" cap="flat" cmpd="sng" algn="ctr">
+                      <a:solidFill>
+                        <a:schemeClr val="tx1"/>
+                      </a:solidFill>
+                      <a:prstDash val="solid"/>
+                      <a:round/>
+                      <a:headEnd type="none" w="med" len="med"/>
+                      <a:tailEnd type="none" w="med" len="med"/>
+                    </a:lnB>
+                    <a:solidFill>
+                      <a:srgbClr val="8FAADC"/>
+                    </a:solidFill>
+                  </a:tcPr>
+                </a:tc>
+                <a:tc>
+                  <a:txBody>
+                    <a:bodyPr/>
+                    <a:lstStyle/>
+                    <a:p>
+                      <a:endParaRPr lang="en-IN" dirty="0"/>
+                    </a:p>
+                  </a:txBody>
+                  <a:tcPr>
+                    <a:lnL w="12700" cap="flat" cmpd="sng" algn="ctr">
+                      <a:solidFill>
+                        <a:schemeClr val="tx1"/>
+                      </a:solidFill>
+                      <a:prstDash val="solid"/>
+                      <a:round/>
+                      <a:headEnd type="none" w="med" len="med"/>
+                      <a:tailEnd type="none" w="med" len="med"/>
+                    </a:lnL>
+                    <a:lnR w="12700" cap="flat" cmpd="sng" algn="ctr">
+                      <a:solidFill>
+                        <a:schemeClr val="tx1"/>
+                      </a:solidFill>
+                      <a:prstDash val="solid"/>
+                      <a:round/>
+                      <a:headEnd type="none" w="med" len="med"/>
+                      <a:tailEnd type="none" w="med" len="med"/>
+                    </a:lnR>
+                    <a:lnT w="12700" cap="flat" cmpd="sng" algn="ctr">
+                      <a:solidFill>
+                        <a:schemeClr val="tx1"/>
+                      </a:solidFill>
+                      <a:prstDash val="solid"/>
+                      <a:round/>
+                      <a:headEnd type="none" w="med" len="med"/>
+                      <a:tailEnd type="none" w="med" len="med"/>
+                    </a:lnT>
+                    <a:lnB w="12700" cap="flat" cmpd="sng" algn="ctr">
+                      <a:solidFill>
+                        <a:schemeClr val="tx1"/>
+                      </a:solidFill>
+                      <a:prstDash val="solid"/>
+                      <a:round/>
+                      <a:headEnd type="none" w="med" len="med"/>
+                      <a:tailEnd type="none" w="med" len="med"/>
+                    </a:lnB>
+                    <a:solidFill>
+                      <a:srgbClr val="8FAADC"/>
+                    </a:solidFill>
+                  </a:tcPr>
+                </a:tc>
+                <a:tc>
+                  <a:txBody>
+                    <a:bodyPr/>
+                    <a:lstStyle/>
+                    <a:p>
+                      <a:endParaRPr lang="en-IN"/>
+                    </a:p>
+                  </a:txBody>
+                  <a:tcPr>
+                    <a:lnL w="12700" cap="flat" cmpd="sng" algn="ctr">
+                      <a:solidFill>
+                        <a:schemeClr val="tx1"/>
+                      </a:solidFill>
+                      <a:prstDash val="solid"/>
+                      <a:round/>
+                      <a:headEnd type="none" w="med" len="med"/>
+                      <a:tailEnd type="none" w="med" len="med"/>
+                    </a:lnL>
+                    <a:lnR w="12700" cap="flat" cmpd="sng" algn="ctr">
+                      <a:solidFill>
+                        <a:schemeClr val="tx1"/>
+                      </a:solidFill>
+                      <a:prstDash val="solid"/>
+                      <a:round/>
+                      <a:headEnd type="none" w="med" len="med"/>
+                      <a:tailEnd type="none" w="med" len="med"/>
+                    </a:lnR>
+                    <a:lnT w="12700" cap="flat" cmpd="sng" algn="ctr">
+                      <a:solidFill>
+                        <a:schemeClr val="tx1"/>
+                      </a:solidFill>
+                      <a:prstDash val="solid"/>
+                      <a:round/>
+                      <a:headEnd type="none" w="med" len="med"/>
+                      <a:tailEnd type="none" w="med" len="med"/>
+                    </a:lnT>
+                    <a:lnB w="12700" cap="flat" cmpd="sng" algn="ctr">
+                      <a:solidFill>
+                        <a:schemeClr val="tx1"/>
+                      </a:solidFill>
+                      <a:prstDash val="solid"/>
+                      <a:round/>
+                      <a:headEnd type="none" w="med" len="med"/>
+                      <a:tailEnd type="none" w="med" len="med"/>
+                    </a:lnB>
+                    <a:solidFill>
+                      <a:srgbClr val="8FAADC"/>
+                    </a:solidFill>
+                  </a:tcPr>
+                </a:tc>
+                <a:tc>
+                  <a:txBody>
+                    <a:bodyPr/>
+                    <a:lstStyle/>
+                    <a:p>
+                      <a:endParaRPr lang="en-IN"/>
+                    </a:p>
+                  </a:txBody>
+                  <a:tcPr>
+                    <a:lnL w="12700" cap="flat" cmpd="sng" algn="ctr">
+                      <a:solidFill>
+                        <a:schemeClr val="tx1"/>
+                      </a:solidFill>
+                      <a:prstDash val="solid"/>
+                      <a:round/>
+                      <a:headEnd type="none" w="med" len="med"/>
+                      <a:tailEnd type="none" w="med" len="med"/>
+                    </a:lnL>
+                    <a:lnR w="12700" cap="flat" cmpd="sng" algn="ctr">
+                      <a:solidFill>
+                        <a:schemeClr val="tx1"/>
+                      </a:solidFill>
+                      <a:prstDash val="solid"/>
+                      <a:round/>
+                      <a:headEnd type="none" w="med" len="med"/>
+                      <a:tailEnd type="none" w="med" len="med"/>
+                    </a:lnR>
+                    <a:lnT w="12700" cap="flat" cmpd="sng" algn="ctr">
+                      <a:solidFill>
+                        <a:schemeClr val="tx1"/>
+                      </a:solidFill>
+                      <a:prstDash val="solid"/>
+                      <a:round/>
+                      <a:headEnd type="none" w="med" len="med"/>
+                      <a:tailEnd type="none" w="med" len="med"/>
+                    </a:lnT>
+                    <a:lnB w="12700" cap="flat" cmpd="sng" algn="ctr">
+                      <a:solidFill>
+                        <a:schemeClr val="tx1"/>
+                      </a:solidFill>
+                      <a:prstDash val="solid"/>
+                      <a:round/>
+                      <a:headEnd type="none" w="med" len="med"/>
+                      <a:tailEnd type="none" w="med" len="med"/>
+                    </a:lnB>
+                    <a:solidFill>
+                      <a:srgbClr val="8FAADC"/>
+                    </a:solidFill>
+                  </a:tcPr>
+                </a:tc>
+                <a:tc>
+                  <a:txBody>
+                    <a:bodyPr/>
+                    <a:lstStyle/>
+                    <a:p>
+                      <a:endParaRPr lang="en-IN"/>
+                    </a:p>
+                  </a:txBody>
+                  <a:tcPr>
+                    <a:lnL w="12700" cap="flat" cmpd="sng" algn="ctr">
+                      <a:solidFill>
+                        <a:schemeClr val="tx1"/>
+                      </a:solidFill>
+                      <a:prstDash val="solid"/>
+                      <a:round/>
+                      <a:headEnd type="none" w="med" len="med"/>
+                      <a:tailEnd type="none" w="med" len="med"/>
+                    </a:lnL>
+                    <a:lnR w="12700" cap="flat" cmpd="sng" algn="ctr">
+                      <a:solidFill>
+                        <a:schemeClr val="tx1"/>
+                      </a:solidFill>
+                      <a:prstDash val="solid"/>
+                      <a:round/>
+                      <a:headEnd type="none" w="med" len="med"/>
+                      <a:tailEnd type="none" w="med" len="med"/>
+                    </a:lnR>
+                    <a:lnT w="12700" cap="flat" cmpd="sng" algn="ctr">
+                      <a:solidFill>
+                        <a:schemeClr val="tx1"/>
+                      </a:solidFill>
+                      <a:prstDash val="solid"/>
+                      <a:round/>
+                      <a:headEnd type="none" w="med" len="med"/>
+                      <a:tailEnd type="none" w="med" len="med"/>
+                    </a:lnT>
+                    <a:lnB w="12700" cap="flat" cmpd="sng" algn="ctr">
+                      <a:solidFill>
+                        <a:schemeClr val="tx1"/>
+                      </a:solidFill>
+                      <a:prstDash val="solid"/>
+                      <a:round/>
+                      <a:headEnd type="none" w="med" len="med"/>
+                      <a:tailEnd type="none" w="med" len="med"/>
+                    </a:lnB>
+                    <a:solidFill>
+                      <a:srgbClr val="8FAADC"/>
+                    </a:solidFill>
+                  </a:tcPr>
+                </a:tc>
+                <a:tc>
+                  <a:txBody>
+                    <a:bodyPr/>
+                    <a:lstStyle/>
+                    <a:p>
+                      <a:endParaRPr lang="en-IN" dirty="0"/>
+                    </a:p>
+                  </a:txBody>
+                  <a:tcPr>
+                    <a:lnL w="12700" cap="flat" cmpd="sng" algn="ctr">
+                      <a:solidFill>
+                        <a:schemeClr val="tx1"/>
+                      </a:solidFill>
+                      <a:prstDash val="solid"/>
+                      <a:round/>
+                      <a:headEnd type="none" w="med" len="med"/>
+                      <a:tailEnd type="none" w="med" len="med"/>
+                    </a:lnL>
+                    <a:lnR w="12700" cap="flat" cmpd="sng" algn="ctr">
+                      <a:solidFill>
+                        <a:schemeClr val="tx1"/>
+                      </a:solidFill>
+                      <a:prstDash val="solid"/>
+                      <a:round/>
+                      <a:headEnd type="none" w="med" len="med"/>
+                      <a:tailEnd type="none" w="med" len="med"/>
+                    </a:lnR>
+                    <a:lnT w="12700" cap="flat" cmpd="sng" algn="ctr">
+                      <a:solidFill>
+                        <a:schemeClr val="tx1"/>
+                      </a:solidFill>
+                      <a:prstDash val="solid"/>
+                      <a:round/>
+                      <a:headEnd type="none" w="med" len="med"/>
+                      <a:tailEnd type="none" w="med" len="med"/>
+                    </a:lnT>
+                    <a:lnB w="12700" cap="flat" cmpd="sng" algn="ctr">
+                      <a:solidFill>
+                        <a:schemeClr val="tx1"/>
+                      </a:solidFill>
+                      <a:prstDash val="solid"/>
+                      <a:round/>
+                      <a:headEnd type="none" w="med" len="med"/>
+                      <a:tailEnd type="none" w="med" len="med"/>
+                    </a:lnB>
+                    <a:solidFill>
+                      <a:srgbClr val="8FAADC"/>
+                    </a:solidFill>
+                  </a:tcPr>
+                </a:tc>
+                <a:extLst>
+                  <a:ext uri="{0D108BD9-81ED-4DB2-BD59-A6C34878D82A}">
+                    <a16:rowId xmlns:a16="http://schemas.microsoft.com/office/drawing/2014/main" val="2809319250"/>
+                  </a:ext>
+                </a:extLst>
+              </a:tr>
+              <a:tr h="370840">
+                <a:tc>
+                  <a:txBody>
+                    <a:bodyPr/>
+                    <a:lstStyle/>
+                    <a:p>
+                      <a:endParaRPr lang="en-IN"/>
+                    </a:p>
+                  </a:txBody>
+                  <a:tcPr>
+                    <a:lnL w="12700" cap="flat" cmpd="sng" algn="ctr">
+                      <a:solidFill>
+                        <a:schemeClr val="tx1"/>
+                      </a:solidFill>
+                      <a:prstDash val="solid"/>
+                      <a:round/>
+                      <a:headEnd type="none" w="med" len="med"/>
+                      <a:tailEnd type="none" w="med" len="med"/>
+                    </a:lnL>
+                    <a:lnR w="12700" cap="flat" cmpd="sng" algn="ctr">
+                      <a:solidFill>
+                        <a:schemeClr val="tx1"/>
+                      </a:solidFill>
+                      <a:prstDash val="solid"/>
+                      <a:round/>
+                      <a:headEnd type="none" w="med" len="med"/>
+                      <a:tailEnd type="none" w="med" len="med"/>
+                    </a:lnR>
+                    <a:lnT w="12700" cap="flat" cmpd="sng" algn="ctr">
+                      <a:solidFill>
+                        <a:schemeClr val="tx1"/>
+                      </a:solidFill>
+                      <a:prstDash val="solid"/>
+                      <a:round/>
+                      <a:headEnd type="none" w="med" len="med"/>
+                      <a:tailEnd type="none" w="med" len="med"/>
+                    </a:lnT>
+                    <a:lnB w="12700" cap="flat" cmpd="sng" algn="ctr">
+                      <a:solidFill>
+                        <a:schemeClr val="tx1"/>
+                      </a:solidFill>
+                      <a:prstDash val="solid"/>
+                      <a:round/>
+                      <a:headEnd type="none" w="med" len="med"/>
+                      <a:tailEnd type="none" w="med" len="med"/>
+                    </a:lnB>
+                    <a:solidFill>
+                      <a:srgbClr val="8FAADC"/>
+                    </a:solidFill>
+                  </a:tcPr>
+                </a:tc>
+                <a:tc>
+                  <a:txBody>
+                    <a:bodyPr/>
+                    <a:lstStyle/>
+                    <a:p>
+                      <a:endParaRPr lang="en-IN"/>
+                    </a:p>
+                  </a:txBody>
+                  <a:tcPr>
+                    <a:lnL w="12700" cap="flat" cmpd="sng" algn="ctr">
+                      <a:solidFill>
+                        <a:schemeClr val="tx1"/>
+                      </a:solidFill>
+                      <a:prstDash val="solid"/>
+                      <a:round/>
+                      <a:headEnd type="none" w="med" len="med"/>
+                      <a:tailEnd type="none" w="med" len="med"/>
+                    </a:lnL>
+                    <a:lnR w="12700" cap="flat" cmpd="sng" algn="ctr">
+                      <a:solidFill>
+                        <a:schemeClr val="tx1"/>
+                      </a:solidFill>
+                      <a:prstDash val="solid"/>
+                      <a:round/>
+                      <a:headEnd type="none" w="med" len="med"/>
+                      <a:tailEnd type="none" w="med" len="med"/>
+                    </a:lnR>
+                    <a:lnT w="12700" cap="flat" cmpd="sng" algn="ctr">
+                      <a:solidFill>
+                        <a:schemeClr val="tx1"/>
+                      </a:solidFill>
+                      <a:prstDash val="solid"/>
+                      <a:round/>
+                      <a:headEnd type="none" w="med" len="med"/>
+                      <a:tailEnd type="none" w="med" len="med"/>
+                    </a:lnT>
+                    <a:lnB w="12700" cap="flat" cmpd="sng" algn="ctr">
+                      <a:solidFill>
+                        <a:schemeClr val="tx1"/>
+                      </a:solidFill>
+                      <a:prstDash val="solid"/>
+                      <a:round/>
+                      <a:headEnd type="none" w="med" len="med"/>
+                      <a:tailEnd type="none" w="med" len="med"/>
+                    </a:lnB>
+                    <a:solidFill>
+                      <a:srgbClr val="8FAADC"/>
+                    </a:solidFill>
+                  </a:tcPr>
+                </a:tc>
+                <a:tc>
+                  <a:txBody>
+                    <a:bodyPr/>
+                    <a:lstStyle/>
+                    <a:p>
+                      <a:endParaRPr lang="en-IN" dirty="0"/>
+                    </a:p>
+                  </a:txBody>
+                  <a:tcPr>
+                    <a:lnL w="12700" cap="flat" cmpd="sng" algn="ctr">
+                      <a:solidFill>
+                        <a:schemeClr val="tx1"/>
+                      </a:solidFill>
+                      <a:prstDash val="solid"/>
+                      <a:round/>
+                      <a:headEnd type="none" w="med" len="med"/>
+                      <a:tailEnd type="none" w="med" len="med"/>
+                    </a:lnL>
+                    <a:lnR w="12700" cap="flat" cmpd="sng" algn="ctr">
+                      <a:solidFill>
+                        <a:schemeClr val="tx1"/>
+                      </a:solidFill>
+                      <a:prstDash val="solid"/>
+                      <a:round/>
+                      <a:headEnd type="none" w="med" len="med"/>
+                      <a:tailEnd type="none" w="med" len="med"/>
+                    </a:lnR>
+                    <a:lnT w="12700" cap="flat" cmpd="sng" algn="ctr">
+                      <a:solidFill>
+                        <a:schemeClr val="tx1"/>
+                      </a:solidFill>
+                      <a:prstDash val="solid"/>
+                      <a:round/>
+                      <a:headEnd type="none" w="med" len="med"/>
+                      <a:tailEnd type="none" w="med" len="med"/>
+                    </a:lnT>
+                    <a:lnB w="12700" cap="flat" cmpd="sng" algn="ctr">
+                      <a:solidFill>
+                        <a:schemeClr val="tx1"/>
+                      </a:solidFill>
+                      <a:prstDash val="solid"/>
+                      <a:round/>
+                      <a:headEnd type="none" w="med" len="med"/>
+                      <a:tailEnd type="none" w="med" len="med"/>
+                    </a:lnB>
+                    <a:solidFill>
+                      <a:srgbClr val="8FAADC"/>
+                    </a:solidFill>
+                  </a:tcPr>
+                </a:tc>
+                <a:tc>
+                  <a:txBody>
+                    <a:bodyPr/>
+                    <a:lstStyle/>
+                    <a:p>
+                      <a:endParaRPr lang="en-IN" dirty="0"/>
+                    </a:p>
+                  </a:txBody>
+                  <a:tcPr>
+                    <a:lnL w="12700" cap="flat" cmpd="sng" algn="ctr">
+                      <a:solidFill>
+                        <a:schemeClr val="tx1"/>
+                      </a:solidFill>
+                      <a:prstDash val="solid"/>
+                      <a:round/>
+                      <a:headEnd type="none" w="med" len="med"/>
+                      <a:tailEnd type="none" w="med" len="med"/>
+                    </a:lnL>
+                    <a:lnR w="12700" cap="flat" cmpd="sng" algn="ctr">
+                      <a:solidFill>
+                        <a:schemeClr val="tx1"/>
+                      </a:solidFill>
+                      <a:prstDash val="solid"/>
+                      <a:round/>
+                      <a:headEnd type="none" w="med" len="med"/>
+                      <a:tailEnd type="none" w="med" len="med"/>
+                    </a:lnR>
+                    <a:lnT w="12700" cap="flat" cmpd="sng" algn="ctr">
+                      <a:solidFill>
+                        <a:schemeClr val="tx1"/>
+                      </a:solidFill>
+                      <a:prstDash val="solid"/>
+                      <a:round/>
+                      <a:headEnd type="none" w="med" len="med"/>
+                      <a:tailEnd type="none" w="med" len="med"/>
+                    </a:lnT>
+                    <a:lnB w="12700" cap="flat" cmpd="sng" algn="ctr">
+                      <a:solidFill>
+                        <a:schemeClr val="tx1"/>
+                      </a:solidFill>
+                      <a:prstDash val="solid"/>
+                      <a:round/>
+                      <a:headEnd type="none" w="med" len="med"/>
+                      <a:tailEnd type="none" w="med" len="med"/>
+                    </a:lnB>
+                    <a:solidFill>
+                      <a:srgbClr val="8FAADC"/>
+                    </a:solidFill>
+                  </a:tcPr>
+                </a:tc>
+                <a:tc>
+                  <a:txBody>
+                    <a:bodyPr/>
+                    <a:lstStyle/>
+                    <a:p>
+                      <a:endParaRPr lang="en-IN"/>
+                    </a:p>
+                  </a:txBody>
+                  <a:tcPr>
+                    <a:lnL w="12700" cap="flat" cmpd="sng" algn="ctr">
+                      <a:solidFill>
+                        <a:schemeClr val="tx1"/>
+                      </a:solidFill>
+                      <a:prstDash val="solid"/>
+                      <a:round/>
+                      <a:headEnd type="none" w="med" len="med"/>
+                      <a:tailEnd type="none" w="med" len="med"/>
+                    </a:lnL>
+                    <a:lnR w="12700" cap="flat" cmpd="sng" algn="ctr">
+                      <a:solidFill>
+                        <a:schemeClr val="tx1"/>
+                      </a:solidFill>
+                      <a:prstDash val="solid"/>
+                      <a:round/>
+                      <a:headEnd type="none" w="med" len="med"/>
+                      <a:tailEnd type="none" w="med" len="med"/>
+                    </a:lnR>
+                    <a:lnT w="12700" cap="flat" cmpd="sng" algn="ctr">
+                      <a:solidFill>
+                        <a:schemeClr val="tx1"/>
+                      </a:solidFill>
+                      <a:prstDash val="solid"/>
+                      <a:round/>
+                      <a:headEnd type="none" w="med" len="med"/>
+                      <a:tailEnd type="none" w="med" len="med"/>
+                    </a:lnT>
+                    <a:lnB w="12700" cap="flat" cmpd="sng" algn="ctr">
+                      <a:solidFill>
+                        <a:schemeClr val="tx1"/>
+                      </a:solidFill>
+                      <a:prstDash val="solid"/>
+                      <a:round/>
+                      <a:headEnd type="none" w="med" len="med"/>
+                      <a:tailEnd type="none" w="med" len="med"/>
+                    </a:lnB>
+                    <a:solidFill>
+                      <a:srgbClr val="8FAADC"/>
+                    </a:solidFill>
+                  </a:tcPr>
+                </a:tc>
+                <a:tc>
+                  <a:txBody>
+                    <a:bodyPr/>
+                    <a:lstStyle/>
+                    <a:p>
+                      <a:endParaRPr lang="en-IN"/>
+                    </a:p>
+                  </a:txBody>
+                  <a:tcPr>
+                    <a:lnL w="12700" cap="flat" cmpd="sng" algn="ctr">
+                      <a:solidFill>
+                        <a:schemeClr val="tx1"/>
+                      </a:solidFill>
+                      <a:prstDash val="solid"/>
+                      <a:round/>
+                      <a:headEnd type="none" w="med" len="med"/>
+                      <a:tailEnd type="none" w="med" len="med"/>
+                    </a:lnL>
+                    <a:lnR w="12700" cap="flat" cmpd="sng" algn="ctr">
+                      <a:solidFill>
+                        <a:schemeClr val="tx1"/>
+                      </a:solidFill>
+                      <a:prstDash val="solid"/>
+                      <a:round/>
+                      <a:headEnd type="none" w="med" len="med"/>
+                      <a:tailEnd type="none" w="med" len="med"/>
+                    </a:lnR>
+                    <a:lnT w="12700" cap="flat" cmpd="sng" algn="ctr">
+                      <a:solidFill>
+                        <a:schemeClr val="tx1"/>
+                      </a:solidFill>
+                      <a:prstDash val="solid"/>
+                      <a:round/>
+                      <a:headEnd type="none" w="med" len="med"/>
+                      <a:tailEnd type="none" w="med" len="med"/>
+                    </a:lnT>
+                    <a:lnB w="12700" cap="flat" cmpd="sng" algn="ctr">
+                      <a:solidFill>
+                        <a:schemeClr val="tx1"/>
+                      </a:solidFill>
+                      <a:prstDash val="solid"/>
+                      <a:round/>
+                      <a:headEnd type="none" w="med" len="med"/>
+                      <a:tailEnd type="none" w="med" len="med"/>
+                    </a:lnB>
+                    <a:solidFill>
+                      <a:srgbClr val="8FAADC"/>
+                    </a:solidFill>
+                  </a:tcPr>
+                </a:tc>
+                <a:tc>
+                  <a:txBody>
+                    <a:bodyPr/>
+                    <a:lstStyle/>
+                    <a:p>
+                      <a:endParaRPr lang="en-IN" dirty="0"/>
+                    </a:p>
+                  </a:txBody>
+                  <a:tcPr>
+                    <a:lnL w="12700" cap="flat" cmpd="sng" algn="ctr">
+                      <a:solidFill>
+                        <a:schemeClr val="tx1"/>
+                      </a:solidFill>
+                      <a:prstDash val="solid"/>
+                      <a:round/>
+                      <a:headEnd type="none" w="med" len="med"/>
+                      <a:tailEnd type="none" w="med" len="med"/>
+                    </a:lnL>
+                    <a:lnR w="12700" cap="flat" cmpd="sng" algn="ctr">
+                      <a:solidFill>
+                        <a:schemeClr val="tx1"/>
+                      </a:solidFill>
+                      <a:prstDash val="solid"/>
+                      <a:round/>
+                      <a:headEnd type="none" w="med" len="med"/>
+                      <a:tailEnd type="none" w="med" len="med"/>
+                    </a:lnR>
+                    <a:lnT w="12700" cap="flat" cmpd="sng" algn="ctr">
+                      <a:solidFill>
+                        <a:schemeClr val="tx1"/>
+                      </a:solidFill>
+                      <a:prstDash val="solid"/>
+                      <a:round/>
+                      <a:headEnd type="none" w="med" len="med"/>
+                      <a:tailEnd type="none" w="med" len="med"/>
+                    </a:lnT>
+                    <a:lnB w="12700" cap="flat" cmpd="sng" algn="ctr">
+                      <a:solidFill>
+                        <a:schemeClr val="tx1"/>
+                      </a:solidFill>
+                      <a:prstDash val="solid"/>
+                      <a:round/>
+                      <a:headEnd type="none" w="med" len="med"/>
+                      <a:tailEnd type="none" w="med" len="med"/>
+                    </a:lnB>
+                    <a:solidFill>
+                      <a:srgbClr val="8FAADC"/>
+                    </a:solidFill>
+                  </a:tcPr>
+                </a:tc>
+                <a:extLst>
+                  <a:ext uri="{0D108BD9-81ED-4DB2-BD59-A6C34878D82A}">
+                    <a16:rowId xmlns:a16="http://schemas.microsoft.com/office/drawing/2014/main" val="1170336215"/>
+                  </a:ext>
+                </a:extLst>
+              </a:tr>
+              <a:tr h="370840">
+                <a:tc>
+                  <a:txBody>
+                    <a:bodyPr/>
+                    <a:lstStyle/>
+                    <a:p>
+                      <a:endParaRPr lang="en-IN" dirty="0"/>
+                    </a:p>
+                  </a:txBody>
+                  <a:tcPr>
+                    <a:lnL w="12700" cap="flat" cmpd="sng" algn="ctr">
+                      <a:solidFill>
+                        <a:schemeClr val="tx1"/>
+                      </a:solidFill>
+                      <a:prstDash val="solid"/>
+                      <a:round/>
+                      <a:headEnd type="none" w="med" len="med"/>
+                      <a:tailEnd type="none" w="med" len="med"/>
+                    </a:lnL>
+                    <a:lnR w="12700" cap="flat" cmpd="sng" algn="ctr">
+                      <a:solidFill>
+                        <a:schemeClr val="tx1"/>
+                      </a:solidFill>
+                      <a:prstDash val="solid"/>
+                      <a:round/>
+                      <a:headEnd type="none" w="med" len="med"/>
+                      <a:tailEnd type="none" w="med" len="med"/>
+                    </a:lnR>
+                    <a:lnT w="12700" cap="flat" cmpd="sng" algn="ctr">
+                      <a:solidFill>
+                        <a:schemeClr val="tx1"/>
+                      </a:solidFill>
+                      <a:prstDash val="solid"/>
+                      <a:round/>
+                      <a:headEnd type="none" w="med" len="med"/>
+                      <a:tailEnd type="none" w="med" len="med"/>
+                    </a:lnT>
+                    <a:lnB w="12700" cap="flat" cmpd="sng" algn="ctr">
+                      <a:solidFill>
+                        <a:schemeClr val="tx1"/>
+                      </a:solidFill>
+                      <a:prstDash val="solid"/>
+                      <a:round/>
+                      <a:headEnd type="none" w="med" len="med"/>
+                      <a:tailEnd type="none" w="med" len="med"/>
+                    </a:lnB>
+                    <a:solidFill>
+                      <a:srgbClr val="8FAADC"/>
+                    </a:solidFill>
+                  </a:tcPr>
+                </a:tc>
+                <a:tc>
+                  <a:txBody>
+                    <a:bodyPr/>
+                    <a:lstStyle/>
+                    <a:p>
+                      <a:endParaRPr lang="en-IN" dirty="0"/>
+                    </a:p>
+                  </a:txBody>
+                  <a:tcPr>
+                    <a:lnL w="12700" cap="flat" cmpd="sng" algn="ctr">
+                      <a:solidFill>
+                        <a:schemeClr val="tx1"/>
+                      </a:solidFill>
+                      <a:prstDash val="solid"/>
+                      <a:round/>
+                      <a:headEnd type="none" w="med" len="med"/>
+                      <a:tailEnd type="none" w="med" len="med"/>
+                    </a:lnL>
+                    <a:lnR w="12700" cap="flat" cmpd="sng" algn="ctr">
+                      <a:solidFill>
+                        <a:schemeClr val="tx1"/>
+                      </a:solidFill>
+                      <a:prstDash val="solid"/>
+                      <a:round/>
+                      <a:headEnd type="none" w="med" len="med"/>
+                      <a:tailEnd type="none" w="med" len="med"/>
+                    </a:lnR>
+                    <a:lnT w="12700" cap="flat" cmpd="sng" algn="ctr">
+                      <a:solidFill>
+                        <a:schemeClr val="tx1"/>
+                      </a:solidFill>
+                      <a:prstDash val="solid"/>
+                      <a:round/>
+                      <a:headEnd type="none" w="med" len="med"/>
+                      <a:tailEnd type="none" w="med" len="med"/>
+                    </a:lnT>
+                    <a:lnB w="12700" cap="flat" cmpd="sng" algn="ctr">
+                      <a:solidFill>
+                        <a:schemeClr val="tx1"/>
+                      </a:solidFill>
+                      <a:prstDash val="solid"/>
+                      <a:round/>
+                      <a:headEnd type="none" w="med" len="med"/>
+                      <a:tailEnd type="none" w="med" len="med"/>
+                    </a:lnB>
+                    <a:solidFill>
+                      <a:srgbClr val="8FAADC"/>
+                    </a:solidFill>
+                  </a:tcPr>
+                </a:tc>
+                <a:tc>
+                  <a:txBody>
+                    <a:bodyPr/>
+                    <a:lstStyle/>
+                    <a:p>
+                      <a:endParaRPr lang="en-IN"/>
+                    </a:p>
+                  </a:txBody>
+                  <a:tcPr>
+                    <a:lnL w="12700" cap="flat" cmpd="sng" algn="ctr">
+                      <a:solidFill>
+                        <a:schemeClr val="tx1"/>
+                      </a:solidFill>
+                      <a:prstDash val="solid"/>
+                      <a:round/>
+                      <a:headEnd type="none" w="med" len="med"/>
+                      <a:tailEnd type="none" w="med" len="med"/>
+                    </a:lnL>
+                    <a:lnR w="12700" cap="flat" cmpd="sng" algn="ctr">
+                      <a:solidFill>
+                        <a:schemeClr val="tx1"/>
+                      </a:solidFill>
+                      <a:prstDash val="solid"/>
+                      <a:round/>
+                      <a:headEnd type="none" w="med" len="med"/>
+                      <a:tailEnd type="none" w="med" len="med"/>
+                    </a:lnR>
+                    <a:lnT w="12700" cap="flat" cmpd="sng" algn="ctr">
+                      <a:solidFill>
+                        <a:schemeClr val="tx1"/>
+                      </a:solidFill>
+                      <a:prstDash val="solid"/>
+                      <a:round/>
+                      <a:headEnd type="none" w="med" len="med"/>
+                      <a:tailEnd type="none" w="med" len="med"/>
+                    </a:lnT>
+                    <a:lnB w="12700" cap="flat" cmpd="sng" algn="ctr">
+                      <a:solidFill>
+                        <a:schemeClr val="tx1"/>
+                      </a:solidFill>
+                      <a:prstDash val="solid"/>
+                      <a:round/>
+                      <a:headEnd type="none" w="med" len="med"/>
+                      <a:tailEnd type="none" w="med" len="med"/>
+                    </a:lnB>
+                    <a:solidFill>
+                      <a:srgbClr val="8FAADC"/>
+                    </a:solidFill>
+                  </a:tcPr>
+                </a:tc>
+                <a:tc>
+                  <a:txBody>
+                    <a:bodyPr/>
+                    <a:lstStyle/>
+                    <a:p>
+                      <a:endParaRPr lang="en-IN" dirty="0"/>
+                    </a:p>
+                  </a:txBody>
+                  <a:tcPr>
+                    <a:lnL w="12700" cap="flat" cmpd="sng" algn="ctr">
+                      <a:solidFill>
+                        <a:schemeClr val="tx1"/>
+                      </a:solidFill>
+                      <a:prstDash val="solid"/>
+                      <a:round/>
+                      <a:headEnd type="none" w="med" len="med"/>
+                      <a:tailEnd type="none" w="med" len="med"/>
+                    </a:lnL>
+                    <a:lnR w="12700" cap="flat" cmpd="sng" algn="ctr">
+                      <a:solidFill>
+                        <a:schemeClr val="tx1"/>
+                      </a:solidFill>
+                      <a:prstDash val="solid"/>
+                      <a:round/>
+                      <a:headEnd type="none" w="med" len="med"/>
+                      <a:tailEnd type="none" w="med" len="med"/>
+                    </a:lnR>
+                    <a:lnT w="12700" cap="flat" cmpd="sng" algn="ctr">
+                      <a:solidFill>
+                        <a:schemeClr val="tx1"/>
+                      </a:solidFill>
+                      <a:prstDash val="solid"/>
+                      <a:round/>
+                      <a:headEnd type="none" w="med" len="med"/>
+                      <a:tailEnd type="none" w="med" len="med"/>
+                    </a:lnT>
+                    <a:lnB w="12700" cap="flat" cmpd="sng" algn="ctr">
+                      <a:solidFill>
+                        <a:schemeClr val="tx1"/>
+                      </a:solidFill>
+                      <a:prstDash val="solid"/>
+                      <a:round/>
+                      <a:headEnd type="none" w="med" len="med"/>
+                      <a:tailEnd type="none" w="med" len="med"/>
+                    </a:lnB>
+                    <a:solidFill>
+                      <a:srgbClr val="8FAADC"/>
+                    </a:solidFill>
+                  </a:tcPr>
+                </a:tc>
+                <a:tc>
+                  <a:txBody>
+                    <a:bodyPr/>
+                    <a:lstStyle/>
+                    <a:p>
+                      <a:endParaRPr lang="en-IN"/>
+                    </a:p>
+                  </a:txBody>
+                  <a:tcPr>
+                    <a:lnL w="12700" cap="flat" cmpd="sng" algn="ctr">
+                      <a:solidFill>
+                        <a:schemeClr val="tx1"/>
+                      </a:solidFill>
+                      <a:prstDash val="solid"/>
+                      <a:round/>
+                      <a:headEnd type="none" w="med" len="med"/>
+                      <a:tailEnd type="none" w="med" len="med"/>
+                    </a:lnL>
+                    <a:lnR w="12700" cap="flat" cmpd="sng" algn="ctr">
+                      <a:solidFill>
+                        <a:schemeClr val="tx1"/>
+                      </a:solidFill>
+                      <a:prstDash val="solid"/>
+                      <a:round/>
+                      <a:headEnd type="none" w="med" len="med"/>
+                      <a:tailEnd type="none" w="med" len="med"/>
+                    </a:lnR>
+                    <a:lnT w="12700" cap="flat" cmpd="sng" algn="ctr">
+                      <a:solidFill>
+                        <a:schemeClr val="tx1"/>
+                      </a:solidFill>
+                      <a:prstDash val="solid"/>
+                      <a:round/>
+                      <a:headEnd type="none" w="med" len="med"/>
+                      <a:tailEnd type="none" w="med" len="med"/>
+                    </a:lnT>
+                    <a:lnB w="12700" cap="flat" cmpd="sng" algn="ctr">
+                      <a:solidFill>
+                        <a:schemeClr val="tx1"/>
+                      </a:solidFill>
+                      <a:prstDash val="solid"/>
+                      <a:round/>
+                      <a:headEnd type="none" w="med" len="med"/>
+                      <a:tailEnd type="none" w="med" len="med"/>
+                    </a:lnB>
+                    <a:solidFill>
+                      <a:srgbClr val="8FAADC"/>
+                    </a:solidFill>
+                  </a:tcPr>
+                </a:tc>
+                <a:tc>
+                  <a:txBody>
+                    <a:bodyPr/>
+                    <a:lstStyle/>
+                    <a:p>
+                      <a:endParaRPr lang="en-IN"/>
+                    </a:p>
+                  </a:txBody>
+                  <a:tcPr>
+                    <a:lnL w="12700" cap="flat" cmpd="sng" algn="ctr">
+                      <a:solidFill>
+                        <a:schemeClr val="tx1"/>
+                      </a:solidFill>
+                      <a:prstDash val="solid"/>
+                      <a:round/>
+                      <a:headEnd type="none" w="med" len="med"/>
+                      <a:tailEnd type="none" w="med" len="med"/>
+                    </a:lnL>
+                    <a:lnR w="12700" cap="flat" cmpd="sng" algn="ctr">
+                      <a:solidFill>
+                        <a:schemeClr val="tx1"/>
+                      </a:solidFill>
+                      <a:prstDash val="solid"/>
+                      <a:round/>
+                      <a:headEnd type="none" w="med" len="med"/>
+                      <a:tailEnd type="none" w="med" len="med"/>
+                    </a:lnR>
+                    <a:lnT w="12700" cap="flat" cmpd="sng" algn="ctr">
+                      <a:solidFill>
+                        <a:schemeClr val="tx1"/>
+                      </a:solidFill>
+                      <a:prstDash val="solid"/>
+                      <a:round/>
+                      <a:headEnd type="none" w="med" len="med"/>
+                      <a:tailEnd type="none" w="med" len="med"/>
+                    </a:lnT>
+                    <a:lnB w="12700" cap="flat" cmpd="sng" algn="ctr">
+                      <a:solidFill>
+                        <a:schemeClr val="tx1"/>
+                      </a:solidFill>
+                      <a:prstDash val="solid"/>
+                      <a:round/>
+                      <a:headEnd type="none" w="med" len="med"/>
+                      <a:tailEnd type="none" w="med" len="med"/>
+                    </a:lnB>
+                    <a:solidFill>
+                      <a:srgbClr val="8FAADC"/>
+                    </a:solidFill>
+                  </a:tcPr>
+                </a:tc>
+                <a:tc>
+                  <a:txBody>
+                    <a:bodyPr/>
+                    <a:lstStyle/>
+                    <a:p>
+                      <a:endParaRPr lang="en-IN" dirty="0"/>
+                    </a:p>
+                  </a:txBody>
+                  <a:tcPr>
+                    <a:lnL w="12700" cap="flat" cmpd="sng" algn="ctr">
+                      <a:solidFill>
+                        <a:schemeClr val="tx1"/>
+                      </a:solidFill>
+                      <a:prstDash val="solid"/>
+                      <a:round/>
+                      <a:headEnd type="none" w="med" len="med"/>
+                      <a:tailEnd type="none" w="med" len="med"/>
+                    </a:lnL>
+                    <a:lnR w="12700" cap="flat" cmpd="sng" algn="ctr">
+                      <a:solidFill>
+                        <a:schemeClr val="tx1"/>
+                      </a:solidFill>
+                      <a:prstDash val="solid"/>
+                      <a:round/>
+                      <a:headEnd type="none" w="med" len="med"/>
+                      <a:tailEnd type="none" w="med" len="med"/>
+                    </a:lnR>
+                    <a:lnT w="12700" cap="flat" cmpd="sng" algn="ctr">
+                      <a:solidFill>
+                        <a:schemeClr val="tx1"/>
+                      </a:solidFill>
+                      <a:prstDash val="solid"/>
+                      <a:round/>
+                      <a:headEnd type="none" w="med" len="med"/>
+                      <a:tailEnd type="none" w="med" len="med"/>
+                    </a:lnT>
+                    <a:lnB w="12700" cap="flat" cmpd="sng" algn="ctr">
+                      <a:solidFill>
+                        <a:schemeClr val="tx1"/>
+                      </a:solidFill>
+                      <a:prstDash val="solid"/>
+                      <a:round/>
+                      <a:headEnd type="none" w="med" len="med"/>
+                      <a:tailEnd type="none" w="med" len="med"/>
+                    </a:lnB>
+                    <a:solidFill>
+                      <a:srgbClr val="8FAADC"/>
+                    </a:solidFill>
+                  </a:tcPr>
+                </a:tc>
+                <a:extLst>
+                  <a:ext uri="{0D108BD9-81ED-4DB2-BD59-A6C34878D82A}">
+                    <a16:rowId xmlns:a16="http://schemas.microsoft.com/office/drawing/2014/main" val="2363680877"/>
+                  </a:ext>
+                </a:extLst>
+              </a:tr>
+              <a:tr h="370840">
+                <a:tc>
+                  <a:txBody>
+                    <a:bodyPr/>
+                    <a:lstStyle/>
+                    <a:p>
+                      <a:endParaRPr lang="en-IN"/>
+                    </a:p>
+                  </a:txBody>
+                  <a:tcPr>
+                    <a:lnL w="12700" cap="flat" cmpd="sng" algn="ctr">
+                      <a:solidFill>
+                        <a:schemeClr val="tx1"/>
+                      </a:solidFill>
+                      <a:prstDash val="solid"/>
+                      <a:round/>
+                      <a:headEnd type="none" w="med" len="med"/>
+                      <a:tailEnd type="none" w="med" len="med"/>
+                    </a:lnL>
+                    <a:lnR w="12700" cap="flat" cmpd="sng" algn="ctr">
+                      <a:solidFill>
+                        <a:schemeClr val="tx1"/>
+                      </a:solidFill>
+                      <a:prstDash val="solid"/>
+                      <a:round/>
+                      <a:headEnd type="none" w="med" len="med"/>
+                      <a:tailEnd type="none" w="med" len="med"/>
+                    </a:lnR>
+                    <a:lnT w="12700" cap="flat" cmpd="sng" algn="ctr">
+                      <a:solidFill>
+                        <a:schemeClr val="tx1"/>
+                      </a:solidFill>
+                      <a:prstDash val="solid"/>
+                      <a:round/>
+                      <a:headEnd type="none" w="med" len="med"/>
+                      <a:tailEnd type="none" w="med" len="med"/>
+                    </a:lnT>
+                    <a:lnB w="12700" cap="flat" cmpd="sng" algn="ctr">
+                      <a:solidFill>
+                        <a:schemeClr val="tx1"/>
+                      </a:solidFill>
+                      <a:prstDash val="solid"/>
+                      <a:round/>
+                      <a:headEnd type="none" w="med" len="med"/>
+                      <a:tailEnd type="none" w="med" len="med"/>
+                    </a:lnB>
+                    <a:solidFill>
+                      <a:srgbClr val="8FAADC"/>
+                    </a:solidFill>
+                  </a:tcPr>
+                </a:tc>
+                <a:tc>
+                  <a:txBody>
+                    <a:bodyPr/>
+                    <a:lstStyle/>
+                    <a:p>
+                      <a:endParaRPr lang="en-IN"/>
+                    </a:p>
+                  </a:txBody>
+                  <a:tcPr>
+                    <a:lnL w="12700" cap="flat" cmpd="sng" algn="ctr">
+                      <a:solidFill>
+                        <a:schemeClr val="tx1"/>
+                      </a:solidFill>
+                      <a:prstDash val="solid"/>
+                      <a:round/>
+                      <a:headEnd type="none" w="med" len="med"/>
+                      <a:tailEnd type="none" w="med" len="med"/>
+                    </a:lnL>
+                    <a:lnR w="12700" cap="flat" cmpd="sng" algn="ctr">
+                      <a:solidFill>
+                        <a:schemeClr val="tx1"/>
+                      </a:solidFill>
+                      <a:prstDash val="solid"/>
+                      <a:round/>
+                      <a:headEnd type="none" w="med" len="med"/>
+                      <a:tailEnd type="none" w="med" len="med"/>
+                    </a:lnR>
+                    <a:lnT w="12700" cap="flat" cmpd="sng" algn="ctr">
+                      <a:solidFill>
+                        <a:schemeClr val="tx1"/>
+                      </a:solidFill>
+                      <a:prstDash val="solid"/>
+                      <a:round/>
+                      <a:headEnd type="none" w="med" len="med"/>
+                      <a:tailEnd type="none" w="med" len="med"/>
+                    </a:lnT>
+                    <a:lnB w="12700" cap="flat" cmpd="sng" algn="ctr">
+                      <a:solidFill>
+                        <a:schemeClr val="tx1"/>
+                      </a:solidFill>
+                      <a:prstDash val="solid"/>
+                      <a:round/>
+                      <a:headEnd type="none" w="med" len="med"/>
+                      <a:tailEnd type="none" w="med" len="med"/>
+                    </a:lnB>
+                    <a:solidFill>
+                      <a:srgbClr val="8FAADC"/>
+                    </a:solidFill>
+                  </a:tcPr>
+                </a:tc>
+                <a:tc>
+                  <a:txBody>
+                    <a:bodyPr/>
+                    <a:lstStyle/>
+                    <a:p>
+                      <a:endParaRPr lang="en-IN"/>
+                    </a:p>
+                  </a:txBody>
+                  <a:tcPr>
+                    <a:lnL w="12700" cap="flat" cmpd="sng" algn="ctr">
+                      <a:solidFill>
+                        <a:schemeClr val="tx1"/>
+                      </a:solidFill>
+                      <a:prstDash val="solid"/>
+                      <a:round/>
+                      <a:headEnd type="none" w="med" len="med"/>
+                      <a:tailEnd type="none" w="med" len="med"/>
+                    </a:lnL>
+                    <a:lnR w="12700" cap="flat" cmpd="sng" algn="ctr">
+                      <a:solidFill>
+                        <a:schemeClr val="tx1"/>
+                      </a:solidFill>
+                      <a:prstDash val="solid"/>
+                      <a:round/>
+                      <a:headEnd type="none" w="med" len="med"/>
+                      <a:tailEnd type="none" w="med" len="med"/>
+                    </a:lnR>
+                    <a:lnT w="12700" cap="flat" cmpd="sng" algn="ctr">
+                      <a:solidFill>
+                        <a:schemeClr val="tx1"/>
+                      </a:solidFill>
+                      <a:prstDash val="solid"/>
+                      <a:round/>
+                      <a:headEnd type="none" w="med" len="med"/>
+                      <a:tailEnd type="none" w="med" len="med"/>
+                    </a:lnT>
+                    <a:lnB w="12700" cap="flat" cmpd="sng" algn="ctr">
+                      <a:solidFill>
+                        <a:schemeClr val="tx1"/>
+                      </a:solidFill>
+                      <a:prstDash val="solid"/>
+                      <a:round/>
+                      <a:headEnd type="none" w="med" len="med"/>
+                      <a:tailEnd type="none" w="med" len="med"/>
+                    </a:lnB>
+                    <a:solidFill>
+                      <a:srgbClr val="8FAADC"/>
+                    </a:solidFill>
+                  </a:tcPr>
+                </a:tc>
+                <a:tc>
+                  <a:txBody>
+                    <a:bodyPr/>
+                    <a:lstStyle/>
+                    <a:p>
+                      <a:endParaRPr lang="en-IN" dirty="0"/>
+                    </a:p>
+                  </a:txBody>
+                  <a:tcPr>
+                    <a:lnL w="12700" cap="flat" cmpd="sng" algn="ctr">
+                      <a:solidFill>
+                        <a:schemeClr val="tx1"/>
+                      </a:solidFill>
+                      <a:prstDash val="solid"/>
+                      <a:round/>
+                      <a:headEnd type="none" w="med" len="med"/>
+                      <a:tailEnd type="none" w="med" len="med"/>
+                    </a:lnL>
+                    <a:lnR w="12700" cap="flat" cmpd="sng" algn="ctr">
+                      <a:solidFill>
+                        <a:schemeClr val="tx1"/>
+                      </a:solidFill>
+                      <a:prstDash val="solid"/>
+                      <a:round/>
+                      <a:headEnd type="none" w="med" len="med"/>
+                      <a:tailEnd type="none" w="med" len="med"/>
+                    </a:lnR>
+                    <a:lnT w="12700" cap="flat" cmpd="sng" algn="ctr">
+                      <a:solidFill>
+                        <a:schemeClr val="tx1"/>
+                      </a:solidFill>
+                      <a:prstDash val="solid"/>
+                      <a:round/>
+                      <a:headEnd type="none" w="med" len="med"/>
+                      <a:tailEnd type="none" w="med" len="med"/>
+                    </a:lnT>
+                    <a:lnB w="12700" cap="flat" cmpd="sng" algn="ctr">
+                      <a:solidFill>
+                        <a:schemeClr val="tx1"/>
+                      </a:solidFill>
+                      <a:prstDash val="solid"/>
+                      <a:round/>
+                      <a:headEnd type="none" w="med" len="med"/>
+                      <a:tailEnd type="none" w="med" len="med"/>
+                    </a:lnB>
+                    <a:solidFill>
+                      <a:srgbClr val="8FAADC"/>
+                    </a:solidFill>
+                  </a:tcPr>
+                </a:tc>
+                <a:tc>
+                  <a:txBody>
+                    <a:bodyPr/>
+                    <a:lstStyle/>
+                    <a:p>
+                      <a:endParaRPr lang="en-IN" dirty="0"/>
+                    </a:p>
+                  </a:txBody>
+                  <a:tcPr>
+                    <a:lnL w="12700" cap="flat" cmpd="sng" algn="ctr">
+                      <a:solidFill>
+                        <a:schemeClr val="tx1"/>
+                      </a:solidFill>
+                      <a:prstDash val="solid"/>
+                      <a:round/>
+                      <a:headEnd type="none" w="med" len="med"/>
+                      <a:tailEnd type="none" w="med" len="med"/>
+                    </a:lnL>
+                    <a:lnR w="12700" cap="flat" cmpd="sng" algn="ctr">
+                      <a:solidFill>
+                        <a:schemeClr val="tx1"/>
+                      </a:solidFill>
+                      <a:prstDash val="solid"/>
+                      <a:round/>
+                      <a:headEnd type="none" w="med" len="med"/>
+                      <a:tailEnd type="none" w="med" len="med"/>
+                    </a:lnR>
+                    <a:lnT w="12700" cap="flat" cmpd="sng" algn="ctr">
+                      <a:solidFill>
+                        <a:schemeClr val="tx1"/>
+                      </a:solidFill>
+                      <a:prstDash val="solid"/>
+                      <a:round/>
+                      <a:headEnd type="none" w="med" len="med"/>
+                      <a:tailEnd type="none" w="med" len="med"/>
+                    </a:lnT>
+                    <a:lnB w="12700" cap="flat" cmpd="sng" algn="ctr">
+                      <a:solidFill>
+                        <a:schemeClr val="tx1"/>
+                      </a:solidFill>
+                      <a:prstDash val="solid"/>
+                      <a:round/>
+                      <a:headEnd type="none" w="med" len="med"/>
+                      <a:tailEnd type="none" w="med" len="med"/>
+                    </a:lnB>
+                    <a:solidFill>
+                      <a:srgbClr val="8FAADC"/>
+                    </a:solidFill>
+                  </a:tcPr>
+                </a:tc>
+                <a:tc>
+                  <a:txBody>
+                    <a:bodyPr/>
+                    <a:lstStyle/>
+                    <a:p>
+                      <a:endParaRPr lang="en-IN" dirty="0"/>
+                    </a:p>
+                  </a:txBody>
+                  <a:tcPr>
+                    <a:lnL w="12700" cap="flat" cmpd="sng" algn="ctr">
+                      <a:solidFill>
+                        <a:schemeClr val="tx1"/>
+                      </a:solidFill>
+                      <a:prstDash val="solid"/>
+                      <a:round/>
+                      <a:headEnd type="none" w="med" len="med"/>
+                      <a:tailEnd type="none" w="med" len="med"/>
+                    </a:lnL>
+                    <a:lnR w="12700" cap="flat" cmpd="sng" algn="ctr">
+                      <a:solidFill>
+                        <a:schemeClr val="tx1"/>
+                      </a:solidFill>
+                      <a:prstDash val="solid"/>
+                      <a:round/>
+                      <a:headEnd type="none" w="med" len="med"/>
+                      <a:tailEnd type="none" w="med" len="med"/>
+                    </a:lnR>
+                    <a:lnT w="12700" cap="flat" cmpd="sng" algn="ctr">
+                      <a:solidFill>
+                        <a:schemeClr val="tx1"/>
+                      </a:solidFill>
+                      <a:prstDash val="solid"/>
+                      <a:round/>
+                      <a:headEnd type="none" w="med" len="med"/>
+                      <a:tailEnd type="none" w="med" len="med"/>
+                    </a:lnT>
+                    <a:lnB w="12700" cap="flat" cmpd="sng" algn="ctr">
+                      <a:solidFill>
+                        <a:schemeClr val="tx1"/>
+                      </a:solidFill>
+                      <a:prstDash val="solid"/>
+                      <a:round/>
+                      <a:headEnd type="none" w="med" len="med"/>
+                      <a:tailEnd type="none" w="med" len="med"/>
+                    </a:lnB>
+                    <a:solidFill>
+                      <a:srgbClr val="8FAADC"/>
+                    </a:solidFill>
+                  </a:tcPr>
+                </a:tc>
+                <a:tc>
+                  <a:txBody>
+                    <a:bodyPr/>
+                    <a:lstStyle/>
+                    <a:p>
+                      <a:endParaRPr lang="en-IN" dirty="0"/>
+                    </a:p>
+                  </a:txBody>
+                  <a:tcPr>
+                    <a:lnL w="12700" cap="flat" cmpd="sng" algn="ctr">
+                      <a:solidFill>
+                        <a:schemeClr val="tx1"/>
+                      </a:solidFill>
+                      <a:prstDash val="solid"/>
+                      <a:round/>
+                      <a:headEnd type="none" w="med" len="med"/>
+                      <a:tailEnd type="none" w="med" len="med"/>
+                    </a:lnL>
+                    <a:lnR w="12700" cap="flat" cmpd="sng" algn="ctr">
+                      <a:solidFill>
+                        <a:schemeClr val="tx1"/>
+                      </a:solidFill>
+                      <a:prstDash val="solid"/>
+                      <a:round/>
+                      <a:headEnd type="none" w="med" len="med"/>
+                      <a:tailEnd type="none" w="med" len="med"/>
+                    </a:lnR>
+                    <a:lnT w="12700" cap="flat" cmpd="sng" algn="ctr">
+                      <a:solidFill>
+                        <a:schemeClr val="tx1"/>
+                      </a:solidFill>
+                      <a:prstDash val="solid"/>
+                      <a:round/>
+                      <a:headEnd type="none" w="med" len="med"/>
+                      <a:tailEnd type="none" w="med" len="med"/>
+                    </a:lnT>
+                    <a:lnB w="12700" cap="flat" cmpd="sng" algn="ctr">
+                      <a:solidFill>
+                        <a:schemeClr val="tx1"/>
+                      </a:solidFill>
+                      <a:prstDash val="solid"/>
+                      <a:round/>
+                      <a:headEnd type="none" w="med" len="med"/>
+                      <a:tailEnd type="none" w="med" len="med"/>
+                    </a:lnB>
+                    <a:solidFill>
+                      <a:srgbClr val="8FAADC"/>
+                    </a:solidFill>
+                  </a:tcPr>
+                </a:tc>
+                <a:extLst>
+                  <a:ext uri="{0D108BD9-81ED-4DB2-BD59-A6C34878D82A}">
+                    <a16:rowId xmlns:a16="http://schemas.microsoft.com/office/drawing/2014/main" val="2031315940"/>
+                  </a:ext>
+                </a:extLst>
+              </a:tr>
+              <a:tr h="370840">
+                <a:tc>
+                  <a:txBody>
+                    <a:bodyPr/>
+                    <a:lstStyle/>
+                    <a:p>
+                      <a:endParaRPr lang="en-IN" dirty="0"/>
+                    </a:p>
+                  </a:txBody>
+                  <a:tcPr>
+                    <a:lnL w="12700" cap="flat" cmpd="sng" algn="ctr">
+                      <a:solidFill>
+                        <a:schemeClr val="tx1"/>
+                      </a:solidFill>
+                      <a:prstDash val="solid"/>
+                      <a:round/>
+                      <a:headEnd type="none" w="med" len="med"/>
+                      <a:tailEnd type="none" w="med" len="med"/>
+                    </a:lnL>
+                    <a:lnR w="12700" cap="flat" cmpd="sng" algn="ctr">
+                      <a:solidFill>
+                        <a:schemeClr val="tx1"/>
+                      </a:solidFill>
+                      <a:prstDash val="solid"/>
+                      <a:round/>
+                      <a:headEnd type="none" w="med" len="med"/>
+                      <a:tailEnd type="none" w="med" len="med"/>
+                    </a:lnR>
+                    <a:lnT w="12700" cap="flat" cmpd="sng" algn="ctr">
+                      <a:solidFill>
+                        <a:schemeClr val="tx1"/>
+                      </a:solidFill>
+                      <a:prstDash val="solid"/>
+                      <a:round/>
+                      <a:headEnd type="none" w="med" len="med"/>
+                      <a:tailEnd type="none" w="med" len="med"/>
+                    </a:lnT>
+                    <a:lnB w="12700" cap="flat" cmpd="sng" algn="ctr">
+                      <a:solidFill>
+                        <a:schemeClr val="tx1"/>
+                      </a:solidFill>
+                      <a:prstDash val="solid"/>
+                      <a:round/>
+                      <a:headEnd type="none" w="med" len="med"/>
+                      <a:tailEnd type="none" w="med" len="med"/>
+                    </a:lnB>
+                    <a:solidFill>
+                      <a:srgbClr val="8FAADC"/>
+                    </a:solidFill>
+                  </a:tcPr>
+                </a:tc>
+                <a:tc>
+                  <a:txBody>
+                    <a:bodyPr/>
+                    <a:lstStyle/>
+                    <a:p>
+                      <a:endParaRPr lang="en-IN"/>
+                    </a:p>
+                  </a:txBody>
+                  <a:tcPr>
+                    <a:lnL w="12700" cap="flat" cmpd="sng" algn="ctr">
+                      <a:solidFill>
+                        <a:schemeClr val="tx1"/>
+                      </a:solidFill>
+                      <a:prstDash val="solid"/>
+                      <a:round/>
+                      <a:headEnd type="none" w="med" len="med"/>
+                      <a:tailEnd type="none" w="med" len="med"/>
+                    </a:lnL>
+                    <a:lnR w="12700" cap="flat" cmpd="sng" algn="ctr">
+                      <a:solidFill>
+                        <a:schemeClr val="tx1"/>
+                      </a:solidFill>
+                      <a:prstDash val="solid"/>
+                      <a:round/>
+                      <a:headEnd type="none" w="med" len="med"/>
+                      <a:tailEnd type="none" w="med" len="med"/>
+                    </a:lnR>
+                    <a:lnT w="12700" cap="flat" cmpd="sng" algn="ctr">
+                      <a:solidFill>
+                        <a:schemeClr val="tx1"/>
+                      </a:solidFill>
+                      <a:prstDash val="solid"/>
+                      <a:round/>
+                      <a:headEnd type="none" w="med" len="med"/>
+                      <a:tailEnd type="none" w="med" len="med"/>
+                    </a:lnT>
+                    <a:lnB w="12700" cap="flat" cmpd="sng" algn="ctr">
+                      <a:solidFill>
+                        <a:schemeClr val="tx1"/>
+                      </a:solidFill>
+                      <a:prstDash val="solid"/>
+                      <a:round/>
+                      <a:headEnd type="none" w="med" len="med"/>
+                      <a:tailEnd type="none" w="med" len="med"/>
+                    </a:lnB>
+                    <a:solidFill>
+                      <a:srgbClr val="8FAADC"/>
+                    </a:solidFill>
+                  </a:tcPr>
+                </a:tc>
+                <a:tc>
+                  <a:txBody>
+                    <a:bodyPr/>
+                    <a:lstStyle/>
+                    <a:p>
+                      <a:endParaRPr lang="en-IN"/>
+                    </a:p>
+                  </a:txBody>
+                  <a:tcPr>
+                    <a:lnL w="12700" cap="flat" cmpd="sng" algn="ctr">
+                      <a:solidFill>
+                        <a:schemeClr val="tx1"/>
+                      </a:solidFill>
+                      <a:prstDash val="solid"/>
+                      <a:round/>
+                      <a:headEnd type="none" w="med" len="med"/>
+                      <a:tailEnd type="none" w="med" len="med"/>
+                    </a:lnL>
+                    <a:lnR w="12700" cap="flat" cmpd="sng" algn="ctr">
+                      <a:solidFill>
+                        <a:schemeClr val="tx1"/>
+                      </a:solidFill>
+                      <a:prstDash val="solid"/>
+                      <a:round/>
+                      <a:headEnd type="none" w="med" len="med"/>
+                      <a:tailEnd type="none" w="med" len="med"/>
+                    </a:lnR>
+                    <a:lnT w="12700" cap="flat" cmpd="sng" algn="ctr">
+                      <a:solidFill>
+                        <a:schemeClr val="tx1"/>
+                      </a:solidFill>
+                      <a:prstDash val="solid"/>
+                      <a:round/>
+                      <a:headEnd type="none" w="med" len="med"/>
+                      <a:tailEnd type="none" w="med" len="med"/>
+                    </a:lnT>
+                    <a:lnB w="12700" cap="flat" cmpd="sng" algn="ctr">
+                      <a:solidFill>
+                        <a:schemeClr val="tx1"/>
+                      </a:solidFill>
+                      <a:prstDash val="solid"/>
+                      <a:round/>
+                      <a:headEnd type="none" w="med" len="med"/>
+                      <a:tailEnd type="none" w="med" len="med"/>
+                    </a:lnB>
+                    <a:solidFill>
+                      <a:srgbClr val="8FAADC"/>
+                    </a:solidFill>
+                  </a:tcPr>
+                </a:tc>
+                <a:tc>
+                  <a:txBody>
+                    <a:bodyPr/>
+                    <a:lstStyle/>
+                    <a:p>
+                      <a:endParaRPr lang="en-IN"/>
+                    </a:p>
+                  </a:txBody>
+                  <a:tcPr>
+                    <a:lnL w="12700" cap="flat" cmpd="sng" algn="ctr">
+                      <a:solidFill>
+                        <a:schemeClr val="tx1"/>
+                      </a:solidFill>
+                      <a:prstDash val="solid"/>
+                      <a:round/>
+                      <a:headEnd type="none" w="med" len="med"/>
+                      <a:tailEnd type="none" w="med" len="med"/>
+                    </a:lnL>
+                    <a:lnR w="12700" cap="flat" cmpd="sng" algn="ctr">
+                      <a:solidFill>
+                        <a:schemeClr val="tx1"/>
+                      </a:solidFill>
+                      <a:prstDash val="solid"/>
+                      <a:round/>
+                      <a:headEnd type="none" w="med" len="med"/>
+                      <a:tailEnd type="none" w="med" len="med"/>
+                    </a:lnR>
+                    <a:lnT w="12700" cap="flat" cmpd="sng" algn="ctr">
+                      <a:solidFill>
+                        <a:schemeClr val="tx1"/>
+                      </a:solidFill>
+                      <a:prstDash val="solid"/>
+                      <a:round/>
+                      <a:headEnd type="none" w="med" len="med"/>
+                      <a:tailEnd type="none" w="med" len="med"/>
+                    </a:lnT>
+                    <a:lnB w="12700" cap="flat" cmpd="sng" algn="ctr">
+                      <a:solidFill>
+                        <a:schemeClr val="tx1"/>
+                      </a:solidFill>
+                      <a:prstDash val="solid"/>
+                      <a:round/>
+                      <a:headEnd type="none" w="med" len="med"/>
+                      <a:tailEnd type="none" w="med" len="med"/>
+                    </a:lnB>
+                    <a:solidFill>
+                      <a:srgbClr val="8FAADC"/>
+                    </a:solidFill>
+                  </a:tcPr>
+                </a:tc>
+                <a:tc>
+                  <a:txBody>
+                    <a:bodyPr/>
+                    <a:lstStyle/>
+                    <a:p>
+                      <a:endParaRPr lang="en-IN" dirty="0"/>
+                    </a:p>
+                  </a:txBody>
+                  <a:tcPr>
+                    <a:lnL w="12700" cap="flat" cmpd="sng" algn="ctr">
+                      <a:solidFill>
+                        <a:schemeClr val="tx1"/>
+                      </a:solidFill>
+                      <a:prstDash val="solid"/>
+                      <a:round/>
+                      <a:headEnd type="none" w="med" len="med"/>
+                      <a:tailEnd type="none" w="med" len="med"/>
+                    </a:lnL>
+                    <a:lnR w="12700" cap="flat" cmpd="sng" algn="ctr">
+                      <a:solidFill>
+                        <a:schemeClr val="tx1"/>
+                      </a:solidFill>
+                      <a:prstDash val="solid"/>
+                      <a:round/>
+                      <a:headEnd type="none" w="med" len="med"/>
+                      <a:tailEnd type="none" w="med" len="med"/>
+                    </a:lnR>
+                    <a:lnT w="12700" cap="flat" cmpd="sng" algn="ctr">
+                      <a:solidFill>
+                        <a:schemeClr val="tx1"/>
+                      </a:solidFill>
+                      <a:prstDash val="solid"/>
+                      <a:round/>
+                      <a:headEnd type="none" w="med" len="med"/>
+                      <a:tailEnd type="none" w="med" len="med"/>
+                    </a:lnT>
+                    <a:lnB w="12700" cap="flat" cmpd="sng" algn="ctr">
+                      <a:solidFill>
+                        <a:schemeClr val="tx1"/>
+                      </a:solidFill>
+                      <a:prstDash val="solid"/>
+                      <a:round/>
+                      <a:headEnd type="none" w="med" len="med"/>
+                      <a:tailEnd type="none" w="med" len="med"/>
+                    </a:lnB>
+                    <a:solidFill>
+                      <a:srgbClr val="8FAADC"/>
+                    </a:solidFill>
+                  </a:tcPr>
+                </a:tc>
+                <a:tc>
+                  <a:txBody>
+                    <a:bodyPr/>
+                    <a:lstStyle/>
+                    <a:p>
+                      <a:endParaRPr lang="en-IN" dirty="0"/>
+                    </a:p>
+                  </a:txBody>
+                  <a:tcPr>
+                    <a:lnL w="12700" cap="flat" cmpd="sng" algn="ctr">
+                      <a:solidFill>
+                        <a:schemeClr val="tx1"/>
+                      </a:solidFill>
+                      <a:prstDash val="solid"/>
+                      <a:round/>
+                      <a:headEnd type="none" w="med" len="med"/>
+                      <a:tailEnd type="none" w="med" len="med"/>
+                    </a:lnL>
+                    <a:lnR w="12700" cap="flat" cmpd="sng" algn="ctr">
+                      <a:solidFill>
+                        <a:schemeClr val="tx1"/>
+                      </a:solidFill>
+                      <a:prstDash val="solid"/>
+                      <a:round/>
+                      <a:headEnd type="none" w="med" len="med"/>
+                      <a:tailEnd type="none" w="med" len="med"/>
+                    </a:lnR>
+                    <a:lnT w="12700" cap="flat" cmpd="sng" algn="ctr">
+                      <a:solidFill>
+                        <a:schemeClr val="tx1"/>
+                      </a:solidFill>
+                      <a:prstDash val="solid"/>
+                      <a:round/>
+                      <a:headEnd type="none" w="med" len="med"/>
+                      <a:tailEnd type="none" w="med" len="med"/>
+                    </a:lnT>
+                    <a:lnB w="12700" cap="flat" cmpd="sng" algn="ctr">
+                      <a:solidFill>
+                        <a:schemeClr val="tx1"/>
+                      </a:solidFill>
+                      <a:prstDash val="solid"/>
+                      <a:round/>
+                      <a:headEnd type="none" w="med" len="med"/>
+                      <a:tailEnd type="none" w="med" len="med"/>
+                    </a:lnB>
+                    <a:solidFill>
+                      <a:srgbClr val="8FAADC"/>
+                    </a:solidFill>
+                  </a:tcPr>
+                </a:tc>
+                <a:tc>
+                  <a:txBody>
+                    <a:bodyPr/>
+                    <a:lstStyle/>
+                    <a:p>
+                      <a:endParaRPr lang="en-IN" dirty="0"/>
+                    </a:p>
+                  </a:txBody>
+                  <a:tcPr>
+                    <a:lnL w="12700" cap="flat" cmpd="sng" algn="ctr">
+                      <a:solidFill>
+                        <a:schemeClr val="tx1"/>
+                      </a:solidFill>
+                      <a:prstDash val="solid"/>
+                      <a:round/>
+                      <a:headEnd type="none" w="med" len="med"/>
+                      <a:tailEnd type="none" w="med" len="med"/>
+                    </a:lnL>
+                    <a:lnR w="12700" cap="flat" cmpd="sng" algn="ctr">
+                      <a:solidFill>
+                        <a:schemeClr val="tx1"/>
+                      </a:solidFill>
+                      <a:prstDash val="solid"/>
+                      <a:round/>
+                      <a:headEnd type="none" w="med" len="med"/>
+                      <a:tailEnd type="none" w="med" len="med"/>
+                    </a:lnR>
+                    <a:lnT w="12700" cap="flat" cmpd="sng" algn="ctr">
+                      <a:solidFill>
+                        <a:schemeClr val="tx1"/>
+                      </a:solidFill>
+                      <a:prstDash val="solid"/>
+                      <a:round/>
+                      <a:headEnd type="none" w="med" len="med"/>
+                      <a:tailEnd type="none" w="med" len="med"/>
+                    </a:lnT>
+                    <a:lnB w="12700" cap="flat" cmpd="sng" algn="ctr">
+                      <a:solidFill>
+                        <a:schemeClr val="tx1"/>
+                      </a:solidFill>
+                      <a:prstDash val="solid"/>
+                      <a:round/>
+                      <a:headEnd type="none" w="med" len="med"/>
+                      <a:tailEnd type="none" w="med" len="med"/>
+                    </a:lnB>
+                    <a:solidFill>
+                      <a:srgbClr val="8FAADC"/>
+                    </a:solidFill>
+                  </a:tcPr>
+                </a:tc>
+                <a:extLst>
+                  <a:ext uri="{0D108BD9-81ED-4DB2-BD59-A6C34878D82A}">
+                    <a16:rowId xmlns:a16="http://schemas.microsoft.com/office/drawing/2014/main" val="992374018"/>
+                  </a:ext>
+                </a:extLst>
+              </a:tr>
+            </a:tbl>
+          </a:graphicData>
+        </a:graphic>
+      </p:graphicFrame>
+      <p:sp>
+        <p:nvSpPr>
+          <p:cNvPr id="11" name="Rectangle 10">
+            <a:extLst>
+              <a:ext uri="{FF2B5EF4-FFF2-40B4-BE49-F238E27FC236}">
+                <a16:creationId xmlns:a16="http://schemas.microsoft.com/office/drawing/2014/main" id="{772C227F-8F6B-E3A1-C945-5BD40838240E}"/>
+              </a:ext>
+            </a:extLst>
+          </p:cNvPr>
+          <p:cNvSpPr/>
+          <p:nvPr/>
+        </p:nvSpPr>
+        <p:spPr>
+          <a:xfrm>
+            <a:off x="9135208" y="1914087"/>
+            <a:ext cx="2740273" cy="3337560"/>
+          </a:xfrm>
+          <a:prstGeom prst="rect">
             <a:avLst/>
           </a:prstGeom>
         </p:spPr>
@@ -30036,10 +36955,10 @@
       </p:sp>
       <p:sp>
         <p:nvSpPr>
-          <p:cNvPr id="20" name="Rectangle: Rounded Corners 19">
+          <p:cNvPr id="12" name="Rectangle: Rounded Corners 11">
             <a:extLst>
               <a:ext uri="{FF2B5EF4-FFF2-40B4-BE49-F238E27FC236}">
-                <a16:creationId xmlns:a16="http://schemas.microsoft.com/office/drawing/2014/main" id="{72931609-DBF7-005C-BF35-2CBF1D134024}"/>
+                <a16:creationId xmlns:a16="http://schemas.microsoft.com/office/drawing/2014/main" id="{DABADA08-6C72-86E3-16A8-B73CD2F7A7B6}"/>
               </a:ext>
             </a:extLst>
           </p:cNvPr>
@@ -30048,8 +36967,8 @@
         </p:nvSpPr>
         <p:spPr>
           <a:xfrm>
-            <a:off x="6079880" y="593481"/>
-            <a:ext cx="2664070" cy="1178169"/>
+            <a:off x="10587892" y="1373245"/>
+            <a:ext cx="1301262" cy="370840"/>
           </a:xfrm>
           <a:prstGeom prst="roundRect">
             <a:avLst/>
@@ -30076,16 +36995,20 @@
           <a:lstStyle/>
           <a:p>
             <a:pPr algn="ctr"/>
-            <a:endParaRPr lang="en-IN"/>
+            <a:r>
+              <a:rPr lang="en-US" dirty="0"/>
+              <a:t>Filters</a:t>
+            </a:r>
+            <a:endParaRPr lang="en-IN" dirty="0"/>
           </a:p>
         </p:txBody>
       </p:sp>
       <p:sp>
         <p:nvSpPr>
-          <p:cNvPr id="21" name="Rectangle: Rounded Corners 20">
+          <p:cNvPr id="13" name="Rectangle: Rounded Corners 12">
             <a:extLst>
               <a:ext uri="{FF2B5EF4-FFF2-40B4-BE49-F238E27FC236}">
-                <a16:creationId xmlns:a16="http://schemas.microsoft.com/office/drawing/2014/main" id="{5B3BB773-7689-FBAA-EFCD-9C170B695B31}"/>
+                <a16:creationId xmlns:a16="http://schemas.microsoft.com/office/drawing/2014/main" id="{62370042-3332-C085-F3B6-C45529F5A4DC}"/>
               </a:ext>
             </a:extLst>
           </p:cNvPr>
@@ -30094,8 +37017,8 @@
         </p:nvSpPr>
         <p:spPr>
           <a:xfrm>
-            <a:off x="3207726" y="593481"/>
-            <a:ext cx="2664070" cy="1178169"/>
+            <a:off x="10588479" y="6109944"/>
+            <a:ext cx="1301262" cy="370840"/>
           </a:xfrm>
           <a:prstGeom prst="roundRect">
             <a:avLst/>
@@ -30122,1965 +37045,18 @@
           <a:lstStyle/>
           <a:p>
             <a:pPr algn="ctr"/>
-            <a:endParaRPr lang="en-IN"/>
+            <a:r>
+              <a:rPr lang="en-US" dirty="0"/>
+              <a:t>Export</a:t>
+            </a:r>
+            <a:endParaRPr lang="en-IN" dirty="0"/>
           </a:p>
         </p:txBody>
       </p:sp>
-      <p:graphicFrame>
-        <p:nvGraphicFramePr>
-          <p:cNvPr id="24" name="Table 23">
-            <a:extLst>
-              <a:ext uri="{FF2B5EF4-FFF2-40B4-BE49-F238E27FC236}">
-                <a16:creationId xmlns:a16="http://schemas.microsoft.com/office/drawing/2014/main" id="{FAB34855-CC85-E1F9-D03D-1328CBBA8744}"/>
-              </a:ext>
-            </a:extLst>
-          </p:cNvPr>
-          <p:cNvGraphicFramePr>
-            <a:graphicFrameLocks noGrp="1"/>
-          </p:cNvGraphicFramePr>
-          <p:nvPr>
-            <p:extLst>
-              <p:ext uri="{D42A27DB-BD31-4B8C-83A1-F6EECF244321}">
-                <p14:modId xmlns:p14="http://schemas.microsoft.com/office/powerpoint/2010/main" val="2926930378"/>
-              </p:ext>
-            </p:extLst>
-          </p:nvPr>
-        </p:nvGraphicFramePr>
-        <p:xfrm>
-          <a:off x="3207726" y="2204232"/>
-          <a:ext cx="5536224" cy="3337560"/>
-        </p:xfrm>
-        <a:graphic>
-          <a:graphicData uri="http://schemas.openxmlformats.org/drawingml/2006/table">
-            <a:tbl>
-              <a:tblPr firstRow="1" bandRow="1">
-                <a:tableStyleId>{2D5ABB26-0587-4C30-8999-92F81FD0307C}</a:tableStyleId>
-              </a:tblPr>
-              <a:tblGrid>
-                <a:gridCol w="1384056">
-                  <a:extLst>
-                    <a:ext uri="{9D8B030D-6E8A-4147-A177-3AD203B41FA5}">
-                      <a16:colId xmlns:a16="http://schemas.microsoft.com/office/drawing/2014/main" val="519203008"/>
-                    </a:ext>
-                  </a:extLst>
-                </a:gridCol>
-                <a:gridCol w="1384056">
-                  <a:extLst>
-                    <a:ext uri="{9D8B030D-6E8A-4147-A177-3AD203B41FA5}">
-                      <a16:colId xmlns:a16="http://schemas.microsoft.com/office/drawing/2014/main" val="2182870733"/>
-                    </a:ext>
-                  </a:extLst>
-                </a:gridCol>
-                <a:gridCol w="1384056">
-                  <a:extLst>
-                    <a:ext uri="{9D8B030D-6E8A-4147-A177-3AD203B41FA5}">
-                      <a16:colId xmlns:a16="http://schemas.microsoft.com/office/drawing/2014/main" val="2948238244"/>
-                    </a:ext>
-                  </a:extLst>
-                </a:gridCol>
-                <a:gridCol w="1384056">
-                  <a:extLst>
-                    <a:ext uri="{9D8B030D-6E8A-4147-A177-3AD203B41FA5}">
-                      <a16:colId xmlns:a16="http://schemas.microsoft.com/office/drawing/2014/main" val="1499066006"/>
-                    </a:ext>
-                  </a:extLst>
-                </a:gridCol>
-              </a:tblGrid>
-              <a:tr h="370840">
-                <a:tc>
-                  <a:txBody>
-                    <a:bodyPr/>
-                    <a:lstStyle/>
-                    <a:p>
-                      <a:r>
-                        <a:rPr lang="en-US" dirty="0"/>
-                        <a:t>Name</a:t>
-                      </a:r>
-                      <a:endParaRPr lang="en-IN" dirty="0"/>
-                    </a:p>
-                  </a:txBody>
-                  <a:tcPr>
-                    <a:lnL w="12700" cap="flat" cmpd="sng" algn="ctr">
-                      <a:solidFill>
-                        <a:schemeClr val="tx1"/>
-                      </a:solidFill>
-                      <a:prstDash val="solid"/>
-                      <a:round/>
-                      <a:headEnd type="none" w="med" len="med"/>
-                      <a:tailEnd type="none" w="med" len="med"/>
-                    </a:lnL>
-                    <a:lnR w="12700" cap="flat" cmpd="sng" algn="ctr">
-                      <a:solidFill>
-                        <a:schemeClr val="tx1"/>
-                      </a:solidFill>
-                      <a:prstDash val="solid"/>
-                      <a:round/>
-                      <a:headEnd type="none" w="med" len="med"/>
-                      <a:tailEnd type="none" w="med" len="med"/>
-                    </a:lnR>
-                    <a:lnT w="12700" cap="flat" cmpd="sng" algn="ctr">
-                      <a:solidFill>
-                        <a:schemeClr val="tx1"/>
-                      </a:solidFill>
-                      <a:prstDash val="solid"/>
-                      <a:round/>
-                      <a:headEnd type="none" w="med" len="med"/>
-                      <a:tailEnd type="none" w="med" len="med"/>
-                    </a:lnT>
-                    <a:lnB w="12700" cap="flat" cmpd="sng" algn="ctr">
-                      <a:solidFill>
-                        <a:schemeClr val="tx1"/>
-                      </a:solidFill>
-                      <a:prstDash val="solid"/>
-                      <a:round/>
-                      <a:headEnd type="none" w="med" len="med"/>
-                      <a:tailEnd type="none" w="med" len="med"/>
-                    </a:lnB>
-                    <a:solidFill>
-                      <a:schemeClr val="accent1">
-                        <a:lumMod val="75000"/>
-                      </a:schemeClr>
-                    </a:solidFill>
-                  </a:tcPr>
-                </a:tc>
-                <a:tc>
-                  <a:txBody>
-                    <a:bodyPr/>
-                    <a:lstStyle/>
-                    <a:p>
-                      <a:r>
-                        <a:rPr lang="en-US" dirty="0"/>
-                        <a:t>Position</a:t>
-                      </a:r>
-                      <a:endParaRPr lang="en-IN" dirty="0"/>
-                    </a:p>
-                  </a:txBody>
-                  <a:tcPr>
-                    <a:lnL w="12700" cap="flat" cmpd="sng" algn="ctr">
-                      <a:solidFill>
-                        <a:schemeClr val="tx1"/>
-                      </a:solidFill>
-                      <a:prstDash val="solid"/>
-                      <a:round/>
-                      <a:headEnd type="none" w="med" len="med"/>
-                      <a:tailEnd type="none" w="med" len="med"/>
-                    </a:lnL>
-                    <a:lnR w="12700" cap="flat" cmpd="sng" algn="ctr">
-                      <a:solidFill>
-                        <a:schemeClr val="tx1"/>
-                      </a:solidFill>
-                      <a:prstDash val="solid"/>
-                      <a:round/>
-                      <a:headEnd type="none" w="med" len="med"/>
-                      <a:tailEnd type="none" w="med" len="med"/>
-                    </a:lnR>
-                    <a:lnT w="12700" cap="flat" cmpd="sng" algn="ctr">
-                      <a:solidFill>
-                        <a:schemeClr val="tx1"/>
-                      </a:solidFill>
-                      <a:prstDash val="solid"/>
-                      <a:round/>
-                      <a:headEnd type="none" w="med" len="med"/>
-                      <a:tailEnd type="none" w="med" len="med"/>
-                    </a:lnT>
-                    <a:lnB w="12700" cap="flat" cmpd="sng" algn="ctr">
-                      <a:solidFill>
-                        <a:schemeClr val="tx1"/>
-                      </a:solidFill>
-                      <a:prstDash val="solid"/>
-                      <a:round/>
-                      <a:headEnd type="none" w="med" len="med"/>
-                      <a:tailEnd type="none" w="med" len="med"/>
-                    </a:lnB>
-                    <a:solidFill>
-                      <a:schemeClr val="accent1">
-                        <a:lumMod val="75000"/>
-                      </a:schemeClr>
-                    </a:solidFill>
-                  </a:tcPr>
-                </a:tc>
-                <a:tc>
-                  <a:txBody>
-                    <a:bodyPr/>
-                    <a:lstStyle/>
-                    <a:p>
-                      <a:r>
-                        <a:rPr lang="en-US" dirty="0"/>
-                        <a:t>Net Salary</a:t>
-                      </a:r>
-                      <a:endParaRPr lang="en-IN" dirty="0"/>
-                    </a:p>
-                  </a:txBody>
-                  <a:tcPr>
-                    <a:lnL w="12700" cap="flat" cmpd="sng" algn="ctr">
-                      <a:solidFill>
-                        <a:schemeClr val="tx1"/>
-                      </a:solidFill>
-                      <a:prstDash val="solid"/>
-                      <a:round/>
-                      <a:headEnd type="none" w="med" len="med"/>
-                      <a:tailEnd type="none" w="med" len="med"/>
-                    </a:lnL>
-                    <a:lnR w="12700" cap="flat" cmpd="sng" algn="ctr">
-                      <a:solidFill>
-                        <a:schemeClr val="tx1"/>
-                      </a:solidFill>
-                      <a:prstDash val="solid"/>
-                      <a:round/>
-                      <a:headEnd type="none" w="med" len="med"/>
-                      <a:tailEnd type="none" w="med" len="med"/>
-                    </a:lnR>
-                    <a:lnT w="12700" cap="flat" cmpd="sng" algn="ctr">
-                      <a:solidFill>
-                        <a:schemeClr val="tx1"/>
-                      </a:solidFill>
-                      <a:prstDash val="solid"/>
-                      <a:round/>
-                      <a:headEnd type="none" w="med" len="med"/>
-                      <a:tailEnd type="none" w="med" len="med"/>
-                    </a:lnT>
-                    <a:lnB w="12700" cap="flat" cmpd="sng" algn="ctr">
-                      <a:solidFill>
-                        <a:schemeClr val="tx1"/>
-                      </a:solidFill>
-                      <a:prstDash val="solid"/>
-                      <a:round/>
-                      <a:headEnd type="none" w="med" len="med"/>
-                      <a:tailEnd type="none" w="med" len="med"/>
-                    </a:lnB>
-                    <a:solidFill>
-                      <a:schemeClr val="accent1">
-                        <a:lumMod val="75000"/>
-                      </a:schemeClr>
-                    </a:solidFill>
-                  </a:tcPr>
-                </a:tc>
-                <a:tc>
-                  <a:txBody>
-                    <a:bodyPr/>
-                    <a:lstStyle/>
-                    <a:p>
-                      <a:r>
-                        <a:rPr lang="en-US" dirty="0"/>
-                        <a:t>Status</a:t>
-                      </a:r>
-                      <a:endParaRPr lang="en-IN" dirty="0"/>
-                    </a:p>
-                  </a:txBody>
-                  <a:tcPr>
-                    <a:lnL w="12700" cap="flat" cmpd="sng" algn="ctr">
-                      <a:solidFill>
-                        <a:schemeClr val="tx1"/>
-                      </a:solidFill>
-                      <a:prstDash val="solid"/>
-                      <a:round/>
-                      <a:headEnd type="none" w="med" len="med"/>
-                      <a:tailEnd type="none" w="med" len="med"/>
-                    </a:lnL>
-                    <a:lnR w="12700" cap="flat" cmpd="sng" algn="ctr">
-                      <a:solidFill>
-                        <a:schemeClr val="tx1"/>
-                      </a:solidFill>
-                      <a:prstDash val="solid"/>
-                      <a:round/>
-                      <a:headEnd type="none" w="med" len="med"/>
-                      <a:tailEnd type="none" w="med" len="med"/>
-                    </a:lnR>
-                    <a:lnT w="12700" cap="flat" cmpd="sng" algn="ctr">
-                      <a:solidFill>
-                        <a:schemeClr val="tx1"/>
-                      </a:solidFill>
-                      <a:prstDash val="solid"/>
-                      <a:round/>
-                      <a:headEnd type="none" w="med" len="med"/>
-                      <a:tailEnd type="none" w="med" len="med"/>
-                    </a:lnT>
-                    <a:lnB w="12700" cap="flat" cmpd="sng" algn="ctr">
-                      <a:solidFill>
-                        <a:schemeClr val="tx1"/>
-                      </a:solidFill>
-                      <a:prstDash val="solid"/>
-                      <a:round/>
-                      <a:headEnd type="none" w="med" len="med"/>
-                      <a:tailEnd type="none" w="med" len="med"/>
-                    </a:lnB>
-                    <a:solidFill>
-                      <a:schemeClr val="accent1">
-                        <a:lumMod val="75000"/>
-                      </a:schemeClr>
-                    </a:solidFill>
-                  </a:tcPr>
-                </a:tc>
-                <a:extLst>
-                  <a:ext uri="{0D108BD9-81ED-4DB2-BD59-A6C34878D82A}">
-                    <a16:rowId xmlns:a16="http://schemas.microsoft.com/office/drawing/2014/main" val="2967609491"/>
-                  </a:ext>
-                </a:extLst>
-              </a:tr>
-              <a:tr h="370840">
-                <a:tc>
-                  <a:txBody>
-                    <a:bodyPr/>
-                    <a:lstStyle/>
-                    <a:p>
-                      <a:endParaRPr lang="en-IN" dirty="0"/>
-                    </a:p>
-                  </a:txBody>
-                  <a:tcPr>
-                    <a:lnL w="12700" cap="flat" cmpd="sng" algn="ctr">
-                      <a:solidFill>
-                        <a:schemeClr val="tx1"/>
-                      </a:solidFill>
-                      <a:prstDash val="solid"/>
-                      <a:round/>
-                      <a:headEnd type="none" w="med" len="med"/>
-                      <a:tailEnd type="none" w="med" len="med"/>
-                    </a:lnL>
-                    <a:lnR w="12700" cap="flat" cmpd="sng" algn="ctr">
-                      <a:solidFill>
-                        <a:schemeClr val="tx1"/>
-                      </a:solidFill>
-                      <a:prstDash val="solid"/>
-                      <a:round/>
-                      <a:headEnd type="none" w="med" len="med"/>
-                      <a:tailEnd type="none" w="med" len="med"/>
-                    </a:lnR>
-                    <a:lnT w="12700" cap="flat" cmpd="sng" algn="ctr">
-                      <a:solidFill>
-                        <a:schemeClr val="tx1"/>
-                      </a:solidFill>
-                      <a:prstDash val="solid"/>
-                      <a:round/>
-                      <a:headEnd type="none" w="med" len="med"/>
-                      <a:tailEnd type="none" w="med" len="med"/>
-                    </a:lnT>
-                    <a:lnB w="12700" cap="flat" cmpd="sng" algn="ctr">
-                      <a:solidFill>
-                        <a:schemeClr val="tx1"/>
-                      </a:solidFill>
-                      <a:prstDash val="solid"/>
-                      <a:round/>
-                      <a:headEnd type="none" w="med" len="med"/>
-                      <a:tailEnd type="none" w="med" len="med"/>
-                    </a:lnB>
-                    <a:solidFill>
-                      <a:srgbClr val="8FAADC"/>
-                    </a:solidFill>
-                  </a:tcPr>
-                </a:tc>
-                <a:tc>
-                  <a:txBody>
-                    <a:bodyPr/>
-                    <a:lstStyle/>
-                    <a:p>
-                      <a:endParaRPr lang="en-IN"/>
-                    </a:p>
-                  </a:txBody>
-                  <a:tcPr>
-                    <a:lnL w="12700" cap="flat" cmpd="sng" algn="ctr">
-                      <a:solidFill>
-                        <a:schemeClr val="tx1"/>
-                      </a:solidFill>
-                      <a:prstDash val="solid"/>
-                      <a:round/>
-                      <a:headEnd type="none" w="med" len="med"/>
-                      <a:tailEnd type="none" w="med" len="med"/>
-                    </a:lnL>
-                    <a:lnR w="12700" cap="flat" cmpd="sng" algn="ctr">
-                      <a:solidFill>
-                        <a:schemeClr val="tx1"/>
-                      </a:solidFill>
-                      <a:prstDash val="solid"/>
-                      <a:round/>
-                      <a:headEnd type="none" w="med" len="med"/>
-                      <a:tailEnd type="none" w="med" len="med"/>
-                    </a:lnR>
-                    <a:lnT w="12700" cap="flat" cmpd="sng" algn="ctr">
-                      <a:solidFill>
-                        <a:schemeClr val="tx1"/>
-                      </a:solidFill>
-                      <a:prstDash val="solid"/>
-                      <a:round/>
-                      <a:headEnd type="none" w="med" len="med"/>
-                      <a:tailEnd type="none" w="med" len="med"/>
-                    </a:lnT>
-                    <a:lnB w="12700" cap="flat" cmpd="sng" algn="ctr">
-                      <a:solidFill>
-                        <a:schemeClr val="tx1"/>
-                      </a:solidFill>
-                      <a:prstDash val="solid"/>
-                      <a:round/>
-                      <a:headEnd type="none" w="med" len="med"/>
-                      <a:tailEnd type="none" w="med" len="med"/>
-                    </a:lnB>
-                    <a:solidFill>
-                      <a:srgbClr val="8FAADC"/>
-                    </a:solidFill>
-                  </a:tcPr>
-                </a:tc>
-                <a:tc>
-                  <a:txBody>
-                    <a:bodyPr/>
-                    <a:lstStyle/>
-                    <a:p>
-                      <a:endParaRPr lang="en-IN"/>
-                    </a:p>
-                  </a:txBody>
-                  <a:tcPr>
-                    <a:lnL w="12700" cap="flat" cmpd="sng" algn="ctr">
-                      <a:solidFill>
-                        <a:schemeClr val="tx1"/>
-                      </a:solidFill>
-                      <a:prstDash val="solid"/>
-                      <a:round/>
-                      <a:headEnd type="none" w="med" len="med"/>
-                      <a:tailEnd type="none" w="med" len="med"/>
-                    </a:lnL>
-                    <a:lnR w="12700" cap="flat" cmpd="sng" algn="ctr">
-                      <a:solidFill>
-                        <a:schemeClr val="tx1"/>
-                      </a:solidFill>
-                      <a:prstDash val="solid"/>
-                      <a:round/>
-                      <a:headEnd type="none" w="med" len="med"/>
-                      <a:tailEnd type="none" w="med" len="med"/>
-                    </a:lnR>
-                    <a:lnT w="12700" cap="flat" cmpd="sng" algn="ctr">
-                      <a:solidFill>
-                        <a:schemeClr val="tx1"/>
-                      </a:solidFill>
-                      <a:prstDash val="solid"/>
-                      <a:round/>
-                      <a:headEnd type="none" w="med" len="med"/>
-                      <a:tailEnd type="none" w="med" len="med"/>
-                    </a:lnT>
-                    <a:lnB w="12700" cap="flat" cmpd="sng" algn="ctr">
-                      <a:solidFill>
-                        <a:schemeClr val="tx1"/>
-                      </a:solidFill>
-                      <a:prstDash val="solid"/>
-                      <a:round/>
-                      <a:headEnd type="none" w="med" len="med"/>
-                      <a:tailEnd type="none" w="med" len="med"/>
-                    </a:lnB>
-                    <a:solidFill>
-                      <a:srgbClr val="8FAADC"/>
-                    </a:solidFill>
-                  </a:tcPr>
-                </a:tc>
-                <a:tc>
-                  <a:txBody>
-                    <a:bodyPr/>
-                    <a:lstStyle/>
-                    <a:p>
-                      <a:endParaRPr lang="en-IN"/>
-                    </a:p>
-                  </a:txBody>
-                  <a:tcPr>
-                    <a:lnL w="12700" cap="flat" cmpd="sng" algn="ctr">
-                      <a:solidFill>
-                        <a:schemeClr val="tx1"/>
-                      </a:solidFill>
-                      <a:prstDash val="solid"/>
-                      <a:round/>
-                      <a:headEnd type="none" w="med" len="med"/>
-                      <a:tailEnd type="none" w="med" len="med"/>
-                    </a:lnL>
-                    <a:lnR w="12700" cap="flat" cmpd="sng" algn="ctr">
-                      <a:solidFill>
-                        <a:schemeClr val="tx1"/>
-                      </a:solidFill>
-                      <a:prstDash val="solid"/>
-                      <a:round/>
-                      <a:headEnd type="none" w="med" len="med"/>
-                      <a:tailEnd type="none" w="med" len="med"/>
-                    </a:lnR>
-                    <a:lnT w="12700" cap="flat" cmpd="sng" algn="ctr">
-                      <a:solidFill>
-                        <a:schemeClr val="tx1"/>
-                      </a:solidFill>
-                      <a:prstDash val="solid"/>
-                      <a:round/>
-                      <a:headEnd type="none" w="med" len="med"/>
-                      <a:tailEnd type="none" w="med" len="med"/>
-                    </a:lnT>
-                    <a:lnB w="12700" cap="flat" cmpd="sng" algn="ctr">
-                      <a:solidFill>
-                        <a:schemeClr val="tx1"/>
-                      </a:solidFill>
-                      <a:prstDash val="solid"/>
-                      <a:round/>
-                      <a:headEnd type="none" w="med" len="med"/>
-                      <a:tailEnd type="none" w="med" len="med"/>
-                    </a:lnB>
-                    <a:solidFill>
-                      <a:srgbClr val="8FAADC"/>
-                    </a:solidFill>
-                  </a:tcPr>
-                </a:tc>
-                <a:extLst>
-                  <a:ext uri="{0D108BD9-81ED-4DB2-BD59-A6C34878D82A}">
-                    <a16:rowId xmlns:a16="http://schemas.microsoft.com/office/drawing/2014/main" val="1665693499"/>
-                  </a:ext>
-                </a:extLst>
-              </a:tr>
-              <a:tr h="370840">
-                <a:tc>
-                  <a:txBody>
-                    <a:bodyPr/>
-                    <a:lstStyle/>
-                    <a:p>
-                      <a:endParaRPr lang="en-IN" dirty="0"/>
-                    </a:p>
-                  </a:txBody>
-                  <a:tcPr>
-                    <a:lnL w="12700" cap="flat" cmpd="sng" algn="ctr">
-                      <a:solidFill>
-                        <a:schemeClr val="tx1"/>
-                      </a:solidFill>
-                      <a:prstDash val="solid"/>
-                      <a:round/>
-                      <a:headEnd type="none" w="med" len="med"/>
-                      <a:tailEnd type="none" w="med" len="med"/>
-                    </a:lnL>
-                    <a:lnR w="12700" cap="flat" cmpd="sng" algn="ctr">
-                      <a:solidFill>
-                        <a:schemeClr val="tx1"/>
-                      </a:solidFill>
-                      <a:prstDash val="solid"/>
-                      <a:round/>
-                      <a:headEnd type="none" w="med" len="med"/>
-                      <a:tailEnd type="none" w="med" len="med"/>
-                    </a:lnR>
-                    <a:lnT w="12700" cap="flat" cmpd="sng" algn="ctr">
-                      <a:solidFill>
-                        <a:schemeClr val="tx1"/>
-                      </a:solidFill>
-                      <a:prstDash val="solid"/>
-                      <a:round/>
-                      <a:headEnd type="none" w="med" len="med"/>
-                      <a:tailEnd type="none" w="med" len="med"/>
-                    </a:lnT>
-                    <a:lnB w="12700" cap="flat" cmpd="sng" algn="ctr">
-                      <a:solidFill>
-                        <a:schemeClr val="tx1"/>
-                      </a:solidFill>
-                      <a:prstDash val="solid"/>
-                      <a:round/>
-                      <a:headEnd type="none" w="med" len="med"/>
-                      <a:tailEnd type="none" w="med" len="med"/>
-                    </a:lnB>
-                    <a:solidFill>
-                      <a:srgbClr val="8FAADC"/>
-                    </a:solidFill>
-                  </a:tcPr>
-                </a:tc>
-                <a:tc>
-                  <a:txBody>
-                    <a:bodyPr/>
-                    <a:lstStyle/>
-                    <a:p>
-                      <a:endParaRPr lang="en-IN" dirty="0"/>
-                    </a:p>
-                  </a:txBody>
-                  <a:tcPr>
-                    <a:lnL w="12700" cap="flat" cmpd="sng" algn="ctr">
-                      <a:solidFill>
-                        <a:schemeClr val="tx1"/>
-                      </a:solidFill>
-                      <a:prstDash val="solid"/>
-                      <a:round/>
-                      <a:headEnd type="none" w="med" len="med"/>
-                      <a:tailEnd type="none" w="med" len="med"/>
-                    </a:lnL>
-                    <a:lnR w="12700" cap="flat" cmpd="sng" algn="ctr">
-                      <a:solidFill>
-                        <a:schemeClr val="tx1"/>
-                      </a:solidFill>
-                      <a:prstDash val="solid"/>
-                      <a:round/>
-                      <a:headEnd type="none" w="med" len="med"/>
-                      <a:tailEnd type="none" w="med" len="med"/>
-                    </a:lnR>
-                    <a:lnT w="12700" cap="flat" cmpd="sng" algn="ctr">
-                      <a:solidFill>
-                        <a:schemeClr val="tx1"/>
-                      </a:solidFill>
-                      <a:prstDash val="solid"/>
-                      <a:round/>
-                      <a:headEnd type="none" w="med" len="med"/>
-                      <a:tailEnd type="none" w="med" len="med"/>
-                    </a:lnT>
-                    <a:lnB w="12700" cap="flat" cmpd="sng" algn="ctr">
-                      <a:solidFill>
-                        <a:schemeClr val="tx1"/>
-                      </a:solidFill>
-                      <a:prstDash val="solid"/>
-                      <a:round/>
-                      <a:headEnd type="none" w="med" len="med"/>
-                      <a:tailEnd type="none" w="med" len="med"/>
-                    </a:lnB>
-                    <a:solidFill>
-                      <a:srgbClr val="8FAADC"/>
-                    </a:solidFill>
-                  </a:tcPr>
-                </a:tc>
-                <a:tc>
-                  <a:txBody>
-                    <a:bodyPr/>
-                    <a:lstStyle/>
-                    <a:p>
-                      <a:endParaRPr lang="en-IN"/>
-                    </a:p>
-                  </a:txBody>
-                  <a:tcPr>
-                    <a:lnL w="12700" cap="flat" cmpd="sng" algn="ctr">
-                      <a:solidFill>
-                        <a:schemeClr val="tx1"/>
-                      </a:solidFill>
-                      <a:prstDash val="solid"/>
-                      <a:round/>
-                      <a:headEnd type="none" w="med" len="med"/>
-                      <a:tailEnd type="none" w="med" len="med"/>
-                    </a:lnL>
-                    <a:lnR w="12700" cap="flat" cmpd="sng" algn="ctr">
-                      <a:solidFill>
-                        <a:schemeClr val="tx1"/>
-                      </a:solidFill>
-                      <a:prstDash val="solid"/>
-                      <a:round/>
-                      <a:headEnd type="none" w="med" len="med"/>
-                      <a:tailEnd type="none" w="med" len="med"/>
-                    </a:lnR>
-                    <a:lnT w="12700" cap="flat" cmpd="sng" algn="ctr">
-                      <a:solidFill>
-                        <a:schemeClr val="tx1"/>
-                      </a:solidFill>
-                      <a:prstDash val="solid"/>
-                      <a:round/>
-                      <a:headEnd type="none" w="med" len="med"/>
-                      <a:tailEnd type="none" w="med" len="med"/>
-                    </a:lnT>
-                    <a:lnB w="12700" cap="flat" cmpd="sng" algn="ctr">
-                      <a:solidFill>
-                        <a:schemeClr val="tx1"/>
-                      </a:solidFill>
-                      <a:prstDash val="solid"/>
-                      <a:round/>
-                      <a:headEnd type="none" w="med" len="med"/>
-                      <a:tailEnd type="none" w="med" len="med"/>
-                    </a:lnB>
-                    <a:solidFill>
-                      <a:srgbClr val="8FAADC"/>
-                    </a:solidFill>
-                  </a:tcPr>
-                </a:tc>
-                <a:tc>
-                  <a:txBody>
-                    <a:bodyPr/>
-                    <a:lstStyle/>
-                    <a:p>
-                      <a:endParaRPr lang="en-IN"/>
-                    </a:p>
-                  </a:txBody>
-                  <a:tcPr>
-                    <a:lnL w="12700" cap="flat" cmpd="sng" algn="ctr">
-                      <a:solidFill>
-                        <a:schemeClr val="tx1"/>
-                      </a:solidFill>
-                      <a:prstDash val="solid"/>
-                      <a:round/>
-                      <a:headEnd type="none" w="med" len="med"/>
-                      <a:tailEnd type="none" w="med" len="med"/>
-                    </a:lnL>
-                    <a:lnR w="12700" cap="flat" cmpd="sng" algn="ctr">
-                      <a:solidFill>
-                        <a:schemeClr val="tx1"/>
-                      </a:solidFill>
-                      <a:prstDash val="solid"/>
-                      <a:round/>
-                      <a:headEnd type="none" w="med" len="med"/>
-                      <a:tailEnd type="none" w="med" len="med"/>
-                    </a:lnR>
-                    <a:lnT w="12700" cap="flat" cmpd="sng" algn="ctr">
-                      <a:solidFill>
-                        <a:schemeClr val="tx1"/>
-                      </a:solidFill>
-                      <a:prstDash val="solid"/>
-                      <a:round/>
-                      <a:headEnd type="none" w="med" len="med"/>
-                      <a:tailEnd type="none" w="med" len="med"/>
-                    </a:lnT>
-                    <a:lnB w="12700" cap="flat" cmpd="sng" algn="ctr">
-                      <a:solidFill>
-                        <a:schemeClr val="tx1"/>
-                      </a:solidFill>
-                      <a:prstDash val="solid"/>
-                      <a:round/>
-                      <a:headEnd type="none" w="med" len="med"/>
-                      <a:tailEnd type="none" w="med" len="med"/>
-                    </a:lnB>
-                    <a:solidFill>
-                      <a:srgbClr val="8FAADC"/>
-                    </a:solidFill>
-                  </a:tcPr>
-                </a:tc>
-                <a:extLst>
-                  <a:ext uri="{0D108BD9-81ED-4DB2-BD59-A6C34878D82A}">
-                    <a16:rowId xmlns:a16="http://schemas.microsoft.com/office/drawing/2014/main" val="1485392036"/>
-                  </a:ext>
-                </a:extLst>
-              </a:tr>
-              <a:tr h="370840">
-                <a:tc>
-                  <a:txBody>
-                    <a:bodyPr/>
-                    <a:lstStyle/>
-                    <a:p>
-                      <a:endParaRPr lang="en-IN"/>
-                    </a:p>
-                  </a:txBody>
-                  <a:tcPr>
-                    <a:lnL w="12700" cap="flat" cmpd="sng" algn="ctr">
-                      <a:solidFill>
-                        <a:schemeClr val="tx1"/>
-                      </a:solidFill>
-                      <a:prstDash val="solid"/>
-                      <a:round/>
-                      <a:headEnd type="none" w="med" len="med"/>
-                      <a:tailEnd type="none" w="med" len="med"/>
-                    </a:lnL>
-                    <a:lnR w="12700" cap="flat" cmpd="sng" algn="ctr">
-                      <a:solidFill>
-                        <a:schemeClr val="tx1"/>
-                      </a:solidFill>
-                      <a:prstDash val="solid"/>
-                      <a:round/>
-                      <a:headEnd type="none" w="med" len="med"/>
-                      <a:tailEnd type="none" w="med" len="med"/>
-                    </a:lnR>
-                    <a:lnT w="12700" cap="flat" cmpd="sng" algn="ctr">
-                      <a:solidFill>
-                        <a:schemeClr val="tx1"/>
-                      </a:solidFill>
-                      <a:prstDash val="solid"/>
-                      <a:round/>
-                      <a:headEnd type="none" w="med" len="med"/>
-                      <a:tailEnd type="none" w="med" len="med"/>
-                    </a:lnT>
-                    <a:lnB w="12700" cap="flat" cmpd="sng" algn="ctr">
-                      <a:solidFill>
-                        <a:schemeClr val="tx1"/>
-                      </a:solidFill>
-                      <a:prstDash val="solid"/>
-                      <a:round/>
-                      <a:headEnd type="none" w="med" len="med"/>
-                      <a:tailEnd type="none" w="med" len="med"/>
-                    </a:lnB>
-                    <a:solidFill>
-                      <a:srgbClr val="8FAADC"/>
-                    </a:solidFill>
-                  </a:tcPr>
-                </a:tc>
-                <a:tc>
-                  <a:txBody>
-                    <a:bodyPr/>
-                    <a:lstStyle/>
-                    <a:p>
-                      <a:endParaRPr lang="en-IN" dirty="0"/>
-                    </a:p>
-                  </a:txBody>
-                  <a:tcPr>
-                    <a:lnL w="12700" cap="flat" cmpd="sng" algn="ctr">
-                      <a:solidFill>
-                        <a:schemeClr val="tx1"/>
-                      </a:solidFill>
-                      <a:prstDash val="solid"/>
-                      <a:round/>
-                      <a:headEnd type="none" w="med" len="med"/>
-                      <a:tailEnd type="none" w="med" len="med"/>
-                    </a:lnL>
-                    <a:lnR w="12700" cap="flat" cmpd="sng" algn="ctr">
-                      <a:solidFill>
-                        <a:schemeClr val="tx1"/>
-                      </a:solidFill>
-                      <a:prstDash val="solid"/>
-                      <a:round/>
-                      <a:headEnd type="none" w="med" len="med"/>
-                      <a:tailEnd type="none" w="med" len="med"/>
-                    </a:lnR>
-                    <a:lnT w="12700" cap="flat" cmpd="sng" algn="ctr">
-                      <a:solidFill>
-                        <a:schemeClr val="tx1"/>
-                      </a:solidFill>
-                      <a:prstDash val="solid"/>
-                      <a:round/>
-                      <a:headEnd type="none" w="med" len="med"/>
-                      <a:tailEnd type="none" w="med" len="med"/>
-                    </a:lnT>
-                    <a:lnB w="12700" cap="flat" cmpd="sng" algn="ctr">
-                      <a:solidFill>
-                        <a:schemeClr val="tx1"/>
-                      </a:solidFill>
-                      <a:prstDash val="solid"/>
-                      <a:round/>
-                      <a:headEnd type="none" w="med" len="med"/>
-                      <a:tailEnd type="none" w="med" len="med"/>
-                    </a:lnB>
-                    <a:solidFill>
-                      <a:srgbClr val="8FAADC"/>
-                    </a:solidFill>
-                  </a:tcPr>
-                </a:tc>
-                <a:tc>
-                  <a:txBody>
-                    <a:bodyPr/>
-                    <a:lstStyle/>
-                    <a:p>
-                      <a:endParaRPr lang="en-IN"/>
-                    </a:p>
-                  </a:txBody>
-                  <a:tcPr>
-                    <a:lnL w="12700" cap="flat" cmpd="sng" algn="ctr">
-                      <a:solidFill>
-                        <a:schemeClr val="tx1"/>
-                      </a:solidFill>
-                      <a:prstDash val="solid"/>
-                      <a:round/>
-                      <a:headEnd type="none" w="med" len="med"/>
-                      <a:tailEnd type="none" w="med" len="med"/>
-                    </a:lnL>
-                    <a:lnR w="12700" cap="flat" cmpd="sng" algn="ctr">
-                      <a:solidFill>
-                        <a:schemeClr val="tx1"/>
-                      </a:solidFill>
-                      <a:prstDash val="solid"/>
-                      <a:round/>
-                      <a:headEnd type="none" w="med" len="med"/>
-                      <a:tailEnd type="none" w="med" len="med"/>
-                    </a:lnR>
-                    <a:lnT w="12700" cap="flat" cmpd="sng" algn="ctr">
-                      <a:solidFill>
-                        <a:schemeClr val="tx1"/>
-                      </a:solidFill>
-                      <a:prstDash val="solid"/>
-                      <a:round/>
-                      <a:headEnd type="none" w="med" len="med"/>
-                      <a:tailEnd type="none" w="med" len="med"/>
-                    </a:lnT>
-                    <a:lnB w="12700" cap="flat" cmpd="sng" algn="ctr">
-                      <a:solidFill>
-                        <a:schemeClr val="tx1"/>
-                      </a:solidFill>
-                      <a:prstDash val="solid"/>
-                      <a:round/>
-                      <a:headEnd type="none" w="med" len="med"/>
-                      <a:tailEnd type="none" w="med" len="med"/>
-                    </a:lnB>
-                    <a:solidFill>
-                      <a:srgbClr val="8FAADC"/>
-                    </a:solidFill>
-                  </a:tcPr>
-                </a:tc>
-                <a:tc>
-                  <a:txBody>
-                    <a:bodyPr/>
-                    <a:lstStyle/>
-                    <a:p>
-                      <a:endParaRPr lang="en-IN"/>
-                    </a:p>
-                  </a:txBody>
-                  <a:tcPr>
-                    <a:lnL w="12700" cap="flat" cmpd="sng" algn="ctr">
-                      <a:solidFill>
-                        <a:schemeClr val="tx1"/>
-                      </a:solidFill>
-                      <a:prstDash val="solid"/>
-                      <a:round/>
-                      <a:headEnd type="none" w="med" len="med"/>
-                      <a:tailEnd type="none" w="med" len="med"/>
-                    </a:lnL>
-                    <a:lnR w="12700" cap="flat" cmpd="sng" algn="ctr">
-                      <a:solidFill>
-                        <a:schemeClr val="tx1"/>
-                      </a:solidFill>
-                      <a:prstDash val="solid"/>
-                      <a:round/>
-                      <a:headEnd type="none" w="med" len="med"/>
-                      <a:tailEnd type="none" w="med" len="med"/>
-                    </a:lnR>
-                    <a:lnT w="12700" cap="flat" cmpd="sng" algn="ctr">
-                      <a:solidFill>
-                        <a:schemeClr val="tx1"/>
-                      </a:solidFill>
-                      <a:prstDash val="solid"/>
-                      <a:round/>
-                      <a:headEnd type="none" w="med" len="med"/>
-                      <a:tailEnd type="none" w="med" len="med"/>
-                    </a:lnT>
-                    <a:lnB w="12700" cap="flat" cmpd="sng" algn="ctr">
-                      <a:solidFill>
-                        <a:schemeClr val="tx1"/>
-                      </a:solidFill>
-                      <a:prstDash val="solid"/>
-                      <a:round/>
-                      <a:headEnd type="none" w="med" len="med"/>
-                      <a:tailEnd type="none" w="med" len="med"/>
-                    </a:lnB>
-                    <a:solidFill>
-                      <a:srgbClr val="8FAADC"/>
-                    </a:solidFill>
-                  </a:tcPr>
-                </a:tc>
-                <a:extLst>
-                  <a:ext uri="{0D108BD9-81ED-4DB2-BD59-A6C34878D82A}">
-                    <a16:rowId xmlns:a16="http://schemas.microsoft.com/office/drawing/2014/main" val="430668479"/>
-                  </a:ext>
-                </a:extLst>
-              </a:tr>
-              <a:tr h="370840">
-                <a:tc>
-                  <a:txBody>
-                    <a:bodyPr/>
-                    <a:lstStyle/>
-                    <a:p>
-                      <a:endParaRPr lang="en-IN"/>
-                    </a:p>
-                  </a:txBody>
-                  <a:tcPr>
-                    <a:lnL w="12700" cap="flat" cmpd="sng" algn="ctr">
-                      <a:solidFill>
-                        <a:schemeClr val="tx1"/>
-                      </a:solidFill>
-                      <a:prstDash val="solid"/>
-                      <a:round/>
-                      <a:headEnd type="none" w="med" len="med"/>
-                      <a:tailEnd type="none" w="med" len="med"/>
-                    </a:lnL>
-                    <a:lnR w="12700" cap="flat" cmpd="sng" algn="ctr">
-                      <a:solidFill>
-                        <a:schemeClr val="tx1"/>
-                      </a:solidFill>
-                      <a:prstDash val="solid"/>
-                      <a:round/>
-                      <a:headEnd type="none" w="med" len="med"/>
-                      <a:tailEnd type="none" w="med" len="med"/>
-                    </a:lnR>
-                    <a:lnT w="12700" cap="flat" cmpd="sng" algn="ctr">
-                      <a:solidFill>
-                        <a:schemeClr val="tx1"/>
-                      </a:solidFill>
-                      <a:prstDash val="solid"/>
-                      <a:round/>
-                      <a:headEnd type="none" w="med" len="med"/>
-                      <a:tailEnd type="none" w="med" len="med"/>
-                    </a:lnT>
-                    <a:lnB w="12700" cap="flat" cmpd="sng" algn="ctr">
-                      <a:solidFill>
-                        <a:schemeClr val="tx1"/>
-                      </a:solidFill>
-                      <a:prstDash val="solid"/>
-                      <a:round/>
-                      <a:headEnd type="none" w="med" len="med"/>
-                      <a:tailEnd type="none" w="med" len="med"/>
-                    </a:lnB>
-                    <a:solidFill>
-                      <a:srgbClr val="8FAADC"/>
-                    </a:solidFill>
-                  </a:tcPr>
-                </a:tc>
-                <a:tc>
-                  <a:txBody>
-                    <a:bodyPr/>
-                    <a:lstStyle/>
-                    <a:p>
-                      <a:endParaRPr lang="en-IN" dirty="0"/>
-                    </a:p>
-                  </a:txBody>
-                  <a:tcPr>
-                    <a:lnL w="12700" cap="flat" cmpd="sng" algn="ctr">
-                      <a:solidFill>
-                        <a:schemeClr val="tx1"/>
-                      </a:solidFill>
-                      <a:prstDash val="solid"/>
-                      <a:round/>
-                      <a:headEnd type="none" w="med" len="med"/>
-                      <a:tailEnd type="none" w="med" len="med"/>
-                    </a:lnL>
-                    <a:lnR w="12700" cap="flat" cmpd="sng" algn="ctr">
-                      <a:solidFill>
-                        <a:schemeClr val="tx1"/>
-                      </a:solidFill>
-                      <a:prstDash val="solid"/>
-                      <a:round/>
-                      <a:headEnd type="none" w="med" len="med"/>
-                      <a:tailEnd type="none" w="med" len="med"/>
-                    </a:lnR>
-                    <a:lnT w="12700" cap="flat" cmpd="sng" algn="ctr">
-                      <a:solidFill>
-                        <a:schemeClr val="tx1"/>
-                      </a:solidFill>
-                      <a:prstDash val="solid"/>
-                      <a:round/>
-                      <a:headEnd type="none" w="med" len="med"/>
-                      <a:tailEnd type="none" w="med" len="med"/>
-                    </a:lnT>
-                    <a:lnB w="12700" cap="flat" cmpd="sng" algn="ctr">
-                      <a:solidFill>
-                        <a:schemeClr val="tx1"/>
-                      </a:solidFill>
-                      <a:prstDash val="solid"/>
-                      <a:round/>
-                      <a:headEnd type="none" w="med" len="med"/>
-                      <a:tailEnd type="none" w="med" len="med"/>
-                    </a:lnB>
-                    <a:solidFill>
-                      <a:srgbClr val="8FAADC"/>
-                    </a:solidFill>
-                  </a:tcPr>
-                </a:tc>
-                <a:tc>
-                  <a:txBody>
-                    <a:bodyPr/>
-                    <a:lstStyle/>
-                    <a:p>
-                      <a:endParaRPr lang="en-IN"/>
-                    </a:p>
-                  </a:txBody>
-                  <a:tcPr>
-                    <a:lnL w="12700" cap="flat" cmpd="sng" algn="ctr">
-                      <a:solidFill>
-                        <a:schemeClr val="tx1"/>
-                      </a:solidFill>
-                      <a:prstDash val="solid"/>
-                      <a:round/>
-                      <a:headEnd type="none" w="med" len="med"/>
-                      <a:tailEnd type="none" w="med" len="med"/>
-                    </a:lnL>
-                    <a:lnR w="12700" cap="flat" cmpd="sng" algn="ctr">
-                      <a:solidFill>
-                        <a:schemeClr val="tx1"/>
-                      </a:solidFill>
-                      <a:prstDash val="solid"/>
-                      <a:round/>
-                      <a:headEnd type="none" w="med" len="med"/>
-                      <a:tailEnd type="none" w="med" len="med"/>
-                    </a:lnR>
-                    <a:lnT w="12700" cap="flat" cmpd="sng" algn="ctr">
-                      <a:solidFill>
-                        <a:schemeClr val="tx1"/>
-                      </a:solidFill>
-                      <a:prstDash val="solid"/>
-                      <a:round/>
-                      <a:headEnd type="none" w="med" len="med"/>
-                      <a:tailEnd type="none" w="med" len="med"/>
-                    </a:lnT>
-                    <a:lnB w="12700" cap="flat" cmpd="sng" algn="ctr">
-                      <a:solidFill>
-                        <a:schemeClr val="tx1"/>
-                      </a:solidFill>
-                      <a:prstDash val="solid"/>
-                      <a:round/>
-                      <a:headEnd type="none" w="med" len="med"/>
-                      <a:tailEnd type="none" w="med" len="med"/>
-                    </a:lnB>
-                    <a:solidFill>
-                      <a:srgbClr val="8FAADC"/>
-                    </a:solidFill>
-                  </a:tcPr>
-                </a:tc>
-                <a:tc>
-                  <a:txBody>
-                    <a:bodyPr/>
-                    <a:lstStyle/>
-                    <a:p>
-                      <a:endParaRPr lang="en-IN"/>
-                    </a:p>
-                  </a:txBody>
-                  <a:tcPr>
-                    <a:lnL w="12700" cap="flat" cmpd="sng" algn="ctr">
-                      <a:solidFill>
-                        <a:schemeClr val="tx1"/>
-                      </a:solidFill>
-                      <a:prstDash val="solid"/>
-                      <a:round/>
-                      <a:headEnd type="none" w="med" len="med"/>
-                      <a:tailEnd type="none" w="med" len="med"/>
-                    </a:lnL>
-                    <a:lnR w="12700" cap="flat" cmpd="sng" algn="ctr">
-                      <a:solidFill>
-                        <a:schemeClr val="tx1"/>
-                      </a:solidFill>
-                      <a:prstDash val="solid"/>
-                      <a:round/>
-                      <a:headEnd type="none" w="med" len="med"/>
-                      <a:tailEnd type="none" w="med" len="med"/>
-                    </a:lnR>
-                    <a:lnT w="12700" cap="flat" cmpd="sng" algn="ctr">
-                      <a:solidFill>
-                        <a:schemeClr val="tx1"/>
-                      </a:solidFill>
-                      <a:prstDash val="solid"/>
-                      <a:round/>
-                      <a:headEnd type="none" w="med" len="med"/>
-                      <a:tailEnd type="none" w="med" len="med"/>
-                    </a:lnT>
-                    <a:lnB w="12700" cap="flat" cmpd="sng" algn="ctr">
-                      <a:solidFill>
-                        <a:schemeClr val="tx1"/>
-                      </a:solidFill>
-                      <a:prstDash val="solid"/>
-                      <a:round/>
-                      <a:headEnd type="none" w="med" len="med"/>
-                      <a:tailEnd type="none" w="med" len="med"/>
-                    </a:lnB>
-                    <a:solidFill>
-                      <a:srgbClr val="8FAADC"/>
-                    </a:solidFill>
-                  </a:tcPr>
-                </a:tc>
-                <a:extLst>
-                  <a:ext uri="{0D108BD9-81ED-4DB2-BD59-A6C34878D82A}">
-                    <a16:rowId xmlns:a16="http://schemas.microsoft.com/office/drawing/2014/main" val="2809319250"/>
-                  </a:ext>
-                </a:extLst>
-              </a:tr>
-              <a:tr h="370840">
-                <a:tc>
-                  <a:txBody>
-                    <a:bodyPr/>
-                    <a:lstStyle/>
-                    <a:p>
-                      <a:endParaRPr lang="en-IN"/>
-                    </a:p>
-                  </a:txBody>
-                  <a:tcPr>
-                    <a:lnL w="12700" cap="flat" cmpd="sng" algn="ctr">
-                      <a:solidFill>
-                        <a:schemeClr val="tx1"/>
-                      </a:solidFill>
-                      <a:prstDash val="solid"/>
-                      <a:round/>
-                      <a:headEnd type="none" w="med" len="med"/>
-                      <a:tailEnd type="none" w="med" len="med"/>
-                    </a:lnL>
-                    <a:lnR w="12700" cap="flat" cmpd="sng" algn="ctr">
-                      <a:solidFill>
-                        <a:schemeClr val="tx1"/>
-                      </a:solidFill>
-                      <a:prstDash val="solid"/>
-                      <a:round/>
-                      <a:headEnd type="none" w="med" len="med"/>
-                      <a:tailEnd type="none" w="med" len="med"/>
-                    </a:lnR>
-                    <a:lnT w="12700" cap="flat" cmpd="sng" algn="ctr">
-                      <a:solidFill>
-                        <a:schemeClr val="tx1"/>
-                      </a:solidFill>
-                      <a:prstDash val="solid"/>
-                      <a:round/>
-                      <a:headEnd type="none" w="med" len="med"/>
-                      <a:tailEnd type="none" w="med" len="med"/>
-                    </a:lnT>
-                    <a:lnB w="12700" cap="flat" cmpd="sng" algn="ctr">
-                      <a:solidFill>
-                        <a:schemeClr val="tx1"/>
-                      </a:solidFill>
-                      <a:prstDash val="solid"/>
-                      <a:round/>
-                      <a:headEnd type="none" w="med" len="med"/>
-                      <a:tailEnd type="none" w="med" len="med"/>
-                    </a:lnB>
-                    <a:solidFill>
-                      <a:srgbClr val="8FAADC"/>
-                    </a:solidFill>
-                  </a:tcPr>
-                </a:tc>
-                <a:tc>
-                  <a:txBody>
-                    <a:bodyPr/>
-                    <a:lstStyle/>
-                    <a:p>
-                      <a:endParaRPr lang="en-IN" dirty="0"/>
-                    </a:p>
-                  </a:txBody>
-                  <a:tcPr>
-                    <a:lnL w="12700" cap="flat" cmpd="sng" algn="ctr">
-                      <a:solidFill>
-                        <a:schemeClr val="tx1"/>
-                      </a:solidFill>
-                      <a:prstDash val="solid"/>
-                      <a:round/>
-                      <a:headEnd type="none" w="med" len="med"/>
-                      <a:tailEnd type="none" w="med" len="med"/>
-                    </a:lnL>
-                    <a:lnR w="12700" cap="flat" cmpd="sng" algn="ctr">
-                      <a:solidFill>
-                        <a:schemeClr val="tx1"/>
-                      </a:solidFill>
-                      <a:prstDash val="solid"/>
-                      <a:round/>
-                      <a:headEnd type="none" w="med" len="med"/>
-                      <a:tailEnd type="none" w="med" len="med"/>
-                    </a:lnR>
-                    <a:lnT w="12700" cap="flat" cmpd="sng" algn="ctr">
-                      <a:solidFill>
-                        <a:schemeClr val="tx1"/>
-                      </a:solidFill>
-                      <a:prstDash val="solid"/>
-                      <a:round/>
-                      <a:headEnd type="none" w="med" len="med"/>
-                      <a:tailEnd type="none" w="med" len="med"/>
-                    </a:lnT>
-                    <a:lnB w="12700" cap="flat" cmpd="sng" algn="ctr">
-                      <a:solidFill>
-                        <a:schemeClr val="tx1"/>
-                      </a:solidFill>
-                      <a:prstDash val="solid"/>
-                      <a:round/>
-                      <a:headEnd type="none" w="med" len="med"/>
-                      <a:tailEnd type="none" w="med" len="med"/>
-                    </a:lnB>
-                    <a:solidFill>
-                      <a:srgbClr val="8FAADC"/>
-                    </a:solidFill>
-                  </a:tcPr>
-                </a:tc>
-                <a:tc>
-                  <a:txBody>
-                    <a:bodyPr/>
-                    <a:lstStyle/>
-                    <a:p>
-                      <a:endParaRPr lang="en-IN" dirty="0"/>
-                    </a:p>
-                  </a:txBody>
-                  <a:tcPr>
-                    <a:lnL w="12700" cap="flat" cmpd="sng" algn="ctr">
-                      <a:solidFill>
-                        <a:schemeClr val="tx1"/>
-                      </a:solidFill>
-                      <a:prstDash val="solid"/>
-                      <a:round/>
-                      <a:headEnd type="none" w="med" len="med"/>
-                      <a:tailEnd type="none" w="med" len="med"/>
-                    </a:lnL>
-                    <a:lnR w="12700" cap="flat" cmpd="sng" algn="ctr">
-                      <a:solidFill>
-                        <a:schemeClr val="tx1"/>
-                      </a:solidFill>
-                      <a:prstDash val="solid"/>
-                      <a:round/>
-                      <a:headEnd type="none" w="med" len="med"/>
-                      <a:tailEnd type="none" w="med" len="med"/>
-                    </a:lnR>
-                    <a:lnT w="12700" cap="flat" cmpd="sng" algn="ctr">
-                      <a:solidFill>
-                        <a:schemeClr val="tx1"/>
-                      </a:solidFill>
-                      <a:prstDash val="solid"/>
-                      <a:round/>
-                      <a:headEnd type="none" w="med" len="med"/>
-                      <a:tailEnd type="none" w="med" len="med"/>
-                    </a:lnT>
-                    <a:lnB w="12700" cap="flat" cmpd="sng" algn="ctr">
-                      <a:solidFill>
-                        <a:schemeClr val="tx1"/>
-                      </a:solidFill>
-                      <a:prstDash val="solid"/>
-                      <a:round/>
-                      <a:headEnd type="none" w="med" len="med"/>
-                      <a:tailEnd type="none" w="med" len="med"/>
-                    </a:lnB>
-                    <a:solidFill>
-                      <a:srgbClr val="8FAADC"/>
-                    </a:solidFill>
-                  </a:tcPr>
-                </a:tc>
-                <a:tc>
-                  <a:txBody>
-                    <a:bodyPr/>
-                    <a:lstStyle/>
-                    <a:p>
-                      <a:endParaRPr lang="en-IN"/>
-                    </a:p>
-                  </a:txBody>
-                  <a:tcPr>
-                    <a:lnL w="12700" cap="flat" cmpd="sng" algn="ctr">
-                      <a:solidFill>
-                        <a:schemeClr val="tx1"/>
-                      </a:solidFill>
-                      <a:prstDash val="solid"/>
-                      <a:round/>
-                      <a:headEnd type="none" w="med" len="med"/>
-                      <a:tailEnd type="none" w="med" len="med"/>
-                    </a:lnL>
-                    <a:lnR w="12700" cap="flat" cmpd="sng" algn="ctr">
-                      <a:solidFill>
-                        <a:schemeClr val="tx1"/>
-                      </a:solidFill>
-                      <a:prstDash val="solid"/>
-                      <a:round/>
-                      <a:headEnd type="none" w="med" len="med"/>
-                      <a:tailEnd type="none" w="med" len="med"/>
-                    </a:lnR>
-                    <a:lnT w="12700" cap="flat" cmpd="sng" algn="ctr">
-                      <a:solidFill>
-                        <a:schemeClr val="tx1"/>
-                      </a:solidFill>
-                      <a:prstDash val="solid"/>
-                      <a:round/>
-                      <a:headEnd type="none" w="med" len="med"/>
-                      <a:tailEnd type="none" w="med" len="med"/>
-                    </a:lnT>
-                    <a:lnB w="12700" cap="flat" cmpd="sng" algn="ctr">
-                      <a:solidFill>
-                        <a:schemeClr val="tx1"/>
-                      </a:solidFill>
-                      <a:prstDash val="solid"/>
-                      <a:round/>
-                      <a:headEnd type="none" w="med" len="med"/>
-                      <a:tailEnd type="none" w="med" len="med"/>
-                    </a:lnB>
-                    <a:solidFill>
-                      <a:srgbClr val="8FAADC"/>
-                    </a:solidFill>
-                  </a:tcPr>
-                </a:tc>
-                <a:extLst>
-                  <a:ext uri="{0D108BD9-81ED-4DB2-BD59-A6C34878D82A}">
-                    <a16:rowId xmlns:a16="http://schemas.microsoft.com/office/drawing/2014/main" val="1170336215"/>
-                  </a:ext>
-                </a:extLst>
-              </a:tr>
-              <a:tr h="370840">
-                <a:tc>
-                  <a:txBody>
-                    <a:bodyPr/>
-                    <a:lstStyle/>
-                    <a:p>
-                      <a:endParaRPr lang="en-IN" dirty="0"/>
-                    </a:p>
-                  </a:txBody>
-                  <a:tcPr>
-                    <a:lnL w="12700" cap="flat" cmpd="sng" algn="ctr">
-                      <a:solidFill>
-                        <a:schemeClr val="tx1"/>
-                      </a:solidFill>
-                      <a:prstDash val="solid"/>
-                      <a:round/>
-                      <a:headEnd type="none" w="med" len="med"/>
-                      <a:tailEnd type="none" w="med" len="med"/>
-                    </a:lnL>
-                    <a:lnR w="12700" cap="flat" cmpd="sng" algn="ctr">
-                      <a:solidFill>
-                        <a:schemeClr val="tx1"/>
-                      </a:solidFill>
-                      <a:prstDash val="solid"/>
-                      <a:round/>
-                      <a:headEnd type="none" w="med" len="med"/>
-                      <a:tailEnd type="none" w="med" len="med"/>
-                    </a:lnR>
-                    <a:lnT w="12700" cap="flat" cmpd="sng" algn="ctr">
-                      <a:solidFill>
-                        <a:schemeClr val="tx1"/>
-                      </a:solidFill>
-                      <a:prstDash val="solid"/>
-                      <a:round/>
-                      <a:headEnd type="none" w="med" len="med"/>
-                      <a:tailEnd type="none" w="med" len="med"/>
-                    </a:lnT>
-                    <a:lnB w="12700" cap="flat" cmpd="sng" algn="ctr">
-                      <a:solidFill>
-                        <a:schemeClr val="tx1"/>
-                      </a:solidFill>
-                      <a:prstDash val="solid"/>
-                      <a:round/>
-                      <a:headEnd type="none" w="med" len="med"/>
-                      <a:tailEnd type="none" w="med" len="med"/>
-                    </a:lnB>
-                    <a:solidFill>
-                      <a:srgbClr val="8FAADC"/>
-                    </a:solidFill>
-                  </a:tcPr>
-                </a:tc>
-                <a:tc>
-                  <a:txBody>
-                    <a:bodyPr/>
-                    <a:lstStyle/>
-                    <a:p>
-                      <a:endParaRPr lang="en-IN"/>
-                    </a:p>
-                  </a:txBody>
-                  <a:tcPr>
-                    <a:lnL w="12700" cap="flat" cmpd="sng" algn="ctr">
-                      <a:solidFill>
-                        <a:schemeClr val="tx1"/>
-                      </a:solidFill>
-                      <a:prstDash val="solid"/>
-                      <a:round/>
-                      <a:headEnd type="none" w="med" len="med"/>
-                      <a:tailEnd type="none" w="med" len="med"/>
-                    </a:lnL>
-                    <a:lnR w="12700" cap="flat" cmpd="sng" algn="ctr">
-                      <a:solidFill>
-                        <a:schemeClr val="tx1"/>
-                      </a:solidFill>
-                      <a:prstDash val="solid"/>
-                      <a:round/>
-                      <a:headEnd type="none" w="med" len="med"/>
-                      <a:tailEnd type="none" w="med" len="med"/>
-                    </a:lnR>
-                    <a:lnT w="12700" cap="flat" cmpd="sng" algn="ctr">
-                      <a:solidFill>
-                        <a:schemeClr val="tx1"/>
-                      </a:solidFill>
-                      <a:prstDash val="solid"/>
-                      <a:round/>
-                      <a:headEnd type="none" w="med" len="med"/>
-                      <a:tailEnd type="none" w="med" len="med"/>
-                    </a:lnT>
-                    <a:lnB w="12700" cap="flat" cmpd="sng" algn="ctr">
-                      <a:solidFill>
-                        <a:schemeClr val="tx1"/>
-                      </a:solidFill>
-                      <a:prstDash val="solid"/>
-                      <a:round/>
-                      <a:headEnd type="none" w="med" len="med"/>
-                      <a:tailEnd type="none" w="med" len="med"/>
-                    </a:lnB>
-                    <a:solidFill>
-                      <a:srgbClr val="8FAADC"/>
-                    </a:solidFill>
-                  </a:tcPr>
-                </a:tc>
-                <a:tc>
-                  <a:txBody>
-                    <a:bodyPr/>
-                    <a:lstStyle/>
-                    <a:p>
-                      <a:endParaRPr lang="en-IN" dirty="0"/>
-                    </a:p>
-                  </a:txBody>
-                  <a:tcPr>
-                    <a:lnL w="12700" cap="flat" cmpd="sng" algn="ctr">
-                      <a:solidFill>
-                        <a:schemeClr val="tx1"/>
-                      </a:solidFill>
-                      <a:prstDash val="solid"/>
-                      <a:round/>
-                      <a:headEnd type="none" w="med" len="med"/>
-                      <a:tailEnd type="none" w="med" len="med"/>
-                    </a:lnL>
-                    <a:lnR w="12700" cap="flat" cmpd="sng" algn="ctr">
-                      <a:solidFill>
-                        <a:schemeClr val="tx1"/>
-                      </a:solidFill>
-                      <a:prstDash val="solid"/>
-                      <a:round/>
-                      <a:headEnd type="none" w="med" len="med"/>
-                      <a:tailEnd type="none" w="med" len="med"/>
-                    </a:lnR>
-                    <a:lnT w="12700" cap="flat" cmpd="sng" algn="ctr">
-                      <a:solidFill>
-                        <a:schemeClr val="tx1"/>
-                      </a:solidFill>
-                      <a:prstDash val="solid"/>
-                      <a:round/>
-                      <a:headEnd type="none" w="med" len="med"/>
-                      <a:tailEnd type="none" w="med" len="med"/>
-                    </a:lnT>
-                    <a:lnB w="12700" cap="flat" cmpd="sng" algn="ctr">
-                      <a:solidFill>
-                        <a:schemeClr val="tx1"/>
-                      </a:solidFill>
-                      <a:prstDash val="solid"/>
-                      <a:round/>
-                      <a:headEnd type="none" w="med" len="med"/>
-                      <a:tailEnd type="none" w="med" len="med"/>
-                    </a:lnB>
-                    <a:solidFill>
-                      <a:srgbClr val="8FAADC"/>
-                    </a:solidFill>
-                  </a:tcPr>
-                </a:tc>
-                <a:tc>
-                  <a:txBody>
-                    <a:bodyPr/>
-                    <a:lstStyle/>
-                    <a:p>
-                      <a:endParaRPr lang="en-IN"/>
-                    </a:p>
-                  </a:txBody>
-                  <a:tcPr>
-                    <a:lnL w="12700" cap="flat" cmpd="sng" algn="ctr">
-                      <a:solidFill>
-                        <a:schemeClr val="tx1"/>
-                      </a:solidFill>
-                      <a:prstDash val="solid"/>
-                      <a:round/>
-                      <a:headEnd type="none" w="med" len="med"/>
-                      <a:tailEnd type="none" w="med" len="med"/>
-                    </a:lnL>
-                    <a:lnR w="12700" cap="flat" cmpd="sng" algn="ctr">
-                      <a:solidFill>
-                        <a:schemeClr val="tx1"/>
-                      </a:solidFill>
-                      <a:prstDash val="solid"/>
-                      <a:round/>
-                      <a:headEnd type="none" w="med" len="med"/>
-                      <a:tailEnd type="none" w="med" len="med"/>
-                    </a:lnR>
-                    <a:lnT w="12700" cap="flat" cmpd="sng" algn="ctr">
-                      <a:solidFill>
-                        <a:schemeClr val="tx1"/>
-                      </a:solidFill>
-                      <a:prstDash val="solid"/>
-                      <a:round/>
-                      <a:headEnd type="none" w="med" len="med"/>
-                      <a:tailEnd type="none" w="med" len="med"/>
-                    </a:lnT>
-                    <a:lnB w="12700" cap="flat" cmpd="sng" algn="ctr">
-                      <a:solidFill>
-                        <a:schemeClr val="tx1"/>
-                      </a:solidFill>
-                      <a:prstDash val="solid"/>
-                      <a:round/>
-                      <a:headEnd type="none" w="med" len="med"/>
-                      <a:tailEnd type="none" w="med" len="med"/>
-                    </a:lnB>
-                    <a:solidFill>
-                      <a:srgbClr val="8FAADC"/>
-                    </a:solidFill>
-                  </a:tcPr>
-                </a:tc>
-                <a:extLst>
-                  <a:ext uri="{0D108BD9-81ED-4DB2-BD59-A6C34878D82A}">
-                    <a16:rowId xmlns:a16="http://schemas.microsoft.com/office/drawing/2014/main" val="2363680877"/>
-                  </a:ext>
-                </a:extLst>
-              </a:tr>
-              <a:tr h="370840">
-                <a:tc>
-                  <a:txBody>
-                    <a:bodyPr/>
-                    <a:lstStyle/>
-                    <a:p>
-                      <a:endParaRPr lang="en-IN"/>
-                    </a:p>
-                  </a:txBody>
-                  <a:tcPr>
-                    <a:lnL w="12700" cap="flat" cmpd="sng" algn="ctr">
-                      <a:solidFill>
-                        <a:schemeClr val="tx1"/>
-                      </a:solidFill>
-                      <a:prstDash val="solid"/>
-                      <a:round/>
-                      <a:headEnd type="none" w="med" len="med"/>
-                      <a:tailEnd type="none" w="med" len="med"/>
-                    </a:lnL>
-                    <a:lnR w="12700" cap="flat" cmpd="sng" algn="ctr">
-                      <a:solidFill>
-                        <a:schemeClr val="tx1"/>
-                      </a:solidFill>
-                      <a:prstDash val="solid"/>
-                      <a:round/>
-                      <a:headEnd type="none" w="med" len="med"/>
-                      <a:tailEnd type="none" w="med" len="med"/>
-                    </a:lnR>
-                    <a:lnT w="12700" cap="flat" cmpd="sng" algn="ctr">
-                      <a:solidFill>
-                        <a:schemeClr val="tx1"/>
-                      </a:solidFill>
-                      <a:prstDash val="solid"/>
-                      <a:round/>
-                      <a:headEnd type="none" w="med" len="med"/>
-                      <a:tailEnd type="none" w="med" len="med"/>
-                    </a:lnT>
-                    <a:lnB w="12700" cap="flat" cmpd="sng" algn="ctr">
-                      <a:solidFill>
-                        <a:schemeClr val="tx1"/>
-                      </a:solidFill>
-                      <a:prstDash val="solid"/>
-                      <a:round/>
-                      <a:headEnd type="none" w="med" len="med"/>
-                      <a:tailEnd type="none" w="med" len="med"/>
-                    </a:lnB>
-                    <a:solidFill>
-                      <a:srgbClr val="8FAADC"/>
-                    </a:solidFill>
-                  </a:tcPr>
-                </a:tc>
-                <a:tc>
-                  <a:txBody>
-                    <a:bodyPr/>
-                    <a:lstStyle/>
-                    <a:p>
-                      <a:endParaRPr lang="en-IN"/>
-                    </a:p>
-                  </a:txBody>
-                  <a:tcPr>
-                    <a:lnL w="12700" cap="flat" cmpd="sng" algn="ctr">
-                      <a:solidFill>
-                        <a:schemeClr val="tx1"/>
-                      </a:solidFill>
-                      <a:prstDash val="solid"/>
-                      <a:round/>
-                      <a:headEnd type="none" w="med" len="med"/>
-                      <a:tailEnd type="none" w="med" len="med"/>
-                    </a:lnL>
-                    <a:lnR w="12700" cap="flat" cmpd="sng" algn="ctr">
-                      <a:solidFill>
-                        <a:schemeClr val="tx1"/>
-                      </a:solidFill>
-                      <a:prstDash val="solid"/>
-                      <a:round/>
-                      <a:headEnd type="none" w="med" len="med"/>
-                      <a:tailEnd type="none" w="med" len="med"/>
-                    </a:lnR>
-                    <a:lnT w="12700" cap="flat" cmpd="sng" algn="ctr">
-                      <a:solidFill>
-                        <a:schemeClr val="tx1"/>
-                      </a:solidFill>
-                      <a:prstDash val="solid"/>
-                      <a:round/>
-                      <a:headEnd type="none" w="med" len="med"/>
-                      <a:tailEnd type="none" w="med" len="med"/>
-                    </a:lnT>
-                    <a:lnB w="12700" cap="flat" cmpd="sng" algn="ctr">
-                      <a:solidFill>
-                        <a:schemeClr val="tx1"/>
-                      </a:solidFill>
-                      <a:prstDash val="solid"/>
-                      <a:round/>
-                      <a:headEnd type="none" w="med" len="med"/>
-                      <a:tailEnd type="none" w="med" len="med"/>
-                    </a:lnB>
-                    <a:solidFill>
-                      <a:srgbClr val="8FAADC"/>
-                    </a:solidFill>
-                  </a:tcPr>
-                </a:tc>
-                <a:tc>
-                  <a:txBody>
-                    <a:bodyPr/>
-                    <a:lstStyle/>
-                    <a:p>
-                      <a:endParaRPr lang="en-IN" dirty="0"/>
-                    </a:p>
-                  </a:txBody>
-                  <a:tcPr>
-                    <a:lnL w="12700" cap="flat" cmpd="sng" algn="ctr">
-                      <a:solidFill>
-                        <a:schemeClr val="tx1"/>
-                      </a:solidFill>
-                      <a:prstDash val="solid"/>
-                      <a:round/>
-                      <a:headEnd type="none" w="med" len="med"/>
-                      <a:tailEnd type="none" w="med" len="med"/>
-                    </a:lnL>
-                    <a:lnR w="12700" cap="flat" cmpd="sng" algn="ctr">
-                      <a:solidFill>
-                        <a:schemeClr val="tx1"/>
-                      </a:solidFill>
-                      <a:prstDash val="solid"/>
-                      <a:round/>
-                      <a:headEnd type="none" w="med" len="med"/>
-                      <a:tailEnd type="none" w="med" len="med"/>
-                    </a:lnR>
-                    <a:lnT w="12700" cap="flat" cmpd="sng" algn="ctr">
-                      <a:solidFill>
-                        <a:schemeClr val="tx1"/>
-                      </a:solidFill>
-                      <a:prstDash val="solid"/>
-                      <a:round/>
-                      <a:headEnd type="none" w="med" len="med"/>
-                      <a:tailEnd type="none" w="med" len="med"/>
-                    </a:lnT>
-                    <a:lnB w="12700" cap="flat" cmpd="sng" algn="ctr">
-                      <a:solidFill>
-                        <a:schemeClr val="tx1"/>
-                      </a:solidFill>
-                      <a:prstDash val="solid"/>
-                      <a:round/>
-                      <a:headEnd type="none" w="med" len="med"/>
-                      <a:tailEnd type="none" w="med" len="med"/>
-                    </a:lnB>
-                    <a:solidFill>
-                      <a:srgbClr val="8FAADC"/>
-                    </a:solidFill>
-                  </a:tcPr>
-                </a:tc>
-                <a:tc>
-                  <a:txBody>
-                    <a:bodyPr/>
-                    <a:lstStyle/>
-                    <a:p>
-                      <a:endParaRPr lang="en-IN" dirty="0"/>
-                    </a:p>
-                  </a:txBody>
-                  <a:tcPr>
-                    <a:lnL w="12700" cap="flat" cmpd="sng" algn="ctr">
-                      <a:solidFill>
-                        <a:schemeClr val="tx1"/>
-                      </a:solidFill>
-                      <a:prstDash val="solid"/>
-                      <a:round/>
-                      <a:headEnd type="none" w="med" len="med"/>
-                      <a:tailEnd type="none" w="med" len="med"/>
-                    </a:lnL>
-                    <a:lnR w="12700" cap="flat" cmpd="sng" algn="ctr">
-                      <a:solidFill>
-                        <a:schemeClr val="tx1"/>
-                      </a:solidFill>
-                      <a:prstDash val="solid"/>
-                      <a:round/>
-                      <a:headEnd type="none" w="med" len="med"/>
-                      <a:tailEnd type="none" w="med" len="med"/>
-                    </a:lnR>
-                    <a:lnT w="12700" cap="flat" cmpd="sng" algn="ctr">
-                      <a:solidFill>
-                        <a:schemeClr val="tx1"/>
-                      </a:solidFill>
-                      <a:prstDash val="solid"/>
-                      <a:round/>
-                      <a:headEnd type="none" w="med" len="med"/>
-                      <a:tailEnd type="none" w="med" len="med"/>
-                    </a:lnT>
-                    <a:lnB w="12700" cap="flat" cmpd="sng" algn="ctr">
-                      <a:solidFill>
-                        <a:schemeClr val="tx1"/>
-                      </a:solidFill>
-                      <a:prstDash val="solid"/>
-                      <a:round/>
-                      <a:headEnd type="none" w="med" len="med"/>
-                      <a:tailEnd type="none" w="med" len="med"/>
-                    </a:lnB>
-                    <a:solidFill>
-                      <a:srgbClr val="8FAADC"/>
-                    </a:solidFill>
-                  </a:tcPr>
-                </a:tc>
-                <a:extLst>
-                  <a:ext uri="{0D108BD9-81ED-4DB2-BD59-A6C34878D82A}">
-                    <a16:rowId xmlns:a16="http://schemas.microsoft.com/office/drawing/2014/main" val="2031315940"/>
-                  </a:ext>
-                </a:extLst>
-              </a:tr>
-              <a:tr h="370840">
-                <a:tc>
-                  <a:txBody>
-                    <a:bodyPr/>
-                    <a:lstStyle/>
-                    <a:p>
-                      <a:endParaRPr lang="en-IN"/>
-                    </a:p>
-                  </a:txBody>
-                  <a:tcPr>
-                    <a:lnL w="12700" cap="flat" cmpd="sng" algn="ctr">
-                      <a:solidFill>
-                        <a:schemeClr val="tx1"/>
-                      </a:solidFill>
-                      <a:prstDash val="solid"/>
-                      <a:round/>
-                      <a:headEnd type="none" w="med" len="med"/>
-                      <a:tailEnd type="none" w="med" len="med"/>
-                    </a:lnL>
-                    <a:lnR w="12700" cap="flat" cmpd="sng" algn="ctr">
-                      <a:solidFill>
-                        <a:schemeClr val="tx1"/>
-                      </a:solidFill>
-                      <a:prstDash val="solid"/>
-                      <a:round/>
-                      <a:headEnd type="none" w="med" len="med"/>
-                      <a:tailEnd type="none" w="med" len="med"/>
-                    </a:lnR>
-                    <a:lnT w="12700" cap="flat" cmpd="sng" algn="ctr">
-                      <a:solidFill>
-                        <a:schemeClr val="tx1"/>
-                      </a:solidFill>
-                      <a:prstDash val="solid"/>
-                      <a:round/>
-                      <a:headEnd type="none" w="med" len="med"/>
-                      <a:tailEnd type="none" w="med" len="med"/>
-                    </a:lnT>
-                    <a:lnB w="12700" cap="flat" cmpd="sng" algn="ctr">
-                      <a:solidFill>
-                        <a:schemeClr val="tx1"/>
-                      </a:solidFill>
-                      <a:prstDash val="solid"/>
-                      <a:round/>
-                      <a:headEnd type="none" w="med" len="med"/>
-                      <a:tailEnd type="none" w="med" len="med"/>
-                    </a:lnB>
-                    <a:solidFill>
-                      <a:srgbClr val="8FAADC"/>
-                    </a:solidFill>
-                  </a:tcPr>
-                </a:tc>
-                <a:tc>
-                  <a:txBody>
-                    <a:bodyPr/>
-                    <a:lstStyle/>
-                    <a:p>
-                      <a:endParaRPr lang="en-IN"/>
-                    </a:p>
-                  </a:txBody>
-                  <a:tcPr>
-                    <a:lnL w="12700" cap="flat" cmpd="sng" algn="ctr">
-                      <a:solidFill>
-                        <a:schemeClr val="tx1"/>
-                      </a:solidFill>
-                      <a:prstDash val="solid"/>
-                      <a:round/>
-                      <a:headEnd type="none" w="med" len="med"/>
-                      <a:tailEnd type="none" w="med" len="med"/>
-                    </a:lnL>
-                    <a:lnR w="12700" cap="flat" cmpd="sng" algn="ctr">
-                      <a:solidFill>
-                        <a:schemeClr val="tx1"/>
-                      </a:solidFill>
-                      <a:prstDash val="solid"/>
-                      <a:round/>
-                      <a:headEnd type="none" w="med" len="med"/>
-                      <a:tailEnd type="none" w="med" len="med"/>
-                    </a:lnR>
-                    <a:lnT w="12700" cap="flat" cmpd="sng" algn="ctr">
-                      <a:solidFill>
-                        <a:schemeClr val="tx1"/>
-                      </a:solidFill>
-                      <a:prstDash val="solid"/>
-                      <a:round/>
-                      <a:headEnd type="none" w="med" len="med"/>
-                      <a:tailEnd type="none" w="med" len="med"/>
-                    </a:lnT>
-                    <a:lnB w="12700" cap="flat" cmpd="sng" algn="ctr">
-                      <a:solidFill>
-                        <a:schemeClr val="tx1"/>
-                      </a:solidFill>
-                      <a:prstDash val="solid"/>
-                      <a:round/>
-                      <a:headEnd type="none" w="med" len="med"/>
-                      <a:tailEnd type="none" w="med" len="med"/>
-                    </a:lnB>
-                    <a:solidFill>
-                      <a:srgbClr val="8FAADC"/>
-                    </a:solidFill>
-                  </a:tcPr>
-                </a:tc>
-                <a:tc>
-                  <a:txBody>
-                    <a:bodyPr/>
-                    <a:lstStyle/>
-                    <a:p>
-                      <a:endParaRPr lang="en-IN"/>
-                    </a:p>
-                  </a:txBody>
-                  <a:tcPr>
-                    <a:lnL w="12700" cap="flat" cmpd="sng" algn="ctr">
-                      <a:solidFill>
-                        <a:schemeClr val="tx1"/>
-                      </a:solidFill>
-                      <a:prstDash val="solid"/>
-                      <a:round/>
-                      <a:headEnd type="none" w="med" len="med"/>
-                      <a:tailEnd type="none" w="med" len="med"/>
-                    </a:lnL>
-                    <a:lnR w="12700" cap="flat" cmpd="sng" algn="ctr">
-                      <a:solidFill>
-                        <a:schemeClr val="tx1"/>
-                      </a:solidFill>
-                      <a:prstDash val="solid"/>
-                      <a:round/>
-                      <a:headEnd type="none" w="med" len="med"/>
-                      <a:tailEnd type="none" w="med" len="med"/>
-                    </a:lnR>
-                    <a:lnT w="12700" cap="flat" cmpd="sng" algn="ctr">
-                      <a:solidFill>
-                        <a:schemeClr val="tx1"/>
-                      </a:solidFill>
-                      <a:prstDash val="solid"/>
-                      <a:round/>
-                      <a:headEnd type="none" w="med" len="med"/>
-                      <a:tailEnd type="none" w="med" len="med"/>
-                    </a:lnT>
-                    <a:lnB w="12700" cap="flat" cmpd="sng" algn="ctr">
-                      <a:solidFill>
-                        <a:schemeClr val="tx1"/>
-                      </a:solidFill>
-                      <a:prstDash val="solid"/>
-                      <a:round/>
-                      <a:headEnd type="none" w="med" len="med"/>
-                      <a:tailEnd type="none" w="med" len="med"/>
-                    </a:lnB>
-                    <a:solidFill>
-                      <a:srgbClr val="8FAADC"/>
-                    </a:solidFill>
-                  </a:tcPr>
-                </a:tc>
-                <a:tc>
-                  <a:txBody>
-                    <a:bodyPr/>
-                    <a:lstStyle/>
-                    <a:p>
-                      <a:endParaRPr lang="en-IN" dirty="0"/>
-                    </a:p>
-                  </a:txBody>
-                  <a:tcPr>
-                    <a:lnL w="12700" cap="flat" cmpd="sng" algn="ctr">
-                      <a:solidFill>
-                        <a:schemeClr val="tx1"/>
-                      </a:solidFill>
-                      <a:prstDash val="solid"/>
-                      <a:round/>
-                      <a:headEnd type="none" w="med" len="med"/>
-                      <a:tailEnd type="none" w="med" len="med"/>
-                    </a:lnL>
-                    <a:lnR w="12700" cap="flat" cmpd="sng" algn="ctr">
-                      <a:solidFill>
-                        <a:schemeClr val="tx1"/>
-                      </a:solidFill>
-                      <a:prstDash val="solid"/>
-                      <a:round/>
-                      <a:headEnd type="none" w="med" len="med"/>
-                      <a:tailEnd type="none" w="med" len="med"/>
-                    </a:lnR>
-                    <a:lnT w="12700" cap="flat" cmpd="sng" algn="ctr">
-                      <a:solidFill>
-                        <a:schemeClr val="tx1"/>
-                      </a:solidFill>
-                      <a:prstDash val="solid"/>
-                      <a:round/>
-                      <a:headEnd type="none" w="med" len="med"/>
-                      <a:tailEnd type="none" w="med" len="med"/>
-                    </a:lnT>
-                    <a:lnB w="12700" cap="flat" cmpd="sng" algn="ctr">
-                      <a:solidFill>
-                        <a:schemeClr val="tx1"/>
-                      </a:solidFill>
-                      <a:prstDash val="solid"/>
-                      <a:round/>
-                      <a:headEnd type="none" w="med" len="med"/>
-                      <a:tailEnd type="none" w="med" len="med"/>
-                    </a:lnB>
-                    <a:solidFill>
-                      <a:srgbClr val="8FAADC"/>
-                    </a:solidFill>
-                  </a:tcPr>
-                </a:tc>
-                <a:extLst>
-                  <a:ext uri="{0D108BD9-81ED-4DB2-BD59-A6C34878D82A}">
-                    <a16:rowId xmlns:a16="http://schemas.microsoft.com/office/drawing/2014/main" val="992374018"/>
-                  </a:ext>
-                </a:extLst>
-              </a:tr>
-            </a:tbl>
-          </a:graphicData>
-        </a:graphic>
-      </p:graphicFrame>
     </p:spTree>
     <p:extLst>
       <p:ext uri="{BB962C8B-B14F-4D97-AF65-F5344CB8AC3E}">
-        <p14:creationId xmlns:p14="http://schemas.microsoft.com/office/powerpoint/2010/main" val="2150309207"/>
+        <p14:creationId xmlns:p14="http://schemas.microsoft.com/office/powerpoint/2010/main" val="3577636732"/>
       </p:ext>
     </p:extLst>
   </p:cSld>

--- a/documentation/Frontend mockup.pptx
+++ b/documentation/Frontend mockup.pptx
@@ -278,7 +278,7 @@
           <a:p>
             <a:fld id="{005069A1-986F-417B-B4C2-5BD1BF3375D4}" type="datetimeFigureOut">
               <a:rPr lang="en-IN" smtClean="0"/>
-              <a:t>11-06-2026</a:t>
+              <a:t>13-06-2026</a:t>
             </a:fld>
             <a:endParaRPr lang="en-IN"/>
           </a:p>
@@ -478,7 +478,7 @@
           <a:p>
             <a:fld id="{005069A1-986F-417B-B4C2-5BD1BF3375D4}" type="datetimeFigureOut">
               <a:rPr lang="en-IN" smtClean="0"/>
-              <a:t>11-06-2026</a:t>
+              <a:t>13-06-2026</a:t>
             </a:fld>
             <a:endParaRPr lang="en-IN"/>
           </a:p>
@@ -688,7 +688,7 @@
           <a:p>
             <a:fld id="{005069A1-986F-417B-B4C2-5BD1BF3375D4}" type="datetimeFigureOut">
               <a:rPr lang="en-IN" smtClean="0"/>
-              <a:t>11-06-2026</a:t>
+              <a:t>13-06-2026</a:t>
             </a:fld>
             <a:endParaRPr lang="en-IN"/>
           </a:p>
@@ -888,7 +888,7 @@
           <a:p>
             <a:fld id="{005069A1-986F-417B-B4C2-5BD1BF3375D4}" type="datetimeFigureOut">
               <a:rPr lang="en-IN" smtClean="0"/>
-              <a:t>11-06-2026</a:t>
+              <a:t>13-06-2026</a:t>
             </a:fld>
             <a:endParaRPr lang="en-IN"/>
           </a:p>
@@ -1164,7 +1164,7 @@
           <a:p>
             <a:fld id="{005069A1-986F-417B-B4C2-5BD1BF3375D4}" type="datetimeFigureOut">
               <a:rPr lang="en-IN" smtClean="0"/>
-              <a:t>11-06-2026</a:t>
+              <a:t>13-06-2026</a:t>
             </a:fld>
             <a:endParaRPr lang="en-IN"/>
           </a:p>
@@ -1432,7 +1432,7 @@
           <a:p>
             <a:fld id="{005069A1-986F-417B-B4C2-5BD1BF3375D4}" type="datetimeFigureOut">
               <a:rPr lang="en-IN" smtClean="0"/>
-              <a:t>11-06-2026</a:t>
+              <a:t>13-06-2026</a:t>
             </a:fld>
             <a:endParaRPr lang="en-IN"/>
           </a:p>
@@ -1847,7 +1847,7 @@
           <a:p>
             <a:fld id="{005069A1-986F-417B-B4C2-5BD1BF3375D4}" type="datetimeFigureOut">
               <a:rPr lang="en-IN" smtClean="0"/>
-              <a:t>11-06-2026</a:t>
+              <a:t>13-06-2026</a:t>
             </a:fld>
             <a:endParaRPr lang="en-IN"/>
           </a:p>
@@ -1989,7 +1989,7 @@
           <a:p>
             <a:fld id="{005069A1-986F-417B-B4C2-5BD1BF3375D4}" type="datetimeFigureOut">
               <a:rPr lang="en-IN" smtClean="0"/>
-              <a:t>11-06-2026</a:t>
+              <a:t>13-06-2026</a:t>
             </a:fld>
             <a:endParaRPr lang="en-IN"/>
           </a:p>
@@ -2102,7 +2102,7 @@
           <a:p>
             <a:fld id="{005069A1-986F-417B-B4C2-5BD1BF3375D4}" type="datetimeFigureOut">
               <a:rPr lang="en-IN" smtClean="0"/>
-              <a:t>11-06-2026</a:t>
+              <a:t>13-06-2026</a:t>
             </a:fld>
             <a:endParaRPr lang="en-IN"/>
           </a:p>
@@ -2415,7 +2415,7 @@
           <a:p>
             <a:fld id="{005069A1-986F-417B-B4C2-5BD1BF3375D4}" type="datetimeFigureOut">
               <a:rPr lang="en-IN" smtClean="0"/>
-              <a:t>11-06-2026</a:t>
+              <a:t>13-06-2026</a:t>
             </a:fld>
             <a:endParaRPr lang="en-IN"/>
           </a:p>
@@ -2704,7 +2704,7 @@
           <a:p>
             <a:fld id="{005069A1-986F-417B-B4C2-5BD1BF3375D4}" type="datetimeFigureOut">
               <a:rPr lang="en-IN" smtClean="0"/>
-              <a:t>11-06-2026</a:t>
+              <a:t>13-06-2026</a:t>
             </a:fld>
             <a:endParaRPr lang="en-IN"/>
           </a:p>
@@ -2947,7 +2947,7 @@
           <a:p>
             <a:fld id="{005069A1-986F-417B-B4C2-5BD1BF3375D4}" type="datetimeFigureOut">
               <a:rPr lang="en-IN" smtClean="0"/>
-              <a:t>11-06-2026</a:t>
+              <a:t>13-06-2026</a:t>
             </a:fld>
             <a:endParaRPr lang="en-IN"/>
           </a:p>
@@ -15132,6 +15132,56 @@
           </a:p>
         </p:txBody>
       </p:sp>
+      <p:sp>
+        <p:nvSpPr>
+          <p:cNvPr id="17" name="Rectangle: Rounded Corners 16">
+            <a:extLst>
+              <a:ext uri="{FF2B5EF4-FFF2-40B4-BE49-F238E27FC236}">
+                <a16:creationId xmlns:a16="http://schemas.microsoft.com/office/drawing/2014/main" id="{BB8E9C1C-933F-D4B9-7B6D-C41077BC6B07}"/>
+              </a:ext>
+            </a:extLst>
+          </p:cNvPr>
+          <p:cNvSpPr/>
+          <p:nvPr/>
+        </p:nvSpPr>
+        <p:spPr>
+          <a:xfrm>
+            <a:off x="10588479" y="6109944"/>
+            <a:ext cx="1301262" cy="370840"/>
+          </a:xfrm>
+          <a:prstGeom prst="roundRect">
+            <a:avLst/>
+          </a:prstGeom>
+        </p:spPr>
+        <p:style>
+          <a:lnRef idx="2">
+            <a:schemeClr val="accent1">
+              <a:shade val="15000"/>
+            </a:schemeClr>
+          </a:lnRef>
+          <a:fillRef idx="1">
+            <a:schemeClr val="accent1"/>
+          </a:fillRef>
+          <a:effectRef idx="0">
+            <a:schemeClr val="accent1"/>
+          </a:effectRef>
+          <a:fontRef idx="minor">
+            <a:schemeClr val="lt1"/>
+          </a:fontRef>
+        </p:style>
+        <p:txBody>
+          <a:bodyPr rtlCol="0" anchor="ctr"/>
+          <a:lstStyle/>
+          <a:p>
+            <a:pPr algn="ctr"/>
+            <a:r>
+              <a:rPr lang="en-US" dirty="0"/>
+              <a:t>Export</a:t>
+            </a:r>
+            <a:endParaRPr lang="en-IN" dirty="0"/>
+          </a:p>
+        </p:txBody>
+      </p:sp>
     </p:spTree>
     <p:extLst>
       <p:ext uri="{BB962C8B-B14F-4D97-AF65-F5344CB8AC3E}">
